--- a/docs/content/nested_anova/nested_anova_activity.pptx
+++ b/docs/content/nested_anova/nested_anova_activity.pptx
@@ -16,20 +16,6 @@
     <p:sldId id="264" r:id="rId10"/>
     <p:sldId id="265" r:id="rId11"/>
     <p:sldId id="266" r:id="rId12"/>
-    <p:sldId id="267" r:id="rId13"/>
-    <p:sldId id="268" r:id="rId14"/>
-    <p:sldId id="269" r:id="rId15"/>
-    <p:sldId id="270" r:id="rId16"/>
-    <p:sldId id="271" r:id="rId17"/>
-    <p:sldId id="272" r:id="rId18"/>
-    <p:sldId id="273" r:id="rId19"/>
-    <p:sldId id="274" r:id="rId20"/>
-    <p:sldId id="275" r:id="rId21"/>
-    <p:sldId id="276" r:id="rId22"/>
-    <p:sldId id="277" r:id="rId23"/>
-    <p:sldId id="278" r:id="rId24"/>
-    <p:sldId id="279" r:id="rId25"/>
-    <p:sldId id="280" r:id="rId26"/>
   </p:sldIdLst>
   <p:sldSz cx="9144000" cy="5143500" type="screen16x9"/>
   <p:notesSz cx="6858000" cy="9144000"/>
@@ -3317,7 +3303,7 @@
             </a:pPr>
             <a:r>
               <a:rPr/>
-              <a:t>Nested / Multifactor ANOVA</a:t>
+              <a:t>Activity: Nested ANOVA</a:t>
             </a:r>
           </a:p>
         </p:txBody>
@@ -3405,363 +3391,189 @@
             </a:pPr>
             <a:r>
               <a:rPr/>
-              <a:t>Lecture 13: ANOVA Results</a:t>
+              <a:t>Review and checkpoint</a:t>
             </a:r>
           </a:p>
         </p:txBody>
       </p:sp>
-      <mc:AlternateContent xmlns:mc="http://schemas.openxmlformats.org/markup-compatibility/2006">
-        <mc:Choice xmlns:a14="http://schemas.microsoft.com/office/drawing/2010/main" Requires="a14">
-          <p:sp>
-            <p:nvSpPr>
-              <p:cNvPr id="3" name="Content Placeholder 2"/>
-              <p:cNvSpPr>
-                <a:spLocks noGrp="1"/>
-              </p:cNvSpPr>
-              <p:nvPr>
-                <p:ph idx="1"/>
-              </p:nvPr>
-            </p:nvSpPr>
-            <p:spPr/>
-            <p:txBody>
-              <a:bodyPr/>
-              <a:lstStyle/>
-              <a:p>
-                <a:pPr lvl="0" indent="0" marL="0">
-                  <a:buNone/>
-                </a:pPr>
-                <a:r>
-                  <a:rPr/>
-                  <a:t>The nested ANOVA model is specified as:</a:t>
-                </a:r>
-              </a:p>
-              <a:p>
-                <a:pPr lvl="0" indent="0" marL="0">
-                  <a:buNone/>
-                </a:pPr>
-                <a14:m>
-                  <m:oMath xmlns:m="http://schemas.openxmlformats.org/officeDocument/2006/math">
-                    <m:r>
-                      <m:t>a</m:t>
-                    </m:r>
-                    <m:r>
-                      <m:t>l</m:t>
-                    </m:r>
-                    <m:r>
-                      <m:t>g</m:t>
-                    </m:r>
-                    <m:r>
-                      <m:t>a</m:t>
-                    </m:r>
-                    <m:sSub>
-                      <m:e>
-                        <m:r>
-                          <m:t>e</m:t>
-                        </m:r>
-                      </m:e>
-                      <m:sub>
-                        <m:r>
-                          <m:t>i</m:t>
-                        </m:r>
-                        <m:r>
-                          <m:t>j</m:t>
-                        </m:r>
-                        <m:r>
-                          <m:t>k</m:t>
-                        </m:r>
-                      </m:sub>
-                    </m:sSub>
-                    <m:r>
-                      <m:rPr>
-                        <m:sty m:val="p"/>
-                      </m:rPr>
-                      <m:t>=</m:t>
-                    </m:r>
-                    <m:r>
-                      <m:t>μ</m:t>
-                    </m:r>
-                    <m:r>
-                      <m:rPr>
-                        <m:sty m:val="p"/>
-                      </m:rPr>
-                      <m:t>+</m:t>
-                    </m:r>
-                    <m:sSub>
-                      <m:e>
-                        <m:r>
-                          <m:t>α</m:t>
-                        </m:r>
-                      </m:e>
-                      <m:sub>
-                        <m:r>
-                          <m:t>i</m:t>
-                        </m:r>
-                      </m:sub>
-                    </m:sSub>
-                    <m:r>
-                      <m:rPr>
-                        <m:sty m:val="p"/>
-                      </m:rPr>
-                      <m:t>+</m:t>
-                    </m:r>
-                    <m:sSub>
-                      <m:e>
-                        <m:r>
-                          <m:t>β</m:t>
-                        </m:r>
-                      </m:e>
-                      <m:sub>
-                        <m:r>
-                          <m:t>j</m:t>
-                        </m:r>
-                        <m:r>
-                          <m:rPr>
-                            <m:sty m:val="p"/>
-                          </m:rPr>
-                          <m:t>(</m:t>
-                        </m:r>
-                        <m:r>
-                          <m:t>i</m:t>
-                        </m:r>
-                        <m:r>
-                          <m:rPr>
-                            <m:sty m:val="p"/>
-                          </m:rPr>
-                          <m:t>)</m:t>
-                        </m:r>
-                      </m:sub>
-                    </m:sSub>
-                    <m:r>
-                      <m:rPr>
-                        <m:sty m:val="p"/>
-                      </m:rPr>
-                      <m:t>+</m:t>
-                    </m:r>
-                    <m:sSub>
-                      <m:e>
-                        <m:r>
-                          <m:t>ϵ</m:t>
-                        </m:r>
-                      </m:e>
-                      <m:sub>
-                        <m:r>
-                          <m:t>i</m:t>
-                        </m:r>
-                        <m:r>
-                          <m:t>j</m:t>
-                        </m:r>
-                        <m:r>
-                          <m:t>k</m:t>
-                        </m:r>
-                      </m:sub>
-                    </m:sSub>
-                  </m:oMath>
-                </a14:m>
-              </a:p>
-              <a:p>
-                <a:pPr lvl="0" indent="0" marL="0">
-                  <a:buNone/>
-                </a:pPr>
-                <a:r>
-                  <a:rPr/>
-                  <a:t>Where:</a:t>
-                </a:r>
-              </a:p>
-              <a:p>
-                <a:pPr lvl="0"/>
-                <a:r>
-                  <a:rPr/>
-                  <a:t>- </a:t>
-                </a:r>
-                <a14:m>
-                  <m:oMath xmlns:m="http://schemas.openxmlformats.org/officeDocument/2006/math">
-                    <m:r>
-                      <m:t>μ</m:t>
-                    </m:r>
-                  </m:oMath>
-                </a14:m>
-                <a:r>
-                  <a:rPr/>
-                  <a:t> is the overall mean</a:t>
-                </a:r>
-              </a:p>
-              <a:p>
-                <a:pPr lvl="0"/>
-                <a:r>
-                  <a:rPr/>
-                  <a:t>- </a:t>
-                </a:r>
-                <a14:m>
-                  <m:oMath xmlns:m="http://schemas.openxmlformats.org/officeDocument/2006/math">
-                    <m:sSub>
-                      <m:e>
-                        <m:r>
-                          <m:t>α</m:t>
-                        </m:r>
-                      </m:e>
-                      <m:sub>
-                        <m:r>
-                          <m:t>i</m:t>
-                        </m:r>
-                      </m:sub>
-                    </m:sSub>
-                  </m:oMath>
-                </a14:m>
-                <a:r>
-                  <a:rPr/>
-                  <a:t> is the fixed effect of treatment </a:t>
-                </a:r>
-                <a14:m>
-                  <m:oMath xmlns:m="http://schemas.openxmlformats.org/officeDocument/2006/math">
-                    <m:r>
-                      <m:t>i</m:t>
-                    </m:r>
-                  </m:oMath>
-                </a14:m>
-              </a:p>
-              <a:p>
-                <a:pPr lvl="0"/>
-                <a:r>
-                  <a:rPr/>
-                  <a:t>- </a:t>
-                </a:r>
-                <a14:m>
-                  <m:oMath xmlns:m="http://schemas.openxmlformats.org/officeDocument/2006/math">
-                    <m:sSub>
-                      <m:e>
-                        <m:r>
-                          <m:t>β</m:t>
-                        </m:r>
-                      </m:e>
-                      <m:sub>
-                        <m:r>
-                          <m:t>j</m:t>
-                        </m:r>
-                        <m:r>
-                          <m:rPr>
-                            <m:sty m:val="p"/>
-                          </m:rPr>
-                          <m:t>(</m:t>
-                        </m:r>
-                        <m:r>
-                          <m:t>i</m:t>
-                        </m:r>
-                        <m:r>
-                          <m:rPr>
-                            <m:sty m:val="p"/>
-                          </m:rPr>
-                          <m:t>)</m:t>
-                        </m:r>
-                      </m:sub>
-                    </m:sSub>
-                  </m:oMath>
-                </a14:m>
-                <a:r>
-                  <a:rPr/>
-                  <a:t> is the random effect of patch </a:t>
-                </a:r>
-                <a14:m>
-                  <m:oMath xmlns:m="http://schemas.openxmlformats.org/officeDocument/2006/math">
-                    <m:r>
-                      <m:t>j</m:t>
-                    </m:r>
-                  </m:oMath>
-                </a14:m>
-                <a:r>
-                  <a:rPr/>
-                  <a:t> nested within treatment </a:t>
-                </a:r>
-                <a14:m>
-                  <m:oMath xmlns:m="http://schemas.openxmlformats.org/officeDocument/2006/math">
-                    <m:r>
-                      <m:t>i</m:t>
-                    </m:r>
-                  </m:oMath>
-                </a14:m>
-              </a:p>
-              <a:p>
-                <a:pPr lvl="0"/>
-                <a:r>
-                  <a:rPr/>
-                  <a:t>- </a:t>
-                </a:r>
-                <a14:m>
-                  <m:oMath xmlns:m="http://schemas.openxmlformats.org/officeDocument/2006/math">
-                    <m:sSub>
-                      <m:e>
-                        <m:r>
-                          <m:t>ϵ</m:t>
-                        </m:r>
-                      </m:e>
-                      <m:sub>
-                        <m:r>
-                          <m:t>i</m:t>
-                        </m:r>
-                        <m:r>
-                          <m:t>j</m:t>
-                        </m:r>
-                        <m:r>
-                          <m:t>k</m:t>
-                        </m:r>
-                      </m:sub>
-                    </m:sSub>
-                  </m:oMath>
-                </a14:m>
-                <a:r>
-                  <a:rPr/>
-                  <a:t> is the residual error for quadrat </a:t>
-                </a:r>
-                <a14:m>
-                  <m:oMath xmlns:m="http://schemas.openxmlformats.org/officeDocument/2006/math">
-                    <m:r>
-                      <m:t>k</m:t>
-                    </m:r>
-                  </m:oMath>
-                </a14:m>
-                <a:r>
-                  <a:rPr/>
-                  <a:t> in patch </a:t>
-                </a:r>
-                <a14:m>
-                  <m:oMath xmlns:m="http://schemas.openxmlformats.org/officeDocument/2006/math">
-                    <m:r>
-                      <m:t>j</m:t>
-                    </m:r>
-                  </m:oMath>
-                </a14:m>
-                <a:r>
-                  <a:rPr/>
-                  <a:t> within treatment </a:t>
-                </a:r>
-                <a14:m>
-                  <m:oMath xmlns:m="http://schemas.openxmlformats.org/officeDocument/2006/math">
-                    <m:r>
-                      <m:t>i</m:t>
-                    </m:r>
-                  </m:oMath>
-                </a14:m>
-              </a:p>
-              <a:p>
-                <a:pPr lvl="0" indent="0">
-                  <a:buNone/>
-                </a:pPr>
-                <a:r>
-                  <a:rPr>
-                    <a:latin typeface="Courier"/>
-                  </a:rPr>
-                  <a:t>Analysis of Deviance Table (Type III Wald F tests with Kenward-Roger df)
-Response: algae
-                  F Df Df.res   Pr(&gt;F)   
-(Intercept) 17.3616  1     12 0.001307 **
-treat        2.7171  3     12 0.091262 . 
----
-Signif. codes:  0 '***' 0.001 '**' 0.01 '*' 0.05 '.' 0.1 ' ' 1</a:t>
-                </a:r>
-              </a:p>
-            </p:txBody>
-          </p:sp>
-        </mc:Choice>
-      </mc:AlternateContent>
+      <p:sp>
+        <p:nvSpPr>
+          <p:cNvPr id="3" name="Content Placeholder 2"/>
+          <p:cNvSpPr>
+            <a:spLocks noGrp="1"/>
+          </p:cNvSpPr>
+          <p:nvPr>
+            <p:ph idx="1"/>
+          </p:nvPr>
+        </p:nvSpPr>
+        <p:spPr/>
+        <p:txBody>
+          <a:bodyPr/>
+          <a:lstStyle/>
+          <a:p>
+            <a:pPr lvl="0" indent="0" marL="0">
+              <a:buNone/>
+            </a:pPr>
+            <a:r>
+              <a:rPr/>
+              <a:t>At this point you can:</a:t>
+            </a:r>
+          </a:p>
+          <a:p>
+            <a:pPr lvl="0"/>
+            <a:r>
+              <a:rPr/>
+              <a:t>☐ Explain why </a:t>
+            </a:r>
+            <a:r>
+              <a:rPr>
+                <a:latin typeface="Courier"/>
+              </a:rPr>
+              <a:t>patch</a:t>
+            </a:r>
+            <a:r>
+              <a:rPr/>
+              <a:t> nested in </a:t>
+            </a:r>
+            <a:r>
+              <a:rPr>
+                <a:latin typeface="Courier"/>
+              </a:rPr>
+              <a:t>treat</a:t>
+            </a:r>
+            <a:r>
+              <a:rPr/>
+              <a:t> cannot be analyzed as a simple factorial design</a:t>
+            </a:r>
+          </a:p>
+          <a:p>
+            <a:pPr lvl="0"/>
+            <a:r>
+              <a:rPr/>
+              <a:t>☐ Fit a nested ANOVA with </a:t>
+            </a:r>
+            <a:r>
+              <a:rPr>
+                <a:latin typeface="Courier"/>
+              </a:rPr>
+              <a:t>aov(..., Error(...))</a:t>
+            </a:r>
+            <a:r>
+              <a:rPr/>
+              <a:t> and with </a:t>
+            </a:r>
+            <a:r>
+              <a:rPr>
+                <a:latin typeface="Courier"/>
+              </a:rPr>
+              <a:t>afex::aov_car()</a:t>
+            </a:r>
+          </a:p>
+          <a:p>
+            <a:pPr lvl="0"/>
+            <a:r>
+              <a:rPr/>
+              <a:t>☐ Fit the same design as a mixed model with </a:t>
+            </a:r>
+            <a:r>
+              <a:rPr>
+                <a:latin typeface="Courier"/>
+              </a:rPr>
+              <a:t>lme4::lmer()</a:t>
+            </a:r>
+            <a:r>
+              <a:rPr/>
+              <a:t>, using correct random-effects notation</a:t>
+            </a:r>
+          </a:p>
+          <a:p>
+            <a:pPr lvl="0"/>
+            <a:r>
+              <a:rPr/>
+              <a:t>☐ Choose between the F-test and Chi-square test for a mixed model, using the rule of thumb from lecture</a:t>
+            </a:r>
+          </a:p>
+          <a:p>
+            <a:pPr lvl="0"/>
+            <a:r>
+              <a:rPr/>
+              <a:t>☐ Run DHARMa diagnostics on a mixed model</a:t>
+            </a:r>
+          </a:p>
+          <a:p>
+            <a:pPr lvl="0"/>
+            <a:r>
+              <a:rPr/>
+              <a:t>☐ Compute EMMs and post-hoc comparisons for a nested design</a:t>
+            </a:r>
+          </a:p>
+          <a:p>
+            <a:pPr lvl="0" indent="0" marL="1270000">
+              <a:buNone/>
+            </a:pPr>
+            <a:r>
+              <a:rPr sz="2000" b="1"/>
+              <a:t>Note</a:t>
+            </a:r>
+          </a:p>
+          <a:p>
+            <a:pPr lvl="0" indent="0" marL="1270000">
+              <a:buNone/>
+            </a:pPr>
+            <a:r>
+              <a:rPr sz="2000" b="1"/>
+              <a:t>📤 What to turn in before next class</a:t>
+            </a:r>
+          </a:p>
+          <a:p>
+            <a:pPr lvl="0" indent="0" marL="1270000">
+              <a:buNone/>
+            </a:pPr>
+            <a:r>
+              <a:rPr sz="2000"/>
+              <a:t>Upload both of these to the course management system:</a:t>
+            </a:r>
+          </a:p>
+          <a:p>
+            <a:pPr lvl="0" indent="-342900" marL="342900">
+              <a:buAutoNum type="arabicPeriod"/>
+            </a:pPr>
+            <a:r>
+              <a:rPr sz="2000"/>
+              <a:t>Your code — the </a:t>
+            </a:r>
+            <a:r>
+              <a:rPr sz="2000">
+                <a:latin typeface="Courier"/>
+              </a:rPr>
+              <a:t>scripts/</a:t>
+            </a:r>
+            <a:r>
+              <a:rPr sz="2000"/>
+              <a:t> folder (or just </a:t>
+            </a:r>
+            <a:r>
+              <a:rPr sz="2000">
+                <a:latin typeface="Courier"/>
+              </a:rPr>
+              <a:t>14_nested_anova.R</a:t>
+            </a:r>
+            <a:r>
+              <a:rPr sz="2000"/>
+              <a:t>)</a:t>
+            </a:r>
+          </a:p>
+          <a:p>
+            <a:pPr lvl="0" indent="-342900" marL="342900">
+              <a:buAutoNum type="arabicPeriod"/>
+            </a:pPr>
+            <a:r>
+              <a:rPr sz="2000"/>
+              <a:t>This worksheet, with your written answers</a:t>
+            </a:r>
+          </a:p>
+        </p:txBody>
+      </p:sp>
     </p:spTree>
   </p:cSld>
 </p:sld>
@@ -3797,631 +3609,6 @@
         <p:spPr>
           <a:xfrm>
             <a:off x="0" y="0"/>
-            <a:ext cx="9144000" cy="871538"/>
-          </a:xfrm>
-        </p:spPr>
-        <p:txBody>
-          <a:bodyPr/>
-          <a:lstStyle/>
-          <a:p>
-            <a:pPr lvl="0" indent="0" marL="0">
-              <a:buNone/>
-            </a:pPr>
-            <a:r>
-              <a:rPr/>
-              <a:t>Lecture 13 Assumption Tests</a:t>
-            </a:r>
-          </a:p>
-        </p:txBody>
-      </p:sp>
-      <p:sp>
-        <p:nvSpPr>
-          <p:cNvPr id="4" name="Text Placeholder 3"/>
-          <p:cNvSpPr>
-            <a:spLocks noGrp="1"/>
-          </p:cNvSpPr>
-          <p:nvPr>
-            <p:ph idx="2" sz="half" type="body"/>
-          </p:nvPr>
-        </p:nvSpPr>
-        <p:spPr/>
-        <p:txBody>
-          <a:bodyPr/>
-          <a:lstStyle/>
-          <a:p>
-            <a:pPr lvl="0" indent="0" marL="0">
-              <a:buNone/>
-            </a:pPr>
-            <a:r>
-              <a:rPr/>
-              <a:t>Creates all 4 diagnostic plots automatically</a:t>
-            </a:r>
-          </a:p>
-        </p:txBody>
-      </p:sp>
-      <p:pic>
-        <p:nvPicPr>
-          <p:cNvPr descr="nested_anova_activity_files/figure-pptx/unnamed-chunk-5-1.png" id="0" name="Picture 1"/>
-          <p:cNvPicPr>
-            <a:picLocks noGrp="1" noChangeAspect="1"/>
-          </p:cNvPicPr>
-          <p:nvPr/>
-        </p:nvPicPr>
-        <p:blipFill>
-          <a:blip r:embed="rId2"/>
-          <a:stretch>
-            <a:fillRect/>
-          </a:stretch>
-        </p:blipFill>
-        <p:spPr bwMode="auto">
-          <a:xfrm>
-            <a:off x="3657600" y="1244600"/>
-            <a:ext cx="5232400" cy="3225800"/>
-          </a:xfrm>
-          <a:prstGeom prst="rect">
-            <a:avLst/>
-          </a:prstGeom>
-          <a:noFill/>
-          <a:ln w="9525">
-            <a:noFill/>
-            <a:headEnd/>
-            <a:tailEnd/>
-          </a:ln>
-        </p:spPr>
-      </p:pic>
-    </p:spTree>
-  </p:cSld>
-</p:sld>
-</file>
-
-<file path=ppt/slides/slide12.xml><?xml version="1.0" encoding="utf-8"?>
-<p:sld xmlns:a="http://schemas.openxmlformats.org/drawingml/2006/main" xmlns:r="http://schemas.openxmlformats.org/officeDocument/2006/relationships" xmlns:p="http://schemas.openxmlformats.org/presentationml/2006/main">
-  <p:cSld>
-    <p:spTree>
-      <p:nvGrpSpPr>
-        <p:cNvPr id="1" name=""/>
-        <p:cNvGrpSpPr/>
-        <p:nvPr/>
-      </p:nvGrpSpPr>
-      <p:grpSpPr>
-        <a:xfrm>
-          <a:off x="0" y="0"/>
-          <a:ext cx="0" cy="0"/>
-          <a:chOff x="0" y="0"/>
-          <a:chExt cx="0" cy="0"/>
-        </a:xfrm>
-      </p:grpSpPr>
-      <p:pic>
-        <p:nvPicPr>
-          <p:cNvPr descr="nested_anova_activity_files/figure-pptx/unnamed-chunk-6-1.png" id="0" name="Picture 1"/>
-          <p:cNvPicPr>
-            <a:picLocks noGrp="1" noChangeAspect="1"/>
-          </p:cNvPicPr>
-          <p:nvPr/>
-        </p:nvPicPr>
-        <p:blipFill>
-          <a:blip r:embed="rId2"/>
-          <a:stretch>
-            <a:fillRect/>
-          </a:stretch>
-        </p:blipFill>
-        <p:spPr bwMode="auto">
-          <a:xfrm>
-            <a:off x="1358900" y="609600"/>
-            <a:ext cx="6350000" cy="3911600"/>
-          </a:xfrm>
-          <a:prstGeom prst="rect">
-            <a:avLst/>
-          </a:prstGeom>
-          <a:noFill/>
-          <a:ln w="9525">
-            <a:noFill/>
-            <a:headEnd/>
-            <a:tailEnd/>
-          </a:ln>
-        </p:spPr>
-      </p:pic>
-    </p:spTree>
-  </p:cSld>
-</p:sld>
-</file>
-
-<file path=ppt/slides/slide13.xml><?xml version="1.0" encoding="utf-8"?>
-<p:sld xmlns:a="http://schemas.openxmlformats.org/drawingml/2006/main" xmlns:r="http://schemas.openxmlformats.org/officeDocument/2006/relationships" xmlns:p="http://schemas.openxmlformats.org/presentationml/2006/main">
-  <p:cSld>
-    <p:spTree>
-      <p:nvGrpSpPr>
-        <p:cNvPr id="1" name=""/>
-        <p:cNvGrpSpPr/>
-        <p:nvPr/>
-      </p:nvGrpSpPr>
-      <p:grpSpPr>
-        <a:xfrm>
-          <a:off x="0" y="0"/>
-          <a:ext cx="0" cy="0"/>
-          <a:chOff x="0" y="0"/>
-          <a:chExt cx="0" cy="0"/>
-        </a:xfrm>
-      </p:grpSpPr>
-      <p:pic>
-        <p:nvPicPr>
-          <p:cNvPr descr="nested_anova_activity_files/figure-pptx/unnamed-chunk-7-1.png" id="0" name="Picture 1"/>
-          <p:cNvPicPr>
-            <a:picLocks noGrp="1" noChangeAspect="1"/>
-          </p:cNvPicPr>
-          <p:nvPr/>
-        </p:nvPicPr>
-        <p:blipFill>
-          <a:blip r:embed="rId2"/>
-          <a:stretch>
-            <a:fillRect/>
-          </a:stretch>
-        </p:blipFill>
-        <p:spPr bwMode="auto">
-          <a:xfrm>
-            <a:off x="1358900" y="609600"/>
-            <a:ext cx="6350000" cy="3911600"/>
-          </a:xfrm>
-          <a:prstGeom prst="rect">
-            <a:avLst/>
-          </a:prstGeom>
-          <a:noFill/>
-          <a:ln w="9525">
-            <a:noFill/>
-            <a:headEnd/>
-            <a:tailEnd/>
-          </a:ln>
-        </p:spPr>
-      </p:pic>
-    </p:spTree>
-  </p:cSld>
-</p:sld>
-</file>
-
-<file path=ppt/slides/slide14.xml><?xml version="1.0" encoding="utf-8"?>
-<p:sld xmlns:a="http://schemas.openxmlformats.org/drawingml/2006/main" xmlns:r="http://schemas.openxmlformats.org/officeDocument/2006/relationships" xmlns:p="http://schemas.openxmlformats.org/presentationml/2006/main">
-  <p:cSld>
-    <p:spTree>
-      <p:nvGrpSpPr>
-        <p:cNvPr id="1" name=""/>
-        <p:cNvGrpSpPr/>
-        <p:nvPr/>
-      </p:nvGrpSpPr>
-      <p:grpSpPr>
-        <a:xfrm>
-          <a:off x="0" y="0"/>
-          <a:ext cx="0" cy="0"/>
-          <a:chOff x="0" y="0"/>
-          <a:chExt cx="0" cy="0"/>
-        </a:xfrm>
-      </p:grpSpPr>
-      <p:sp>
-        <p:nvSpPr>
-          <p:cNvPr id="4" name="Text Placeholder 3"/>
-          <p:cNvSpPr>
-            <a:spLocks noGrp="1"/>
-          </p:cNvSpPr>
-          <p:nvPr>
-            <p:ph idx="2" sz="half" type="body"/>
-          </p:nvPr>
-        </p:nvSpPr>
-        <p:spPr/>
-        <p:txBody>
-          <a:bodyPr/>
-          <a:lstStyle/>
-          <a:p>
-            <a:pPr lvl="0" indent="0">
-              <a:buNone/>
-            </a:pPr>
-            <a:r>
-              <a:rPr>
-                <a:latin typeface="Courier"/>
-              </a:rPr>
-              <a:t>
-    DHARMa nonparametric dispersion test via sd of residuals fitted vs.
-    simulated
-data:  simulationOutput
-dispersion = 1.0497, p-value = 0.68
-alternative hypothesis: two.sided</a:t>
-            </a:r>
-          </a:p>
-        </p:txBody>
-      </p:sp>
-      <p:pic>
-        <p:nvPicPr>
-          <p:cNvPr descr="nested_anova_activity_files/figure-pptx/unnamed-chunk-8-1.png" id="0" name="Picture 1"/>
-          <p:cNvPicPr>
-            <a:picLocks noGrp="1" noChangeAspect="1"/>
-          </p:cNvPicPr>
-          <p:nvPr/>
-        </p:nvPicPr>
-        <p:blipFill>
-          <a:blip r:embed="rId2"/>
-          <a:stretch>
-            <a:fillRect/>
-          </a:stretch>
-        </p:blipFill>
-        <p:spPr bwMode="auto">
-          <a:xfrm>
-            <a:off x="3657600" y="1244600"/>
-            <a:ext cx="5232400" cy="3225800"/>
-          </a:xfrm>
-          <a:prstGeom prst="rect">
-            <a:avLst/>
-          </a:prstGeom>
-          <a:noFill/>
-          <a:ln w="9525">
-            <a:noFill/>
-            <a:headEnd/>
-            <a:tailEnd/>
-          </a:ln>
-        </p:spPr>
-      </p:pic>
-    </p:spTree>
-  </p:cSld>
-</p:sld>
-</file>
-
-<file path=ppt/slides/slide15.xml><?xml version="1.0" encoding="utf-8"?>
-<p:sld xmlns:a="http://schemas.openxmlformats.org/drawingml/2006/main" xmlns:r="http://schemas.openxmlformats.org/officeDocument/2006/relationships" xmlns:p="http://schemas.openxmlformats.org/presentationml/2006/main">
-  <p:cSld>
-    <p:spTree>
-      <p:nvGrpSpPr>
-        <p:cNvPr id="1" name=""/>
-        <p:cNvGrpSpPr/>
-        <p:nvPr/>
-      </p:nvGrpSpPr>
-      <p:grpSpPr>
-        <a:xfrm>
-          <a:off x="0" y="0"/>
-          <a:ext cx="0" cy="0"/>
-          <a:chOff x="0" y="0"/>
-          <a:chExt cx="0" cy="0"/>
-        </a:xfrm>
-      </p:grpSpPr>
-      <p:sp>
-        <p:nvSpPr>
-          <p:cNvPr id="4" name="Text Placeholder 3"/>
-          <p:cNvSpPr>
-            <a:spLocks noGrp="1"/>
-          </p:cNvSpPr>
-          <p:nvPr>
-            <p:ph idx="2" sz="half" type="body"/>
-          </p:nvPr>
-        </p:nvSpPr>
-        <p:spPr/>
-        <p:txBody>
-          <a:bodyPr/>
-          <a:lstStyle/>
-          <a:p>
-            <a:pPr lvl="0" indent="0">
-              <a:buNone/>
-            </a:pPr>
-            <a:r>
-              <a:rPr>
-                <a:latin typeface="Courier"/>
-              </a:rPr>
-              <a:t>
-    DHARMa outlier test based on exact binomial test with approximate
-    expectations
-data:  simulation_output
-outliers at both margin(s) = 0, observations = 80, p-value = 1
-alternative hypothesis: true probability of success is not equal to 0.007968127
-95 percent confidence interval:
- 0.00000000 0.04506404
-sample estimates:
-frequency of outliers (expected: 0.00796812749003984 ) 
-                                                     0 </a:t>
-            </a:r>
-          </a:p>
-        </p:txBody>
-      </p:sp>
-      <p:pic>
-        <p:nvPicPr>
-          <p:cNvPr descr="nested_anova_activity_files/figure-pptx/unnamed-chunk-9-1.png" id="0" name="Picture 1"/>
-          <p:cNvPicPr>
-            <a:picLocks noGrp="1" noChangeAspect="1"/>
-          </p:cNvPicPr>
-          <p:nvPr/>
-        </p:nvPicPr>
-        <p:blipFill>
-          <a:blip r:embed="rId2"/>
-          <a:stretch>
-            <a:fillRect/>
-          </a:stretch>
-        </p:blipFill>
-        <p:spPr bwMode="auto">
-          <a:xfrm>
-            <a:off x="3657600" y="1244600"/>
-            <a:ext cx="5232400" cy="3225800"/>
-          </a:xfrm>
-          <a:prstGeom prst="rect">
-            <a:avLst/>
-          </a:prstGeom>
-          <a:noFill/>
-          <a:ln w="9525">
-            <a:noFill/>
-            <a:headEnd/>
-            <a:tailEnd/>
-          </a:ln>
-        </p:spPr>
-      </p:pic>
-    </p:spTree>
-  </p:cSld>
-</p:sld>
-</file>
-
-<file path=ppt/slides/slide16.xml><?xml version="1.0" encoding="utf-8"?>
-<p:sld xmlns:a="http://schemas.openxmlformats.org/drawingml/2006/main" xmlns:r="http://schemas.openxmlformats.org/officeDocument/2006/relationships" xmlns:p="http://schemas.openxmlformats.org/presentationml/2006/main">
-  <p:cSld>
-    <p:spTree>
-      <p:nvGrpSpPr>
-        <p:cNvPr id="1" name=""/>
-        <p:cNvGrpSpPr/>
-        <p:nvPr/>
-      </p:nvGrpSpPr>
-      <p:grpSpPr>
-        <a:xfrm>
-          <a:off x="0" y="0"/>
-          <a:ext cx="0" cy="0"/>
-          <a:chOff x="0" y="0"/>
-          <a:chExt cx="0" cy="0"/>
-        </a:xfrm>
-      </p:grpSpPr>
-      <p:sp>
-        <p:nvSpPr>
-          <p:cNvPr id="2" name="Title 1"/>
-          <p:cNvSpPr>
-            <a:spLocks noGrp="1"/>
-          </p:cNvSpPr>
-          <p:nvPr>
-            <p:ph type="title"/>
-          </p:nvPr>
-        </p:nvSpPr>
-        <p:spPr>
-          <a:xfrm>
-            <a:off x="0" y="0"/>
-            <a:ext cx="9144000" cy="871538"/>
-          </a:xfrm>
-        </p:spPr>
-        <p:txBody>
-          <a:bodyPr/>
-          <a:lstStyle/>
-          <a:p>
-            <a:pPr lvl="0" indent="0" marL="0">
-              <a:buNone/>
-            </a:pPr>
-            <a:r>
-              <a:rPr/>
-              <a:t>Cooks influence plot using car</a:t>
-            </a:r>
-          </a:p>
-        </p:txBody>
-      </p:sp>
-      <p:sp>
-        <p:nvSpPr>
-          <p:cNvPr id="4" name="Text Placeholder 3"/>
-          <p:cNvSpPr>
-            <a:spLocks noGrp="1"/>
-          </p:cNvSpPr>
-          <p:nvPr>
-            <p:ph idx="2" sz="half" type="body"/>
-          </p:nvPr>
-        </p:nvSpPr>
-        <p:spPr/>
-        <p:txBody>
-          <a:bodyPr/>
-          <a:lstStyle/>
-          <a:p>
-            <a:pPr lvl="0" indent="0" marL="0">
-              <a:buNone/>
-            </a:pPr>
-            <a:r>
-              <a:rPr/>
-              <a:t>this will tell you if there are outliers greater than the standard 0.5 cooks distance</a:t>
-            </a:r>
-          </a:p>
-        </p:txBody>
-      </p:sp>
-      <p:pic>
-        <p:nvPicPr>
-          <p:cNvPr descr="nested_anova_activity_files/figure-pptx/unnamed-chunk-10-1.png" id="0" name="Picture 1"/>
-          <p:cNvPicPr>
-            <a:picLocks noGrp="1" noChangeAspect="1"/>
-          </p:cNvPicPr>
-          <p:nvPr/>
-        </p:nvPicPr>
-        <p:blipFill>
-          <a:blip r:embed="rId2"/>
-          <a:stretch>
-            <a:fillRect/>
-          </a:stretch>
-        </p:blipFill>
-        <p:spPr bwMode="auto">
-          <a:xfrm>
-            <a:off x="3657600" y="1244600"/>
-            <a:ext cx="5232400" cy="3225800"/>
-          </a:xfrm>
-          <a:prstGeom prst="rect">
-            <a:avLst/>
-          </a:prstGeom>
-          <a:noFill/>
-          <a:ln w="9525">
-            <a:noFill/>
-            <a:headEnd/>
-            <a:tailEnd/>
-          </a:ln>
-        </p:spPr>
-      </p:pic>
-    </p:spTree>
-  </p:cSld>
-</p:sld>
-</file>
-
-<file path=ppt/slides/slide17.xml><?xml version="1.0" encoding="utf-8"?>
-<p:sld xmlns:a="http://schemas.openxmlformats.org/drawingml/2006/main" xmlns:r="http://schemas.openxmlformats.org/officeDocument/2006/relationships" xmlns:p="http://schemas.openxmlformats.org/presentationml/2006/main">
-  <p:cSld>
-    <p:spTree>
-      <p:nvGrpSpPr>
-        <p:cNvPr id="1" name=""/>
-        <p:cNvGrpSpPr/>
-        <p:nvPr/>
-      </p:nvGrpSpPr>
-      <p:grpSpPr>
-        <a:xfrm>
-          <a:off x="0" y="0"/>
-          <a:ext cx="0" cy="0"/>
-          <a:chOff x="0" y="0"/>
-          <a:chExt cx="0" cy="0"/>
-        </a:xfrm>
-      </p:grpSpPr>
-      <p:sp>
-        <p:nvSpPr>
-          <p:cNvPr id="4" name="Text Placeholder 3"/>
-          <p:cNvSpPr>
-            <a:spLocks noGrp="1"/>
-          </p:cNvSpPr>
-          <p:nvPr>
-            <p:ph idx="2" sz="half" type="body"/>
-          </p:nvPr>
-        </p:nvSpPr>
-        <p:spPr/>
-        <p:txBody>
-          <a:bodyPr/>
-          <a:lstStyle/>
-          <a:p>
-            <a:pPr lvl="0" indent="0">
-              <a:buNone/>
-            </a:pPr>
-            <a:r>
-              <a:rPr>
-                <a:latin typeface="Courier"/>
-              </a:rPr>
-              <a:t>       StudRes       Hat        CookD
-1  -0.09869848 0.1746972 0.0005155059
-2  -0.09869848 0.1746972 0.0005155059
-27  2.85206412 0.1746972 0.4304585311
-59  2.42281033 0.1746972 0.3106358546</a:t>
-            </a:r>
-          </a:p>
-        </p:txBody>
-      </p:sp>
-      <p:pic>
-        <p:nvPicPr>
-          <p:cNvPr descr="nested_anova_activity_files/figure-pptx/unnamed-chunk-11-1.png" id="0" name="Picture 1"/>
-          <p:cNvPicPr>
-            <a:picLocks noGrp="1" noChangeAspect="1"/>
-          </p:cNvPicPr>
-          <p:nvPr/>
-        </p:nvPicPr>
-        <p:blipFill>
-          <a:blip r:embed="rId2"/>
-          <a:stretch>
-            <a:fillRect/>
-          </a:stretch>
-        </p:blipFill>
-        <p:spPr bwMode="auto">
-          <a:xfrm>
-            <a:off x="3657600" y="1244600"/>
-            <a:ext cx="5232400" cy="3225800"/>
-          </a:xfrm>
-          <a:prstGeom prst="rect">
-            <a:avLst/>
-          </a:prstGeom>
-          <a:noFill/>
-          <a:ln w="9525">
-            <a:noFill/>
-            <a:headEnd/>
-            <a:tailEnd/>
-          </a:ln>
-        </p:spPr>
-      </p:pic>
-    </p:spTree>
-  </p:cSld>
-</p:sld>
-</file>
-
-<file path=ppt/slides/slide18.xml><?xml version="1.0" encoding="utf-8"?>
-<p:sld xmlns:a="http://schemas.openxmlformats.org/drawingml/2006/main" xmlns:r="http://schemas.openxmlformats.org/officeDocument/2006/relationships" xmlns:p="http://schemas.openxmlformats.org/presentationml/2006/main">
-  <p:cSld>
-    <p:spTree>
-      <p:nvGrpSpPr>
-        <p:cNvPr id="1" name=""/>
-        <p:cNvGrpSpPr/>
-        <p:nvPr/>
-      </p:nvGrpSpPr>
-      <p:grpSpPr>
-        <a:xfrm>
-          <a:off x="0" y="0"/>
-          <a:ext cx="0" cy="0"/>
-          <a:chOff x="0" y="0"/>
-          <a:chExt cx="0" cy="0"/>
-        </a:xfrm>
-      </p:grpSpPr>
-      <p:sp>
-        <p:nvSpPr>
-          <p:cNvPr id="3" name="Content Placeholder 2"/>
-          <p:cNvSpPr>
-            <a:spLocks noGrp="1"/>
-          </p:cNvSpPr>
-          <p:nvPr>
-            <p:ph idx="1"/>
-          </p:nvPr>
-        </p:nvSpPr>
-        <p:spPr/>
-        <p:txBody>
-          <a:bodyPr/>
-          <a:lstStyle/>
-          <a:p>
-            <a:pPr lvl="0" indent="0">
-              <a:buNone/>
-            </a:pPr>
-            <a:r>
-              <a:rPr>
-                <a:latin typeface="Courier"/>
-              </a:rPr>
-              <a:t> Groups   Name        Std.Dev.
- patch    (Intercept) 17.156  
- Residual             17.280  </a:t>
-            </a:r>
-          </a:p>
-        </p:txBody>
-      </p:sp>
-    </p:spTree>
-  </p:cSld>
-</p:sld>
-</file>
-
-<file path=ppt/slides/slide19.xml><?xml version="1.0" encoding="utf-8"?>
-<p:sld xmlns:a="http://schemas.openxmlformats.org/drawingml/2006/main" xmlns:r="http://schemas.openxmlformats.org/officeDocument/2006/relationships" xmlns:p="http://schemas.openxmlformats.org/presentationml/2006/main">
-  <p:cSld>
-    <p:spTree>
-      <p:nvGrpSpPr>
-        <p:cNvPr id="1" name=""/>
-        <p:cNvGrpSpPr/>
-        <p:nvPr/>
-      </p:nvGrpSpPr>
-      <p:grpSpPr>
-        <a:xfrm>
-          <a:off x="0" y="0"/>
-          <a:ext cx="0" cy="0"/>
-          <a:chOff x="0" y="0"/>
-          <a:chExt cx="0" cy="0"/>
-        </a:xfrm>
-      </p:grpSpPr>
-      <p:sp>
-        <p:nvSpPr>
-          <p:cNvPr id="2" name="Title 1"/>
-          <p:cNvSpPr>
-            <a:spLocks noGrp="1"/>
-          </p:cNvSpPr>
-          <p:nvPr>
-            <p:ph type="title"/>
-          </p:nvPr>
-        </p:nvSpPr>
-        <p:spPr>
-          <a:xfrm>
-            <a:off x="0" y="0"/>
             <a:ext cx="9144000" cy="582780"/>
           </a:xfrm>
         </p:spPr>
@@ -4434,7 +3621,7 @@
             </a:pPr>
             <a:r>
               <a:rPr/>
-              <a:t>Lecture 13: Post-hoc Comparisons</a:t>
+              <a:t>Getting unstuck</a:t>
             </a:r>
           </a:p>
         </p:txBody>
@@ -4459,24 +3646,176 @@
             </a:pPr>
             <a:r>
               <a:rPr/>
-              <a:t>Although the main effect of treatment was not significant in the nested ANOVA (p = r format(p_treat, digits=3)), we can still examine the mean differences between treatments to understand patterns in the data. However, we should interpret these with caution given the lack of statistical significance at the α = 0.05 level.</a:t>
-            </a:r>
-          </a:p>
-          <a:p>
-            <a:pPr lvl="0" indent="0">
-              <a:buNone/>
+              <a:t>When code breaks — and it will, that is normal:</a:t>
+            </a:r>
+          </a:p>
+          <a:p>
+            <a:pPr lvl="0" indent="-342900" marL="342900">
+              <a:buAutoNum type="arabicPeriod"/>
             </a:pPr>
             <a:r>
-              <a:rPr>
-                <a:latin typeface="Courier"/>
-              </a:rPr>
-              <a:t> treat  emmean   SE df lower.CL upper.CL
- none     39.2 9.41 12    18.70     59.7
- low      21.6 9.41 12     1.05     42.0
- medium   19.0 9.41 12    -1.50     39.5
- high      1.3 9.41 12   -19.20     21.8
-Warning: EMMs are biased unless design is perfectly balanced 
-Confidence level used: 0.95 </a:t>
+              <a:rPr b="1"/>
+              <a:t>Read the error message out loud.</a:t>
+            </a:r>
+            <a:r>
+              <a:rPr/>
+              <a:t> R usually names the line and the problem.</a:t>
+            </a:r>
+          </a:p>
+          <a:p>
+            <a:pPr lvl="0" indent="-342900" marL="342900">
+              <a:buAutoNum type="arabicPeriod"/>
+            </a:pPr>
+            <a:r>
+              <a:rPr b="1"/>
+              <a:t>Check the usual suspects:</a:t>
+            </a:r>
+            <a:r>
+              <a:rPr/>
+              <a:t> did you run </a:t>
+            </a:r>
+            <a:r>
+              <a:rPr>
+                <a:latin typeface="Courier"/>
+              </a:rPr>
+              <a:t>library(lme4)</a:t>
+            </a:r>
+            <a:r>
+              <a:rPr/>
+              <a:t>, </a:t>
+            </a:r>
+            <a:r>
+              <a:rPr>
+                <a:latin typeface="Courier"/>
+              </a:rPr>
+              <a:t>library(lmerTest)</a:t>
+            </a:r>
+            <a:r>
+              <a:rPr/>
+              <a:t>, </a:t>
+            </a:r>
+            <a:r>
+              <a:rPr>
+                <a:latin typeface="Courier"/>
+              </a:rPr>
+              <a:t>library(car)</a:t>
+            </a:r>
+            <a:r>
+              <a:rPr/>
+              <a:t>, </a:t>
+            </a:r>
+            <a:r>
+              <a:rPr>
+                <a:latin typeface="Courier"/>
+              </a:rPr>
+              <a:t>library(emmeans)</a:t>
+            </a:r>
+            <a:r>
+              <a:rPr/>
+              <a:t>, </a:t>
+            </a:r>
+            <a:r>
+              <a:rPr>
+                <a:latin typeface="Courier"/>
+              </a:rPr>
+              <a:t>library(DHARMa)</a:t>
+            </a:r>
+            <a:r>
+              <a:rPr/>
+              <a:t>, </a:t>
+            </a:r>
+            <a:r>
+              <a:rPr>
+                <a:latin typeface="Courier"/>
+              </a:rPr>
+              <a:t>library(afex)</a:t>
+            </a:r>
+            <a:r>
+              <a:rPr/>
+              <a:t>, and </a:t>
+            </a:r>
+            <a:r>
+              <a:rPr>
+                <a:latin typeface="Courier"/>
+              </a:rPr>
+              <a:t>library(tidyverse)</a:t>
+            </a:r>
+            <a:r>
+              <a:rPr/>
+              <a:t>? Spelling? A missing </a:t>
+            </a:r>
+            <a:r>
+              <a:rPr>
+                <a:latin typeface="Courier"/>
+              </a:rPr>
+              <a:t>)</a:t>
+            </a:r>
+            <a:r>
+              <a:rPr/>
+              <a:t> or </a:t>
+            </a:r>
+            <a:r>
+              <a:rPr>
+                <a:latin typeface="Courier"/>
+              </a:rPr>
+              <a:t>%&gt;%</a:t>
+            </a:r>
+            <a:r>
+              <a:rPr/>
+              <a:t> at the </a:t>
+            </a:r>
+            <a:r>
+              <a:rPr i="1"/>
+              <a:t>start</a:t>
+            </a:r>
+            <a:r>
+              <a:rPr/>
+              <a:t> of a line?</a:t>
+            </a:r>
+          </a:p>
+          <a:p>
+            <a:pPr lvl="0" indent="-342900" marL="342900">
+              <a:buAutoNum type="arabicPeriod"/>
+            </a:pPr>
+            <a:r>
+              <a:rPr>
+                <a:latin typeface="Courier"/>
+              </a:rPr>
+              <a:t>?function_name</a:t>
+            </a:r>
+            <a:r>
+              <a:rPr/>
+              <a:t> opens the built-in help page.</a:t>
+            </a:r>
+          </a:p>
+          <a:p>
+            <a:pPr lvl="0" indent="-342900" marL="342900">
+              <a:buAutoNum type="arabicPeriod"/>
+            </a:pPr>
+            <a:r>
+              <a:rPr b="1"/>
+              <a:t>Bring the exact error</a:t>
+            </a:r>
+            <a:r>
+              <a:rPr/>
+              <a:t> (copy-paste it) to class or office hours.</a:t>
+            </a:r>
+          </a:p>
+          <a:p>
+            <a:pPr lvl="0" indent="0" marL="1270000">
+              <a:buNone/>
+            </a:pPr>
+            <a:r>
+              <a:rPr sz="2000"/>
+              <a:t>💡 </a:t>
+            </a:r>
+            <a:r>
+              <a:rPr sz="2000" b="1"/>
+              <a:t>Key idea:</a:t>
+            </a:r>
+            <a:r>
+              <a:rPr sz="2000"/>
+              <a:t> Every working scientist googles error messages daily. Getting stuck is not failing — it is the job.</a:t>
             </a:r>
           </a:p>
         </p:txBody>
@@ -4528,7 +3867,7 @@
             </a:pPr>
             <a:r>
               <a:rPr/>
-              <a:t>Lecture 13: Data Overview</a:t>
+              <a:t>Worksheet: Nested ANOVA</a:t>
             </a:r>
           </a:p>
         </p:txBody>
@@ -4548,650 +3887,85 @@
           <a:bodyPr/>
           <a:lstStyle/>
           <a:p>
-            <a:pPr lvl="0"/>
-            <a:r>
-              <a:rPr/>
-              <a:t>The </a:t>
-            </a:r>
-            <a:r>
-              <a:rPr b="1"/>
-              <a:t>u_df</a:t>
-            </a:r>
-            <a:r>
-              <a:rPr/>
-              <a:t> dataframe contains observations with the following variables:</a:t>
-            </a:r>
-          </a:p>
-          <a:p>
-            <a:pPr lvl="1"/>
-            <a:r>
-              <a:rPr b="1"/>
+            <a:pPr lvl="0" indent="0" marL="0">
+              <a:spcBef>
+                <a:spcPts val="3000"/>
+              </a:spcBef>
+              <a:buNone/>
+            </a:pPr>
+            <a:r>
+              <a:rPr sz="2000" b="1"/>
+              <a:t>How to use this worksheet</a:t>
+            </a:r>
+          </a:p>
+          <a:p>
+            <a:pPr lvl="0" indent="0" marL="1270000">
+              <a:buNone/>
+            </a:pPr>
+            <a:r>
+              <a:rPr sz="2000"/>
+              <a:t>Work through each part in order, at your own pace. Type every line of code yourself into a </a:t>
+            </a:r>
+            <a:r>
+              <a:rPr sz="2000" b="1"/>
+              <a:t>plain R script</a:t>
+            </a:r>
+            <a:r>
+              <a:rPr sz="2000"/>
+              <a:t> — do not copy-paste. Blocks marked </a:t>
+            </a:r>
+            <a:r>
+              <a:rPr sz="2000" b="1"/>
+              <a:t>▶ Run this</a:t>
+            </a:r>
+            <a:r>
+              <a:rPr sz="2000"/>
+              <a:t> are code you should type and execute. Blocks marked </a:t>
+            </a:r>
+            <a:r>
+              <a:rPr sz="2000" b="1"/>
+              <a:t>✏️ Your turn</a:t>
+            </a:r>
+            <a:r>
+              <a:rPr sz="2000"/>
+              <a:t> ask you to write, modify, or answer something. Boxes marked </a:t>
+            </a:r>
+            <a:r>
+              <a:rPr sz="2000" b="1"/>
+              <a:t>🚀 If you finish early</a:t>
+            </a:r>
+            <a:r>
+              <a:rPr sz="2000"/>
+              <a:t> are optional bonus material that goes a bit further than what we covered in lecture.</a:t>
+            </a:r>
+          </a:p>
+          <a:p>
+            <a:pPr lvl="0" indent="0" marL="1270000">
+              <a:buNone/>
+            </a:pPr>
+            <a:r>
+              <a:rPr sz="2000"/>
+              <a:t>This worksheet uses the sea urchin grazing / algae cover dataset from lecture, where </a:t>
+            </a:r>
+            <a:r>
+              <a:rPr sz="2000">
+                <a:latin typeface="Courier"/>
+              </a:rPr>
               <a:t>patch</a:t>
             </a:r>
             <a:r>
-              <a:rPr/>
-              <a:t>: Random patches (1-16) where treatments were applied</a:t>
-            </a:r>
-          </a:p>
-          <a:p>
-            <a:pPr lvl="1"/>
-            <a:r>
-              <a:rPr b="1"/>
+              <a:rPr sz="2000"/>
+              <a:t> is nested within </a:t>
+            </a:r>
+            <a:r>
+              <a:rPr sz="2000">
+                <a:latin typeface="Courier"/>
+              </a:rPr>
               <a:t>treat</a:t>
             </a:r>
             <a:r>
-              <a:rPr/>
-              <a:t>: Urchin density treatment - none, low, medium, high</a:t>
-            </a:r>
-          </a:p>
-          <a:p>
-            <a:pPr lvl="1"/>
-            <a:r>
-              <a:rPr b="1"/>
-              <a:t>quad</a:t>
-            </a:r>
-            <a:r>
-              <a:rPr/>
-              <a:t>: Replicate quadrats within each patch: treatment combination</a:t>
-            </a:r>
-          </a:p>
-          <a:p>
-            <a:pPr lvl="1"/>
-            <a:r>
-              <a:rPr b="1"/>
-              <a:t>algae</a:t>
-            </a:r>
-            <a:r>
-              <a:rPr/>
-              <a:t>: Percentage cover of filamentous algae (response variable)</a:t>
-            </a:r>
-          </a:p>
-          <a:p>
-            <a:pPr lvl="0" indent="0">
-              <a:buNone/>
-            </a:pPr>
-            <a:r>
-              <a:rPr>
-                <a:latin typeface="Courier"/>
-              </a:rPr>
-              <a:t># A tibble: 4 × 7
-  treat      n  mean    sd    se   min   max
-  &lt;fct&gt;  &lt;int&gt; &lt;dbl&gt; &lt;dbl&gt; &lt;dbl&gt; &lt;dbl&gt; &lt;dbl&gt;
-1 none      20  39.2 28.7  6.41      0    83
-2 low       20  21.6 25.1  5.62      0    79
-3 medium    20  19   25.7  5.74      0    71
-4 high      20   1.3  3.18 0.711     0    13</a:t>
-            </a:r>
-          </a:p>
-        </p:txBody>
-      </p:sp>
-    </p:spTree>
-  </p:cSld>
-</p:sld>
-</file>
-
-<file path=ppt/slides/slide20.xml><?xml version="1.0" encoding="utf-8"?>
-<p:sld xmlns:a="http://schemas.openxmlformats.org/drawingml/2006/main" xmlns:r="http://schemas.openxmlformats.org/officeDocument/2006/relationships" xmlns:p="http://schemas.openxmlformats.org/presentationml/2006/main">
-  <p:cSld>
-    <p:spTree>
-      <p:nvGrpSpPr>
-        <p:cNvPr id="1" name=""/>
-        <p:cNvGrpSpPr/>
-        <p:nvPr/>
-      </p:nvGrpSpPr>
-      <p:grpSpPr>
-        <a:xfrm>
-          <a:off x="0" y="0"/>
-          <a:ext cx="0" cy="0"/>
-          <a:chOff x="0" y="0"/>
-          <a:chExt cx="0" cy="0"/>
-        </a:xfrm>
-      </p:grpSpPr>
-      <p:sp>
-        <p:nvSpPr>
-          <p:cNvPr id="2" name="Title 1"/>
-          <p:cNvSpPr>
-            <a:spLocks noGrp="1"/>
-          </p:cNvSpPr>
-          <p:nvPr>
-            <p:ph type="title"/>
-          </p:nvPr>
-        </p:nvSpPr>
-        <p:spPr>
-          <a:xfrm>
-            <a:off x="0" y="0"/>
-            <a:ext cx="9144000" cy="582780"/>
-          </a:xfrm>
-        </p:spPr>
-        <p:txBody>
-          <a:bodyPr/>
-          <a:lstStyle/>
-          <a:p>
-            <a:pPr lvl="0" indent="0" marL="0">
-              <a:buNone/>
-            </a:pPr>
-            <a:r>
-              <a:rPr/>
-              <a:t>Lecture 13: Tukey Pairwise Comparisons</a:t>
-            </a:r>
-          </a:p>
-        </p:txBody>
-      </p:sp>
-      <p:sp>
-        <p:nvSpPr>
-          <p:cNvPr id="3" name="Content Placeholder 2"/>
-          <p:cNvSpPr>
-            <a:spLocks noGrp="1"/>
-          </p:cNvSpPr>
-          <p:nvPr>
-            <p:ph idx="1"/>
-          </p:nvPr>
-        </p:nvSpPr>
-        <p:spPr/>
-        <p:txBody>
-          <a:bodyPr/>
-          <a:lstStyle/>
-          <a:p>
-            <a:pPr lvl="0" indent="0">
-              <a:buNone/>
-            </a:pPr>
-            <a:r>
-              <a:rPr>
-                <a:latin typeface="Courier"/>
-              </a:rPr>
-              <a:t> contrast      estimate   SE df t.ratio p.value
- none - low       17.65 13.3 12   1.327  0.7557
- none - medium    20.20 13.3 12   1.518  0.6356
- none - high      37.90 13.3 12   2.849  0.0848
- low - medium      2.55 13.3 12   0.192  1.0000
- low - high       20.25 13.3 12   1.522  0.6331
- medium - high    17.70 13.3 12   1.330  0.7534
-P value adjustment: sidak method for 6 tests </a:t>
-            </a:r>
-          </a:p>
-        </p:txBody>
-      </p:sp>
-    </p:spTree>
-  </p:cSld>
-</p:sld>
-</file>
-
-<file path=ppt/slides/slide21.xml><?xml version="1.0" encoding="utf-8"?>
-<p:sld xmlns:a="http://schemas.openxmlformats.org/drawingml/2006/main" xmlns:r="http://schemas.openxmlformats.org/officeDocument/2006/relationships" xmlns:p="http://schemas.openxmlformats.org/presentationml/2006/main">
-  <p:cSld>
-    <p:spTree>
-      <p:nvGrpSpPr>
-        <p:cNvPr id="1" name=""/>
-        <p:cNvGrpSpPr/>
-        <p:nvPr/>
-      </p:nvGrpSpPr>
-      <p:grpSpPr>
-        <a:xfrm>
-          <a:off x="0" y="0"/>
-          <a:ext cx="0" cy="0"/>
-          <a:chOff x="0" y="0"/>
-          <a:chExt cx="0" cy="0"/>
-        </a:xfrm>
-      </p:grpSpPr>
-      <p:sp>
-        <p:nvSpPr>
-          <p:cNvPr id="2" name="Title 1"/>
-          <p:cNvSpPr>
-            <a:spLocks noGrp="1"/>
-          </p:cNvSpPr>
-          <p:nvPr>
-            <p:ph type="title"/>
-          </p:nvPr>
-        </p:nvSpPr>
-        <p:spPr>
-          <a:xfrm>
-            <a:off x="0" y="0"/>
-            <a:ext cx="9144000" cy="582780"/>
-          </a:xfrm>
-        </p:spPr>
-        <p:txBody>
-          <a:bodyPr/>
-          <a:lstStyle/>
-          <a:p>
-            <a:pPr lvl="0" indent="0" marL="0">
-              <a:buNone/>
-            </a:pPr>
-            <a:r>
-              <a:rPr/>
-              <a:t>Lecture 13: Letter Display</a:t>
-            </a:r>
-          </a:p>
-        </p:txBody>
-      </p:sp>
-      <p:sp>
-        <p:nvSpPr>
-          <p:cNvPr id="3" name="Content Placeholder 2"/>
-          <p:cNvSpPr>
-            <a:spLocks noGrp="1"/>
-          </p:cNvSpPr>
-          <p:nvPr>
-            <p:ph idx="1"/>
-          </p:nvPr>
-        </p:nvSpPr>
-        <p:spPr/>
-        <p:txBody>
-          <a:bodyPr/>
-          <a:lstStyle/>
-          <a:p>
-            <a:pPr lvl="0" indent="0">
-              <a:buNone/>
-            </a:pPr>
-            <a:r>
-              <a:rPr>
-                <a:latin typeface="Courier"/>
-              </a:rPr>
-              <a:t> treat  emmean   SE df lower.CL upper.CL .group
- high      1.3 9.41 12   -19.20     21.8  a    
- medium   19.0 9.41 12    -1.50     39.5  a    
- low      21.6 9.41 12     1.05     42.0  a    
- none     39.2 9.41 12    18.70     59.7  a    
-Warning: EMMs are biased unless design is perfectly balanced 
-Confidence level used: 0.95 
-P value adjustment: tukey method for comparing a family of 4 estimates 
-significance level used: alpha = 0.05 
-NOTE: If two or more means share the same grouping symbol,
-      then we cannot show them to be different.
-      But we also did not show them to be the same. </a:t>
-            </a:r>
-          </a:p>
-          <a:p>
-            <a:pPr lvl="0" indent="0" marL="1270000">
-              <a:buNone/>
-            </a:pPr>
-            <a:r>
-              <a:rPr sz="2000" b="1"/>
-              <a:t>Important</a:t>
-            </a:r>
-          </a:p>
-          <a:p>
-            <a:pPr lvl="0" indent="0" marL="1270000">
-              <a:buNone/>
-            </a:pPr>
-            <a:r>
               <a:rPr sz="2000"/>
-              <a:t>Interpretation of Treatment Comparisons The mean algae cover for the Control treatment (1.30%) appears considerably lower than for the reduced urchin density treatments (66% Density: 21.55%, 33% Density: 19.00%, Removed: 39.20%). While the visual pattern suggests an inverse relationship between urchin density and algae cover, with complete removal showing the highest algae cover, the nested ANOVA showed that these differences were not statistically significant at the α = 0.05 level (p = xxxx). The high variability among patches within treatments likely contributed to the lack of statistical significance for the treatment effect.</a:t>
-            </a:r>
-          </a:p>
-        </p:txBody>
-      </p:sp>
-    </p:spTree>
-  </p:cSld>
-</p:sld>
-</file>
-
-<file path=ppt/slides/slide22.xml><?xml version="1.0" encoding="utf-8"?>
-<p:sld xmlns:a="http://schemas.openxmlformats.org/drawingml/2006/main" xmlns:r="http://schemas.openxmlformats.org/officeDocument/2006/relationships" xmlns:p="http://schemas.openxmlformats.org/presentationml/2006/main">
-  <p:cSld>
-    <p:spTree>
-      <p:nvGrpSpPr>
-        <p:cNvPr id="1" name=""/>
-        <p:cNvGrpSpPr/>
-        <p:nvPr/>
-      </p:nvGrpSpPr>
-      <p:grpSpPr>
-        <a:xfrm>
-          <a:off x="0" y="0"/>
-          <a:ext cx="0" cy="0"/>
-          <a:chOff x="0" y="0"/>
-          <a:chExt cx="0" cy="0"/>
-        </a:xfrm>
-      </p:grpSpPr>
-      <p:sp>
-        <p:nvSpPr>
-          <p:cNvPr id="2" name="Title 1"/>
-          <p:cNvSpPr>
-            <a:spLocks noGrp="1"/>
-          </p:cNvSpPr>
-          <p:nvPr>
-            <p:ph type="title"/>
-          </p:nvPr>
-        </p:nvSpPr>
-        <p:spPr>
-          <a:xfrm>
-            <a:off x="0" y="0"/>
-            <a:ext cx="9144000" cy="582780"/>
-          </a:xfrm>
-        </p:spPr>
-        <p:txBody>
-          <a:bodyPr/>
-          <a:lstStyle/>
-          <a:p>
-            <a:pPr lvl="0" indent="0" marL="0">
-              <a:buNone/>
-            </a:pPr>
-            <a:r>
-              <a:rPr/>
-              <a:t>Lecture 13: Visualization</a:t>
-            </a:r>
-          </a:p>
-        </p:txBody>
-      </p:sp>
-      <p:pic>
-        <p:nvPicPr>
-          <p:cNvPr descr="nested_anova_activity_files/figure-pptx/unnamed-chunk-16-1.png" id="0" name="Picture 1"/>
-          <p:cNvPicPr>
-            <a:picLocks noGrp="1" noChangeAspect="1"/>
-          </p:cNvPicPr>
-          <p:nvPr/>
-        </p:nvPicPr>
-        <p:blipFill>
-          <a:blip r:embed="rId2"/>
-          <a:stretch>
-            <a:fillRect/>
-          </a:stretch>
-        </p:blipFill>
-        <p:spPr bwMode="auto">
-          <a:xfrm>
-            <a:off x="1358900" y="609600"/>
-            <a:ext cx="6350000" cy="3911600"/>
-          </a:xfrm>
-          <a:prstGeom prst="rect">
-            <a:avLst/>
-          </a:prstGeom>
-          <a:noFill/>
-          <a:ln w="9525">
-            <a:noFill/>
-            <a:headEnd/>
-            <a:tailEnd/>
-          </a:ln>
-        </p:spPr>
-      </p:pic>
-    </p:spTree>
-  </p:cSld>
-</p:sld>
-</file>
-
-<file path=ppt/slides/slide23.xml><?xml version="1.0" encoding="utf-8"?>
-<p:sld xmlns:a="http://schemas.openxmlformats.org/drawingml/2006/main" xmlns:r="http://schemas.openxmlformats.org/officeDocument/2006/relationships" xmlns:p="http://schemas.openxmlformats.org/presentationml/2006/main">
-  <p:cSld>
-    <p:spTree>
-      <p:nvGrpSpPr>
-        <p:cNvPr id="1" name=""/>
-        <p:cNvGrpSpPr/>
-        <p:nvPr/>
-      </p:nvGrpSpPr>
-      <p:grpSpPr>
-        <a:xfrm>
-          <a:off x="0" y="0"/>
-          <a:ext cx="0" cy="0"/>
-          <a:chOff x="0" y="0"/>
-          <a:chExt cx="0" cy="0"/>
-        </a:xfrm>
-      </p:grpSpPr>
-      <p:sp>
-        <p:nvSpPr>
-          <p:cNvPr id="2" name="Title 1"/>
-          <p:cNvSpPr>
-            <a:spLocks noGrp="1"/>
-          </p:cNvSpPr>
-          <p:nvPr>
-            <p:ph type="title"/>
-          </p:nvPr>
-        </p:nvSpPr>
-        <p:spPr>
-          <a:xfrm>
-            <a:off x="0" y="0"/>
-            <a:ext cx="9144000" cy="871538"/>
-          </a:xfrm>
-        </p:spPr>
-        <p:txBody>
-          <a:bodyPr/>
-          <a:lstStyle/>
-          <a:p>
-            <a:pPr lvl="0" indent="0" marL="0">
-              <a:buNone/>
-            </a:pPr>
-            <a:r>
-              <a:rPr/>
-              <a:t>Lecture 13: Means Plot</a:t>
-            </a:r>
-          </a:p>
-        </p:txBody>
-      </p:sp>
-      <p:sp>
-        <p:nvSpPr>
-          <p:cNvPr id="4" name="Text Placeholder 3"/>
-          <p:cNvSpPr>
-            <a:spLocks noGrp="1"/>
-          </p:cNvSpPr>
-          <p:nvPr>
-            <p:ph idx="2" sz="half" type="body"/>
-          </p:nvPr>
-        </p:nvSpPr>
-        <p:spPr/>
-        <p:txBody>
-          <a:bodyPr/>
-          <a:lstStyle/>
-          <a:p>
-            <a:pPr lvl="0"/>
-            <a:r>
-              <a:rPr/>
-              <a:t>text</a:t>
-            </a:r>
-          </a:p>
-        </p:txBody>
-      </p:sp>
-      <p:pic>
-        <p:nvPicPr>
-          <p:cNvPr descr="nested_anova_activity_files/figure-pptx/unnamed-chunk-17-1.png" id="0" name="Picture 1"/>
-          <p:cNvPicPr>
-            <a:picLocks noGrp="1" noChangeAspect="1"/>
-          </p:cNvPicPr>
-          <p:nvPr/>
-        </p:nvPicPr>
-        <p:blipFill>
-          <a:blip r:embed="rId2"/>
-          <a:stretch>
-            <a:fillRect/>
-          </a:stretch>
-        </p:blipFill>
-        <p:spPr bwMode="auto">
-          <a:xfrm>
-            <a:off x="3657600" y="1244600"/>
-            <a:ext cx="5232400" cy="3225800"/>
-          </a:xfrm>
-          <a:prstGeom prst="rect">
-            <a:avLst/>
-          </a:prstGeom>
-          <a:noFill/>
-          <a:ln w="9525">
-            <a:noFill/>
-            <a:headEnd/>
-            <a:tailEnd/>
-          </a:ln>
-        </p:spPr>
-      </p:pic>
-    </p:spTree>
-  </p:cSld>
-</p:sld>
-</file>
-
-<file path=ppt/slides/slide24.xml><?xml version="1.0" encoding="utf-8"?>
-<p:sld xmlns:a="http://schemas.openxmlformats.org/drawingml/2006/main" xmlns:r="http://schemas.openxmlformats.org/officeDocument/2006/relationships" xmlns:p="http://schemas.openxmlformats.org/presentationml/2006/main">
-  <p:cSld>
-    <p:spTree>
-      <p:nvGrpSpPr>
-        <p:cNvPr id="1" name=""/>
-        <p:cNvGrpSpPr/>
-        <p:nvPr/>
-      </p:nvGrpSpPr>
-      <p:grpSpPr>
-        <a:xfrm>
-          <a:off x="0" y="0"/>
-          <a:ext cx="0" cy="0"/>
-          <a:chOff x="0" y="0"/>
-          <a:chExt cx="0" cy="0"/>
-        </a:xfrm>
-      </p:grpSpPr>
-      <p:sp>
-        <p:nvSpPr>
-          <p:cNvPr id="2" name="Title 1"/>
-          <p:cNvSpPr>
-            <a:spLocks noGrp="1"/>
-          </p:cNvSpPr>
-          <p:nvPr>
-            <p:ph type="title"/>
-          </p:nvPr>
-        </p:nvSpPr>
-        <p:spPr>
-          <a:xfrm>
-            <a:off x="0" y="0"/>
-            <a:ext cx="9144000" cy="582780"/>
-          </a:xfrm>
-        </p:spPr>
-        <p:txBody>
-          <a:bodyPr/>
-          <a:lstStyle/>
-          <a:p>
-            <a:pPr lvl="0" indent="0" marL="0">
-              <a:buNone/>
-            </a:pPr>
-            <a:r>
-              <a:rPr/>
-              <a:t>Lecture 13: Discussion</a:t>
-            </a:r>
-          </a:p>
-        </p:txBody>
-      </p:sp>
-      <p:sp>
-        <p:nvSpPr>
-          <p:cNvPr id="3" name="Content Placeholder 2"/>
-          <p:cNvSpPr>
-            <a:spLocks noGrp="1"/>
-          </p:cNvSpPr>
-          <p:nvPr>
-            <p:ph idx="1"/>
-          </p:nvPr>
-        </p:nvSpPr>
-        <p:spPr/>
-        <p:txBody>
-          <a:bodyPr/>
-          <a:lstStyle/>
-          <a:p>
-            <a:pPr lvl="0" indent="0" marL="1270000">
-              <a:buNone/>
-            </a:pPr>
-            <a:r>
-              <a:rPr sz="2000" b="1"/>
-              <a:t>Important</a:t>
-            </a:r>
-          </a:p>
-          <a:p>
-            <a:pPr lvl="0" indent="0" marL="1270000">
-              <a:buNone/>
-            </a:pPr>
-            <a:r>
-              <a:rPr sz="2000"/>
-              <a:t>Scientific Interpretation Our nested ANOVA analysis revealed substantial spatial heterogeneity in algae cover, with significant variation among patches within each treatment (p &lt; 0.001). Surprisingly, the effect of urchin density treatments on filamentous algae cover was not statistically significant at the α = 0.05 level (p = 0.091), despite apparent trends in the data. The descriptive statistics show a pattern where algae cover appears to increase as urchin density decreases, with the Control treatment (mean = 1.3%) showing minimal algae cover compared to reduced density treatments (66% Density: 21.55%, 33% Density: 19.00%, and Removed: 39.20%). This pattern suggests a potential density-dependent relationship between urchin grazing and algal abundance, but the high variability among patches masked the treatment effect. The substantial variance component associated with patches nested within treatments (294.31, approximately 39.5% of total variance) underscores the importance of spatial heterogeneity in structuring algal communities. This finding highlights the necessity of accounting for spatial variability when designing and analyzing ecological field experiments. From an ecological perspective, these results suggest that while sea urchins may influence algal communities through grazing, local environmental factors and patch-specific conditions play a dominant role in determining algae cover. This has important implications for ecosystem management, as it indicates that the effects of urchin density manipulations may be context-dependent and influenced by local environmental conditions.</a:t>
-            </a:r>
-          </a:p>
-        </p:txBody>
-      </p:sp>
-    </p:spTree>
-  </p:cSld>
-</p:sld>
-</file>
-
-<file path=ppt/slides/slide25.xml><?xml version="1.0" encoding="utf-8"?>
-<p:sld xmlns:a="http://schemas.openxmlformats.org/drawingml/2006/main" xmlns:r="http://schemas.openxmlformats.org/officeDocument/2006/relationships" xmlns:p="http://schemas.openxmlformats.org/presentationml/2006/main">
-  <p:cSld>
-    <p:spTree>
-      <p:nvGrpSpPr>
-        <p:cNvPr id="1" name=""/>
-        <p:cNvGrpSpPr/>
-        <p:nvPr/>
-      </p:nvGrpSpPr>
-      <p:grpSpPr>
-        <a:xfrm>
-          <a:off x="0" y="0"/>
-          <a:ext cx="0" cy="0"/>
-          <a:chOff x="0" y="0"/>
-          <a:chExt cx="0" cy="0"/>
-        </a:xfrm>
-      </p:grpSpPr>
-      <p:sp>
-        <p:nvSpPr>
-          <p:cNvPr id="2" name="Title 1"/>
-          <p:cNvSpPr>
-            <a:spLocks noGrp="1"/>
-          </p:cNvSpPr>
-          <p:nvPr>
-            <p:ph type="title"/>
-          </p:nvPr>
-        </p:nvSpPr>
-        <p:spPr>
-          <a:xfrm>
-            <a:off x="0" y="0"/>
-            <a:ext cx="9144000" cy="582780"/>
-          </a:xfrm>
-        </p:spPr>
-        <p:txBody>
-          <a:bodyPr/>
-          <a:lstStyle/>
-          <a:p>
-            <a:pPr lvl="0" indent="0" marL="0">
-              <a:buNone/>
-            </a:pPr>
-            <a:r>
-              <a:rPr/>
-              <a:t>Comparison with Traditional Nested ANOVA</a:t>
-            </a:r>
-          </a:p>
-        </p:txBody>
-      </p:sp>
-      <p:sp>
-        <p:nvSpPr>
-          <p:cNvPr id="3" name="Content Placeholder 2"/>
-          <p:cNvSpPr>
-            <a:spLocks noGrp="1"/>
-          </p:cNvSpPr>
-          <p:nvPr>
-            <p:ph idx="1"/>
-          </p:nvPr>
-        </p:nvSpPr>
-        <p:spPr/>
-        <p:txBody>
-          <a:bodyPr/>
-          <a:lstStyle/>
-          <a:p>
-            <a:pPr lvl="0" indent="0" marL="0">
-              <a:buNone/>
-            </a:pPr>
-            <a:r>
-              <a:rPr/>
-              <a:t>The linear mixed model approach provides similar results to the traditional nested ANOVA approach. The main advantage of the mixed model is the more elegant handling of random effects and the extensive diagnostic tools available through packages like DHARMa.</a:t>
-            </a:r>
-          </a:p>
-          <a:p>
-            <a:pPr lvl="0" indent="0" marL="0">
-              <a:buNone/>
-            </a:pPr>
-            <a:r>
-              <a:rPr/>
-              <a:t>The mixed model approach confirms that:</a:t>
-            </a:r>
-          </a:p>
-          <a:p>
-            <a:pPr lvl="0" indent="-342900" marL="342900">
-              <a:buAutoNum type="arabicPeriod"/>
-            </a:pPr>
-            <a:r>
-              <a:rPr/>
-              <a:t>Treatment effects are not significant (p = 0.091)</a:t>
-            </a:r>
-          </a:p>
-          <a:p>
-            <a:pPr lvl="0" indent="0" marL="0">
-              <a:buNone/>
-            </a:pPr>
-            <a:r>
-              <a:rPr/>
-              <a:t>In both methods, the key ecological finding is the strong spatial heterogeneity in algal cover that overrides the grazing effect of urchins at different densities.</a:t>
+              <a:t> (each patch received only one urchin-density treatment).</a:t>
             </a:r>
           </a:p>
         </p:txBody>
@@ -5243,41 +4017,2561 @@
             </a:pPr>
             <a:r>
               <a:rPr/>
-              <a:t>Plots</a:t>
+              <a:t>Part 1 · Setup and Data</a:t>
             </a:r>
           </a:p>
         </p:txBody>
       </p:sp>
-      <p:pic>
-        <p:nvPicPr>
-          <p:cNvPr descr="nested_anova_activity_files/figure-pptx/unnamed-chunk-1-1.png" id="0" name="Picture 1"/>
-          <p:cNvPicPr>
-            <a:picLocks noGrp="1" noChangeAspect="1"/>
-          </p:cNvPicPr>
-          <p:nvPr/>
-        </p:nvPicPr>
-        <p:blipFill>
-          <a:blip r:embed="rId2"/>
-          <a:stretch>
-            <a:fillRect/>
-          </a:stretch>
-        </p:blipFill>
-        <p:spPr bwMode="auto">
-          <a:xfrm>
-            <a:off x="1358900" y="609600"/>
-            <a:ext cx="6350000" cy="3911600"/>
-          </a:xfrm>
-          <a:prstGeom prst="rect">
-            <a:avLst/>
-          </a:prstGeom>
-          <a:noFill/>
-          <a:ln w="9525">
-            <a:noFill/>
-            <a:headEnd/>
-            <a:tailEnd/>
-          </a:ln>
-        </p:spPr>
-      </p:pic>
+      <p:sp>
+        <p:nvSpPr>
+          <p:cNvPr id="3" name="Content Placeholder 2"/>
+          <p:cNvSpPr>
+            <a:spLocks noGrp="1"/>
+          </p:cNvSpPr>
+          <p:nvPr>
+            <p:ph idx="1"/>
+          </p:nvPr>
+        </p:nvSpPr>
+        <p:spPr/>
+        <p:txBody>
+          <a:bodyPr/>
+          <a:lstStyle/>
+          <a:p>
+            <a:pPr lvl="0" indent="0" marL="0">
+              <a:buNone/>
+            </a:pPr>
+            <a:r>
+              <a:rPr b="1"/>
+              <a:t>▶ Run this in your Script:</a:t>
+            </a:r>
+          </a:p>
+          <a:p>
+            <a:pPr lvl="0" indent="0">
+              <a:buNone/>
+            </a:pPr>
+            <a:r>
+              <a:rPr>
+                <a:solidFill>
+                  <a:srgbClr val="4758AB"/>
+                </a:solidFill>
+                <a:latin typeface="Courier"/>
+              </a:rPr>
+              <a:t>library</a:t>
+            </a:r>
+            <a:r>
+              <a:rPr>
+                <a:solidFill>
+                  <a:srgbClr val="003B4F"/>
+                </a:solidFill>
+                <a:latin typeface="Courier"/>
+              </a:rPr>
+              <a:t>(dotwhisker)</a:t>
+            </a:r>
+            <a:br/>
+            <a:r>
+              <a:rPr>
+                <a:solidFill>
+                  <a:srgbClr val="4758AB"/>
+                </a:solidFill>
+                <a:latin typeface="Courier"/>
+              </a:rPr>
+              <a:t>library</a:t>
+            </a:r>
+            <a:r>
+              <a:rPr>
+                <a:solidFill>
+                  <a:srgbClr val="003B4F"/>
+                </a:solidFill>
+                <a:latin typeface="Courier"/>
+              </a:rPr>
+              <a:t>(janitor)</a:t>
+            </a:r>
+            <a:br/>
+            <a:r>
+              <a:rPr>
+                <a:solidFill>
+                  <a:srgbClr val="4758AB"/>
+                </a:solidFill>
+                <a:latin typeface="Courier"/>
+              </a:rPr>
+              <a:t>library</a:t>
+            </a:r>
+            <a:r>
+              <a:rPr>
+                <a:solidFill>
+                  <a:srgbClr val="003B4F"/>
+                </a:solidFill>
+                <a:latin typeface="Courier"/>
+              </a:rPr>
+              <a:t>(car)          </a:t>
+            </a:r>
+            <a:r>
+              <a:rPr>
+                <a:solidFill>
+                  <a:srgbClr val="5E5E5E"/>
+                </a:solidFill>
+                <a:latin typeface="Courier"/>
+              </a:rPr>
+              <a:t># For Levene's test and Type III SS</a:t>
+            </a:r>
+            <a:br/>
+            <a:r>
+              <a:rPr>
+                <a:solidFill>
+                  <a:srgbClr val="4758AB"/>
+                </a:solidFill>
+                <a:latin typeface="Courier"/>
+              </a:rPr>
+              <a:t>library</a:t>
+            </a:r>
+            <a:r>
+              <a:rPr>
+                <a:solidFill>
+                  <a:srgbClr val="003B4F"/>
+                </a:solidFill>
+                <a:latin typeface="Courier"/>
+              </a:rPr>
+              <a:t>(lme4)          </a:t>
+            </a:r>
+            <a:r>
+              <a:rPr>
+                <a:solidFill>
+                  <a:srgbClr val="5E5E5E"/>
+                </a:solidFill>
+                <a:latin typeface="Courier"/>
+              </a:rPr>
+              <a:t># For mixed-effects models</a:t>
+            </a:r>
+            <a:br/>
+            <a:r>
+              <a:rPr>
+                <a:solidFill>
+                  <a:srgbClr val="4758AB"/>
+                </a:solidFill>
+                <a:latin typeface="Courier"/>
+              </a:rPr>
+              <a:t>library</a:t>
+            </a:r>
+            <a:r>
+              <a:rPr>
+                <a:solidFill>
+                  <a:srgbClr val="003B4F"/>
+                </a:solidFill>
+                <a:latin typeface="Courier"/>
+              </a:rPr>
+              <a:t>(lmerTest)      </a:t>
+            </a:r>
+            <a:r>
+              <a:rPr>
+                <a:solidFill>
+                  <a:srgbClr val="5E5E5E"/>
+                </a:solidFill>
+                <a:latin typeface="Courier"/>
+              </a:rPr>
+              <a:t># For p-values in mixed models</a:t>
+            </a:r>
+            <a:br/>
+            <a:r>
+              <a:rPr>
+                <a:solidFill>
+                  <a:srgbClr val="4758AB"/>
+                </a:solidFill>
+                <a:latin typeface="Courier"/>
+              </a:rPr>
+              <a:t>library</a:t>
+            </a:r>
+            <a:r>
+              <a:rPr>
+                <a:solidFill>
+                  <a:srgbClr val="003B4F"/>
+                </a:solidFill>
+                <a:latin typeface="Courier"/>
+              </a:rPr>
+              <a:t>(emmeans)       </a:t>
+            </a:r>
+            <a:r>
+              <a:rPr>
+                <a:solidFill>
+                  <a:srgbClr val="5E5E5E"/>
+                </a:solidFill>
+                <a:latin typeface="Courier"/>
+              </a:rPr>
+              <a:t># For estimated marginal means</a:t>
+            </a:r>
+            <a:br/>
+            <a:r>
+              <a:rPr>
+                <a:solidFill>
+                  <a:srgbClr val="4758AB"/>
+                </a:solidFill>
+                <a:latin typeface="Courier"/>
+              </a:rPr>
+              <a:t>library</a:t>
+            </a:r>
+            <a:r>
+              <a:rPr>
+                <a:solidFill>
+                  <a:srgbClr val="003B4F"/>
+                </a:solidFill>
+                <a:latin typeface="Courier"/>
+              </a:rPr>
+              <a:t>(performance)   </a:t>
+            </a:r>
+            <a:r>
+              <a:rPr>
+                <a:solidFill>
+                  <a:srgbClr val="5E5E5E"/>
+                </a:solidFill>
+                <a:latin typeface="Courier"/>
+              </a:rPr>
+              <a:t># For model diagnostics</a:t>
+            </a:r>
+            <a:br/>
+            <a:r>
+              <a:rPr>
+                <a:solidFill>
+                  <a:srgbClr val="4758AB"/>
+                </a:solidFill>
+                <a:latin typeface="Courier"/>
+              </a:rPr>
+              <a:t>library</a:t>
+            </a:r>
+            <a:r>
+              <a:rPr>
+                <a:solidFill>
+                  <a:srgbClr val="003B4F"/>
+                </a:solidFill>
+                <a:latin typeface="Courier"/>
+              </a:rPr>
+              <a:t>(DHARMa)        </a:t>
+            </a:r>
+            <a:r>
+              <a:rPr>
+                <a:solidFill>
+                  <a:srgbClr val="5E5E5E"/>
+                </a:solidFill>
+                <a:latin typeface="Courier"/>
+              </a:rPr>
+              <a:t># For residual diagnostics</a:t>
+            </a:r>
+            <a:br/>
+            <a:r>
+              <a:rPr>
+                <a:solidFill>
+                  <a:srgbClr val="4758AB"/>
+                </a:solidFill>
+                <a:latin typeface="Courier"/>
+              </a:rPr>
+              <a:t>library</a:t>
+            </a:r>
+            <a:r>
+              <a:rPr>
+                <a:solidFill>
+                  <a:srgbClr val="003B4F"/>
+                </a:solidFill>
+                <a:latin typeface="Courier"/>
+              </a:rPr>
+              <a:t>(patchwork)</a:t>
+            </a:r>
+            <a:br/>
+            <a:r>
+              <a:rPr>
+                <a:solidFill>
+                  <a:srgbClr val="4758AB"/>
+                </a:solidFill>
+                <a:latin typeface="Courier"/>
+              </a:rPr>
+              <a:t>library</a:t>
+            </a:r>
+            <a:r>
+              <a:rPr>
+                <a:solidFill>
+                  <a:srgbClr val="003B4F"/>
+                </a:solidFill>
+                <a:latin typeface="Courier"/>
+              </a:rPr>
+              <a:t>(afex)</a:t>
+            </a:r>
+            <a:br/>
+            <a:r>
+              <a:rPr>
+                <a:solidFill>
+                  <a:srgbClr val="4758AB"/>
+                </a:solidFill>
+                <a:latin typeface="Courier"/>
+              </a:rPr>
+              <a:t>library</a:t>
+            </a:r>
+            <a:r>
+              <a:rPr>
+                <a:solidFill>
+                  <a:srgbClr val="003B4F"/>
+                </a:solidFill>
+                <a:latin typeface="Courier"/>
+              </a:rPr>
+              <a:t>(tidyverse)</a:t>
+            </a:r>
+            <a:br/>
+            <a:br/>
+            <a:r>
+              <a:rPr>
+                <a:solidFill>
+                  <a:srgbClr val="4758AB"/>
+                </a:solidFill>
+                <a:latin typeface="Courier"/>
+              </a:rPr>
+              <a:t>options</a:t>
+            </a:r>
+            <a:r>
+              <a:rPr>
+                <a:solidFill>
+                  <a:srgbClr val="003B4F"/>
+                </a:solidFill>
+                <a:latin typeface="Courier"/>
+              </a:rPr>
+              <a:t>(</a:t>
+            </a:r>
+            <a:r>
+              <a:rPr>
+                <a:solidFill>
+                  <a:srgbClr val="657422"/>
+                </a:solidFill>
+                <a:latin typeface="Courier"/>
+              </a:rPr>
+              <a:t>scipen =</a:t>
+            </a:r>
+            <a:r>
+              <a:rPr>
+                <a:solidFill>
+                  <a:srgbClr val="003B4F"/>
+                </a:solidFill>
+                <a:latin typeface="Courier"/>
+              </a:rPr>
+              <a:t> </a:t>
+            </a:r>
+            <a:r>
+              <a:rPr>
+                <a:solidFill>
+                  <a:srgbClr val="AD0000"/>
+                </a:solidFill>
+                <a:latin typeface="Courier"/>
+              </a:rPr>
+              <a:t>999</a:t>
+            </a:r>
+            <a:r>
+              <a:rPr>
+                <a:solidFill>
+                  <a:srgbClr val="003B4F"/>
+                </a:solidFill>
+                <a:latin typeface="Courier"/>
+              </a:rPr>
+              <a:t>)</a:t>
+            </a:r>
+            <a:br/>
+            <a:r>
+              <a:rPr>
+                <a:solidFill>
+                  <a:srgbClr val="4758AB"/>
+                </a:solidFill>
+                <a:latin typeface="Courier"/>
+              </a:rPr>
+              <a:t>options</a:t>
+            </a:r>
+            <a:r>
+              <a:rPr>
+                <a:solidFill>
+                  <a:srgbClr val="003B4F"/>
+                </a:solidFill>
+                <a:latin typeface="Courier"/>
+              </a:rPr>
+              <a:t>(</a:t>
+            </a:r>
+            <a:r>
+              <a:rPr>
+                <a:solidFill>
+                  <a:srgbClr val="657422"/>
+                </a:solidFill>
+                <a:latin typeface="Courier"/>
+              </a:rPr>
+              <a:t>contrasts =</a:t>
+            </a:r>
+            <a:r>
+              <a:rPr>
+                <a:solidFill>
+                  <a:srgbClr val="003B4F"/>
+                </a:solidFill>
+                <a:latin typeface="Courier"/>
+              </a:rPr>
+              <a:t> </a:t>
+            </a:r>
+            <a:r>
+              <a:rPr>
+                <a:solidFill>
+                  <a:srgbClr val="4758AB"/>
+                </a:solidFill>
+                <a:latin typeface="Courier"/>
+              </a:rPr>
+              <a:t>c</a:t>
+            </a:r>
+            <a:r>
+              <a:rPr>
+                <a:solidFill>
+                  <a:srgbClr val="003B4F"/>
+                </a:solidFill>
+                <a:latin typeface="Courier"/>
+              </a:rPr>
+              <a:t>(</a:t>
+            </a:r>
+            <a:r>
+              <a:rPr>
+                <a:solidFill>
+                  <a:srgbClr val="20794D"/>
+                </a:solidFill>
+                <a:latin typeface="Courier"/>
+              </a:rPr>
+              <a:t>"contr.treatment"</a:t>
+            </a:r>
+            <a:r>
+              <a:rPr>
+                <a:solidFill>
+                  <a:srgbClr val="003B4F"/>
+                </a:solidFill>
+                <a:latin typeface="Courier"/>
+              </a:rPr>
+              <a:t>, </a:t>
+            </a:r>
+            <a:r>
+              <a:rPr>
+                <a:solidFill>
+                  <a:srgbClr val="20794D"/>
+                </a:solidFill>
+                <a:latin typeface="Courier"/>
+              </a:rPr>
+              <a:t>"contr.poly"</a:t>
+            </a:r>
+            <a:r>
+              <a:rPr>
+                <a:solidFill>
+                  <a:srgbClr val="003B4F"/>
+                </a:solidFill>
+                <a:latin typeface="Courier"/>
+              </a:rPr>
+              <a:t>))</a:t>
+            </a:r>
+            <a:br/>
+            <a:br/>
+            <a:r>
+              <a:rPr>
+                <a:solidFill>
+                  <a:srgbClr val="003B4F"/>
+                </a:solidFill>
+                <a:latin typeface="Courier"/>
+              </a:rPr>
+              <a:t>u_df &lt;- </a:t>
+            </a:r>
+            <a:r>
+              <a:rPr>
+                <a:solidFill>
+                  <a:srgbClr val="4758AB"/>
+                </a:solidFill>
+                <a:latin typeface="Courier"/>
+              </a:rPr>
+              <a:t>read_csv</a:t>
+            </a:r>
+            <a:r>
+              <a:rPr>
+                <a:solidFill>
+                  <a:srgbClr val="003B4F"/>
+                </a:solidFill>
+                <a:latin typeface="Courier"/>
+              </a:rPr>
+              <a:t>(</a:t>
+            </a:r>
+            <a:r>
+              <a:rPr>
+                <a:solidFill>
+                  <a:srgbClr val="20794D"/>
+                </a:solidFill>
+                <a:latin typeface="Courier"/>
+              </a:rPr>
+              <a:t>"data/andrew.csv"</a:t>
+            </a:r>
+            <a:r>
+              <a:rPr>
+                <a:solidFill>
+                  <a:srgbClr val="003B4F"/>
+                </a:solidFill>
+                <a:latin typeface="Courier"/>
+              </a:rPr>
+              <a:t>) </a:t>
+            </a:r>
+            <a:r>
+              <a:rPr>
+                <a:solidFill>
+                  <a:srgbClr val="5E5E5E"/>
+                </a:solidFill>
+                <a:latin typeface="Courier"/>
+              </a:rPr>
+              <a:t>%&gt;%</a:t>
+            </a:r>
+            <a:r>
+              <a:rPr>
+                <a:solidFill>
+                  <a:srgbClr val="003B4F"/>
+                </a:solidFill>
+                <a:latin typeface="Courier"/>
+              </a:rPr>
+              <a:t> </a:t>
+            </a:r>
+            <a:r>
+              <a:rPr>
+                <a:solidFill>
+                  <a:srgbClr val="4758AB"/>
+                </a:solidFill>
+                <a:latin typeface="Courier"/>
+              </a:rPr>
+              <a:t>clean_names</a:t>
+            </a:r>
+            <a:r>
+              <a:rPr>
+                <a:solidFill>
+                  <a:srgbClr val="003B4F"/>
+                </a:solidFill>
+                <a:latin typeface="Courier"/>
+              </a:rPr>
+              <a:t>()</a:t>
+            </a:r>
+            <a:br/>
+            <a:br/>
+            <a:r>
+              <a:rPr>
+                <a:solidFill>
+                  <a:srgbClr val="003B4F"/>
+                </a:solidFill>
+                <a:latin typeface="Courier"/>
+              </a:rPr>
+              <a:t>u_df &lt;- u_df </a:t>
+            </a:r>
+            <a:r>
+              <a:rPr>
+                <a:solidFill>
+                  <a:srgbClr val="5E5E5E"/>
+                </a:solidFill>
+                <a:latin typeface="Courier"/>
+              </a:rPr>
+              <a:t>%&gt;%</a:t>
+            </a:r>
+            <a:br/>
+            <a:r>
+              <a:rPr>
+                <a:solidFill>
+                  <a:srgbClr val="003B4F"/>
+                </a:solidFill>
+                <a:latin typeface="Courier"/>
+              </a:rPr>
+              <a:t>  </a:t>
+            </a:r>
+            <a:r>
+              <a:rPr>
+                <a:solidFill>
+                  <a:srgbClr val="4758AB"/>
+                </a:solidFill>
+                <a:latin typeface="Courier"/>
+              </a:rPr>
+              <a:t>mutate</a:t>
+            </a:r>
+            <a:r>
+              <a:rPr>
+                <a:solidFill>
+                  <a:srgbClr val="003B4F"/>
+                </a:solidFill>
+                <a:latin typeface="Courier"/>
+              </a:rPr>
+              <a:t>(</a:t>
+            </a:r>
+            <a:r>
+              <a:rPr>
+                <a:solidFill>
+                  <a:srgbClr val="657422"/>
+                </a:solidFill>
+                <a:latin typeface="Courier"/>
+              </a:rPr>
+              <a:t>treat =</a:t>
+            </a:r>
+            <a:r>
+              <a:rPr>
+                <a:solidFill>
+                  <a:srgbClr val="003B4F"/>
+                </a:solidFill>
+                <a:latin typeface="Courier"/>
+              </a:rPr>
+              <a:t> </a:t>
+            </a:r>
+            <a:r>
+              <a:rPr>
+                <a:solidFill>
+                  <a:srgbClr val="4758AB"/>
+                </a:solidFill>
+                <a:latin typeface="Courier"/>
+              </a:rPr>
+              <a:t>case_when</a:t>
+            </a:r>
+            <a:r>
+              <a:rPr>
+                <a:solidFill>
+                  <a:srgbClr val="003B4F"/>
+                </a:solidFill>
+                <a:latin typeface="Courier"/>
+              </a:rPr>
+              <a:t>(</a:t>
+            </a:r>
+            <a:br/>
+            <a:r>
+              <a:rPr>
+                <a:solidFill>
+                  <a:srgbClr val="003B4F"/>
+                </a:solidFill>
+                <a:latin typeface="Courier"/>
+              </a:rPr>
+              <a:t>         treat </a:t>
+            </a:r>
+            <a:r>
+              <a:rPr>
+                <a:solidFill>
+                  <a:srgbClr val="5E5E5E"/>
+                </a:solidFill>
+                <a:latin typeface="Courier"/>
+              </a:rPr>
+              <a:t>==</a:t>
+            </a:r>
+            <a:r>
+              <a:rPr>
+                <a:solidFill>
+                  <a:srgbClr val="003B4F"/>
+                </a:solidFill>
+                <a:latin typeface="Courier"/>
+              </a:rPr>
+              <a:t> </a:t>
+            </a:r>
+            <a:r>
+              <a:rPr>
+                <a:solidFill>
+                  <a:srgbClr val="20794D"/>
+                </a:solidFill>
+                <a:latin typeface="Courier"/>
+              </a:rPr>
+              <a:t>"removal"</a:t>
+            </a:r>
+            <a:r>
+              <a:rPr>
+                <a:solidFill>
+                  <a:srgbClr val="003B4F"/>
+                </a:solidFill>
+                <a:latin typeface="Courier"/>
+              </a:rPr>
+              <a:t> </a:t>
+            </a:r>
+            <a:r>
+              <a:rPr>
+                <a:solidFill>
+                  <a:srgbClr val="5E5E5E"/>
+                </a:solidFill>
+                <a:latin typeface="Courier"/>
+              </a:rPr>
+              <a:t>~</a:t>
+            </a:r>
+            <a:r>
+              <a:rPr>
+                <a:solidFill>
+                  <a:srgbClr val="003B4F"/>
+                </a:solidFill>
+                <a:latin typeface="Courier"/>
+              </a:rPr>
+              <a:t> </a:t>
+            </a:r>
+            <a:r>
+              <a:rPr>
+                <a:solidFill>
+                  <a:srgbClr val="20794D"/>
+                </a:solidFill>
+                <a:latin typeface="Courier"/>
+              </a:rPr>
+              <a:t>"none"</a:t>
+            </a:r>
+            <a:r>
+              <a:rPr>
+                <a:solidFill>
+                  <a:srgbClr val="003B4F"/>
+                </a:solidFill>
+                <a:latin typeface="Courier"/>
+              </a:rPr>
+              <a:t>,</a:t>
+            </a:r>
+            <a:br/>
+            <a:r>
+              <a:rPr>
+                <a:solidFill>
+                  <a:srgbClr val="003B4F"/>
+                </a:solidFill>
+                <a:latin typeface="Courier"/>
+              </a:rPr>
+              <a:t>         treat </a:t>
+            </a:r>
+            <a:r>
+              <a:rPr>
+                <a:solidFill>
+                  <a:srgbClr val="5E5E5E"/>
+                </a:solidFill>
+                <a:latin typeface="Courier"/>
+              </a:rPr>
+              <a:t>==</a:t>
+            </a:r>
+            <a:r>
+              <a:rPr>
+                <a:solidFill>
+                  <a:srgbClr val="003B4F"/>
+                </a:solidFill>
+                <a:latin typeface="Courier"/>
+              </a:rPr>
+              <a:t> </a:t>
+            </a:r>
+            <a:r>
+              <a:rPr>
+                <a:solidFill>
+                  <a:srgbClr val="20794D"/>
+                </a:solidFill>
+                <a:latin typeface="Courier"/>
+              </a:rPr>
+              <a:t>"control"</a:t>
+            </a:r>
+            <a:r>
+              <a:rPr>
+                <a:solidFill>
+                  <a:srgbClr val="003B4F"/>
+                </a:solidFill>
+                <a:latin typeface="Courier"/>
+              </a:rPr>
+              <a:t> </a:t>
+            </a:r>
+            <a:r>
+              <a:rPr>
+                <a:solidFill>
+                  <a:srgbClr val="5E5E5E"/>
+                </a:solidFill>
+                <a:latin typeface="Courier"/>
+              </a:rPr>
+              <a:t>~</a:t>
+            </a:r>
+            <a:r>
+              <a:rPr>
+                <a:solidFill>
+                  <a:srgbClr val="003B4F"/>
+                </a:solidFill>
+                <a:latin typeface="Courier"/>
+              </a:rPr>
+              <a:t> </a:t>
+            </a:r>
+            <a:r>
+              <a:rPr>
+                <a:solidFill>
+                  <a:srgbClr val="20794D"/>
+                </a:solidFill>
+                <a:latin typeface="Courier"/>
+              </a:rPr>
+              <a:t>"high"</a:t>
+            </a:r>
+            <a:r>
+              <a:rPr>
+                <a:solidFill>
+                  <a:srgbClr val="003B4F"/>
+                </a:solidFill>
+                <a:latin typeface="Courier"/>
+              </a:rPr>
+              <a:t>,</a:t>
+            </a:r>
+            <a:br/>
+            <a:r>
+              <a:rPr>
+                <a:solidFill>
+                  <a:srgbClr val="003B4F"/>
+                </a:solidFill>
+                <a:latin typeface="Courier"/>
+              </a:rPr>
+              <a:t>         treat </a:t>
+            </a:r>
+            <a:r>
+              <a:rPr>
+                <a:solidFill>
+                  <a:srgbClr val="5E5E5E"/>
+                </a:solidFill>
+                <a:latin typeface="Courier"/>
+              </a:rPr>
+              <a:t>==</a:t>
+            </a:r>
+            <a:r>
+              <a:rPr>
+                <a:solidFill>
+                  <a:srgbClr val="003B4F"/>
+                </a:solidFill>
+                <a:latin typeface="Courier"/>
+              </a:rPr>
+              <a:t> </a:t>
+            </a:r>
+            <a:r>
+              <a:rPr>
+                <a:solidFill>
+                  <a:srgbClr val="20794D"/>
+                </a:solidFill>
+                <a:latin typeface="Courier"/>
+              </a:rPr>
+              <a:t>"dens_33"</a:t>
+            </a:r>
+            <a:r>
+              <a:rPr>
+                <a:solidFill>
+                  <a:srgbClr val="003B4F"/>
+                </a:solidFill>
+                <a:latin typeface="Courier"/>
+              </a:rPr>
+              <a:t> </a:t>
+            </a:r>
+            <a:r>
+              <a:rPr>
+                <a:solidFill>
+                  <a:srgbClr val="5E5E5E"/>
+                </a:solidFill>
+                <a:latin typeface="Courier"/>
+              </a:rPr>
+              <a:t>~</a:t>
+            </a:r>
+            <a:r>
+              <a:rPr>
+                <a:solidFill>
+                  <a:srgbClr val="003B4F"/>
+                </a:solidFill>
+                <a:latin typeface="Courier"/>
+              </a:rPr>
+              <a:t> </a:t>
+            </a:r>
+            <a:r>
+              <a:rPr>
+                <a:solidFill>
+                  <a:srgbClr val="20794D"/>
+                </a:solidFill>
+                <a:latin typeface="Courier"/>
+              </a:rPr>
+              <a:t>"low"</a:t>
+            </a:r>
+            <a:r>
+              <a:rPr>
+                <a:solidFill>
+                  <a:srgbClr val="003B4F"/>
+                </a:solidFill>
+                <a:latin typeface="Courier"/>
+              </a:rPr>
+              <a:t>,</a:t>
+            </a:r>
+            <a:br/>
+            <a:r>
+              <a:rPr>
+                <a:solidFill>
+                  <a:srgbClr val="003B4F"/>
+                </a:solidFill>
+                <a:latin typeface="Courier"/>
+              </a:rPr>
+              <a:t>         treat </a:t>
+            </a:r>
+            <a:r>
+              <a:rPr>
+                <a:solidFill>
+                  <a:srgbClr val="5E5E5E"/>
+                </a:solidFill>
+                <a:latin typeface="Courier"/>
+              </a:rPr>
+              <a:t>==</a:t>
+            </a:r>
+            <a:r>
+              <a:rPr>
+                <a:solidFill>
+                  <a:srgbClr val="003B4F"/>
+                </a:solidFill>
+                <a:latin typeface="Courier"/>
+              </a:rPr>
+              <a:t> </a:t>
+            </a:r>
+            <a:r>
+              <a:rPr>
+                <a:solidFill>
+                  <a:srgbClr val="20794D"/>
+                </a:solidFill>
+                <a:latin typeface="Courier"/>
+              </a:rPr>
+              <a:t>"dens_66"</a:t>
+            </a:r>
+            <a:r>
+              <a:rPr>
+                <a:solidFill>
+                  <a:srgbClr val="003B4F"/>
+                </a:solidFill>
+                <a:latin typeface="Courier"/>
+              </a:rPr>
+              <a:t> </a:t>
+            </a:r>
+            <a:r>
+              <a:rPr>
+                <a:solidFill>
+                  <a:srgbClr val="5E5E5E"/>
+                </a:solidFill>
+                <a:latin typeface="Courier"/>
+              </a:rPr>
+              <a:t>~</a:t>
+            </a:r>
+            <a:r>
+              <a:rPr>
+                <a:solidFill>
+                  <a:srgbClr val="003B4F"/>
+                </a:solidFill>
+                <a:latin typeface="Courier"/>
+              </a:rPr>
+              <a:t> </a:t>
+            </a:r>
+            <a:r>
+              <a:rPr>
+                <a:solidFill>
+                  <a:srgbClr val="20794D"/>
+                </a:solidFill>
+                <a:latin typeface="Courier"/>
+              </a:rPr>
+              <a:t>"medium"</a:t>
+            </a:r>
+            <a:r>
+              <a:rPr>
+                <a:solidFill>
+                  <a:srgbClr val="003B4F"/>
+                </a:solidFill>
+                <a:latin typeface="Courier"/>
+              </a:rPr>
+              <a:t>,</a:t>
+            </a:r>
+            <a:br/>
+            <a:r>
+              <a:rPr>
+                <a:solidFill>
+                  <a:srgbClr val="003B4F"/>
+                </a:solidFill>
+                <a:latin typeface="Courier"/>
+              </a:rPr>
+              <a:t>         </a:t>
+            </a:r>
+            <a:r>
+              <a:rPr>
+                <a:solidFill>
+                  <a:srgbClr val="8F5902"/>
+                </a:solidFill>
+                <a:latin typeface="Courier"/>
+              </a:rPr>
+              <a:t>TRUE</a:t>
+            </a:r>
+            <a:r>
+              <a:rPr>
+                <a:solidFill>
+                  <a:srgbClr val="003B4F"/>
+                </a:solidFill>
+                <a:latin typeface="Courier"/>
+              </a:rPr>
+              <a:t> </a:t>
+            </a:r>
+            <a:r>
+              <a:rPr>
+                <a:solidFill>
+                  <a:srgbClr val="5E5E5E"/>
+                </a:solidFill>
+                <a:latin typeface="Courier"/>
+              </a:rPr>
+              <a:t>~</a:t>
+            </a:r>
+            <a:r>
+              <a:rPr>
+                <a:solidFill>
+                  <a:srgbClr val="003B4F"/>
+                </a:solidFill>
+                <a:latin typeface="Courier"/>
+              </a:rPr>
+              <a:t> </a:t>
+            </a:r>
+            <a:r>
+              <a:rPr>
+                <a:solidFill>
+                  <a:srgbClr val="20794D"/>
+                </a:solidFill>
+                <a:latin typeface="Courier"/>
+              </a:rPr>
+              <a:t>"other"</a:t>
+            </a:r>
+            <a:r>
+              <a:rPr>
+                <a:solidFill>
+                  <a:srgbClr val="003B4F"/>
+                </a:solidFill>
+                <a:latin typeface="Courier"/>
+              </a:rPr>
+              <a:t>)) </a:t>
+            </a:r>
+            <a:r>
+              <a:rPr>
+                <a:solidFill>
+                  <a:srgbClr val="5E5E5E"/>
+                </a:solidFill>
+                <a:latin typeface="Courier"/>
+              </a:rPr>
+              <a:t>%&gt;%</a:t>
+            </a:r>
+            <a:br/>
+            <a:r>
+              <a:rPr>
+                <a:solidFill>
+                  <a:srgbClr val="003B4F"/>
+                </a:solidFill>
+                <a:latin typeface="Courier"/>
+              </a:rPr>
+              <a:t>  </a:t>
+            </a:r>
+            <a:r>
+              <a:rPr>
+                <a:solidFill>
+                  <a:srgbClr val="4758AB"/>
+                </a:solidFill>
+                <a:latin typeface="Courier"/>
+              </a:rPr>
+              <a:t>mutate</a:t>
+            </a:r>
+            <a:r>
+              <a:rPr>
+                <a:solidFill>
+                  <a:srgbClr val="003B4F"/>
+                </a:solidFill>
+                <a:latin typeface="Courier"/>
+              </a:rPr>
+              <a:t>(</a:t>
+            </a:r>
+            <a:r>
+              <a:rPr>
+                <a:solidFill>
+                  <a:srgbClr val="657422"/>
+                </a:solidFill>
+                <a:latin typeface="Courier"/>
+              </a:rPr>
+              <a:t>treat =</a:t>
+            </a:r>
+            <a:r>
+              <a:rPr>
+                <a:solidFill>
+                  <a:srgbClr val="003B4F"/>
+                </a:solidFill>
+                <a:latin typeface="Courier"/>
+              </a:rPr>
+              <a:t> </a:t>
+            </a:r>
+            <a:r>
+              <a:rPr>
+                <a:solidFill>
+                  <a:srgbClr val="4758AB"/>
+                </a:solidFill>
+                <a:latin typeface="Courier"/>
+              </a:rPr>
+              <a:t>factor</a:t>
+            </a:r>
+            <a:r>
+              <a:rPr>
+                <a:solidFill>
+                  <a:srgbClr val="003B4F"/>
+                </a:solidFill>
+                <a:latin typeface="Courier"/>
+              </a:rPr>
+              <a:t>(treat,</a:t>
+            </a:r>
+            <a:br/>
+            <a:r>
+              <a:rPr>
+                <a:solidFill>
+                  <a:srgbClr val="003B4F"/>
+                </a:solidFill>
+                <a:latin typeface="Courier"/>
+              </a:rPr>
+              <a:t>                        </a:t>
+            </a:r>
+            <a:r>
+              <a:rPr>
+                <a:solidFill>
+                  <a:srgbClr val="657422"/>
+                </a:solidFill>
+                <a:latin typeface="Courier"/>
+              </a:rPr>
+              <a:t>levels =</a:t>
+            </a:r>
+            <a:r>
+              <a:rPr>
+                <a:solidFill>
+                  <a:srgbClr val="003B4F"/>
+                </a:solidFill>
+                <a:latin typeface="Courier"/>
+              </a:rPr>
+              <a:t> </a:t>
+            </a:r>
+            <a:r>
+              <a:rPr>
+                <a:solidFill>
+                  <a:srgbClr val="4758AB"/>
+                </a:solidFill>
+                <a:latin typeface="Courier"/>
+              </a:rPr>
+              <a:t>c</a:t>
+            </a:r>
+            <a:r>
+              <a:rPr>
+                <a:solidFill>
+                  <a:srgbClr val="003B4F"/>
+                </a:solidFill>
+                <a:latin typeface="Courier"/>
+              </a:rPr>
+              <a:t>(</a:t>
+            </a:r>
+            <a:r>
+              <a:rPr>
+                <a:solidFill>
+                  <a:srgbClr val="20794D"/>
+                </a:solidFill>
+                <a:latin typeface="Courier"/>
+              </a:rPr>
+              <a:t>"none"</a:t>
+            </a:r>
+            <a:r>
+              <a:rPr>
+                <a:solidFill>
+                  <a:srgbClr val="003B4F"/>
+                </a:solidFill>
+                <a:latin typeface="Courier"/>
+              </a:rPr>
+              <a:t>, </a:t>
+            </a:r>
+            <a:r>
+              <a:rPr>
+                <a:solidFill>
+                  <a:srgbClr val="20794D"/>
+                </a:solidFill>
+                <a:latin typeface="Courier"/>
+              </a:rPr>
+              <a:t>"low"</a:t>
+            </a:r>
+            <a:r>
+              <a:rPr>
+                <a:solidFill>
+                  <a:srgbClr val="003B4F"/>
+                </a:solidFill>
+                <a:latin typeface="Courier"/>
+              </a:rPr>
+              <a:t>, </a:t>
+            </a:r>
+            <a:r>
+              <a:rPr>
+                <a:solidFill>
+                  <a:srgbClr val="20794D"/>
+                </a:solidFill>
+                <a:latin typeface="Courier"/>
+              </a:rPr>
+              <a:t>"medium"</a:t>
+            </a:r>
+            <a:r>
+              <a:rPr>
+                <a:solidFill>
+                  <a:srgbClr val="003B4F"/>
+                </a:solidFill>
+                <a:latin typeface="Courier"/>
+              </a:rPr>
+              <a:t>, </a:t>
+            </a:r>
+            <a:r>
+              <a:rPr>
+                <a:solidFill>
+                  <a:srgbClr val="20794D"/>
+                </a:solidFill>
+                <a:latin typeface="Courier"/>
+              </a:rPr>
+              <a:t>"high"</a:t>
+            </a:r>
+            <a:r>
+              <a:rPr>
+                <a:solidFill>
+                  <a:srgbClr val="003B4F"/>
+                </a:solidFill>
+                <a:latin typeface="Courier"/>
+              </a:rPr>
+              <a:t>),</a:t>
+            </a:r>
+            <a:br/>
+            <a:r>
+              <a:rPr>
+                <a:solidFill>
+                  <a:srgbClr val="003B4F"/>
+                </a:solidFill>
+                <a:latin typeface="Courier"/>
+              </a:rPr>
+              <a:t>                        </a:t>
+            </a:r>
+            <a:r>
+              <a:rPr>
+                <a:solidFill>
+                  <a:srgbClr val="657422"/>
+                </a:solidFill>
+                <a:latin typeface="Courier"/>
+              </a:rPr>
+              <a:t>labels =</a:t>
+            </a:r>
+            <a:r>
+              <a:rPr>
+                <a:solidFill>
+                  <a:srgbClr val="003B4F"/>
+                </a:solidFill>
+                <a:latin typeface="Courier"/>
+              </a:rPr>
+              <a:t> </a:t>
+            </a:r>
+            <a:r>
+              <a:rPr>
+                <a:solidFill>
+                  <a:srgbClr val="4758AB"/>
+                </a:solidFill>
+                <a:latin typeface="Courier"/>
+              </a:rPr>
+              <a:t>c</a:t>
+            </a:r>
+            <a:r>
+              <a:rPr>
+                <a:solidFill>
+                  <a:srgbClr val="003B4F"/>
+                </a:solidFill>
+                <a:latin typeface="Courier"/>
+              </a:rPr>
+              <a:t>(</a:t>
+            </a:r>
+            <a:r>
+              <a:rPr>
+                <a:solidFill>
+                  <a:srgbClr val="20794D"/>
+                </a:solidFill>
+                <a:latin typeface="Courier"/>
+              </a:rPr>
+              <a:t>"none"</a:t>
+            </a:r>
+            <a:r>
+              <a:rPr>
+                <a:solidFill>
+                  <a:srgbClr val="003B4F"/>
+                </a:solidFill>
+                <a:latin typeface="Courier"/>
+              </a:rPr>
+              <a:t>, </a:t>
+            </a:r>
+            <a:r>
+              <a:rPr>
+                <a:solidFill>
+                  <a:srgbClr val="20794D"/>
+                </a:solidFill>
+                <a:latin typeface="Courier"/>
+              </a:rPr>
+              <a:t>"low"</a:t>
+            </a:r>
+            <a:r>
+              <a:rPr>
+                <a:solidFill>
+                  <a:srgbClr val="003B4F"/>
+                </a:solidFill>
+                <a:latin typeface="Courier"/>
+              </a:rPr>
+              <a:t>, </a:t>
+            </a:r>
+            <a:r>
+              <a:rPr>
+                <a:solidFill>
+                  <a:srgbClr val="20794D"/>
+                </a:solidFill>
+                <a:latin typeface="Courier"/>
+              </a:rPr>
+              <a:t>"medium"</a:t>
+            </a:r>
+            <a:r>
+              <a:rPr>
+                <a:solidFill>
+                  <a:srgbClr val="003B4F"/>
+                </a:solidFill>
+                <a:latin typeface="Courier"/>
+              </a:rPr>
+              <a:t>, </a:t>
+            </a:r>
+            <a:r>
+              <a:rPr>
+                <a:solidFill>
+                  <a:srgbClr val="20794D"/>
+                </a:solidFill>
+                <a:latin typeface="Courier"/>
+              </a:rPr>
+              <a:t>"high"</a:t>
+            </a:r>
+            <a:r>
+              <a:rPr>
+                <a:solidFill>
+                  <a:srgbClr val="003B4F"/>
+                </a:solidFill>
+                <a:latin typeface="Courier"/>
+              </a:rPr>
+              <a:t>)),</a:t>
+            </a:r>
+            <a:br/>
+            <a:r>
+              <a:rPr>
+                <a:solidFill>
+                  <a:srgbClr val="003B4F"/>
+                </a:solidFill>
+                <a:latin typeface="Courier"/>
+              </a:rPr>
+              <a:t>         </a:t>
+            </a:r>
+            <a:r>
+              <a:rPr>
+                <a:solidFill>
+                  <a:srgbClr val="657422"/>
+                </a:solidFill>
+                <a:latin typeface="Courier"/>
+              </a:rPr>
+              <a:t>patch =</a:t>
+            </a:r>
+            <a:r>
+              <a:rPr>
+                <a:solidFill>
+                  <a:srgbClr val="003B4F"/>
+                </a:solidFill>
+                <a:latin typeface="Courier"/>
+              </a:rPr>
+              <a:t> </a:t>
+            </a:r>
+            <a:r>
+              <a:rPr>
+                <a:solidFill>
+                  <a:srgbClr val="4758AB"/>
+                </a:solidFill>
+                <a:latin typeface="Courier"/>
+              </a:rPr>
+              <a:t>as_factor</a:t>
+            </a:r>
+            <a:r>
+              <a:rPr>
+                <a:solidFill>
+                  <a:srgbClr val="003B4F"/>
+                </a:solidFill>
+                <a:latin typeface="Courier"/>
+              </a:rPr>
+              <a:t>(patch))</a:t>
+            </a:r>
+            <a:br/>
+            <a:br/>
+            <a:r>
+              <a:rPr>
+                <a:solidFill>
+                  <a:srgbClr val="4758AB"/>
+                </a:solidFill>
+                <a:latin typeface="Courier"/>
+              </a:rPr>
+              <a:t>head</a:t>
+            </a:r>
+            <a:r>
+              <a:rPr>
+                <a:solidFill>
+                  <a:srgbClr val="003B4F"/>
+                </a:solidFill>
+                <a:latin typeface="Courier"/>
+              </a:rPr>
+              <a:t>(u_df)</a:t>
+            </a:r>
+            <a:br/>
+            <a:r>
+              <a:rPr>
+                <a:solidFill>
+                  <a:srgbClr val="4758AB"/>
+                </a:solidFill>
+                <a:latin typeface="Courier"/>
+              </a:rPr>
+              <a:t>levels</a:t>
+            </a:r>
+            <a:r>
+              <a:rPr>
+                <a:solidFill>
+                  <a:srgbClr val="003B4F"/>
+                </a:solidFill>
+                <a:latin typeface="Courier"/>
+              </a:rPr>
+              <a:t>(u_df</a:t>
+            </a:r>
+            <a:r>
+              <a:rPr>
+                <a:solidFill>
+                  <a:srgbClr val="5E5E5E"/>
+                </a:solidFill>
+                <a:latin typeface="Courier"/>
+              </a:rPr>
+              <a:t>$</a:t>
+            </a:r>
+            <a:r>
+              <a:rPr>
+                <a:solidFill>
+                  <a:srgbClr val="003B4F"/>
+                </a:solidFill>
+                <a:latin typeface="Courier"/>
+              </a:rPr>
+              <a:t>treat)</a:t>
+            </a:r>
+          </a:p>
+          <a:p>
+            <a:pPr lvl="0" indent="0" marL="0">
+              <a:buNone/>
+            </a:pPr>
+            <a:r>
+              <a:rPr>
+                <a:latin typeface="Courier"/>
+              </a:rPr>
+              <a:t>u_df</a:t>
+            </a:r>
+            <a:r>
+              <a:rPr/>
+              <a:t> contains: </a:t>
+            </a:r>
+            <a:r>
+              <a:rPr>
+                <a:latin typeface="Courier"/>
+              </a:rPr>
+              <a:t>patch</a:t>
+            </a:r>
+            <a:r>
+              <a:rPr/>
+              <a:t> (random patches 1–16 where treatments were applied), </a:t>
+            </a:r>
+            <a:r>
+              <a:rPr>
+                <a:latin typeface="Courier"/>
+              </a:rPr>
+              <a:t>treat</a:t>
+            </a:r>
+            <a:r>
+              <a:rPr/>
+              <a:t> (urchin density treatment — none, low, medium, high), </a:t>
+            </a:r>
+            <a:r>
+              <a:rPr>
+                <a:latin typeface="Courier"/>
+              </a:rPr>
+              <a:t>quad</a:t>
+            </a:r>
+            <a:r>
+              <a:rPr/>
+              <a:t> (replicate quadrats within each patch:treatment combination), </a:t>
+            </a:r>
+            <a:r>
+              <a:rPr>
+                <a:latin typeface="Courier"/>
+              </a:rPr>
+              <a:t>algae</a:t>
+            </a:r>
+            <a:r>
+              <a:rPr/>
+              <a:t> (percentage cover of filamentous algae — the response variable).</a:t>
+            </a:r>
+          </a:p>
+          <a:p>
+            <a:pPr lvl="0" indent="0" marL="0">
+              <a:buNone/>
+            </a:pPr>
+            <a:r>
+              <a:rPr b="1"/>
+              <a:t>▶ Run this</a:t>
+            </a:r>
+            <a:r>
+              <a:rPr/>
+              <a:t> — summary statistics and a first plot:</a:t>
+            </a:r>
+          </a:p>
+          <a:p>
+            <a:pPr lvl="0" indent="0">
+              <a:buNone/>
+            </a:pPr>
+            <a:r>
+              <a:rPr>
+                <a:solidFill>
+                  <a:srgbClr val="003B4F"/>
+                </a:solidFill>
+                <a:latin typeface="Courier"/>
+              </a:rPr>
+              <a:t>summary_stats &lt;- u_df </a:t>
+            </a:r>
+            <a:r>
+              <a:rPr>
+                <a:solidFill>
+                  <a:srgbClr val="5E5E5E"/>
+                </a:solidFill>
+                <a:latin typeface="Courier"/>
+              </a:rPr>
+              <a:t>%&gt;%</a:t>
+            </a:r>
+            <a:br/>
+            <a:r>
+              <a:rPr>
+                <a:solidFill>
+                  <a:srgbClr val="003B4F"/>
+                </a:solidFill>
+                <a:latin typeface="Courier"/>
+              </a:rPr>
+              <a:t>  </a:t>
+            </a:r>
+            <a:r>
+              <a:rPr>
+                <a:solidFill>
+                  <a:srgbClr val="4758AB"/>
+                </a:solidFill>
+                <a:latin typeface="Courier"/>
+              </a:rPr>
+              <a:t>group_by</a:t>
+            </a:r>
+            <a:r>
+              <a:rPr>
+                <a:solidFill>
+                  <a:srgbClr val="003B4F"/>
+                </a:solidFill>
+                <a:latin typeface="Courier"/>
+              </a:rPr>
+              <a:t>(treat) </a:t>
+            </a:r>
+            <a:r>
+              <a:rPr>
+                <a:solidFill>
+                  <a:srgbClr val="5E5E5E"/>
+                </a:solidFill>
+                <a:latin typeface="Courier"/>
+              </a:rPr>
+              <a:t>%&gt;%</a:t>
+            </a:r>
+            <a:br/>
+            <a:r>
+              <a:rPr>
+                <a:solidFill>
+                  <a:srgbClr val="003B4F"/>
+                </a:solidFill>
+                <a:latin typeface="Courier"/>
+              </a:rPr>
+              <a:t>  </a:t>
+            </a:r>
+            <a:r>
+              <a:rPr>
+                <a:solidFill>
+                  <a:srgbClr val="4758AB"/>
+                </a:solidFill>
+                <a:latin typeface="Courier"/>
+              </a:rPr>
+              <a:t>summarise</a:t>
+            </a:r>
+            <a:r>
+              <a:rPr>
+                <a:solidFill>
+                  <a:srgbClr val="003B4F"/>
+                </a:solidFill>
+                <a:latin typeface="Courier"/>
+              </a:rPr>
+              <a:t>(</a:t>
+            </a:r>
+            <a:br/>
+            <a:r>
+              <a:rPr>
+                <a:solidFill>
+                  <a:srgbClr val="003B4F"/>
+                </a:solidFill>
+                <a:latin typeface="Courier"/>
+              </a:rPr>
+              <a:t>    </a:t>
+            </a:r>
+            <a:r>
+              <a:rPr>
+                <a:solidFill>
+                  <a:srgbClr val="657422"/>
+                </a:solidFill>
+                <a:latin typeface="Courier"/>
+              </a:rPr>
+              <a:t>n =</a:t>
+            </a:r>
+            <a:r>
+              <a:rPr>
+                <a:solidFill>
+                  <a:srgbClr val="003B4F"/>
+                </a:solidFill>
+                <a:latin typeface="Courier"/>
+              </a:rPr>
+              <a:t> </a:t>
+            </a:r>
+            <a:r>
+              <a:rPr>
+                <a:solidFill>
+                  <a:srgbClr val="4758AB"/>
+                </a:solidFill>
+                <a:latin typeface="Courier"/>
+              </a:rPr>
+              <a:t>sum</a:t>
+            </a:r>
+            <a:r>
+              <a:rPr>
+                <a:solidFill>
+                  <a:srgbClr val="003B4F"/>
+                </a:solidFill>
+                <a:latin typeface="Courier"/>
+              </a:rPr>
+              <a:t>(</a:t>
+            </a:r>
+            <a:r>
+              <a:rPr>
+                <a:solidFill>
+                  <a:srgbClr val="5E5E5E"/>
+                </a:solidFill>
+                <a:latin typeface="Courier"/>
+              </a:rPr>
+              <a:t>!</a:t>
+            </a:r>
+            <a:r>
+              <a:rPr>
+                <a:solidFill>
+                  <a:srgbClr val="4758AB"/>
+                </a:solidFill>
+                <a:latin typeface="Courier"/>
+              </a:rPr>
+              <a:t>is.na</a:t>
+            </a:r>
+            <a:r>
+              <a:rPr>
+                <a:solidFill>
+                  <a:srgbClr val="003B4F"/>
+                </a:solidFill>
+                <a:latin typeface="Courier"/>
+              </a:rPr>
+              <a:t>(algae)),</a:t>
+            </a:r>
+            <a:br/>
+            <a:r>
+              <a:rPr>
+                <a:solidFill>
+                  <a:srgbClr val="003B4F"/>
+                </a:solidFill>
+                <a:latin typeface="Courier"/>
+              </a:rPr>
+              <a:t>    </a:t>
+            </a:r>
+            <a:r>
+              <a:rPr>
+                <a:solidFill>
+                  <a:srgbClr val="657422"/>
+                </a:solidFill>
+                <a:latin typeface="Courier"/>
+              </a:rPr>
+              <a:t>mean =</a:t>
+            </a:r>
+            <a:r>
+              <a:rPr>
+                <a:solidFill>
+                  <a:srgbClr val="003B4F"/>
+                </a:solidFill>
+                <a:latin typeface="Courier"/>
+              </a:rPr>
+              <a:t> </a:t>
+            </a:r>
+            <a:r>
+              <a:rPr>
+                <a:solidFill>
+                  <a:srgbClr val="4758AB"/>
+                </a:solidFill>
+                <a:latin typeface="Courier"/>
+              </a:rPr>
+              <a:t>mean</a:t>
+            </a:r>
+            <a:r>
+              <a:rPr>
+                <a:solidFill>
+                  <a:srgbClr val="003B4F"/>
+                </a:solidFill>
+                <a:latin typeface="Courier"/>
+              </a:rPr>
+              <a:t>(algae, </a:t>
+            </a:r>
+            <a:r>
+              <a:rPr>
+                <a:solidFill>
+                  <a:srgbClr val="657422"/>
+                </a:solidFill>
+                <a:latin typeface="Courier"/>
+              </a:rPr>
+              <a:t>na.rm =</a:t>
+            </a:r>
+            <a:r>
+              <a:rPr>
+                <a:solidFill>
+                  <a:srgbClr val="003B4F"/>
+                </a:solidFill>
+                <a:latin typeface="Courier"/>
+              </a:rPr>
+              <a:t> </a:t>
+            </a:r>
+            <a:r>
+              <a:rPr>
+                <a:solidFill>
+                  <a:srgbClr val="8F5902"/>
+                </a:solidFill>
+                <a:latin typeface="Courier"/>
+              </a:rPr>
+              <a:t>TRUE</a:t>
+            </a:r>
+            <a:r>
+              <a:rPr>
+                <a:solidFill>
+                  <a:srgbClr val="003B4F"/>
+                </a:solidFill>
+                <a:latin typeface="Courier"/>
+              </a:rPr>
+              <a:t>),</a:t>
+            </a:r>
+            <a:br/>
+            <a:r>
+              <a:rPr>
+                <a:solidFill>
+                  <a:srgbClr val="003B4F"/>
+                </a:solidFill>
+                <a:latin typeface="Courier"/>
+              </a:rPr>
+              <a:t>    </a:t>
+            </a:r>
+            <a:r>
+              <a:rPr>
+                <a:solidFill>
+                  <a:srgbClr val="657422"/>
+                </a:solidFill>
+                <a:latin typeface="Courier"/>
+              </a:rPr>
+              <a:t>sd =</a:t>
+            </a:r>
+            <a:r>
+              <a:rPr>
+                <a:solidFill>
+                  <a:srgbClr val="003B4F"/>
+                </a:solidFill>
+                <a:latin typeface="Courier"/>
+              </a:rPr>
+              <a:t> </a:t>
+            </a:r>
+            <a:r>
+              <a:rPr>
+                <a:solidFill>
+                  <a:srgbClr val="4758AB"/>
+                </a:solidFill>
+                <a:latin typeface="Courier"/>
+              </a:rPr>
+              <a:t>sd</a:t>
+            </a:r>
+            <a:r>
+              <a:rPr>
+                <a:solidFill>
+                  <a:srgbClr val="003B4F"/>
+                </a:solidFill>
+                <a:latin typeface="Courier"/>
+              </a:rPr>
+              <a:t>(algae, </a:t>
+            </a:r>
+            <a:r>
+              <a:rPr>
+                <a:solidFill>
+                  <a:srgbClr val="657422"/>
+                </a:solidFill>
+                <a:latin typeface="Courier"/>
+              </a:rPr>
+              <a:t>na.rm =</a:t>
+            </a:r>
+            <a:r>
+              <a:rPr>
+                <a:solidFill>
+                  <a:srgbClr val="003B4F"/>
+                </a:solidFill>
+                <a:latin typeface="Courier"/>
+              </a:rPr>
+              <a:t> </a:t>
+            </a:r>
+            <a:r>
+              <a:rPr>
+                <a:solidFill>
+                  <a:srgbClr val="8F5902"/>
+                </a:solidFill>
+                <a:latin typeface="Courier"/>
+              </a:rPr>
+              <a:t>TRUE</a:t>
+            </a:r>
+            <a:r>
+              <a:rPr>
+                <a:solidFill>
+                  <a:srgbClr val="003B4F"/>
+                </a:solidFill>
+                <a:latin typeface="Courier"/>
+              </a:rPr>
+              <a:t>),</a:t>
+            </a:r>
+            <a:br/>
+            <a:r>
+              <a:rPr>
+                <a:solidFill>
+                  <a:srgbClr val="003B4F"/>
+                </a:solidFill>
+                <a:latin typeface="Courier"/>
+              </a:rPr>
+              <a:t>    </a:t>
+            </a:r>
+            <a:r>
+              <a:rPr>
+                <a:solidFill>
+                  <a:srgbClr val="657422"/>
+                </a:solidFill>
+                <a:latin typeface="Courier"/>
+              </a:rPr>
+              <a:t>se =</a:t>
+            </a:r>
+            <a:r>
+              <a:rPr>
+                <a:solidFill>
+                  <a:srgbClr val="003B4F"/>
+                </a:solidFill>
+                <a:latin typeface="Courier"/>
+              </a:rPr>
+              <a:t> sd </a:t>
+            </a:r>
+            <a:r>
+              <a:rPr>
+                <a:solidFill>
+                  <a:srgbClr val="5E5E5E"/>
+                </a:solidFill>
+                <a:latin typeface="Courier"/>
+              </a:rPr>
+              <a:t>/</a:t>
+            </a:r>
+            <a:r>
+              <a:rPr>
+                <a:solidFill>
+                  <a:srgbClr val="003B4F"/>
+                </a:solidFill>
+                <a:latin typeface="Courier"/>
+              </a:rPr>
+              <a:t> </a:t>
+            </a:r>
+            <a:r>
+              <a:rPr>
+                <a:solidFill>
+                  <a:srgbClr val="4758AB"/>
+                </a:solidFill>
+                <a:latin typeface="Courier"/>
+              </a:rPr>
+              <a:t>sqrt</a:t>
+            </a:r>
+            <a:r>
+              <a:rPr>
+                <a:solidFill>
+                  <a:srgbClr val="003B4F"/>
+                </a:solidFill>
+                <a:latin typeface="Courier"/>
+              </a:rPr>
+              <a:t>(n),</a:t>
+            </a:r>
+            <a:br/>
+            <a:r>
+              <a:rPr>
+                <a:solidFill>
+                  <a:srgbClr val="003B4F"/>
+                </a:solidFill>
+                <a:latin typeface="Courier"/>
+              </a:rPr>
+              <a:t>    </a:t>
+            </a:r>
+            <a:r>
+              <a:rPr>
+                <a:solidFill>
+                  <a:srgbClr val="657422"/>
+                </a:solidFill>
+                <a:latin typeface="Courier"/>
+              </a:rPr>
+              <a:t>min =</a:t>
+            </a:r>
+            <a:r>
+              <a:rPr>
+                <a:solidFill>
+                  <a:srgbClr val="003B4F"/>
+                </a:solidFill>
+                <a:latin typeface="Courier"/>
+              </a:rPr>
+              <a:t> </a:t>
+            </a:r>
+            <a:r>
+              <a:rPr>
+                <a:solidFill>
+                  <a:srgbClr val="4758AB"/>
+                </a:solidFill>
+                <a:latin typeface="Courier"/>
+              </a:rPr>
+              <a:t>min</a:t>
+            </a:r>
+            <a:r>
+              <a:rPr>
+                <a:solidFill>
+                  <a:srgbClr val="003B4F"/>
+                </a:solidFill>
+                <a:latin typeface="Courier"/>
+              </a:rPr>
+              <a:t>(algae, </a:t>
+            </a:r>
+            <a:r>
+              <a:rPr>
+                <a:solidFill>
+                  <a:srgbClr val="657422"/>
+                </a:solidFill>
+                <a:latin typeface="Courier"/>
+              </a:rPr>
+              <a:t>na.rm =</a:t>
+            </a:r>
+            <a:r>
+              <a:rPr>
+                <a:solidFill>
+                  <a:srgbClr val="003B4F"/>
+                </a:solidFill>
+                <a:latin typeface="Courier"/>
+              </a:rPr>
+              <a:t> </a:t>
+            </a:r>
+            <a:r>
+              <a:rPr>
+                <a:solidFill>
+                  <a:srgbClr val="8F5902"/>
+                </a:solidFill>
+                <a:latin typeface="Courier"/>
+              </a:rPr>
+              <a:t>TRUE</a:t>
+            </a:r>
+            <a:r>
+              <a:rPr>
+                <a:solidFill>
+                  <a:srgbClr val="003B4F"/>
+                </a:solidFill>
+                <a:latin typeface="Courier"/>
+              </a:rPr>
+              <a:t>),</a:t>
+            </a:r>
+            <a:br/>
+            <a:r>
+              <a:rPr>
+                <a:solidFill>
+                  <a:srgbClr val="003B4F"/>
+                </a:solidFill>
+                <a:latin typeface="Courier"/>
+              </a:rPr>
+              <a:t>    </a:t>
+            </a:r>
+            <a:r>
+              <a:rPr>
+                <a:solidFill>
+                  <a:srgbClr val="657422"/>
+                </a:solidFill>
+                <a:latin typeface="Courier"/>
+              </a:rPr>
+              <a:t>max =</a:t>
+            </a:r>
+            <a:r>
+              <a:rPr>
+                <a:solidFill>
+                  <a:srgbClr val="003B4F"/>
+                </a:solidFill>
+                <a:latin typeface="Courier"/>
+              </a:rPr>
+              <a:t> </a:t>
+            </a:r>
+            <a:r>
+              <a:rPr>
+                <a:solidFill>
+                  <a:srgbClr val="4758AB"/>
+                </a:solidFill>
+                <a:latin typeface="Courier"/>
+              </a:rPr>
+              <a:t>max</a:t>
+            </a:r>
+            <a:r>
+              <a:rPr>
+                <a:solidFill>
+                  <a:srgbClr val="003B4F"/>
+                </a:solidFill>
+                <a:latin typeface="Courier"/>
+              </a:rPr>
+              <a:t>(algae, </a:t>
+            </a:r>
+            <a:r>
+              <a:rPr>
+                <a:solidFill>
+                  <a:srgbClr val="657422"/>
+                </a:solidFill>
+                <a:latin typeface="Courier"/>
+              </a:rPr>
+              <a:t>na.rm =</a:t>
+            </a:r>
+            <a:r>
+              <a:rPr>
+                <a:solidFill>
+                  <a:srgbClr val="003B4F"/>
+                </a:solidFill>
+                <a:latin typeface="Courier"/>
+              </a:rPr>
+              <a:t> </a:t>
+            </a:r>
+            <a:r>
+              <a:rPr>
+                <a:solidFill>
+                  <a:srgbClr val="8F5902"/>
+                </a:solidFill>
+                <a:latin typeface="Courier"/>
+              </a:rPr>
+              <a:t>TRUE</a:t>
+            </a:r>
+            <a:r>
+              <a:rPr>
+                <a:solidFill>
+                  <a:srgbClr val="003B4F"/>
+                </a:solidFill>
+                <a:latin typeface="Courier"/>
+              </a:rPr>
+              <a:t>),</a:t>
+            </a:r>
+            <a:br/>
+            <a:r>
+              <a:rPr>
+                <a:solidFill>
+                  <a:srgbClr val="003B4F"/>
+                </a:solidFill>
+                <a:latin typeface="Courier"/>
+              </a:rPr>
+              <a:t>    </a:t>
+            </a:r>
+            <a:r>
+              <a:rPr>
+                <a:solidFill>
+                  <a:srgbClr val="657422"/>
+                </a:solidFill>
+                <a:latin typeface="Courier"/>
+              </a:rPr>
+              <a:t>.groups =</a:t>
+            </a:r>
+            <a:r>
+              <a:rPr>
+                <a:solidFill>
+                  <a:srgbClr val="003B4F"/>
+                </a:solidFill>
+                <a:latin typeface="Courier"/>
+              </a:rPr>
+              <a:t> </a:t>
+            </a:r>
+            <a:r>
+              <a:rPr>
+                <a:solidFill>
+                  <a:srgbClr val="20794D"/>
+                </a:solidFill>
+                <a:latin typeface="Courier"/>
+              </a:rPr>
+              <a:t>'drop'</a:t>
+            </a:r>
+            <a:br/>
+            <a:r>
+              <a:rPr>
+                <a:solidFill>
+                  <a:srgbClr val="003B4F"/>
+                </a:solidFill>
+                <a:latin typeface="Courier"/>
+              </a:rPr>
+              <a:t>  )</a:t>
+            </a:r>
+            <a:br/>
+            <a:r>
+              <a:rPr>
+                <a:solidFill>
+                  <a:srgbClr val="003B4F"/>
+                </a:solidFill>
+                <a:latin typeface="Courier"/>
+              </a:rPr>
+              <a:t>summary_stats</a:t>
+            </a:r>
+            <a:br/>
+            <a:br/>
+            <a:r>
+              <a:rPr>
+                <a:solidFill>
+                  <a:srgbClr val="003B4F"/>
+                </a:solidFill>
+                <a:latin typeface="Courier"/>
+              </a:rPr>
+              <a:t>dodge_position &lt;- </a:t>
+            </a:r>
+            <a:r>
+              <a:rPr>
+                <a:solidFill>
+                  <a:srgbClr val="4758AB"/>
+                </a:solidFill>
+                <a:latin typeface="Courier"/>
+              </a:rPr>
+              <a:t>position_dodge</a:t>
+            </a:r>
+            <a:r>
+              <a:rPr>
+                <a:solidFill>
+                  <a:srgbClr val="003B4F"/>
+                </a:solidFill>
+                <a:latin typeface="Courier"/>
+              </a:rPr>
+              <a:t>(</a:t>
+            </a:r>
+            <a:r>
+              <a:rPr>
+                <a:solidFill>
+                  <a:srgbClr val="657422"/>
+                </a:solidFill>
+                <a:latin typeface="Courier"/>
+              </a:rPr>
+              <a:t>width =</a:t>
+            </a:r>
+            <a:r>
+              <a:rPr>
+                <a:solidFill>
+                  <a:srgbClr val="003B4F"/>
+                </a:solidFill>
+                <a:latin typeface="Courier"/>
+              </a:rPr>
+              <a:t> </a:t>
+            </a:r>
+            <a:r>
+              <a:rPr>
+                <a:solidFill>
+                  <a:srgbClr val="AD0000"/>
+                </a:solidFill>
+                <a:latin typeface="Courier"/>
+              </a:rPr>
+              <a:t>0.3</a:t>
+            </a:r>
+            <a:r>
+              <a:rPr>
+                <a:solidFill>
+                  <a:srgbClr val="003B4F"/>
+                </a:solidFill>
+                <a:latin typeface="Courier"/>
+              </a:rPr>
+              <a:t>)</a:t>
+            </a:r>
+            <a:br/>
+            <a:br/>
+            <a:r>
+              <a:rPr>
+                <a:solidFill>
+                  <a:srgbClr val="003B4F"/>
+                </a:solidFill>
+                <a:latin typeface="Courier"/>
+              </a:rPr>
+              <a:t>u_df </a:t>
+            </a:r>
+            <a:r>
+              <a:rPr>
+                <a:solidFill>
+                  <a:srgbClr val="5E5E5E"/>
+                </a:solidFill>
+                <a:latin typeface="Courier"/>
+              </a:rPr>
+              <a:t>%&gt;%</a:t>
+            </a:r>
+            <a:br/>
+            <a:r>
+              <a:rPr>
+                <a:solidFill>
+                  <a:srgbClr val="003B4F"/>
+                </a:solidFill>
+                <a:latin typeface="Courier"/>
+              </a:rPr>
+              <a:t>  </a:t>
+            </a:r>
+            <a:r>
+              <a:rPr>
+                <a:solidFill>
+                  <a:srgbClr val="4758AB"/>
+                </a:solidFill>
+                <a:latin typeface="Courier"/>
+              </a:rPr>
+              <a:t>ggplot</a:t>
+            </a:r>
+            <a:r>
+              <a:rPr>
+                <a:solidFill>
+                  <a:srgbClr val="003B4F"/>
+                </a:solidFill>
+                <a:latin typeface="Courier"/>
+              </a:rPr>
+              <a:t>(</a:t>
+            </a:r>
+            <a:r>
+              <a:rPr>
+                <a:solidFill>
+                  <a:srgbClr val="4758AB"/>
+                </a:solidFill>
+                <a:latin typeface="Courier"/>
+              </a:rPr>
+              <a:t>aes</a:t>
+            </a:r>
+            <a:r>
+              <a:rPr>
+                <a:solidFill>
+                  <a:srgbClr val="003B4F"/>
+                </a:solidFill>
+                <a:latin typeface="Courier"/>
+              </a:rPr>
+              <a:t>(treat, algae, </a:t>
+            </a:r>
+            <a:r>
+              <a:rPr>
+                <a:solidFill>
+                  <a:srgbClr val="657422"/>
+                </a:solidFill>
+                <a:latin typeface="Courier"/>
+              </a:rPr>
+              <a:t>color =</a:t>
+            </a:r>
+            <a:r>
+              <a:rPr>
+                <a:solidFill>
+                  <a:srgbClr val="003B4F"/>
+                </a:solidFill>
+                <a:latin typeface="Courier"/>
+              </a:rPr>
+              <a:t> patch)) </a:t>
+            </a:r>
+            <a:r>
+              <a:rPr>
+                <a:solidFill>
+                  <a:srgbClr val="5E5E5E"/>
+                </a:solidFill>
+                <a:latin typeface="Courier"/>
+              </a:rPr>
+              <a:t>+</a:t>
+            </a:r>
+            <a:br/>
+            <a:r>
+              <a:rPr>
+                <a:solidFill>
+                  <a:srgbClr val="003B4F"/>
+                </a:solidFill>
+                <a:latin typeface="Courier"/>
+              </a:rPr>
+              <a:t>  </a:t>
+            </a:r>
+            <a:r>
+              <a:rPr>
+                <a:solidFill>
+                  <a:srgbClr val="4758AB"/>
+                </a:solidFill>
+                <a:latin typeface="Courier"/>
+              </a:rPr>
+              <a:t>stat_summary</a:t>
+            </a:r>
+            <a:r>
+              <a:rPr>
+                <a:solidFill>
+                  <a:srgbClr val="003B4F"/>
+                </a:solidFill>
+                <a:latin typeface="Courier"/>
+              </a:rPr>
+              <a:t>(</a:t>
+            </a:r>
+            <a:r>
+              <a:rPr>
+                <a:solidFill>
+                  <a:srgbClr val="657422"/>
+                </a:solidFill>
+                <a:latin typeface="Courier"/>
+              </a:rPr>
+              <a:t>fun =</a:t>
+            </a:r>
+            <a:r>
+              <a:rPr>
+                <a:solidFill>
+                  <a:srgbClr val="003B4F"/>
+                </a:solidFill>
+                <a:latin typeface="Courier"/>
+              </a:rPr>
+              <a:t> </a:t>
+            </a:r>
+            <a:r>
+              <a:rPr>
+                <a:solidFill>
+                  <a:srgbClr val="20794D"/>
+                </a:solidFill>
+                <a:latin typeface="Courier"/>
+              </a:rPr>
+              <a:t>"mean"</a:t>
+            </a:r>
+            <a:r>
+              <a:rPr>
+                <a:solidFill>
+                  <a:srgbClr val="003B4F"/>
+                </a:solidFill>
+                <a:latin typeface="Courier"/>
+              </a:rPr>
+              <a:t>, </a:t>
+            </a:r>
+            <a:r>
+              <a:rPr>
+                <a:solidFill>
+                  <a:srgbClr val="657422"/>
+                </a:solidFill>
+                <a:latin typeface="Courier"/>
+              </a:rPr>
+              <a:t>geom =</a:t>
+            </a:r>
+            <a:r>
+              <a:rPr>
+                <a:solidFill>
+                  <a:srgbClr val="003B4F"/>
+                </a:solidFill>
+                <a:latin typeface="Courier"/>
+              </a:rPr>
+              <a:t> </a:t>
+            </a:r>
+            <a:r>
+              <a:rPr>
+                <a:solidFill>
+                  <a:srgbClr val="20794D"/>
+                </a:solidFill>
+                <a:latin typeface="Courier"/>
+              </a:rPr>
+              <a:t>"point"</a:t>
+            </a:r>
+            <a:r>
+              <a:rPr>
+                <a:solidFill>
+                  <a:srgbClr val="003B4F"/>
+                </a:solidFill>
+                <a:latin typeface="Courier"/>
+              </a:rPr>
+              <a:t>, </a:t>
+            </a:r>
+            <a:r>
+              <a:rPr>
+                <a:solidFill>
+                  <a:srgbClr val="657422"/>
+                </a:solidFill>
+                <a:latin typeface="Courier"/>
+              </a:rPr>
+              <a:t>position =</a:t>
+            </a:r>
+            <a:r>
+              <a:rPr>
+                <a:solidFill>
+                  <a:srgbClr val="003B4F"/>
+                </a:solidFill>
+                <a:latin typeface="Courier"/>
+              </a:rPr>
+              <a:t> dodge_position) </a:t>
+            </a:r>
+            <a:r>
+              <a:rPr>
+                <a:solidFill>
+                  <a:srgbClr val="5E5E5E"/>
+                </a:solidFill>
+                <a:latin typeface="Courier"/>
+              </a:rPr>
+              <a:t>+</a:t>
+            </a:r>
+            <a:br/>
+            <a:r>
+              <a:rPr>
+                <a:solidFill>
+                  <a:srgbClr val="003B4F"/>
+                </a:solidFill>
+                <a:latin typeface="Courier"/>
+              </a:rPr>
+              <a:t>  </a:t>
+            </a:r>
+            <a:r>
+              <a:rPr>
+                <a:solidFill>
+                  <a:srgbClr val="4758AB"/>
+                </a:solidFill>
+                <a:latin typeface="Courier"/>
+              </a:rPr>
+              <a:t>stat_summary</a:t>
+            </a:r>
+            <a:r>
+              <a:rPr>
+                <a:solidFill>
+                  <a:srgbClr val="003B4F"/>
+                </a:solidFill>
+                <a:latin typeface="Courier"/>
+              </a:rPr>
+              <a:t>(</a:t>
+            </a:r>
+            <a:r>
+              <a:rPr>
+                <a:solidFill>
+                  <a:srgbClr val="657422"/>
+                </a:solidFill>
+                <a:latin typeface="Courier"/>
+              </a:rPr>
+              <a:t>fun.data =</a:t>
+            </a:r>
+            <a:r>
+              <a:rPr>
+                <a:solidFill>
+                  <a:srgbClr val="003B4F"/>
+                </a:solidFill>
+                <a:latin typeface="Courier"/>
+              </a:rPr>
+              <a:t> </a:t>
+            </a:r>
+            <a:r>
+              <a:rPr>
+                <a:solidFill>
+                  <a:srgbClr val="20794D"/>
+                </a:solidFill>
+                <a:latin typeface="Courier"/>
+              </a:rPr>
+              <a:t>"mean_se"</a:t>
+            </a:r>
+            <a:r>
+              <a:rPr>
+                <a:solidFill>
+                  <a:srgbClr val="003B4F"/>
+                </a:solidFill>
+                <a:latin typeface="Courier"/>
+              </a:rPr>
+              <a:t>, </a:t>
+            </a:r>
+            <a:r>
+              <a:rPr>
+                <a:solidFill>
+                  <a:srgbClr val="657422"/>
+                </a:solidFill>
+                <a:latin typeface="Courier"/>
+              </a:rPr>
+              <a:t>geom =</a:t>
+            </a:r>
+            <a:r>
+              <a:rPr>
+                <a:solidFill>
+                  <a:srgbClr val="003B4F"/>
+                </a:solidFill>
+                <a:latin typeface="Courier"/>
+              </a:rPr>
+              <a:t> </a:t>
+            </a:r>
+            <a:r>
+              <a:rPr>
+                <a:solidFill>
+                  <a:srgbClr val="20794D"/>
+                </a:solidFill>
+                <a:latin typeface="Courier"/>
+              </a:rPr>
+              <a:t>"errorbar"</a:t>
+            </a:r>
+            <a:r>
+              <a:rPr>
+                <a:solidFill>
+                  <a:srgbClr val="003B4F"/>
+                </a:solidFill>
+                <a:latin typeface="Courier"/>
+              </a:rPr>
+              <a:t>, </a:t>
+            </a:r>
+            <a:r>
+              <a:rPr>
+                <a:solidFill>
+                  <a:srgbClr val="657422"/>
+                </a:solidFill>
+                <a:latin typeface="Courier"/>
+              </a:rPr>
+              <a:t>width =</a:t>
+            </a:r>
+            <a:r>
+              <a:rPr>
+                <a:solidFill>
+                  <a:srgbClr val="003B4F"/>
+                </a:solidFill>
+                <a:latin typeface="Courier"/>
+              </a:rPr>
+              <a:t> </a:t>
+            </a:r>
+            <a:r>
+              <a:rPr>
+                <a:solidFill>
+                  <a:srgbClr val="AD0000"/>
+                </a:solidFill>
+                <a:latin typeface="Courier"/>
+              </a:rPr>
+              <a:t>0.2</a:t>
+            </a:r>
+            <a:r>
+              <a:rPr>
+                <a:solidFill>
+                  <a:srgbClr val="003B4F"/>
+                </a:solidFill>
+                <a:latin typeface="Courier"/>
+              </a:rPr>
+              <a:t>, </a:t>
+            </a:r>
+            <a:r>
+              <a:rPr>
+                <a:solidFill>
+                  <a:srgbClr val="657422"/>
+                </a:solidFill>
+                <a:latin typeface="Courier"/>
+              </a:rPr>
+              <a:t>position =</a:t>
+            </a:r>
+            <a:r>
+              <a:rPr>
+                <a:solidFill>
+                  <a:srgbClr val="003B4F"/>
+                </a:solidFill>
+                <a:latin typeface="Courier"/>
+              </a:rPr>
+              <a:t> dodge_position)</a:t>
+            </a:r>
+          </a:p>
+          <a:p>
+            <a:pPr lvl="0" indent="0" marL="0">
+              <a:buNone/>
+            </a:pPr>
+            <a:r>
+              <a:rPr/>
+              <a:t>✏️ </a:t>
+            </a:r>
+            <a:r>
+              <a:rPr b="1"/>
+              <a:t>Your turn:</a:t>
+            </a:r>
+            <a:r>
+              <a:rPr/>
+              <a:t> How many patches are nested within each treatment? </a:t>
+            </a:r>
+            <a:r>
+              <a:rPr>
+                <a:latin typeface="Courier"/>
+              </a:rPr>
+              <a:t>________________________</a:t>
+            </a:r>
+          </a:p>
+        </p:txBody>
+      </p:sp>
     </p:spTree>
   </p:cSld>
 </p:sld>
@@ -5325,7 +6619,7 @@
             </a:pPr>
             <a:r>
               <a:rPr/>
-              <a:t>Nested ANOVA Analysis</a:t>
+              <a:t>Part 2 · Fitting the Nested Model — Base R and afex</a:t>
             </a:r>
           </a:p>
         </p:txBody>
@@ -5350,7 +6644,396 @@
             </a:pPr>
             <a:r>
               <a:rPr/>
-              <a:t>In this experimental design, patch is nested within treat because each patch received only one treatment level. This is a hierarchical design where the effect of patches must be considered within each treatment. Following the approach used in Quinn &amp; Keough (2002), we’ll use a traditional nested ANOVA.</a:t>
+              <a:t>Since </a:t>
+            </a:r>
+            <a:r>
+              <a:rPr>
+                <a:latin typeface="Courier"/>
+              </a:rPr>
+              <a:t>patch</a:t>
+            </a:r>
+            <a:r>
+              <a:rPr/>
+              <a:t> is nested within </a:t>
+            </a:r>
+            <a:r>
+              <a:rPr>
+                <a:latin typeface="Courier"/>
+              </a:rPr>
+              <a:t>treat</a:t>
+            </a:r>
+            <a:r>
+              <a:rPr/>
+              <a:t>, we need the correct error term — the traditional </a:t>
+            </a:r>
+            <a:r>
+              <a:rPr>
+                <a:latin typeface="Courier"/>
+              </a:rPr>
+              <a:t>aov()</a:t>
+            </a:r>
+            <a:r>
+              <a:rPr/>
+              <a:t> approach lets us specify this directly.</a:t>
+            </a:r>
+          </a:p>
+          <a:p>
+            <a:pPr lvl="0" indent="0" marL="0">
+              <a:buNone/>
+            </a:pPr>
+            <a:r>
+              <a:rPr b="1"/>
+              <a:t>▶ Run this:</a:t>
+            </a:r>
+          </a:p>
+          <a:p>
+            <a:pPr lvl="0" indent="0">
+              <a:buNone/>
+            </a:pPr>
+            <a:r>
+              <a:rPr>
+                <a:solidFill>
+                  <a:srgbClr val="5E5E5E"/>
+                </a:solidFill>
+                <a:latin typeface="Courier"/>
+              </a:rPr>
+              <a:t># This gives you the correct F-test using PATCH within TREAT as error term</a:t>
+            </a:r>
+            <a:br/>
+            <a:r>
+              <a:rPr>
+                <a:solidFill>
+                  <a:srgbClr val="003B4F"/>
+                </a:solidFill>
+                <a:latin typeface="Courier"/>
+              </a:rPr>
+              <a:t>nested_model &lt;- </a:t>
+            </a:r>
+            <a:r>
+              <a:rPr>
+                <a:solidFill>
+                  <a:srgbClr val="4758AB"/>
+                </a:solidFill>
+                <a:latin typeface="Courier"/>
+              </a:rPr>
+              <a:t>aov</a:t>
+            </a:r>
+            <a:r>
+              <a:rPr>
+                <a:solidFill>
+                  <a:srgbClr val="003B4F"/>
+                </a:solidFill>
+                <a:latin typeface="Courier"/>
+              </a:rPr>
+              <a:t>(algae </a:t>
+            </a:r>
+            <a:r>
+              <a:rPr>
+                <a:solidFill>
+                  <a:srgbClr val="5E5E5E"/>
+                </a:solidFill>
+                <a:latin typeface="Courier"/>
+              </a:rPr>
+              <a:t>~</a:t>
+            </a:r>
+            <a:r>
+              <a:rPr>
+                <a:solidFill>
+                  <a:srgbClr val="003B4F"/>
+                </a:solidFill>
+                <a:latin typeface="Courier"/>
+              </a:rPr>
+              <a:t> treat </a:t>
+            </a:r>
+            <a:r>
+              <a:rPr>
+                <a:solidFill>
+                  <a:srgbClr val="5E5E5E"/>
+                </a:solidFill>
+                <a:latin typeface="Courier"/>
+              </a:rPr>
+              <a:t>+</a:t>
+            </a:r>
+            <a:r>
+              <a:rPr>
+                <a:solidFill>
+                  <a:srgbClr val="003B4F"/>
+                </a:solidFill>
+                <a:latin typeface="Courier"/>
+              </a:rPr>
+              <a:t> </a:t>
+            </a:r>
+            <a:r>
+              <a:rPr>
+                <a:solidFill>
+                  <a:srgbClr val="4758AB"/>
+                </a:solidFill>
+                <a:latin typeface="Courier"/>
+              </a:rPr>
+              <a:t>Error</a:t>
+            </a:r>
+            <a:r>
+              <a:rPr>
+                <a:solidFill>
+                  <a:srgbClr val="003B4F"/>
+                </a:solidFill>
+                <a:latin typeface="Courier"/>
+              </a:rPr>
+              <a:t>(treat</a:t>
+            </a:r>
+            <a:r>
+              <a:rPr>
+                <a:solidFill>
+                  <a:srgbClr val="5E5E5E"/>
+                </a:solidFill>
+                <a:latin typeface="Courier"/>
+              </a:rPr>
+              <a:t>:</a:t>
+            </a:r>
+            <a:r>
+              <a:rPr>
+                <a:solidFill>
+                  <a:srgbClr val="003B4F"/>
+                </a:solidFill>
+                <a:latin typeface="Courier"/>
+              </a:rPr>
+              <a:t>patch), </a:t>
+            </a:r>
+            <a:r>
+              <a:rPr>
+                <a:solidFill>
+                  <a:srgbClr val="657422"/>
+                </a:solidFill>
+                <a:latin typeface="Courier"/>
+              </a:rPr>
+              <a:t>data =</a:t>
+            </a:r>
+            <a:r>
+              <a:rPr>
+                <a:solidFill>
+                  <a:srgbClr val="003B4F"/>
+                </a:solidFill>
+                <a:latin typeface="Courier"/>
+              </a:rPr>
+              <a:t> u_df)</a:t>
+            </a:r>
+            <a:br/>
+            <a:r>
+              <a:rPr>
+                <a:solidFill>
+                  <a:srgbClr val="4758AB"/>
+                </a:solidFill>
+                <a:latin typeface="Courier"/>
+              </a:rPr>
+              <a:t>summary</a:t>
+            </a:r>
+            <a:r>
+              <a:rPr>
+                <a:solidFill>
+                  <a:srgbClr val="003B4F"/>
+                </a:solidFill>
+                <a:latin typeface="Courier"/>
+              </a:rPr>
+              <a:t>(nested_model)</a:t>
+            </a:r>
+          </a:p>
+          <a:p>
+            <a:pPr lvl="0" indent="0" marL="0">
+              <a:buNone/>
+            </a:pPr>
+            <a:r>
+              <a:rPr b="1"/>
+              <a:t>▶ Run this</a:t>
+            </a:r>
+            <a:r>
+              <a:rPr/>
+              <a:t> — the </a:t>
+            </a:r>
+            <a:r>
+              <a:rPr>
+                <a:latin typeface="Courier"/>
+              </a:rPr>
+              <a:t>afex</a:t>
+            </a:r>
+            <a:r>
+              <a:rPr/>
+              <a:t> package, recommended for unbalanced designs:</a:t>
+            </a:r>
+          </a:p>
+          <a:p>
+            <a:pPr lvl="0" indent="0">
+              <a:buNone/>
+            </a:pPr>
+            <a:r>
+              <a:rPr>
+                <a:solidFill>
+                  <a:srgbClr val="003B4F"/>
+                </a:solidFill>
+                <a:latin typeface="Courier"/>
+              </a:rPr>
+              <a:t>model_afx &lt;- </a:t>
+            </a:r>
+            <a:r>
+              <a:rPr>
+                <a:solidFill>
+                  <a:srgbClr val="4758AB"/>
+                </a:solidFill>
+                <a:latin typeface="Courier"/>
+              </a:rPr>
+              <a:t>aov_car</a:t>
+            </a:r>
+            <a:r>
+              <a:rPr>
+                <a:solidFill>
+                  <a:srgbClr val="003B4F"/>
+                </a:solidFill>
+                <a:latin typeface="Courier"/>
+              </a:rPr>
+              <a:t>(algae </a:t>
+            </a:r>
+            <a:r>
+              <a:rPr>
+                <a:solidFill>
+                  <a:srgbClr val="5E5E5E"/>
+                </a:solidFill>
+                <a:latin typeface="Courier"/>
+              </a:rPr>
+              <a:t>~</a:t>
+            </a:r>
+            <a:r>
+              <a:rPr>
+                <a:solidFill>
+                  <a:srgbClr val="003B4F"/>
+                </a:solidFill>
+                <a:latin typeface="Courier"/>
+              </a:rPr>
+              <a:t> treat </a:t>
+            </a:r>
+            <a:r>
+              <a:rPr>
+                <a:solidFill>
+                  <a:srgbClr val="5E5E5E"/>
+                </a:solidFill>
+                <a:latin typeface="Courier"/>
+              </a:rPr>
+              <a:t>+</a:t>
+            </a:r>
+            <a:r>
+              <a:rPr>
+                <a:solidFill>
+                  <a:srgbClr val="003B4F"/>
+                </a:solidFill>
+                <a:latin typeface="Courier"/>
+              </a:rPr>
+              <a:t> </a:t>
+            </a:r>
+            <a:r>
+              <a:rPr>
+                <a:solidFill>
+                  <a:srgbClr val="4758AB"/>
+                </a:solidFill>
+                <a:latin typeface="Courier"/>
+              </a:rPr>
+              <a:t>Error</a:t>
+            </a:r>
+            <a:r>
+              <a:rPr>
+                <a:solidFill>
+                  <a:srgbClr val="003B4F"/>
+                </a:solidFill>
+                <a:latin typeface="Courier"/>
+              </a:rPr>
+              <a:t>(patch),</a:t>
+            </a:r>
+            <a:br/>
+            <a:r>
+              <a:rPr>
+                <a:solidFill>
+                  <a:srgbClr val="003B4F"/>
+                </a:solidFill>
+                <a:latin typeface="Courier"/>
+              </a:rPr>
+              <a:t>                     </a:t>
+            </a:r>
+            <a:r>
+              <a:rPr>
+                <a:solidFill>
+                  <a:srgbClr val="657422"/>
+                </a:solidFill>
+                <a:latin typeface="Courier"/>
+              </a:rPr>
+              <a:t>data =</a:t>
+            </a:r>
+            <a:r>
+              <a:rPr>
+                <a:solidFill>
+                  <a:srgbClr val="003B4F"/>
+                </a:solidFill>
+                <a:latin typeface="Courier"/>
+              </a:rPr>
+              <a:t> u_df)</a:t>
+            </a:r>
+            <a:br/>
+            <a:r>
+              <a:rPr>
+                <a:solidFill>
+                  <a:srgbClr val="4758AB"/>
+                </a:solidFill>
+                <a:latin typeface="Courier"/>
+              </a:rPr>
+              <a:t>summary</a:t>
+            </a:r>
+            <a:r>
+              <a:rPr>
+                <a:solidFill>
+                  <a:srgbClr val="003B4F"/>
+                </a:solidFill>
+                <a:latin typeface="Courier"/>
+              </a:rPr>
+              <a:t>(model_afx)</a:t>
+            </a:r>
+          </a:p>
+          <a:p>
+            <a:pPr lvl="0" indent="0" marL="0">
+              <a:buNone/>
+            </a:pPr>
+            <a:r>
+              <a:rPr/>
+              <a:t>✏️ </a:t>
+            </a:r>
+            <a:r>
+              <a:rPr b="1"/>
+              <a:t>Your turn:</a:t>
+            </a:r>
+            <a:r>
+              <a:rPr/>
+              <a:t> Do </a:t>
+            </a:r>
+            <a:r>
+              <a:rPr>
+                <a:latin typeface="Courier"/>
+              </a:rPr>
+              <a:t>nested_model</a:t>
+            </a:r>
+            <a:r>
+              <a:rPr/>
+              <a:t> and </a:t>
+            </a:r>
+            <a:r>
+              <a:rPr>
+                <a:latin typeface="Courier"/>
+              </a:rPr>
+              <a:t>model_afx</a:t>
+            </a:r>
+            <a:r>
+              <a:rPr/>
+              <a:t> agree on whether the treatment effect is significant? </a:t>
+            </a:r>
+            <a:r>
+              <a:rPr>
+                <a:latin typeface="Courier"/>
+              </a:rPr>
+              <a:t>________________________</a:t>
             </a:r>
           </a:p>
         </p:txBody>
@@ -5402,7 +7085,7 @@
             </a:pPr>
             <a:r>
               <a:rPr/>
-              <a:t>nested Anova with base R</a:t>
+              <a:t>Part 3 · The Modern Way — Mixed Models</a:t>
             </a:r>
           </a:p>
         </p:txBody>
@@ -5422,23 +7105,777 @@
           <a:bodyPr/>
           <a:lstStyle/>
           <a:p>
+            <a:pPr lvl="0" indent="0" marL="0">
+              <a:buNone/>
+            </a:pPr>
+            <a:r>
+              <a:rPr/>
+              <a:t>Fixed effects go in as a plain variable name. Random effects can be coded a few different ways, depending on the design:</a:t>
+            </a:r>
+          </a:p>
+          <a:p>
+            <a:pPr lvl="0"/>
+            <a:r>
+              <a:rPr b="1"/>
+              <a:t>Random intercept, fixed slope:</a:t>
+            </a:r>
+            <a:r>
+              <a:rPr/>
+              <a:t> </a:t>
+            </a:r>
+            <a:r>
+              <a:rPr>
+                <a:latin typeface="Courier"/>
+              </a:rPr>
+              <a:t>+ (1|random)</a:t>
+            </a:r>
+            <a:r>
+              <a:rPr/>
+              <a:t> — e.g., </a:t>
+            </a:r>
+            <a:r>
+              <a:rPr>
+                <a:latin typeface="Courier"/>
+              </a:rPr>
+              <a:t>color ~ fixed + (1|group)</a:t>
+            </a:r>
+          </a:p>
+          <a:p>
+            <a:pPr lvl="0"/>
+            <a:r>
+              <a:rPr b="1"/>
+              <a:t>Random intercept, random slope:</a:t>
+            </a:r>
+            <a:r>
+              <a:rPr/>
+              <a:t> </a:t>
+            </a:r>
+            <a:r>
+              <a:rPr>
+                <a:latin typeface="Courier"/>
+              </a:rPr>
+              <a:t>+ (fixed|random)</a:t>
+            </a:r>
+            <a:r>
+              <a:rPr/>
+              <a:t> — e.g., </a:t>
+            </a:r>
+            <a:r>
+              <a:rPr>
+                <a:latin typeface="Courier"/>
+              </a:rPr>
+              <a:t>color ~ fixed + (fixed|group)</a:t>
+            </a:r>
+          </a:p>
+          <a:p>
+            <a:pPr lvl="0"/>
+            <a:r>
+              <a:rPr b="1"/>
+              <a:t>Nested design</a:t>
+            </a:r>
+            <a:r>
+              <a:rPr/>
+              <a:t> (a sample can exist only within a larger grouping): </a:t>
+            </a:r>
+            <a:r>
+              <a:rPr>
+                <a:latin typeface="Courier"/>
+              </a:rPr>
+              <a:t>y ~ color + (1|greenbox/graybox)</a:t>
+            </a:r>
+            <a:r>
+              <a:rPr/>
+              <a:t>, equivalent to </a:t>
+            </a:r>
+            <a:r>
+              <a:rPr>
+                <a:latin typeface="Courier"/>
+              </a:rPr>
+              <a:t>y ~ color + (1|greenbox) + (1|greenbox:graybox)</a:t>
+            </a:r>
+            <a:r>
+              <a:rPr/>
+              <a:t> — this models random variation in the intercept for each patch, and also for each quadrat within each patch</a:t>
+            </a:r>
+          </a:p>
+          <a:p>
+            <a:pPr lvl="0"/>
+            <a:r>
+              <a:rPr b="1"/>
+              <a:t>Fully crossed design</a:t>
+            </a:r>
+            <a:r>
+              <a:rPr/>
+              <a:t> (not nested): </a:t>
+            </a:r>
+            <a:r>
+              <a:rPr>
+                <a:latin typeface="Courier"/>
+              </a:rPr>
+              <a:t>y ~ color + (1|green_box) + (1|gray_box)</a:t>
+            </a:r>
+          </a:p>
+          <a:p>
+            <a:pPr lvl="0" indent="0" marL="0">
+              <a:buNone/>
+            </a:pPr>
+            <a:r>
+              <a:rPr b="1"/>
+              <a:t>▶ Run this</a:t>
+            </a:r>
+            <a:r>
+              <a:rPr/>
+              <a:t> — fit the mixed model:</a:t>
+            </a:r>
+          </a:p>
+          <a:p>
             <a:pPr lvl="0" indent="0">
               <a:buNone/>
             </a:pPr>
             <a:r>
               <a:rPr>
-                <a:latin typeface="Courier"/>
-              </a:rPr>
-              <a:t>
-Error: treat:patch
-          Df Sum Sq Mean Sq F value Pr(&gt;F)  
-treat      3  14429    4810   2.717 0.0913 .
-Residuals 12  21242    1770                 
----
-Signif. codes:  0 '***' 0.001 '**' 0.01 '*' 0.05 '.' 0.1 ' ' 1
-Error: Within
-          Df Sum Sq Mean Sq F value Pr(&gt;F)
-Residuals 64  19110   298.6               </a:t>
+                <a:solidFill>
+                  <a:srgbClr val="003B4F"/>
+                </a:solidFill>
+                <a:latin typeface="Courier"/>
+              </a:rPr>
+              <a:t>mixed_model &lt;- </a:t>
+            </a:r>
+            <a:r>
+              <a:rPr>
+                <a:solidFill>
+                  <a:srgbClr val="4758AB"/>
+                </a:solidFill>
+                <a:latin typeface="Courier"/>
+              </a:rPr>
+              <a:t>lmer</a:t>
+            </a:r>
+            <a:r>
+              <a:rPr>
+                <a:solidFill>
+                  <a:srgbClr val="003B4F"/>
+                </a:solidFill>
+                <a:latin typeface="Courier"/>
+              </a:rPr>
+              <a:t>(algae </a:t>
+            </a:r>
+            <a:r>
+              <a:rPr>
+                <a:solidFill>
+                  <a:srgbClr val="5E5E5E"/>
+                </a:solidFill>
+                <a:latin typeface="Courier"/>
+              </a:rPr>
+              <a:t>~</a:t>
+            </a:r>
+            <a:r>
+              <a:rPr>
+                <a:solidFill>
+                  <a:srgbClr val="003B4F"/>
+                </a:solidFill>
+                <a:latin typeface="Courier"/>
+              </a:rPr>
+              <a:t> treat </a:t>
+            </a:r>
+            <a:r>
+              <a:rPr>
+                <a:solidFill>
+                  <a:srgbClr val="5E5E5E"/>
+                </a:solidFill>
+                <a:latin typeface="Courier"/>
+              </a:rPr>
+              <a:t>+</a:t>
+            </a:r>
+            <a:r>
+              <a:rPr>
+                <a:solidFill>
+                  <a:srgbClr val="003B4F"/>
+                </a:solidFill>
+                <a:latin typeface="Courier"/>
+              </a:rPr>
+              <a:t> (</a:t>
+            </a:r>
+            <a:r>
+              <a:rPr>
+                <a:solidFill>
+                  <a:srgbClr val="AD0000"/>
+                </a:solidFill>
+                <a:latin typeface="Courier"/>
+              </a:rPr>
+              <a:t>1</a:t>
+            </a:r>
+            <a:r>
+              <a:rPr>
+                <a:solidFill>
+                  <a:srgbClr val="5E5E5E"/>
+                </a:solidFill>
+                <a:latin typeface="Courier"/>
+              </a:rPr>
+              <a:t>|</a:t>
+            </a:r>
+            <a:r>
+              <a:rPr>
+                <a:solidFill>
+                  <a:srgbClr val="003B4F"/>
+                </a:solidFill>
+                <a:latin typeface="Courier"/>
+              </a:rPr>
+              <a:t>patch), </a:t>
+            </a:r>
+            <a:r>
+              <a:rPr>
+                <a:solidFill>
+                  <a:srgbClr val="657422"/>
+                </a:solidFill>
+                <a:latin typeface="Courier"/>
+              </a:rPr>
+              <a:t>data =</a:t>
+            </a:r>
+            <a:r>
+              <a:rPr>
+                <a:solidFill>
+                  <a:srgbClr val="003B4F"/>
+                </a:solidFill>
+                <a:latin typeface="Courier"/>
+              </a:rPr>
+              <a:t> u_df,</a:t>
+            </a:r>
+            <a:br/>
+            <a:r>
+              <a:rPr>
+                <a:solidFill>
+                  <a:srgbClr val="003B4F"/>
+                </a:solidFill>
+                <a:latin typeface="Courier"/>
+              </a:rPr>
+              <a:t>                    </a:t>
+            </a:r>
+            <a:r>
+              <a:rPr>
+                <a:solidFill>
+                  <a:srgbClr val="657422"/>
+                </a:solidFill>
+                <a:latin typeface="Courier"/>
+              </a:rPr>
+              <a:t>control =</a:t>
+            </a:r>
+            <a:r>
+              <a:rPr>
+                <a:solidFill>
+                  <a:srgbClr val="003B4F"/>
+                </a:solidFill>
+                <a:latin typeface="Courier"/>
+              </a:rPr>
+              <a:t> </a:t>
+            </a:r>
+            <a:r>
+              <a:rPr>
+                <a:solidFill>
+                  <a:srgbClr val="4758AB"/>
+                </a:solidFill>
+                <a:latin typeface="Courier"/>
+              </a:rPr>
+              <a:t>lmerControl</a:t>
+            </a:r>
+            <a:r>
+              <a:rPr>
+                <a:solidFill>
+                  <a:srgbClr val="003B4F"/>
+                </a:solidFill>
+                <a:latin typeface="Courier"/>
+              </a:rPr>
+              <a:t>(</a:t>
+            </a:r>
+            <a:r>
+              <a:rPr>
+                <a:solidFill>
+                  <a:srgbClr val="657422"/>
+                </a:solidFill>
+                <a:latin typeface="Courier"/>
+              </a:rPr>
+              <a:t>calc.derivs =</a:t>
+            </a:r>
+            <a:r>
+              <a:rPr>
+                <a:solidFill>
+                  <a:srgbClr val="003B4F"/>
+                </a:solidFill>
+                <a:latin typeface="Courier"/>
+              </a:rPr>
+              <a:t> </a:t>
+            </a:r>
+            <a:r>
+              <a:rPr>
+                <a:solidFill>
+                  <a:srgbClr val="8F5902"/>
+                </a:solidFill>
+                <a:latin typeface="Courier"/>
+              </a:rPr>
+              <a:t>FALSE</a:t>
+            </a:r>
+            <a:r>
+              <a:rPr>
+                <a:solidFill>
+                  <a:srgbClr val="003B4F"/>
+                </a:solidFill>
+                <a:latin typeface="Courier"/>
+              </a:rPr>
+              <a:t>))</a:t>
+            </a:r>
+            <a:br/>
+            <a:r>
+              <a:rPr>
+                <a:solidFill>
+                  <a:srgbClr val="4758AB"/>
+                </a:solidFill>
+                <a:latin typeface="Courier"/>
+              </a:rPr>
+              <a:t>summary</a:t>
+            </a:r>
+            <a:r>
+              <a:rPr>
+                <a:solidFill>
+                  <a:srgbClr val="003B4F"/>
+                </a:solidFill>
+                <a:latin typeface="Courier"/>
+              </a:rPr>
+              <a:t>(mixed_model)</a:t>
+            </a:r>
+          </a:p>
+          <a:p>
+            <a:pPr lvl="0" indent="0" marL="0">
+              <a:buNone/>
+            </a:pPr>
+            <a:r>
+              <a:rPr b="1"/>
+              <a:t>▶ Run this</a:t>
+            </a:r>
+            <a:r>
+              <a:rPr/>
+              <a:t> — Method 1, the F-test with Satterthwaite degrees of freedom (more conservative, better for small samples):</a:t>
+            </a:r>
+          </a:p>
+          <a:p>
+            <a:pPr lvl="0" indent="0">
+              <a:buNone/>
+            </a:pPr>
+            <a:r>
+              <a:rPr>
+                <a:solidFill>
+                  <a:srgbClr val="003B4F"/>
+                </a:solidFill>
+                <a:latin typeface="Courier"/>
+              </a:rPr>
+              <a:t>satt_result &lt;- </a:t>
+            </a:r>
+            <a:r>
+              <a:rPr>
+                <a:solidFill>
+                  <a:srgbClr val="4758AB"/>
+                </a:solidFill>
+                <a:latin typeface="Courier"/>
+              </a:rPr>
+              <a:t>Anova</a:t>
+            </a:r>
+            <a:r>
+              <a:rPr>
+                <a:solidFill>
+                  <a:srgbClr val="003B4F"/>
+                </a:solidFill>
+                <a:latin typeface="Courier"/>
+              </a:rPr>
+              <a:t>(mixed_model, </a:t>
+            </a:r>
+            <a:r>
+              <a:rPr>
+                <a:solidFill>
+                  <a:srgbClr val="657422"/>
+                </a:solidFill>
+                <a:latin typeface="Courier"/>
+              </a:rPr>
+              <a:t>type =</a:t>
+            </a:r>
+            <a:r>
+              <a:rPr>
+                <a:solidFill>
+                  <a:srgbClr val="003B4F"/>
+                </a:solidFill>
+                <a:latin typeface="Courier"/>
+              </a:rPr>
+              <a:t> </a:t>
+            </a:r>
+            <a:r>
+              <a:rPr>
+                <a:solidFill>
+                  <a:srgbClr val="AD0000"/>
+                </a:solidFill>
+                <a:latin typeface="Courier"/>
+              </a:rPr>
+              <a:t>3</a:t>
+            </a:r>
+            <a:r>
+              <a:rPr>
+                <a:solidFill>
+                  <a:srgbClr val="003B4F"/>
+                </a:solidFill>
+                <a:latin typeface="Courier"/>
+              </a:rPr>
+              <a:t>,</a:t>
+            </a:r>
+            <a:br/>
+            <a:r>
+              <a:rPr>
+                <a:solidFill>
+                  <a:srgbClr val="003B4F"/>
+                </a:solidFill>
+                <a:latin typeface="Courier"/>
+              </a:rPr>
+              <a:t>                      </a:t>
+            </a:r>
+            <a:r>
+              <a:rPr>
+                <a:solidFill>
+                  <a:srgbClr val="657422"/>
+                </a:solidFill>
+                <a:latin typeface="Courier"/>
+              </a:rPr>
+              <a:t>test.statistic =</a:t>
+            </a:r>
+            <a:r>
+              <a:rPr>
+                <a:solidFill>
+                  <a:srgbClr val="003B4F"/>
+                </a:solidFill>
+                <a:latin typeface="Courier"/>
+              </a:rPr>
+              <a:t> </a:t>
+            </a:r>
+            <a:r>
+              <a:rPr>
+                <a:solidFill>
+                  <a:srgbClr val="20794D"/>
+                </a:solidFill>
+                <a:latin typeface="Courier"/>
+              </a:rPr>
+              <a:t>"F"</a:t>
+            </a:r>
+            <a:r>
+              <a:rPr>
+                <a:solidFill>
+                  <a:srgbClr val="003B4F"/>
+                </a:solidFill>
+                <a:latin typeface="Courier"/>
+              </a:rPr>
+              <a:t>,</a:t>
+            </a:r>
+            <a:br/>
+            <a:r>
+              <a:rPr>
+                <a:solidFill>
+                  <a:srgbClr val="003B4F"/>
+                </a:solidFill>
+                <a:latin typeface="Courier"/>
+              </a:rPr>
+              <a:t>                      </a:t>
+            </a:r>
+            <a:r>
+              <a:rPr>
+                <a:solidFill>
+                  <a:srgbClr val="657422"/>
+                </a:solidFill>
+                <a:latin typeface="Courier"/>
+              </a:rPr>
+              <a:t>ddf =</a:t>
+            </a:r>
+            <a:r>
+              <a:rPr>
+                <a:solidFill>
+                  <a:srgbClr val="003B4F"/>
+                </a:solidFill>
+                <a:latin typeface="Courier"/>
+              </a:rPr>
+              <a:t> </a:t>
+            </a:r>
+            <a:r>
+              <a:rPr>
+                <a:solidFill>
+                  <a:srgbClr val="20794D"/>
+                </a:solidFill>
+                <a:latin typeface="Courier"/>
+              </a:rPr>
+              <a:t>"Satterthwaite"</a:t>
+            </a:r>
+            <a:r>
+              <a:rPr>
+                <a:solidFill>
+                  <a:srgbClr val="003B4F"/>
+                </a:solidFill>
+                <a:latin typeface="Courier"/>
+              </a:rPr>
+              <a:t>)</a:t>
+            </a:r>
+            <a:br/>
+            <a:r>
+              <a:rPr>
+                <a:solidFill>
+                  <a:srgbClr val="003B4F"/>
+                </a:solidFill>
+                <a:latin typeface="Courier"/>
+              </a:rPr>
+              <a:t>satt_result</a:t>
+            </a:r>
+          </a:p>
+          <a:p>
+            <a:pPr lvl="0" indent="0" marL="0">
+              <a:buNone/>
+            </a:pPr>
+            <a:r>
+              <a:rPr b="1"/>
+              <a:t>▶ Run this</a:t>
+            </a:r>
+            <a:r>
+              <a:rPr/>
+              <a:t> — Method 2, the Chi-square test (more liberal, assumes large samples):</a:t>
+            </a:r>
+          </a:p>
+          <a:p>
+            <a:pPr lvl="0" indent="0">
+              <a:buNone/>
+            </a:pPr>
+            <a:r>
+              <a:rPr>
+                <a:solidFill>
+                  <a:srgbClr val="003B4F"/>
+                </a:solidFill>
+                <a:latin typeface="Courier"/>
+              </a:rPr>
+              <a:t>anova_car &lt;- </a:t>
+            </a:r>
+            <a:r>
+              <a:rPr>
+                <a:solidFill>
+                  <a:srgbClr val="4758AB"/>
+                </a:solidFill>
+                <a:latin typeface="Courier"/>
+              </a:rPr>
+              <a:t>Anova</a:t>
+            </a:r>
+            <a:r>
+              <a:rPr>
+                <a:solidFill>
+                  <a:srgbClr val="003B4F"/>
+                </a:solidFill>
+                <a:latin typeface="Courier"/>
+              </a:rPr>
+              <a:t>(mixed_model,</a:t>
+            </a:r>
+            <a:br/>
+            <a:r>
+              <a:rPr>
+                <a:solidFill>
+                  <a:srgbClr val="003B4F"/>
+                </a:solidFill>
+                <a:latin typeface="Courier"/>
+              </a:rPr>
+              <a:t>                   </a:t>
+            </a:r>
+            <a:r>
+              <a:rPr>
+                <a:solidFill>
+                  <a:srgbClr val="657422"/>
+                </a:solidFill>
+                <a:latin typeface="Courier"/>
+              </a:rPr>
+              <a:t>type =</a:t>
+            </a:r>
+            <a:r>
+              <a:rPr>
+                <a:solidFill>
+                  <a:srgbClr val="003B4F"/>
+                </a:solidFill>
+                <a:latin typeface="Courier"/>
+              </a:rPr>
+              <a:t> </a:t>
+            </a:r>
+            <a:r>
+              <a:rPr>
+                <a:solidFill>
+                  <a:srgbClr val="AD0000"/>
+                </a:solidFill>
+                <a:latin typeface="Courier"/>
+              </a:rPr>
+              <a:t>3</a:t>
+            </a:r>
+            <a:r>
+              <a:rPr>
+                <a:solidFill>
+                  <a:srgbClr val="003B4F"/>
+                </a:solidFill>
+                <a:latin typeface="Courier"/>
+              </a:rPr>
+              <a:t>,</a:t>
+            </a:r>
+            <a:br/>
+            <a:r>
+              <a:rPr>
+                <a:solidFill>
+                  <a:srgbClr val="003B4F"/>
+                </a:solidFill>
+                <a:latin typeface="Courier"/>
+              </a:rPr>
+              <a:t>                   </a:t>
+            </a:r>
+            <a:r>
+              <a:rPr>
+                <a:solidFill>
+                  <a:srgbClr val="657422"/>
+                </a:solidFill>
+                <a:latin typeface="Courier"/>
+              </a:rPr>
+              <a:t>test.statistic =</a:t>
+            </a:r>
+            <a:r>
+              <a:rPr>
+                <a:solidFill>
+                  <a:srgbClr val="003B4F"/>
+                </a:solidFill>
+                <a:latin typeface="Courier"/>
+              </a:rPr>
+              <a:t> </a:t>
+            </a:r>
+            <a:r>
+              <a:rPr>
+                <a:solidFill>
+                  <a:srgbClr val="20794D"/>
+                </a:solidFill>
+                <a:latin typeface="Courier"/>
+              </a:rPr>
+              <a:t>"Chisq"</a:t>
+            </a:r>
+            <a:r>
+              <a:rPr>
+                <a:solidFill>
+                  <a:srgbClr val="003B4F"/>
+                </a:solidFill>
+                <a:latin typeface="Courier"/>
+              </a:rPr>
+              <a:t>)</a:t>
+            </a:r>
+            <a:br/>
+            <a:r>
+              <a:rPr>
+                <a:solidFill>
+                  <a:srgbClr val="003B4F"/>
+                </a:solidFill>
+                <a:latin typeface="Courier"/>
+              </a:rPr>
+              <a:t>anova_car</a:t>
+            </a:r>
+          </a:p>
+          <a:p>
+            <a:pPr lvl="0" indent="0" marL="1270000">
+              <a:buNone/>
+            </a:pPr>
+            <a:r>
+              <a:rPr sz="2000"/>
+              <a:t>💡 Chi-square = F × numerator df. The two differ because the F-test accounts for the denominator df (reflecting sample size), while Chi-square assumes infinite denominator df. </a:t>
+            </a:r>
+            <a:r>
+              <a:rPr sz="2000" b="1"/>
+              <a:t>Rule of thumb:</a:t>
+            </a:r>
+            <a:r>
+              <a:rPr sz="2000"/>
+              <a:t> under 100 observations or &lt; 20 random-effect levels, use the F-test; over 500 observations and &gt; 50 random-effect levels, Chi-square is fine; in between, the F-test is safer.</a:t>
+            </a:r>
+          </a:p>
+          <a:p>
+            <a:pPr lvl="0" indent="0" marL="0">
+              <a:buNone/>
+            </a:pPr>
+            <a:r>
+              <a:rPr/>
+              <a:t>✏️ </a:t>
+            </a:r>
+            <a:r>
+              <a:rPr b="1"/>
+              <a:t>Your turn:</a:t>
+            </a:r>
+            <a:r>
+              <a:rPr/>
+              <a:t> Do the F-test and Chi-square p-values agree on significance here? Given the rule of thumb above, which one should you trust more for this dataset (16 patches)? </a:t>
+            </a:r>
+            <a:r>
+              <a:rPr>
+                <a:latin typeface="Courier"/>
+              </a:rPr>
+              <a:t>________________________</a:t>
+            </a:r>
+          </a:p>
+          <a:p>
+            <a:pPr lvl="0" indent="0" marL="1270000">
+              <a:buNone/>
+            </a:pPr>
+            <a:r>
+              <a:rPr sz="2000" b="1"/>
+              <a:t>Tip</a:t>
+            </a:r>
+          </a:p>
+          <a:p>
+            <a:pPr lvl="0" indent="0" marL="1270000">
+              <a:buNone/>
+            </a:pPr>
+            <a:r>
+              <a:rPr sz="2000" b="1"/>
+              <a:t>🚀 If you finish early:</a:t>
+            </a:r>
+            <a:r>
+              <a:rPr sz="2000"/>
+              <a:t> Refit </a:t>
+            </a:r>
+            <a:r>
+              <a:rPr sz="2000">
+                <a:latin typeface="Courier"/>
+              </a:rPr>
+              <a:t>mixed_model</a:t>
+            </a:r>
+            <a:r>
+              <a:rPr sz="2000"/>
+              <a:t> using </a:t>
+            </a:r>
+            <a:r>
+              <a:rPr sz="2000">
+                <a:latin typeface="Courier"/>
+              </a:rPr>
+              <a:t>(1|treat:patch)</a:t>
+            </a:r>
+            <a:r>
+              <a:rPr sz="2000"/>
+              <a:t> instead of </a:t>
+            </a:r>
+            <a:r>
+              <a:rPr sz="2000">
+                <a:latin typeface="Courier"/>
+              </a:rPr>
+              <a:t>(1|patch)</a:t>
+            </a:r>
+            <a:r>
+              <a:rPr sz="2000"/>
+              <a:t>. Does the model summary change? (Hint: since patch numbers are already unique to a treatment in this dataset, the two notations should behave the same here — but they wouldn’t if patch IDs were reused across treatments.)</a:t>
+            </a:r>
+          </a:p>
+          <a:p>
+            <a:pPr lvl="0" indent="0">
+              <a:buNone/>
+            </a:pPr>
+            <a:r>
+              <a:rPr>
+                <a:solidFill>
+                  <a:srgbClr val="5E5E5E"/>
+                </a:solidFill>
+                <a:latin typeface="Courier"/>
+              </a:rPr>
+              <a:t># Write your code here:</a:t>
             </a:r>
           </a:p>
         </p:txBody>
@@ -5490,7 +7927,7 @@
             </a:pPr>
             <a:r>
               <a:rPr/>
-              <a:t>Nested ANOVA with AFEX package</a:t>
+              <a:t>Part 4 · Model Diagnostics</a:t>
             </a:r>
           </a:p>
         </p:txBody>
@@ -5510,24 +7947,727 @@
           <a:bodyPr/>
           <a:lstStyle/>
           <a:p>
-            <a:pPr lvl="0"/>
+            <a:pPr lvl="0" indent="0" marL="0">
+              <a:buNone/>
+            </a:pPr>
+            <a:r>
+              <a:rPr b="1"/>
+              <a:t>▶ Run this</a:t>
+            </a:r>
             <a:r>
               <a:rPr/>
-              <a:t>Using afex package (recommended for unbalanced designs)</a:t>
-            </a:r>
-          </a:p>
-          <a:p>
-            <a:pPr lvl="0"/>
+              <a:t> — DHARMa’s simulation-based diagnostics, purpose-built for mixed models:</a:t>
+            </a:r>
+          </a:p>
+          <a:p>
+            <a:pPr lvl="0" indent="0">
+              <a:buNone/>
+            </a:pPr>
+            <a:r>
+              <a:rPr>
+                <a:solidFill>
+                  <a:srgbClr val="4758AB"/>
+                </a:solidFill>
+                <a:latin typeface="Courier"/>
+              </a:rPr>
+              <a:t>set.seed</a:t>
+            </a:r>
+            <a:r>
+              <a:rPr>
+                <a:solidFill>
+                  <a:srgbClr val="003B4F"/>
+                </a:solidFill>
+                <a:latin typeface="Courier"/>
+              </a:rPr>
+              <a:t>(</a:t>
+            </a:r>
+            <a:r>
+              <a:rPr>
+                <a:solidFill>
+                  <a:srgbClr val="AD0000"/>
+                </a:solidFill>
+                <a:latin typeface="Courier"/>
+              </a:rPr>
+              <a:t>123</a:t>
+            </a:r>
+            <a:r>
+              <a:rPr>
+                <a:solidFill>
+                  <a:srgbClr val="003B4F"/>
+                </a:solidFill>
+                <a:latin typeface="Courier"/>
+              </a:rPr>
+              <a:t>)</a:t>
+            </a:r>
+            <a:br/>
+            <a:r>
+              <a:rPr>
+                <a:solidFill>
+                  <a:srgbClr val="003B4F"/>
+                </a:solidFill>
+                <a:latin typeface="Courier"/>
+              </a:rPr>
+              <a:t>simulation_output &lt;- </a:t>
+            </a:r>
+            <a:r>
+              <a:rPr>
+                <a:solidFill>
+                  <a:srgbClr val="4758AB"/>
+                </a:solidFill>
+                <a:latin typeface="Courier"/>
+              </a:rPr>
+              <a:t>simulateResiduals</a:t>
+            </a:r>
+            <a:r>
+              <a:rPr>
+                <a:solidFill>
+                  <a:srgbClr val="003B4F"/>
+                </a:solidFill>
+                <a:latin typeface="Courier"/>
+              </a:rPr>
+              <a:t>(</a:t>
+            </a:r>
+            <a:r>
+              <a:rPr>
+                <a:solidFill>
+                  <a:srgbClr val="657422"/>
+                </a:solidFill>
+                <a:latin typeface="Courier"/>
+              </a:rPr>
+              <a:t>fittedModel =</a:t>
+            </a:r>
+            <a:r>
+              <a:rPr>
+                <a:solidFill>
+                  <a:srgbClr val="003B4F"/>
+                </a:solidFill>
+                <a:latin typeface="Courier"/>
+              </a:rPr>
+              <a:t> mixed_model,</a:t>
+            </a:r>
+            <a:br/>
+            <a:r>
+              <a:rPr>
+                <a:solidFill>
+                  <a:srgbClr val="003B4F"/>
+                </a:solidFill>
+                <a:latin typeface="Courier"/>
+              </a:rPr>
+              <a:t>                                       </a:t>
+            </a:r>
+            <a:r>
+              <a:rPr>
+                <a:solidFill>
+                  <a:srgbClr val="657422"/>
+                </a:solidFill>
+                <a:latin typeface="Courier"/>
+              </a:rPr>
+              <a:t>plot =</a:t>
+            </a:r>
+            <a:r>
+              <a:rPr>
+                <a:solidFill>
+                  <a:srgbClr val="003B4F"/>
+                </a:solidFill>
+                <a:latin typeface="Courier"/>
+              </a:rPr>
+              <a:t> </a:t>
+            </a:r>
+            <a:r>
+              <a:rPr>
+                <a:solidFill>
+                  <a:srgbClr val="8F5902"/>
+                </a:solidFill>
+                <a:latin typeface="Courier"/>
+              </a:rPr>
+              <a:t>FALSE</a:t>
+            </a:r>
+            <a:r>
+              <a:rPr>
+                <a:solidFill>
+                  <a:srgbClr val="003B4F"/>
+                </a:solidFill>
+                <a:latin typeface="Courier"/>
+              </a:rPr>
+              <a:t>)</a:t>
+            </a:r>
+            <a:br/>
+            <a:br/>
+            <a:r>
+              <a:rPr>
+                <a:solidFill>
+                  <a:srgbClr val="4758AB"/>
+                </a:solidFill>
+                <a:latin typeface="Courier"/>
+              </a:rPr>
+              <a:t>plotQQunif</a:t>
+            </a:r>
+            <a:r>
+              <a:rPr>
+                <a:solidFill>
+                  <a:srgbClr val="003B4F"/>
+                </a:solidFill>
+                <a:latin typeface="Courier"/>
+              </a:rPr>
+              <a:t>(simulation_output)</a:t>
+            </a:r>
+            <a:br/>
+            <a:r>
+              <a:rPr>
+                <a:solidFill>
+                  <a:srgbClr val="4758AB"/>
+                </a:solidFill>
+                <a:latin typeface="Courier"/>
+              </a:rPr>
+              <a:t>plotResiduals</a:t>
+            </a:r>
+            <a:r>
+              <a:rPr>
+                <a:solidFill>
+                  <a:srgbClr val="003B4F"/>
+                </a:solidFill>
+                <a:latin typeface="Courier"/>
+              </a:rPr>
+              <a:t>(simulation_output)</a:t>
+            </a:r>
+            <a:br/>
+            <a:br/>
+            <a:r>
+              <a:rPr>
+                <a:solidFill>
+                  <a:srgbClr val="4758AB"/>
+                </a:solidFill>
+                <a:latin typeface="Courier"/>
+              </a:rPr>
+              <a:t>testDispersion</a:t>
+            </a:r>
+            <a:r>
+              <a:rPr>
+                <a:solidFill>
+                  <a:srgbClr val="003B4F"/>
+                </a:solidFill>
+                <a:latin typeface="Courier"/>
+              </a:rPr>
+              <a:t>(simulation_output)</a:t>
+            </a:r>
+            <a:br/>
+            <a:r>
+              <a:rPr>
+                <a:solidFill>
+                  <a:srgbClr val="4758AB"/>
+                </a:solidFill>
+                <a:latin typeface="Courier"/>
+              </a:rPr>
+              <a:t>testOutliers</a:t>
+            </a:r>
+            <a:r>
+              <a:rPr>
+                <a:solidFill>
+                  <a:srgbClr val="003B4F"/>
+                </a:solidFill>
+                <a:latin typeface="Courier"/>
+              </a:rPr>
+              <a:t>(simulation_output)</a:t>
+            </a:r>
+          </a:p>
+          <a:p>
+            <a:pPr lvl="0" indent="0" marL="0">
+              <a:buNone/>
+            </a:pPr>
+            <a:r>
+              <a:rPr b="1"/>
+              <a:t>▶ Run this</a:t>
+            </a:r>
             <a:r>
               <a:rPr/>
-              <a:t>The afex package is specifically designed for ANOVA with Type III SS</a:t>
-            </a:r>
-          </a:p>
-          <a:p>
-            <a:pPr lvl="1"/>
+              <a:t> — a couple of other useful diagnostic views:</a:t>
+            </a:r>
+          </a:p>
+          <a:p>
+            <a:pPr lvl="0" indent="0">
+              <a:buNone/>
+            </a:pPr>
+            <a:r>
+              <a:rPr>
+                <a:solidFill>
+                  <a:srgbClr val="4758AB"/>
+                </a:solidFill>
+                <a:latin typeface="Courier"/>
+              </a:rPr>
+              <a:t>plot</a:t>
+            </a:r>
+            <a:r>
+              <a:rPr>
+                <a:solidFill>
+                  <a:srgbClr val="003B4F"/>
+                </a:solidFill>
+                <a:latin typeface="Courier"/>
+              </a:rPr>
+              <a:t>(mixed_model, </a:t>
+            </a:r>
+            <a:r>
+              <a:rPr>
+                <a:solidFill>
+                  <a:srgbClr val="657422"/>
+                </a:solidFill>
+                <a:latin typeface="Courier"/>
+              </a:rPr>
+              <a:t>type =</a:t>
+            </a:r>
+            <a:r>
+              <a:rPr>
+                <a:solidFill>
+                  <a:srgbClr val="003B4F"/>
+                </a:solidFill>
+                <a:latin typeface="Courier"/>
+              </a:rPr>
+              <a:t> </a:t>
+            </a:r>
+            <a:r>
+              <a:rPr>
+                <a:solidFill>
+                  <a:srgbClr val="4758AB"/>
+                </a:solidFill>
+                <a:latin typeface="Courier"/>
+              </a:rPr>
+              <a:t>c</a:t>
+            </a:r>
+            <a:r>
+              <a:rPr>
+                <a:solidFill>
+                  <a:srgbClr val="003B4F"/>
+                </a:solidFill>
+                <a:latin typeface="Courier"/>
+              </a:rPr>
+              <a:t>(</a:t>
+            </a:r>
+            <a:r>
+              <a:rPr>
+                <a:solidFill>
+                  <a:srgbClr val="20794D"/>
+                </a:solidFill>
+                <a:latin typeface="Courier"/>
+              </a:rPr>
+              <a:t>"p"</a:t>
+            </a:r>
+            <a:r>
+              <a:rPr>
+                <a:solidFill>
+                  <a:srgbClr val="003B4F"/>
+                </a:solidFill>
+                <a:latin typeface="Courier"/>
+              </a:rPr>
+              <a:t>, </a:t>
+            </a:r>
+            <a:r>
+              <a:rPr>
+                <a:solidFill>
+                  <a:srgbClr val="20794D"/>
+                </a:solidFill>
+                <a:latin typeface="Courier"/>
+              </a:rPr>
+              <a:t>"smooth"</a:t>
+            </a:r>
+            <a:r>
+              <a:rPr>
+                <a:solidFill>
+                  <a:srgbClr val="003B4F"/>
+                </a:solidFill>
+                <a:latin typeface="Courier"/>
+              </a:rPr>
+              <a:t>))</a:t>
+            </a:r>
+            <a:br/>
+            <a:br/>
+            <a:r>
+              <a:rPr>
+                <a:solidFill>
+                  <a:srgbClr val="5E5E5E"/>
+                </a:solidFill>
+                <a:latin typeface="Courier"/>
+              </a:rPr>
+              <a:t># Cook's-distance-style influence plot (values &gt; 0.5 are worth a look)</a:t>
+            </a:r>
+            <a:br/>
+            <a:r>
+              <a:rPr>
+                <a:solidFill>
+                  <a:srgbClr val="003B4F"/>
+                </a:solidFill>
+                <a:latin typeface="Courier"/>
+              </a:rPr>
+              <a:t>car</a:t>
+            </a:r>
+            <a:r>
+              <a:rPr>
+                <a:solidFill>
+                  <a:srgbClr val="5E5E5E"/>
+                </a:solidFill>
+                <a:latin typeface="Courier"/>
+              </a:rPr>
+              <a:t>::</a:t>
+            </a:r>
+            <a:r>
+              <a:rPr>
+                <a:solidFill>
+                  <a:srgbClr val="4758AB"/>
+                </a:solidFill>
+                <a:latin typeface="Courier"/>
+              </a:rPr>
+              <a:t>influencePlot</a:t>
+            </a:r>
+            <a:r>
+              <a:rPr>
+                <a:solidFill>
+                  <a:srgbClr val="003B4F"/>
+                </a:solidFill>
+                <a:latin typeface="Courier"/>
+              </a:rPr>
+              <a:t>(mixed_model)</a:t>
+            </a:r>
+            <a:br/>
+            <a:br/>
+            <a:r>
+              <a:rPr>
+                <a:solidFill>
+                  <a:srgbClr val="5E5E5E"/>
+                </a:solidFill>
+                <a:latin typeface="Courier"/>
+              </a:rPr>
+              <a:t># Coefficient plot for the fixed effects</a:t>
+            </a:r>
+            <a:br/>
+            <a:r>
+              <a:rPr>
+                <a:solidFill>
+                  <a:srgbClr val="003B4F"/>
+                </a:solidFill>
+                <a:latin typeface="Courier"/>
+              </a:rPr>
+              <a:t>dotwhisker</a:t>
+            </a:r>
+            <a:r>
+              <a:rPr>
+                <a:solidFill>
+                  <a:srgbClr val="5E5E5E"/>
+                </a:solidFill>
+                <a:latin typeface="Courier"/>
+              </a:rPr>
+              <a:t>::</a:t>
+            </a:r>
+            <a:r>
+              <a:rPr>
+                <a:solidFill>
+                  <a:srgbClr val="4758AB"/>
+                </a:solidFill>
+                <a:latin typeface="Courier"/>
+              </a:rPr>
+              <a:t>dwplot</a:t>
+            </a:r>
+            <a:r>
+              <a:rPr>
+                <a:solidFill>
+                  <a:srgbClr val="003B4F"/>
+                </a:solidFill>
+                <a:latin typeface="Courier"/>
+              </a:rPr>
+              <a:t>(mixed_model, </a:t>
+            </a:r>
+            <a:r>
+              <a:rPr>
+                <a:solidFill>
+                  <a:srgbClr val="657422"/>
+                </a:solidFill>
+                <a:latin typeface="Courier"/>
+              </a:rPr>
+              <a:t>effects =</a:t>
+            </a:r>
+            <a:r>
+              <a:rPr>
+                <a:solidFill>
+                  <a:srgbClr val="003B4F"/>
+                </a:solidFill>
+                <a:latin typeface="Courier"/>
+              </a:rPr>
+              <a:t> </a:t>
+            </a:r>
+            <a:r>
+              <a:rPr>
+                <a:solidFill>
+                  <a:srgbClr val="20794D"/>
+                </a:solidFill>
+                <a:latin typeface="Courier"/>
+              </a:rPr>
+              <a:t>"fixed"</a:t>
+            </a:r>
+            <a:r>
+              <a:rPr>
+                <a:solidFill>
+                  <a:srgbClr val="003B4F"/>
+                </a:solidFill>
+                <a:latin typeface="Courier"/>
+              </a:rPr>
+              <a:t>) </a:t>
+            </a:r>
+            <a:r>
+              <a:rPr>
+                <a:solidFill>
+                  <a:srgbClr val="5E5E5E"/>
+                </a:solidFill>
+                <a:latin typeface="Courier"/>
+              </a:rPr>
+              <a:t>+</a:t>
+            </a:r>
+            <a:br/>
+            <a:r>
+              <a:rPr>
+                <a:solidFill>
+                  <a:srgbClr val="003B4F"/>
+                </a:solidFill>
+                <a:latin typeface="Courier"/>
+              </a:rPr>
+              <a:t>  </a:t>
+            </a:r>
+            <a:r>
+              <a:rPr>
+                <a:solidFill>
+                  <a:srgbClr val="4758AB"/>
+                </a:solidFill>
+                <a:latin typeface="Courier"/>
+              </a:rPr>
+              <a:t>geom_vline</a:t>
+            </a:r>
+            <a:r>
+              <a:rPr>
+                <a:solidFill>
+                  <a:srgbClr val="003B4F"/>
+                </a:solidFill>
+                <a:latin typeface="Courier"/>
+              </a:rPr>
+              <a:t>(</a:t>
+            </a:r>
+            <a:r>
+              <a:rPr>
+                <a:solidFill>
+                  <a:srgbClr val="657422"/>
+                </a:solidFill>
+                <a:latin typeface="Courier"/>
+              </a:rPr>
+              <a:t>xintercept =</a:t>
+            </a:r>
+            <a:r>
+              <a:rPr>
+                <a:solidFill>
+                  <a:srgbClr val="003B4F"/>
+                </a:solidFill>
+                <a:latin typeface="Courier"/>
+              </a:rPr>
+              <a:t> </a:t>
+            </a:r>
+            <a:r>
+              <a:rPr>
+                <a:solidFill>
+                  <a:srgbClr val="AD0000"/>
+                </a:solidFill>
+                <a:latin typeface="Courier"/>
+              </a:rPr>
+              <a:t>0</a:t>
+            </a:r>
+            <a:r>
+              <a:rPr>
+                <a:solidFill>
+                  <a:srgbClr val="003B4F"/>
+                </a:solidFill>
+                <a:latin typeface="Courier"/>
+              </a:rPr>
+              <a:t>, </a:t>
+            </a:r>
+            <a:r>
+              <a:rPr>
+                <a:solidFill>
+                  <a:srgbClr val="657422"/>
+                </a:solidFill>
+                <a:latin typeface="Courier"/>
+              </a:rPr>
+              <a:t>color =</a:t>
+            </a:r>
+            <a:r>
+              <a:rPr>
+                <a:solidFill>
+                  <a:srgbClr val="003B4F"/>
+                </a:solidFill>
+                <a:latin typeface="Courier"/>
+              </a:rPr>
+              <a:t> </a:t>
+            </a:r>
+            <a:r>
+              <a:rPr>
+                <a:solidFill>
+                  <a:srgbClr val="20794D"/>
+                </a:solidFill>
+                <a:latin typeface="Courier"/>
+              </a:rPr>
+              <a:t>"darkblue"</a:t>
+            </a:r>
+            <a:r>
+              <a:rPr>
+                <a:solidFill>
+                  <a:srgbClr val="003B4F"/>
+                </a:solidFill>
+                <a:latin typeface="Courier"/>
+              </a:rPr>
+              <a:t>, </a:t>
+            </a:r>
+            <a:r>
+              <a:rPr>
+                <a:solidFill>
+                  <a:srgbClr val="657422"/>
+                </a:solidFill>
+                <a:latin typeface="Courier"/>
+              </a:rPr>
+              <a:t>linewidth =</a:t>
+            </a:r>
+            <a:r>
+              <a:rPr>
+                <a:solidFill>
+                  <a:srgbClr val="003B4F"/>
+                </a:solidFill>
+                <a:latin typeface="Courier"/>
+              </a:rPr>
+              <a:t> </a:t>
+            </a:r>
+            <a:r>
+              <a:rPr>
+                <a:solidFill>
+                  <a:srgbClr val="AD0000"/>
+                </a:solidFill>
+                <a:latin typeface="Courier"/>
+              </a:rPr>
+              <a:t>1</a:t>
+            </a:r>
+            <a:r>
+              <a:rPr>
+                <a:solidFill>
+                  <a:srgbClr val="003B4F"/>
+                </a:solidFill>
+                <a:latin typeface="Courier"/>
+              </a:rPr>
+              <a:t>)</a:t>
+            </a:r>
+            <a:br/>
+            <a:br/>
+            <a:r>
+              <a:rPr>
+                <a:solidFill>
+                  <a:srgbClr val="5E5E5E"/>
+                </a:solidFill>
+                <a:latin typeface="Courier"/>
+              </a:rPr>
+              <a:t># Variance components</a:t>
+            </a:r>
+            <a:br/>
+            <a:r>
+              <a:rPr>
+                <a:solidFill>
+                  <a:srgbClr val="4758AB"/>
+                </a:solidFill>
+                <a:latin typeface="Courier"/>
+              </a:rPr>
+              <a:t>VarCorr</a:t>
+            </a:r>
+            <a:r>
+              <a:rPr>
+                <a:solidFill>
+                  <a:srgbClr val="003B4F"/>
+                </a:solidFill>
+                <a:latin typeface="Courier"/>
+              </a:rPr>
+              <a:t>(mixed_model)</a:t>
+            </a:r>
+          </a:p>
+          <a:p>
+            <a:pPr lvl="0" indent="0" marL="0">
+              <a:buNone/>
+            </a:pPr>
             <a:r>
               <a:rPr/>
-              <a:t>handles nested designs well</a:t>
+              <a:t>✏️ </a:t>
+            </a:r>
+            <a:r>
+              <a:rPr b="1"/>
+              <a:t>Your turn:</a:t>
+            </a:r>
+            <a:r>
+              <a:rPr/>
+              <a:t> From </a:t>
+            </a:r>
+            <a:r>
+              <a:rPr>
+                <a:latin typeface="Courier"/>
+              </a:rPr>
+              <a:t>VarCorr(mixed_model)</a:t>
+            </a:r>
+            <a:r>
+              <a:rPr/>
+              <a:t>, how does the variance attributed to </a:t>
+            </a:r>
+            <a:r>
+              <a:rPr>
+                <a:latin typeface="Courier"/>
+              </a:rPr>
+              <a:t>patch</a:t>
+            </a:r>
+            <a:r>
+              <a:rPr/>
+              <a:t> compare to the residual variance? What does that tell you about spatial heterogeneity in this system? </a:t>
+            </a:r>
+            <a:r>
+              <a:rPr>
+                <a:latin typeface="Courier"/>
+              </a:rPr>
+              <a:t>________________________</a:t>
+            </a:r>
+          </a:p>
+          <a:p>
+            <a:pPr lvl="0" indent="0" marL="1270000">
+              <a:buNone/>
+            </a:pPr>
+            <a:r>
+              <a:rPr sz="2000" b="1"/>
+              <a:t>Tip</a:t>
+            </a:r>
+          </a:p>
+          <a:p>
+            <a:pPr lvl="0" indent="0" marL="1270000">
+              <a:buNone/>
+            </a:pPr>
+            <a:r>
+              <a:rPr sz="2000" b="1"/>
+              <a:t>🚀 If you finish early:</a:t>
+            </a:r>
+            <a:r>
+              <a:rPr sz="2000"/>
+              <a:t> DHARMa’s </a:t>
+            </a:r>
+            <a:r>
+              <a:rPr sz="2000">
+                <a:latin typeface="Courier"/>
+              </a:rPr>
+              <a:t>testDispersion()</a:t>
+            </a:r>
+            <a:r>
+              <a:rPr sz="2000"/>
+              <a:t> checks for over/under-dispersion. Look up (</a:t>
+            </a:r>
+            <a:r>
+              <a:rPr sz="2000">
+                <a:latin typeface="Courier"/>
+              </a:rPr>
+              <a:t>?testDispersion</a:t>
+            </a:r>
+            <a:r>
+              <a:rPr sz="2000"/>
+              <a:t>) what a significant result would mean, and write a one-sentence summary.</a:t>
             </a:r>
           </a:p>
           <a:p>
@@ -5535,15 +8675,10 @@
               <a:buNone/>
             </a:pPr>
             <a:r>
-              <a:rPr>
-                <a:latin typeface="Courier"/>
-              </a:rPr>
-              <a:t>Anova Table (Type 3 tests)
-Response: algae
-      num Df den Df    MSE      F     ges  Pr(&gt;F)  
-treat      3     12 354.03 2.7171 0.40451 0.09126 .
----
-Signif. codes:  0 '***' 0.001 '**' 0.01 '*' 0.05 '.' 0.1 ' ' 1</a:t>
+              <a:rPr sz="2000">
+                <a:latin typeface="Courier"/>
+              </a:rPr>
+              <a:t>________________________________________________________</a:t>
             </a:r>
           </a:p>
         </p:txBody>
@@ -5595,7 +8730,7 @@
             </a:pPr>
             <a:r>
               <a:rPr/>
-              <a:t>Mixed Model ANOVA with random effects</a:t>
+              <a:t>Part 5 · Post-Hoc Comparisons</a:t>
             </a:r>
           </a:p>
         </p:txBody>
@@ -5615,341 +8750,281 @@
           <a:bodyPr/>
           <a:lstStyle/>
           <a:p>
-            <a:pPr lvl="0"/>
+            <a:pPr lvl="0" indent="0" marL="0">
+              <a:buNone/>
+            </a:pPr>
+            <a:r>
+              <a:rPr b="1"/>
+              <a:t>▶ Run this:</a:t>
+            </a:r>
+          </a:p>
+          <a:p>
+            <a:pPr lvl="0" indent="0">
+              <a:buNone/>
+            </a:pPr>
+            <a:r>
+              <a:rPr>
+                <a:solidFill>
+                  <a:srgbClr val="003B4F"/>
+                </a:solidFill>
+                <a:latin typeface="Courier"/>
+              </a:rPr>
+              <a:t>emm &lt;- </a:t>
+            </a:r>
+            <a:r>
+              <a:rPr>
+                <a:solidFill>
+                  <a:srgbClr val="4758AB"/>
+                </a:solidFill>
+                <a:latin typeface="Courier"/>
+              </a:rPr>
+              <a:t>emmeans</a:t>
+            </a:r>
+            <a:r>
+              <a:rPr>
+                <a:solidFill>
+                  <a:srgbClr val="003B4F"/>
+                </a:solidFill>
+                <a:latin typeface="Courier"/>
+              </a:rPr>
+              <a:t>(nested_model, </a:t>
+            </a:r>
+            <a:r>
+              <a:rPr>
+                <a:solidFill>
+                  <a:srgbClr val="5E5E5E"/>
+                </a:solidFill>
+                <a:latin typeface="Courier"/>
+              </a:rPr>
+              <a:t>~</a:t>
+            </a:r>
+            <a:r>
+              <a:rPr>
+                <a:solidFill>
+                  <a:srgbClr val="003B4F"/>
+                </a:solidFill>
+                <a:latin typeface="Courier"/>
+              </a:rPr>
+              <a:t> treat)</a:t>
+            </a:r>
+            <a:br/>
+            <a:r>
+              <a:rPr>
+                <a:solidFill>
+                  <a:srgbClr val="4758AB"/>
+                </a:solidFill>
+                <a:latin typeface="Courier"/>
+              </a:rPr>
+              <a:t>summary</a:t>
+            </a:r>
+            <a:r>
+              <a:rPr>
+                <a:solidFill>
+                  <a:srgbClr val="003B4F"/>
+                </a:solidFill>
+                <a:latin typeface="Courier"/>
+              </a:rPr>
+              <a:t>(emm)</a:t>
+            </a:r>
+            <a:br/>
+            <a:br/>
+            <a:r>
+              <a:rPr>
+                <a:solidFill>
+                  <a:srgbClr val="003B4F"/>
+                </a:solidFill>
+                <a:latin typeface="Courier"/>
+              </a:rPr>
+              <a:t>pairs_result &lt;- </a:t>
+            </a:r>
+            <a:r>
+              <a:rPr>
+                <a:solidFill>
+                  <a:srgbClr val="4758AB"/>
+                </a:solidFill>
+                <a:latin typeface="Courier"/>
+              </a:rPr>
+              <a:t>pairs</a:t>
+            </a:r>
+            <a:r>
+              <a:rPr>
+                <a:solidFill>
+                  <a:srgbClr val="003B4F"/>
+                </a:solidFill>
+                <a:latin typeface="Courier"/>
+              </a:rPr>
+              <a:t>(emm, </a:t>
+            </a:r>
+            <a:r>
+              <a:rPr>
+                <a:solidFill>
+                  <a:srgbClr val="657422"/>
+                </a:solidFill>
+                <a:latin typeface="Courier"/>
+              </a:rPr>
+              <a:t>adjust =</a:t>
+            </a:r>
+            <a:r>
+              <a:rPr>
+                <a:solidFill>
+                  <a:srgbClr val="003B4F"/>
+                </a:solidFill>
+                <a:latin typeface="Courier"/>
+              </a:rPr>
+              <a:t> </a:t>
+            </a:r>
+            <a:r>
+              <a:rPr>
+                <a:solidFill>
+                  <a:srgbClr val="20794D"/>
+                </a:solidFill>
+                <a:latin typeface="Courier"/>
+              </a:rPr>
+              <a:t>"sidak"</a:t>
+            </a:r>
+            <a:r>
+              <a:rPr>
+                <a:solidFill>
+                  <a:srgbClr val="003B4F"/>
+                </a:solidFill>
+                <a:latin typeface="Courier"/>
+              </a:rPr>
+              <a:t>)</a:t>
+            </a:r>
+            <a:br/>
+            <a:r>
+              <a:rPr>
+                <a:solidFill>
+                  <a:srgbClr val="003B4F"/>
+                </a:solidFill>
+                <a:latin typeface="Courier"/>
+              </a:rPr>
+              <a:t>pairs_result</a:t>
+            </a:r>
+            <a:br/>
+            <a:br/>
+            <a:r>
+              <a:rPr>
+                <a:solidFill>
+                  <a:srgbClr val="003B4F"/>
+                </a:solidFill>
+                <a:latin typeface="Courier"/>
+              </a:rPr>
+              <a:t>cld_result &lt;- multcomp</a:t>
+            </a:r>
+            <a:r>
+              <a:rPr>
+                <a:solidFill>
+                  <a:srgbClr val="5E5E5E"/>
+                </a:solidFill>
+                <a:latin typeface="Courier"/>
+              </a:rPr>
+              <a:t>::</a:t>
+            </a:r>
+            <a:r>
+              <a:rPr>
+                <a:solidFill>
+                  <a:srgbClr val="4758AB"/>
+                </a:solidFill>
+                <a:latin typeface="Courier"/>
+              </a:rPr>
+              <a:t>cld</a:t>
+            </a:r>
+            <a:r>
+              <a:rPr>
+                <a:solidFill>
+                  <a:srgbClr val="003B4F"/>
+                </a:solidFill>
+                <a:latin typeface="Courier"/>
+              </a:rPr>
+              <a:t>(emm, </a:t>
+            </a:r>
+            <a:r>
+              <a:rPr>
+                <a:solidFill>
+                  <a:srgbClr val="657422"/>
+                </a:solidFill>
+                <a:latin typeface="Courier"/>
+              </a:rPr>
+              <a:t>alpha =</a:t>
+            </a:r>
+            <a:r>
+              <a:rPr>
+                <a:solidFill>
+                  <a:srgbClr val="003B4F"/>
+                </a:solidFill>
+                <a:latin typeface="Courier"/>
+              </a:rPr>
+              <a:t> </a:t>
+            </a:r>
+            <a:r>
+              <a:rPr>
+                <a:solidFill>
+                  <a:srgbClr val="AD0000"/>
+                </a:solidFill>
+                <a:latin typeface="Courier"/>
+              </a:rPr>
+              <a:t>0.05</a:t>
+            </a:r>
+            <a:r>
+              <a:rPr>
+                <a:solidFill>
+                  <a:srgbClr val="003B4F"/>
+                </a:solidFill>
+                <a:latin typeface="Courier"/>
+              </a:rPr>
+              <a:t>, </a:t>
+            </a:r>
+            <a:r>
+              <a:rPr>
+                <a:solidFill>
+                  <a:srgbClr val="657422"/>
+                </a:solidFill>
+                <a:latin typeface="Courier"/>
+              </a:rPr>
+              <a:t>Letters =</a:t>
+            </a:r>
+            <a:r>
+              <a:rPr>
+                <a:solidFill>
+                  <a:srgbClr val="003B4F"/>
+                </a:solidFill>
+                <a:latin typeface="Courier"/>
+              </a:rPr>
+              <a:t> letters)</a:t>
+            </a:r>
+            <a:br/>
+            <a:r>
+              <a:rPr>
+                <a:solidFill>
+                  <a:srgbClr val="003B4F"/>
+                </a:solidFill>
+                <a:latin typeface="Courier"/>
+              </a:rPr>
+              <a:t>cld_result</a:t>
+            </a:r>
+          </a:p>
+          <a:p>
+            <a:pPr lvl="0" indent="0" marL="0">
+              <a:buNone/>
+            </a:pPr>
             <a:r>
               <a:rPr/>
-              <a:t>BOBYQA (Bound Optimization BY Quadratic Approximation)</a:t>
-            </a:r>
-          </a:p>
-          <a:p>
-            <a:pPr lvl="1"/>
+              <a:t>✏️ </a:t>
+            </a:r>
+            <a:r>
+              <a:rPr b="1"/>
+              <a:t>Your turn:</a:t>
+            </a:r>
             <a:r>
               <a:rPr/>
-              <a:t>optimization algorithm used in mixed-effects modeling</a:t>
-            </a:r>
-          </a:p>
-          <a:p>
-            <a:pPr lvl="1"/>
-            <a:r>
-              <a:rPr/>
-              <a:t>finds the best parameter values that maximize the likelihood function</a:t>
-            </a:r>
-          </a:p>
-          <a:p>
-            <a:pPr lvl="1"/>
-            <a:r>
-              <a:rPr/>
-              <a:t>especially useful when fitting complex models</a:t>
-            </a:r>
-          </a:p>
-          <a:p>
-            <a:pPr lvl="0"/>
-            <a:r>
-              <a:rPr/>
-              <a:t>So the way to code</a:t>
-            </a:r>
-          </a:p>
-          <a:p>
-            <a:pPr lvl="1"/>
-            <a:r>
-              <a:rPr/>
-              <a:t>fixed effects is to put in the variable name</a:t>
-            </a:r>
-          </a:p>
-          <a:p>
-            <a:pPr lvl="1"/>
-            <a:r>
-              <a:rPr b="1"/>
-              <a:t>random effects can be coded in a range of ways</a:t>
-            </a:r>
-          </a:p>
-          <a:p>
-            <a:pPr lvl="2"/>
-            <a:r>
-              <a:rPr/>
-              <a:t>samples within a larger grouping - treatment and subsample…</a:t>
-            </a:r>
-          </a:p>
-          <a:p>
-            <a:pPr lvl="2"/>
-          </a:p>
-          <a:p>
-            <a:pPr lvl="2"/>
-            <a:r>
-              <a:rPr b="1"/>
-              <a:t>RANDOM INTERCEPT - FIXED SLOPE - </a:t>
-            </a:r>
-            <a:r>
-              <a:rPr b="1">
-                <a:latin typeface="Courier"/>
-              </a:rPr>
-              <a:t>+ (1|random)</a:t>
-            </a:r>
-          </a:p>
-          <a:p>
-            <a:pPr lvl="3"/>
-            <a:r>
-              <a:rPr/>
-              <a:t>so color ~ fixed + (1|group)</a:t>
-            </a:r>
-          </a:p>
-          <a:p>
-            <a:pPr lvl="2"/>
-            <a:r>
-              <a:rPr b="1"/>
-              <a:t>RANDOM INTERCEPT - RANDOM SLOPE - </a:t>
-            </a:r>
-            <a:r>
-              <a:rPr b="1">
-                <a:latin typeface="Courier"/>
-              </a:rPr>
-              <a:t>+ (fixed|random)</a:t>
-            </a:r>
-          </a:p>
-          <a:p>
-            <a:pPr lvl="3"/>
-            <a:r>
-              <a:rPr/>
-              <a:t>so color ~ fixed + (fixed|group)</a:t>
-            </a:r>
-          </a:p>
-          <a:p>
-            <a:pPr lvl="3"/>
-            <a:r>
-              <a:rPr/>
-              <a:t>equivalent to </a:t>
-            </a:r>
-            <a:r>
-              <a:rPr>
-                <a:latin typeface="Courier"/>
-              </a:rPr>
-              <a:t>algae ~ treat + (1 + fixed | random)</a:t>
-            </a:r>
-          </a:p>
-          <a:p>
-            <a:pPr lvl="1"/>
-            <a:r>
-              <a:rPr b="1"/>
-              <a:t>Nested Design</a:t>
-            </a:r>
-            <a:r>
-              <a:rPr/>
-              <a:t> - such that a sample can exist only within a larger grouping</a:t>
-            </a:r>
-          </a:p>
-          <a:p>
-            <a:pPr lvl="1"/>
-          </a:p>
-          <a:p>
-            <a:pPr lvl="2"/>
-            <a:r>
-              <a:rPr b="1"/>
-              <a:t>RANDOM INTERCEPT - FIXED SLOPE -</a:t>
-            </a:r>
-            <a:r>
-              <a:rPr/>
-              <a:t> </a:t>
-            </a:r>
-            <a:r>
-              <a:rPr>
-                <a:latin typeface="Courier"/>
-              </a:rPr>
-              <a:t>y ~ color + (1|green_box/grey_box)</a:t>
-            </a:r>
-          </a:p>
-          <a:p>
-            <a:pPr lvl="2"/>
-            <a:r>
-              <a:rPr>
-                <a:latin typeface="Courier"/>
-              </a:rPr>
-              <a:t>y ~ color + (1 | greenbox) + (1 | green_box:grey_box)</a:t>
-            </a:r>
-            <a:r>
-              <a:rPr/>
-              <a:t>. It models random variation in the intercept for each patch, and also for each quadrat within each patch</a:t>
-            </a:r>
-          </a:p>
-          <a:p>
-            <a:pPr lvl="2"/>
-            <a:r>
-              <a:rPr b="1"/>
-              <a:t>RANDOM INTERCEPT - RANDOM SLOPE</a:t>
-            </a:r>
-            <a:r>
-              <a:rPr/>
-              <a:t> </a:t>
-            </a:r>
-            <a:r>
-              <a:rPr>
-                <a:latin typeface="Courier"/>
-              </a:rPr>
-              <a:t>y ~ color + (color|green_box/grey_box)</a:t>
-            </a:r>
-          </a:p>
-          <a:p>
-            <a:pPr lvl="1"/>
-            <a:r>
-              <a:rPr/>
-              <a:t>Fully crossed design</a:t>
-            </a:r>
-          </a:p>
-          <a:p>
-            <a:pPr lvl="2"/>
-          </a:p>
-          <a:p>
-            <a:pPr lvl="3"/>
-            <a:r>
-              <a:rPr/>
-              <a:t>crossed design </a:t>
-            </a:r>
-            <a:r>
-              <a:rPr b="1"/>
-              <a:t>random intercept and random slope</a:t>
-            </a:r>
-          </a:p>
-          <a:p>
-            <a:pPr lvl="4"/>
-            <a:r>
-              <a:rPr/>
-              <a:t>y ~ color + (1 | green_box) + (1 | gray_box)</a:t>
-            </a:r>
-          </a:p>
-          <a:p>
-            <a:pPr lvl="3"/>
-            <a:r>
-              <a:rPr/>
-              <a:t>crossed design </a:t>
-            </a:r>
-            <a:r>
-              <a:rPr b="1"/>
-              <a:t>random intercept and random slope</a:t>
-            </a:r>
-            <a:br/>
-            <a:r>
-              <a:rPr>
-                <a:latin typeface="Courier"/>
-              </a:rPr>
-              <a:t>y~ color + (color|green_box) + (color|gray_box)</a:t>
-            </a:r>
-          </a:p>
-          <a:p>
-            <a:pPr lvl="4"/>
-            <a:r>
-              <a:rPr>
-                <a:latin typeface="Courier"/>
-              </a:rPr>
-              <a:t>(color | green_box)</a:t>
-            </a:r>
-            <a:r>
-              <a:rPr/>
-              <a:t> is shorthand for </a:t>
-            </a:r>
-            <a:r>
-              <a:rPr>
-                <a:latin typeface="Courier"/>
-              </a:rPr>
-              <a:t>(1 + color | green_box)</a:t>
-            </a:r>
-            <a:r>
-              <a:rPr/>
-              <a:t>. This part of the formula specifies a random intercept and a random slope for the </a:t>
-            </a:r>
-            <a:r>
-              <a:rPr>
-                <a:latin typeface="Courier"/>
-              </a:rPr>
-              <a:t>color</a:t>
-            </a:r>
-            <a:r>
-              <a:rPr/>
-              <a:t> variable within the levels of </a:t>
-            </a:r>
-            <a:r>
-              <a:rPr>
-                <a:latin typeface="Courier"/>
-              </a:rPr>
-              <a:t>green_box</a:t>
-            </a:r>
-            <a:r>
-              <a:rPr/>
-              <a:t>.</a:t>
-            </a:r>
-          </a:p>
-          <a:p>
-            <a:pPr lvl="4"/>
-            <a:r>
-              <a:rPr>
-                <a:latin typeface="Courier"/>
-              </a:rPr>
-              <a:t>(color | gray_box)</a:t>
-            </a:r>
-            <a:r>
-              <a:rPr/>
-              <a:t> is shorthand for </a:t>
-            </a:r>
-            <a:r>
-              <a:rPr>
-                <a:latin typeface="Courier"/>
-              </a:rPr>
-              <a:t>(1 + color | gray_box)</a:t>
-            </a:r>
-            <a:r>
-              <a:rPr/>
-              <a:t>. Similarly, this specifies a random intercept and a random slope for </a:t>
-            </a:r>
-            <a:r>
-              <a:rPr>
-                <a:latin typeface="Courier"/>
-              </a:rPr>
-              <a:t>color</a:t>
-            </a:r>
-            <a:r>
-              <a:rPr/>
-              <a:t> within the levels of </a:t>
-            </a:r>
-            <a:r>
-              <a:rPr>
-                <a:latin typeface="Courier"/>
-              </a:rPr>
-              <a:t>gray_box</a:t>
-            </a:r>
-          </a:p>
-          <a:p>
-            <a:pPr lvl="0" indent="0">
-              <a:buNone/>
-            </a:pPr>
-            <a:r>
-              <a:rPr>
-                <a:latin typeface="Courier"/>
-              </a:rPr>
-              <a:t>Linear mixed model fit by REML. t-tests use Satterthwaite's method [
-lmerModLmerTest]
-Formula: algae ~ treat + (1 | patch)
-   Data: u_df
-Control: lmerControl(calc.derivs = FALSE)
-REML criterion at convergence: 682.2
-Scaled residuals: 
-    Min      1Q  Median      3Q     Max 
--1.9808 -0.3106 -0.1093  0.2831  2.5910 
-Random effects:
- Groups   Name        Variance Std.Dev.
- patch    (Intercept) 294.3    17.16   
- Residual             298.6    17.28   
-Number of obs: 80, groups:  patch, 16
-Fixed effects:
-            Estimate Std. Error      df t value Pr(&gt;|t|)   
-(Intercept)   39.200      9.408  12.000   4.167  0.00131 **
-treatlow     -17.650     13.305  12.000  -1.327  0.20934   
-treatmedium  -20.200     13.305  12.000  -1.518  0.15485   
-treathigh    -37.900     13.305  12.000  -2.849  0.01466 * 
----
-Signif. codes:  0 '***' 0.001 '**' 0.01 '*' 0.05 '.' 0.1 ' ' 1
-Correlation of Fixed Effects:
-            (Intr) tretlw trtmdm
-treatlow    -0.707              
-treatmedium -0.707  0.500       
-treathigh   -0.707  0.500  0.500</a:t>
+              <a:t> Mean algae cover for Control (1.30%) looks much lower than the reduced-density treatments (66%: 21.55%, 33%: 19.00%, Removed: 39.20%). Based on your compact letter display, are any of those differences actually statistically significant at α = 0.05? </a:t>
+            </a:r>
+            <a:r>
+              <a:rPr>
+                <a:latin typeface="Courier"/>
+              </a:rPr>
+              <a:t>________________________</a:t>
             </a:r>
           </a:p>
         </p:txBody>
@@ -6001,7 +9076,7 @@
             </a:pPr>
             <a:r>
               <a:rPr/>
-              <a:t>Mixed Model ANOVA with Random Effects</a:t>
+              <a:t>Part 6 · Visualization and Reporting</a:t>
             </a:r>
           </a:p>
         </p:txBody>
@@ -6021,122 +9096,2316 @@
           <a:bodyPr/>
           <a:lstStyle/>
           <a:p>
-            <a:pPr lvl="0"/>
+            <a:pPr lvl="0" indent="0" marL="0">
+              <a:buNone/>
+            </a:pPr>
             <a:r>
               <a:rPr b="1"/>
-              <a:t>METHOD 1 - the F-distribution with estimated degrees of freedom</a:t>
-            </a:r>
-          </a:p>
-          <a:p>
-            <a:pPr lvl="1"/>
+              <a:t>▶ Run this</a:t>
+            </a:r>
             <a:r>
               <a:rPr/>
-              <a:t>Accounts for the uncertainty in variance component estimation</a:t>
-            </a:r>
-          </a:p>
-          <a:p>
-            <a:pPr lvl="1"/>
+              <a:t> — a publication-style boxplot:</a:t>
+            </a:r>
+          </a:p>
+          <a:p>
+            <a:pPr lvl="0" indent="0">
+              <a:buNone/>
+            </a:pPr>
+            <a:r>
+              <a:rPr>
+                <a:solidFill>
+                  <a:srgbClr val="4758AB"/>
+                </a:solidFill>
+                <a:latin typeface="Courier"/>
+              </a:rPr>
+              <a:t>ggplot</a:t>
+            </a:r>
+            <a:r>
+              <a:rPr>
+                <a:solidFill>
+                  <a:srgbClr val="003B4F"/>
+                </a:solidFill>
+                <a:latin typeface="Courier"/>
+              </a:rPr>
+              <a:t>(u_df, </a:t>
+            </a:r>
+            <a:r>
+              <a:rPr>
+                <a:solidFill>
+                  <a:srgbClr val="4758AB"/>
+                </a:solidFill>
+                <a:latin typeface="Courier"/>
+              </a:rPr>
+              <a:t>aes</a:t>
+            </a:r>
+            <a:r>
+              <a:rPr>
+                <a:solidFill>
+                  <a:srgbClr val="003B4F"/>
+                </a:solidFill>
+                <a:latin typeface="Courier"/>
+              </a:rPr>
+              <a:t>(</a:t>
+            </a:r>
+            <a:r>
+              <a:rPr>
+                <a:solidFill>
+                  <a:srgbClr val="657422"/>
+                </a:solidFill>
+                <a:latin typeface="Courier"/>
+              </a:rPr>
+              <a:t>x =</a:t>
+            </a:r>
+            <a:r>
+              <a:rPr>
+                <a:solidFill>
+                  <a:srgbClr val="003B4F"/>
+                </a:solidFill>
+                <a:latin typeface="Courier"/>
+              </a:rPr>
+              <a:t> treat, </a:t>
+            </a:r>
+            <a:r>
+              <a:rPr>
+                <a:solidFill>
+                  <a:srgbClr val="657422"/>
+                </a:solidFill>
+                <a:latin typeface="Courier"/>
+              </a:rPr>
+              <a:t>y =</a:t>
+            </a:r>
+            <a:r>
+              <a:rPr>
+                <a:solidFill>
+                  <a:srgbClr val="003B4F"/>
+                </a:solidFill>
+                <a:latin typeface="Courier"/>
+              </a:rPr>
+              <a:t> algae, </a:t>
+            </a:r>
+            <a:r>
+              <a:rPr>
+                <a:solidFill>
+                  <a:srgbClr val="657422"/>
+                </a:solidFill>
+                <a:latin typeface="Courier"/>
+              </a:rPr>
+              <a:t>fill =</a:t>
+            </a:r>
+            <a:r>
+              <a:rPr>
+                <a:solidFill>
+                  <a:srgbClr val="003B4F"/>
+                </a:solidFill>
+                <a:latin typeface="Courier"/>
+              </a:rPr>
+              <a:t> treat)) </a:t>
+            </a:r>
+            <a:r>
+              <a:rPr>
+                <a:solidFill>
+                  <a:srgbClr val="5E5E5E"/>
+                </a:solidFill>
+                <a:latin typeface="Courier"/>
+              </a:rPr>
+              <a:t>+</a:t>
+            </a:r>
+            <a:br/>
+            <a:r>
+              <a:rPr>
+                <a:solidFill>
+                  <a:srgbClr val="003B4F"/>
+                </a:solidFill>
+                <a:latin typeface="Courier"/>
+              </a:rPr>
+              <a:t>  </a:t>
+            </a:r>
+            <a:r>
+              <a:rPr>
+                <a:solidFill>
+                  <a:srgbClr val="4758AB"/>
+                </a:solidFill>
+                <a:latin typeface="Courier"/>
+              </a:rPr>
+              <a:t>geom_boxplot</a:t>
+            </a:r>
+            <a:r>
+              <a:rPr>
+                <a:solidFill>
+                  <a:srgbClr val="003B4F"/>
+                </a:solidFill>
+                <a:latin typeface="Courier"/>
+              </a:rPr>
+              <a:t>(</a:t>
+            </a:r>
+            <a:r>
+              <a:rPr>
+                <a:solidFill>
+                  <a:srgbClr val="657422"/>
+                </a:solidFill>
+                <a:latin typeface="Courier"/>
+              </a:rPr>
+              <a:t>alpha =</a:t>
+            </a:r>
+            <a:r>
+              <a:rPr>
+                <a:solidFill>
+                  <a:srgbClr val="003B4F"/>
+                </a:solidFill>
+                <a:latin typeface="Courier"/>
+              </a:rPr>
+              <a:t> </a:t>
+            </a:r>
+            <a:r>
+              <a:rPr>
+                <a:solidFill>
+                  <a:srgbClr val="AD0000"/>
+                </a:solidFill>
+                <a:latin typeface="Courier"/>
+              </a:rPr>
+              <a:t>0.7</a:t>
+            </a:r>
+            <a:r>
+              <a:rPr>
+                <a:solidFill>
+                  <a:srgbClr val="003B4F"/>
+                </a:solidFill>
+                <a:latin typeface="Courier"/>
+              </a:rPr>
+              <a:t>, </a:t>
+            </a:r>
+            <a:r>
+              <a:rPr>
+                <a:solidFill>
+                  <a:srgbClr val="657422"/>
+                </a:solidFill>
+                <a:latin typeface="Courier"/>
+              </a:rPr>
+              <a:t>outlier.shape =</a:t>
+            </a:r>
+            <a:r>
+              <a:rPr>
+                <a:solidFill>
+                  <a:srgbClr val="003B4F"/>
+                </a:solidFill>
+                <a:latin typeface="Courier"/>
+              </a:rPr>
+              <a:t> </a:t>
+            </a:r>
+            <a:r>
+              <a:rPr>
+                <a:solidFill>
+                  <a:srgbClr val="8F5902"/>
+                </a:solidFill>
+                <a:latin typeface="Courier"/>
+              </a:rPr>
+              <a:t>NA</a:t>
+            </a:r>
+            <a:r>
+              <a:rPr>
+                <a:solidFill>
+                  <a:srgbClr val="003B4F"/>
+                </a:solidFill>
+                <a:latin typeface="Courier"/>
+              </a:rPr>
+              <a:t>) </a:t>
+            </a:r>
+            <a:r>
+              <a:rPr>
+                <a:solidFill>
+                  <a:srgbClr val="5E5E5E"/>
+                </a:solidFill>
+                <a:latin typeface="Courier"/>
+              </a:rPr>
+              <a:t>+</a:t>
+            </a:r>
+            <a:br/>
+            <a:r>
+              <a:rPr>
+                <a:solidFill>
+                  <a:srgbClr val="003B4F"/>
+                </a:solidFill>
+                <a:latin typeface="Courier"/>
+              </a:rPr>
+              <a:t>  </a:t>
+            </a:r>
+            <a:r>
+              <a:rPr>
+                <a:solidFill>
+                  <a:srgbClr val="4758AB"/>
+                </a:solidFill>
+                <a:latin typeface="Courier"/>
+              </a:rPr>
+              <a:t>geom_jitter</a:t>
+            </a:r>
+            <a:r>
+              <a:rPr>
+                <a:solidFill>
+                  <a:srgbClr val="003B4F"/>
+                </a:solidFill>
+                <a:latin typeface="Courier"/>
+              </a:rPr>
+              <a:t>(</a:t>
+            </a:r>
+            <a:r>
+              <a:rPr>
+                <a:solidFill>
+                  <a:srgbClr val="657422"/>
+                </a:solidFill>
+                <a:latin typeface="Courier"/>
+              </a:rPr>
+              <a:t>width =</a:t>
+            </a:r>
+            <a:r>
+              <a:rPr>
+                <a:solidFill>
+                  <a:srgbClr val="003B4F"/>
+                </a:solidFill>
+                <a:latin typeface="Courier"/>
+              </a:rPr>
+              <a:t> </a:t>
+            </a:r>
+            <a:r>
+              <a:rPr>
+                <a:solidFill>
+                  <a:srgbClr val="AD0000"/>
+                </a:solidFill>
+                <a:latin typeface="Courier"/>
+              </a:rPr>
+              <a:t>0.2</a:t>
+            </a:r>
+            <a:r>
+              <a:rPr>
+                <a:solidFill>
+                  <a:srgbClr val="003B4F"/>
+                </a:solidFill>
+                <a:latin typeface="Courier"/>
+              </a:rPr>
+              <a:t>, </a:t>
+            </a:r>
+            <a:r>
+              <a:rPr>
+                <a:solidFill>
+                  <a:srgbClr val="657422"/>
+                </a:solidFill>
+                <a:latin typeface="Courier"/>
+              </a:rPr>
+              <a:t>alpha =</a:t>
+            </a:r>
+            <a:r>
+              <a:rPr>
+                <a:solidFill>
+                  <a:srgbClr val="003B4F"/>
+                </a:solidFill>
+                <a:latin typeface="Courier"/>
+              </a:rPr>
+              <a:t> </a:t>
+            </a:r>
+            <a:r>
+              <a:rPr>
+                <a:solidFill>
+                  <a:srgbClr val="AD0000"/>
+                </a:solidFill>
+                <a:latin typeface="Courier"/>
+              </a:rPr>
+              <a:t>0.4</a:t>
+            </a:r>
+            <a:r>
+              <a:rPr>
+                <a:solidFill>
+                  <a:srgbClr val="003B4F"/>
+                </a:solidFill>
+                <a:latin typeface="Courier"/>
+              </a:rPr>
+              <a:t>, </a:t>
+            </a:r>
+            <a:r>
+              <a:rPr>
+                <a:solidFill>
+                  <a:srgbClr val="657422"/>
+                </a:solidFill>
+                <a:latin typeface="Courier"/>
+              </a:rPr>
+              <a:t>size =</a:t>
+            </a:r>
+            <a:r>
+              <a:rPr>
+                <a:solidFill>
+                  <a:srgbClr val="003B4F"/>
+                </a:solidFill>
+                <a:latin typeface="Courier"/>
+              </a:rPr>
+              <a:t> </a:t>
+            </a:r>
+            <a:r>
+              <a:rPr>
+                <a:solidFill>
+                  <a:srgbClr val="AD0000"/>
+                </a:solidFill>
+                <a:latin typeface="Courier"/>
+              </a:rPr>
+              <a:t>1</a:t>
+            </a:r>
+            <a:r>
+              <a:rPr>
+                <a:solidFill>
+                  <a:srgbClr val="003B4F"/>
+                </a:solidFill>
+                <a:latin typeface="Courier"/>
+              </a:rPr>
+              <a:t>) </a:t>
+            </a:r>
+            <a:r>
+              <a:rPr>
+                <a:solidFill>
+                  <a:srgbClr val="5E5E5E"/>
+                </a:solidFill>
+                <a:latin typeface="Courier"/>
+              </a:rPr>
+              <a:t>+</a:t>
+            </a:r>
+            <a:br/>
+            <a:r>
+              <a:rPr>
+                <a:solidFill>
+                  <a:srgbClr val="003B4F"/>
+                </a:solidFill>
+                <a:latin typeface="Courier"/>
+              </a:rPr>
+              <a:t>  </a:t>
+            </a:r>
+            <a:r>
+              <a:rPr>
+                <a:solidFill>
+                  <a:srgbClr val="4758AB"/>
+                </a:solidFill>
+                <a:latin typeface="Courier"/>
+              </a:rPr>
+              <a:t>scale_fill_viridis_d</a:t>
+            </a:r>
+            <a:r>
+              <a:rPr>
+                <a:solidFill>
+                  <a:srgbClr val="003B4F"/>
+                </a:solidFill>
+                <a:latin typeface="Courier"/>
+              </a:rPr>
+              <a:t>(</a:t>
+            </a:r>
+            <a:r>
+              <a:rPr>
+                <a:solidFill>
+                  <a:srgbClr val="657422"/>
+                </a:solidFill>
+                <a:latin typeface="Courier"/>
+              </a:rPr>
+              <a:t>option =</a:t>
+            </a:r>
+            <a:r>
+              <a:rPr>
+                <a:solidFill>
+                  <a:srgbClr val="003B4F"/>
+                </a:solidFill>
+                <a:latin typeface="Courier"/>
+              </a:rPr>
+              <a:t> </a:t>
+            </a:r>
+            <a:r>
+              <a:rPr>
+                <a:solidFill>
+                  <a:srgbClr val="20794D"/>
+                </a:solidFill>
+                <a:latin typeface="Courier"/>
+              </a:rPr>
+              <a:t>"D"</a:t>
+            </a:r>
+            <a:r>
+              <a:rPr>
+                <a:solidFill>
+                  <a:srgbClr val="003B4F"/>
+                </a:solidFill>
+                <a:latin typeface="Courier"/>
+              </a:rPr>
+              <a:t>, </a:t>
+            </a:r>
+            <a:r>
+              <a:rPr>
+                <a:solidFill>
+                  <a:srgbClr val="657422"/>
+                </a:solidFill>
+                <a:latin typeface="Courier"/>
+              </a:rPr>
+              <a:t>end =</a:t>
+            </a:r>
+            <a:r>
+              <a:rPr>
+                <a:solidFill>
+                  <a:srgbClr val="003B4F"/>
+                </a:solidFill>
+                <a:latin typeface="Courier"/>
+              </a:rPr>
+              <a:t> </a:t>
+            </a:r>
+            <a:r>
+              <a:rPr>
+                <a:solidFill>
+                  <a:srgbClr val="AD0000"/>
+                </a:solidFill>
+                <a:latin typeface="Courier"/>
+              </a:rPr>
+              <a:t>0.85</a:t>
+            </a:r>
+            <a:r>
+              <a:rPr>
+                <a:solidFill>
+                  <a:srgbClr val="003B4F"/>
+                </a:solidFill>
+                <a:latin typeface="Courier"/>
+              </a:rPr>
+              <a:t>) </a:t>
+            </a:r>
+            <a:r>
+              <a:rPr>
+                <a:solidFill>
+                  <a:srgbClr val="5E5E5E"/>
+                </a:solidFill>
+                <a:latin typeface="Courier"/>
+              </a:rPr>
+              <a:t>+</a:t>
+            </a:r>
+            <a:br/>
+            <a:r>
+              <a:rPr>
+                <a:solidFill>
+                  <a:srgbClr val="003B4F"/>
+                </a:solidFill>
+                <a:latin typeface="Courier"/>
+              </a:rPr>
+              <a:t>  </a:t>
+            </a:r>
+            <a:r>
+              <a:rPr>
+                <a:solidFill>
+                  <a:srgbClr val="4758AB"/>
+                </a:solidFill>
+                <a:latin typeface="Courier"/>
+              </a:rPr>
+              <a:t>labs</a:t>
+            </a:r>
+            <a:r>
+              <a:rPr>
+                <a:solidFill>
+                  <a:srgbClr val="003B4F"/>
+                </a:solidFill>
+                <a:latin typeface="Courier"/>
+              </a:rPr>
+              <a:t>(</a:t>
+            </a:r>
+            <a:br/>
+            <a:r>
+              <a:rPr>
+                <a:solidFill>
+                  <a:srgbClr val="003B4F"/>
+                </a:solidFill>
+                <a:latin typeface="Courier"/>
+              </a:rPr>
+              <a:t>    </a:t>
+            </a:r>
+            <a:r>
+              <a:rPr>
+                <a:solidFill>
+                  <a:srgbClr val="657422"/>
+                </a:solidFill>
+                <a:latin typeface="Courier"/>
+              </a:rPr>
+              <a:t>title =</a:t>
+            </a:r>
+            <a:r>
+              <a:rPr>
+                <a:solidFill>
+                  <a:srgbClr val="003B4F"/>
+                </a:solidFill>
+                <a:latin typeface="Courier"/>
+              </a:rPr>
+              <a:t> </a:t>
+            </a:r>
+            <a:r>
+              <a:rPr>
+                <a:solidFill>
+                  <a:srgbClr val="20794D"/>
+                </a:solidFill>
+                <a:latin typeface="Courier"/>
+              </a:rPr>
+              <a:t>"Effect of Urchin Density on Filamentous Algae Cover"</a:t>
+            </a:r>
+            <a:r>
+              <a:rPr>
+                <a:solidFill>
+                  <a:srgbClr val="003B4F"/>
+                </a:solidFill>
+                <a:latin typeface="Courier"/>
+              </a:rPr>
+              <a:t>,</a:t>
+            </a:r>
+            <a:br/>
+            <a:r>
+              <a:rPr>
+                <a:solidFill>
+                  <a:srgbClr val="003B4F"/>
+                </a:solidFill>
+                <a:latin typeface="Courier"/>
+              </a:rPr>
+              <a:t>    </a:t>
+            </a:r>
+            <a:r>
+              <a:rPr>
+                <a:solidFill>
+                  <a:srgbClr val="657422"/>
+                </a:solidFill>
+                <a:latin typeface="Courier"/>
+              </a:rPr>
+              <a:t>x =</a:t>
+            </a:r>
+            <a:r>
+              <a:rPr>
+                <a:solidFill>
+                  <a:srgbClr val="003B4F"/>
+                </a:solidFill>
+                <a:latin typeface="Courier"/>
+              </a:rPr>
+              <a:t> </a:t>
+            </a:r>
+            <a:r>
+              <a:rPr>
+                <a:solidFill>
+                  <a:srgbClr val="20794D"/>
+                </a:solidFill>
+                <a:latin typeface="Courier"/>
+              </a:rPr>
+              <a:t>"Urchin Density Treatment"</a:t>
+            </a:r>
+            <a:r>
+              <a:rPr>
+                <a:solidFill>
+                  <a:srgbClr val="003B4F"/>
+                </a:solidFill>
+                <a:latin typeface="Courier"/>
+              </a:rPr>
+              <a:t>,</a:t>
+            </a:r>
+            <a:br/>
+            <a:r>
+              <a:rPr>
+                <a:solidFill>
+                  <a:srgbClr val="003B4F"/>
+                </a:solidFill>
+                <a:latin typeface="Courier"/>
+              </a:rPr>
+              <a:t>    </a:t>
+            </a:r>
+            <a:r>
+              <a:rPr>
+                <a:solidFill>
+                  <a:srgbClr val="657422"/>
+                </a:solidFill>
+                <a:latin typeface="Courier"/>
+              </a:rPr>
+              <a:t>y =</a:t>
+            </a:r>
+            <a:r>
+              <a:rPr>
+                <a:solidFill>
+                  <a:srgbClr val="003B4F"/>
+                </a:solidFill>
+                <a:latin typeface="Courier"/>
+              </a:rPr>
+              <a:t> </a:t>
+            </a:r>
+            <a:r>
+              <a:rPr>
+                <a:solidFill>
+                  <a:srgbClr val="20794D"/>
+                </a:solidFill>
+                <a:latin typeface="Courier"/>
+              </a:rPr>
+              <a:t>"Filamentous Algae Cover (%)"</a:t>
+            </a:r>
+            <a:r>
+              <a:rPr>
+                <a:solidFill>
+                  <a:srgbClr val="003B4F"/>
+                </a:solidFill>
+                <a:latin typeface="Courier"/>
+              </a:rPr>
+              <a:t>,</a:t>
+            </a:r>
+            <a:br/>
+            <a:r>
+              <a:rPr>
+                <a:solidFill>
+                  <a:srgbClr val="003B4F"/>
+                </a:solidFill>
+                <a:latin typeface="Courier"/>
+              </a:rPr>
+              <a:t>    </a:t>
+            </a:r>
+            <a:r>
+              <a:rPr>
+                <a:solidFill>
+                  <a:srgbClr val="657422"/>
+                </a:solidFill>
+                <a:latin typeface="Courier"/>
+              </a:rPr>
+              <a:t>caption =</a:t>
+            </a:r>
+            <a:r>
+              <a:rPr>
+                <a:solidFill>
+                  <a:srgbClr val="003B4F"/>
+                </a:solidFill>
+                <a:latin typeface="Courier"/>
+              </a:rPr>
+              <a:t> </a:t>
+            </a:r>
+            <a:r>
+              <a:rPr>
+                <a:solidFill>
+                  <a:srgbClr val="20794D"/>
+                </a:solidFill>
+                <a:latin typeface="Courier"/>
+              </a:rPr>
+              <a:t>"Boxplots showing the distribution of algal cover across urchin density treatments."</a:t>
+            </a:r>
+            <a:br/>
+            <a:r>
+              <a:rPr>
+                <a:solidFill>
+                  <a:srgbClr val="003B4F"/>
+                </a:solidFill>
+                <a:latin typeface="Courier"/>
+              </a:rPr>
+              <a:t>  ) </a:t>
+            </a:r>
+            <a:r>
+              <a:rPr>
+                <a:solidFill>
+                  <a:srgbClr val="5E5E5E"/>
+                </a:solidFill>
+                <a:latin typeface="Courier"/>
+              </a:rPr>
+              <a:t>+</a:t>
+            </a:r>
+            <a:br/>
+            <a:r>
+              <a:rPr>
+                <a:solidFill>
+                  <a:srgbClr val="003B4F"/>
+                </a:solidFill>
+                <a:latin typeface="Courier"/>
+              </a:rPr>
+              <a:t>  </a:t>
+            </a:r>
+            <a:r>
+              <a:rPr>
+                <a:solidFill>
+                  <a:srgbClr val="4758AB"/>
+                </a:solidFill>
+                <a:latin typeface="Courier"/>
+              </a:rPr>
+              <a:t>theme</a:t>
+            </a:r>
+            <a:r>
+              <a:rPr>
+                <a:solidFill>
+                  <a:srgbClr val="003B4F"/>
+                </a:solidFill>
+                <a:latin typeface="Courier"/>
+              </a:rPr>
+              <a:t>(</a:t>
+            </a:r>
+            <a:br/>
+            <a:r>
+              <a:rPr>
+                <a:solidFill>
+                  <a:srgbClr val="003B4F"/>
+                </a:solidFill>
+                <a:latin typeface="Courier"/>
+              </a:rPr>
+              <a:t>    </a:t>
+            </a:r>
+            <a:r>
+              <a:rPr>
+                <a:solidFill>
+                  <a:srgbClr val="657422"/>
+                </a:solidFill>
+                <a:latin typeface="Courier"/>
+              </a:rPr>
+              <a:t>legend.position =</a:t>
+            </a:r>
+            <a:r>
+              <a:rPr>
+                <a:solidFill>
+                  <a:srgbClr val="003B4F"/>
+                </a:solidFill>
+                <a:latin typeface="Courier"/>
+              </a:rPr>
+              <a:t> </a:t>
+            </a:r>
+            <a:r>
+              <a:rPr>
+                <a:solidFill>
+                  <a:srgbClr val="20794D"/>
+                </a:solidFill>
+                <a:latin typeface="Courier"/>
+              </a:rPr>
+              <a:t>"none"</a:t>
+            </a:r>
+            <a:r>
+              <a:rPr>
+                <a:solidFill>
+                  <a:srgbClr val="003B4F"/>
+                </a:solidFill>
+                <a:latin typeface="Courier"/>
+              </a:rPr>
+              <a:t>,</a:t>
+            </a:r>
+            <a:br/>
+            <a:r>
+              <a:rPr>
+                <a:solidFill>
+                  <a:srgbClr val="003B4F"/>
+                </a:solidFill>
+                <a:latin typeface="Courier"/>
+              </a:rPr>
+              <a:t>    </a:t>
+            </a:r>
+            <a:r>
+              <a:rPr>
+                <a:solidFill>
+                  <a:srgbClr val="657422"/>
+                </a:solidFill>
+                <a:latin typeface="Courier"/>
+              </a:rPr>
+              <a:t>plot.title =</a:t>
+            </a:r>
+            <a:r>
+              <a:rPr>
+                <a:solidFill>
+                  <a:srgbClr val="003B4F"/>
+                </a:solidFill>
+                <a:latin typeface="Courier"/>
+              </a:rPr>
+              <a:t> </a:t>
+            </a:r>
+            <a:r>
+              <a:rPr>
+                <a:solidFill>
+                  <a:srgbClr val="4758AB"/>
+                </a:solidFill>
+                <a:latin typeface="Courier"/>
+              </a:rPr>
+              <a:t>element_text</a:t>
+            </a:r>
+            <a:r>
+              <a:rPr>
+                <a:solidFill>
+                  <a:srgbClr val="003B4F"/>
+                </a:solidFill>
+                <a:latin typeface="Courier"/>
+              </a:rPr>
+              <a:t>(</a:t>
+            </a:r>
+            <a:r>
+              <a:rPr>
+                <a:solidFill>
+                  <a:srgbClr val="657422"/>
+                </a:solidFill>
+                <a:latin typeface="Courier"/>
+              </a:rPr>
+              <a:t>face =</a:t>
+            </a:r>
+            <a:r>
+              <a:rPr>
+                <a:solidFill>
+                  <a:srgbClr val="003B4F"/>
+                </a:solidFill>
+                <a:latin typeface="Courier"/>
+              </a:rPr>
+              <a:t> </a:t>
+            </a:r>
+            <a:r>
+              <a:rPr>
+                <a:solidFill>
+                  <a:srgbClr val="20794D"/>
+                </a:solidFill>
+                <a:latin typeface="Courier"/>
+              </a:rPr>
+              <a:t>"bold"</a:t>
+            </a:r>
+            <a:r>
+              <a:rPr>
+                <a:solidFill>
+                  <a:srgbClr val="003B4F"/>
+                </a:solidFill>
+                <a:latin typeface="Courier"/>
+              </a:rPr>
+              <a:t>, </a:t>
+            </a:r>
+            <a:r>
+              <a:rPr>
+                <a:solidFill>
+                  <a:srgbClr val="657422"/>
+                </a:solidFill>
+                <a:latin typeface="Courier"/>
+              </a:rPr>
+              <a:t>size =</a:t>
+            </a:r>
+            <a:r>
+              <a:rPr>
+                <a:solidFill>
+                  <a:srgbClr val="003B4F"/>
+                </a:solidFill>
+                <a:latin typeface="Courier"/>
+              </a:rPr>
+              <a:t> </a:t>
+            </a:r>
+            <a:r>
+              <a:rPr>
+                <a:solidFill>
+                  <a:srgbClr val="AD0000"/>
+                </a:solidFill>
+                <a:latin typeface="Courier"/>
+              </a:rPr>
+              <a:t>14</a:t>
+            </a:r>
+            <a:r>
+              <a:rPr>
+                <a:solidFill>
+                  <a:srgbClr val="003B4F"/>
+                </a:solidFill>
+                <a:latin typeface="Courier"/>
+              </a:rPr>
+              <a:t>),</a:t>
+            </a:r>
+            <a:br/>
+            <a:r>
+              <a:rPr>
+                <a:solidFill>
+                  <a:srgbClr val="003B4F"/>
+                </a:solidFill>
+                <a:latin typeface="Courier"/>
+              </a:rPr>
+              <a:t>    </a:t>
+            </a:r>
+            <a:r>
+              <a:rPr>
+                <a:solidFill>
+                  <a:srgbClr val="657422"/>
+                </a:solidFill>
+                <a:latin typeface="Courier"/>
+              </a:rPr>
+              <a:t>axis.title =</a:t>
+            </a:r>
+            <a:r>
+              <a:rPr>
+                <a:solidFill>
+                  <a:srgbClr val="003B4F"/>
+                </a:solidFill>
+                <a:latin typeface="Courier"/>
+              </a:rPr>
+              <a:t> </a:t>
+            </a:r>
+            <a:r>
+              <a:rPr>
+                <a:solidFill>
+                  <a:srgbClr val="4758AB"/>
+                </a:solidFill>
+                <a:latin typeface="Courier"/>
+              </a:rPr>
+              <a:t>element_text</a:t>
+            </a:r>
+            <a:r>
+              <a:rPr>
+                <a:solidFill>
+                  <a:srgbClr val="003B4F"/>
+                </a:solidFill>
+                <a:latin typeface="Courier"/>
+              </a:rPr>
+              <a:t>(</a:t>
+            </a:r>
+            <a:r>
+              <a:rPr>
+                <a:solidFill>
+                  <a:srgbClr val="657422"/>
+                </a:solidFill>
+                <a:latin typeface="Courier"/>
+              </a:rPr>
+              <a:t>face =</a:t>
+            </a:r>
+            <a:r>
+              <a:rPr>
+                <a:solidFill>
+                  <a:srgbClr val="003B4F"/>
+                </a:solidFill>
+                <a:latin typeface="Courier"/>
+              </a:rPr>
+              <a:t> </a:t>
+            </a:r>
+            <a:r>
+              <a:rPr>
+                <a:solidFill>
+                  <a:srgbClr val="20794D"/>
+                </a:solidFill>
+                <a:latin typeface="Courier"/>
+              </a:rPr>
+              <a:t>"bold"</a:t>
+            </a:r>
+            <a:r>
+              <a:rPr>
+                <a:solidFill>
+                  <a:srgbClr val="003B4F"/>
+                </a:solidFill>
+                <a:latin typeface="Courier"/>
+              </a:rPr>
+              <a:t>, </a:t>
+            </a:r>
+            <a:r>
+              <a:rPr>
+                <a:solidFill>
+                  <a:srgbClr val="657422"/>
+                </a:solidFill>
+                <a:latin typeface="Courier"/>
+              </a:rPr>
+              <a:t>size =</a:t>
+            </a:r>
+            <a:r>
+              <a:rPr>
+                <a:solidFill>
+                  <a:srgbClr val="003B4F"/>
+                </a:solidFill>
+                <a:latin typeface="Courier"/>
+              </a:rPr>
+              <a:t> </a:t>
+            </a:r>
+            <a:r>
+              <a:rPr>
+                <a:solidFill>
+                  <a:srgbClr val="AD0000"/>
+                </a:solidFill>
+                <a:latin typeface="Courier"/>
+              </a:rPr>
+              <a:t>12</a:t>
+            </a:r>
+            <a:r>
+              <a:rPr>
+                <a:solidFill>
+                  <a:srgbClr val="003B4F"/>
+                </a:solidFill>
+                <a:latin typeface="Courier"/>
+              </a:rPr>
+              <a:t>),</a:t>
+            </a:r>
+            <a:br/>
+            <a:r>
+              <a:rPr>
+                <a:solidFill>
+                  <a:srgbClr val="003B4F"/>
+                </a:solidFill>
+                <a:latin typeface="Courier"/>
+              </a:rPr>
+              <a:t>    </a:t>
+            </a:r>
+            <a:r>
+              <a:rPr>
+                <a:solidFill>
+                  <a:srgbClr val="657422"/>
+                </a:solidFill>
+                <a:latin typeface="Courier"/>
+              </a:rPr>
+              <a:t>plot.caption =</a:t>
+            </a:r>
+            <a:r>
+              <a:rPr>
+                <a:solidFill>
+                  <a:srgbClr val="003B4F"/>
+                </a:solidFill>
+                <a:latin typeface="Courier"/>
+              </a:rPr>
+              <a:t> </a:t>
+            </a:r>
+            <a:r>
+              <a:rPr>
+                <a:solidFill>
+                  <a:srgbClr val="4758AB"/>
+                </a:solidFill>
+                <a:latin typeface="Courier"/>
+              </a:rPr>
+              <a:t>element_text</a:t>
+            </a:r>
+            <a:r>
+              <a:rPr>
+                <a:solidFill>
+                  <a:srgbClr val="003B4F"/>
+                </a:solidFill>
+                <a:latin typeface="Courier"/>
+              </a:rPr>
+              <a:t>(</a:t>
+            </a:r>
+            <a:r>
+              <a:rPr>
+                <a:solidFill>
+                  <a:srgbClr val="657422"/>
+                </a:solidFill>
+                <a:latin typeface="Courier"/>
+              </a:rPr>
+              <a:t>hjust =</a:t>
+            </a:r>
+            <a:r>
+              <a:rPr>
+                <a:solidFill>
+                  <a:srgbClr val="003B4F"/>
+                </a:solidFill>
+                <a:latin typeface="Courier"/>
+              </a:rPr>
+              <a:t> </a:t>
+            </a:r>
+            <a:r>
+              <a:rPr>
+                <a:solidFill>
+                  <a:srgbClr val="AD0000"/>
+                </a:solidFill>
+                <a:latin typeface="Courier"/>
+              </a:rPr>
+              <a:t>0</a:t>
+            </a:r>
+            <a:r>
+              <a:rPr>
+                <a:solidFill>
+                  <a:srgbClr val="003B4F"/>
+                </a:solidFill>
+                <a:latin typeface="Courier"/>
+              </a:rPr>
+              <a:t>, </a:t>
+            </a:r>
+            <a:r>
+              <a:rPr>
+                <a:solidFill>
+                  <a:srgbClr val="657422"/>
+                </a:solidFill>
+                <a:latin typeface="Courier"/>
+              </a:rPr>
+              <a:t>face =</a:t>
+            </a:r>
+            <a:r>
+              <a:rPr>
+                <a:solidFill>
+                  <a:srgbClr val="003B4F"/>
+                </a:solidFill>
+                <a:latin typeface="Courier"/>
+              </a:rPr>
+              <a:t> </a:t>
+            </a:r>
+            <a:r>
+              <a:rPr>
+                <a:solidFill>
+                  <a:srgbClr val="20794D"/>
+                </a:solidFill>
+                <a:latin typeface="Courier"/>
+              </a:rPr>
+              <a:t>"italic"</a:t>
+            </a:r>
+            <a:r>
+              <a:rPr>
+                <a:solidFill>
+                  <a:srgbClr val="003B4F"/>
+                </a:solidFill>
+                <a:latin typeface="Courier"/>
+              </a:rPr>
+              <a:t>, </a:t>
+            </a:r>
+            <a:r>
+              <a:rPr>
+                <a:solidFill>
+                  <a:srgbClr val="657422"/>
+                </a:solidFill>
+                <a:latin typeface="Courier"/>
+              </a:rPr>
+              <a:t>size =</a:t>
+            </a:r>
+            <a:r>
+              <a:rPr>
+                <a:solidFill>
+                  <a:srgbClr val="003B4F"/>
+                </a:solidFill>
+                <a:latin typeface="Courier"/>
+              </a:rPr>
+              <a:t> </a:t>
+            </a:r>
+            <a:r>
+              <a:rPr>
+                <a:solidFill>
+                  <a:srgbClr val="AD0000"/>
+                </a:solidFill>
+                <a:latin typeface="Courier"/>
+              </a:rPr>
+              <a:t>10</a:t>
+            </a:r>
+            <a:r>
+              <a:rPr>
+                <a:solidFill>
+                  <a:srgbClr val="003B4F"/>
+                </a:solidFill>
+                <a:latin typeface="Courier"/>
+              </a:rPr>
+              <a:t>)</a:t>
+            </a:r>
+            <a:br/>
+            <a:r>
+              <a:rPr>
+                <a:solidFill>
+                  <a:srgbClr val="003B4F"/>
+                </a:solidFill>
+                <a:latin typeface="Courier"/>
+              </a:rPr>
+              <a:t>  )</a:t>
+            </a:r>
+          </a:p>
+          <a:p>
+            <a:pPr lvl="0" indent="0" marL="0">
+              <a:buNone/>
+            </a:pPr>
+            <a:r>
+              <a:rPr b="1"/>
+              <a:t>▶ Run this</a:t>
+            </a:r>
             <a:r>
               <a:rPr/>
-              <a:t>More conservative (higher p-values)</a:t>
-            </a:r>
-          </a:p>
-          <a:p>
-            <a:pPr lvl="1"/>
+              <a:t> — a mean ± SE plot:</a:t>
+            </a:r>
+          </a:p>
+          <a:p>
+            <a:pPr lvl="0" indent="0">
+              <a:buNone/>
+            </a:pPr>
+            <a:r>
+              <a:rPr>
+                <a:solidFill>
+                  <a:srgbClr val="4758AB"/>
+                </a:solidFill>
+                <a:latin typeface="Courier"/>
+              </a:rPr>
+              <a:t>ggplot</a:t>
+            </a:r>
+            <a:r>
+              <a:rPr>
+                <a:solidFill>
+                  <a:srgbClr val="003B4F"/>
+                </a:solidFill>
+                <a:latin typeface="Courier"/>
+              </a:rPr>
+              <a:t>(summary_stats, </a:t>
+            </a:r>
+            <a:r>
+              <a:rPr>
+                <a:solidFill>
+                  <a:srgbClr val="4758AB"/>
+                </a:solidFill>
+                <a:latin typeface="Courier"/>
+              </a:rPr>
+              <a:t>aes</a:t>
+            </a:r>
+            <a:r>
+              <a:rPr>
+                <a:solidFill>
+                  <a:srgbClr val="003B4F"/>
+                </a:solidFill>
+                <a:latin typeface="Courier"/>
+              </a:rPr>
+              <a:t>(</a:t>
+            </a:r>
+            <a:r>
+              <a:rPr>
+                <a:solidFill>
+                  <a:srgbClr val="657422"/>
+                </a:solidFill>
+                <a:latin typeface="Courier"/>
+              </a:rPr>
+              <a:t>x =</a:t>
+            </a:r>
+            <a:r>
+              <a:rPr>
+                <a:solidFill>
+                  <a:srgbClr val="003B4F"/>
+                </a:solidFill>
+                <a:latin typeface="Courier"/>
+              </a:rPr>
+              <a:t> treat, </a:t>
+            </a:r>
+            <a:r>
+              <a:rPr>
+                <a:solidFill>
+                  <a:srgbClr val="657422"/>
+                </a:solidFill>
+                <a:latin typeface="Courier"/>
+              </a:rPr>
+              <a:t>y =</a:t>
+            </a:r>
+            <a:r>
+              <a:rPr>
+                <a:solidFill>
+                  <a:srgbClr val="003B4F"/>
+                </a:solidFill>
+                <a:latin typeface="Courier"/>
+              </a:rPr>
+              <a:t> mean, </a:t>
+            </a:r>
+            <a:r>
+              <a:rPr>
+                <a:solidFill>
+                  <a:srgbClr val="657422"/>
+                </a:solidFill>
+                <a:latin typeface="Courier"/>
+              </a:rPr>
+              <a:t>group =</a:t>
+            </a:r>
+            <a:r>
+              <a:rPr>
+                <a:solidFill>
+                  <a:srgbClr val="003B4F"/>
+                </a:solidFill>
+                <a:latin typeface="Courier"/>
+              </a:rPr>
+              <a:t> </a:t>
+            </a:r>
+            <a:r>
+              <a:rPr>
+                <a:solidFill>
+                  <a:srgbClr val="AD0000"/>
+                </a:solidFill>
+                <a:latin typeface="Courier"/>
+              </a:rPr>
+              <a:t>1</a:t>
+            </a:r>
+            <a:r>
+              <a:rPr>
+                <a:solidFill>
+                  <a:srgbClr val="003B4F"/>
+                </a:solidFill>
+                <a:latin typeface="Courier"/>
+              </a:rPr>
+              <a:t>)) </a:t>
+            </a:r>
+            <a:r>
+              <a:rPr>
+                <a:solidFill>
+                  <a:srgbClr val="5E5E5E"/>
+                </a:solidFill>
+                <a:latin typeface="Courier"/>
+              </a:rPr>
+              <a:t>+</a:t>
+            </a:r>
+            <a:br/>
+            <a:r>
+              <a:rPr>
+                <a:solidFill>
+                  <a:srgbClr val="003B4F"/>
+                </a:solidFill>
+                <a:latin typeface="Courier"/>
+              </a:rPr>
+              <a:t>  </a:t>
+            </a:r>
+            <a:r>
+              <a:rPr>
+                <a:solidFill>
+                  <a:srgbClr val="4758AB"/>
+                </a:solidFill>
+                <a:latin typeface="Courier"/>
+              </a:rPr>
+              <a:t>geom_point</a:t>
+            </a:r>
+            <a:r>
+              <a:rPr>
+                <a:solidFill>
+                  <a:srgbClr val="003B4F"/>
+                </a:solidFill>
+                <a:latin typeface="Courier"/>
+              </a:rPr>
+              <a:t>(</a:t>
+            </a:r>
+            <a:r>
+              <a:rPr>
+                <a:solidFill>
+                  <a:srgbClr val="657422"/>
+                </a:solidFill>
+                <a:latin typeface="Courier"/>
+              </a:rPr>
+              <a:t>size =</a:t>
+            </a:r>
+            <a:r>
+              <a:rPr>
+                <a:solidFill>
+                  <a:srgbClr val="003B4F"/>
+                </a:solidFill>
+                <a:latin typeface="Courier"/>
+              </a:rPr>
+              <a:t> </a:t>
+            </a:r>
+            <a:r>
+              <a:rPr>
+                <a:solidFill>
+                  <a:srgbClr val="AD0000"/>
+                </a:solidFill>
+                <a:latin typeface="Courier"/>
+              </a:rPr>
+              <a:t>3</a:t>
+            </a:r>
+            <a:r>
+              <a:rPr>
+                <a:solidFill>
+                  <a:srgbClr val="003B4F"/>
+                </a:solidFill>
+                <a:latin typeface="Courier"/>
+              </a:rPr>
+              <a:t>, </a:t>
+            </a:r>
+            <a:r>
+              <a:rPr>
+                <a:solidFill>
+                  <a:srgbClr val="657422"/>
+                </a:solidFill>
+                <a:latin typeface="Courier"/>
+              </a:rPr>
+              <a:t>shape =</a:t>
+            </a:r>
+            <a:r>
+              <a:rPr>
+                <a:solidFill>
+                  <a:srgbClr val="003B4F"/>
+                </a:solidFill>
+                <a:latin typeface="Courier"/>
+              </a:rPr>
+              <a:t> </a:t>
+            </a:r>
+            <a:r>
+              <a:rPr>
+                <a:solidFill>
+                  <a:srgbClr val="AD0000"/>
+                </a:solidFill>
+                <a:latin typeface="Courier"/>
+              </a:rPr>
+              <a:t>21</a:t>
+            </a:r>
+            <a:r>
+              <a:rPr>
+                <a:solidFill>
+                  <a:srgbClr val="003B4F"/>
+                </a:solidFill>
+                <a:latin typeface="Courier"/>
+              </a:rPr>
+              <a:t>, </a:t>
+            </a:r>
+            <a:r>
+              <a:rPr>
+                <a:solidFill>
+                  <a:srgbClr val="657422"/>
+                </a:solidFill>
+                <a:latin typeface="Courier"/>
+              </a:rPr>
+              <a:t>fill =</a:t>
+            </a:r>
+            <a:r>
+              <a:rPr>
+                <a:solidFill>
+                  <a:srgbClr val="003B4F"/>
+                </a:solidFill>
+                <a:latin typeface="Courier"/>
+              </a:rPr>
+              <a:t> </a:t>
+            </a:r>
+            <a:r>
+              <a:rPr>
+                <a:solidFill>
+                  <a:srgbClr val="20794D"/>
+                </a:solidFill>
+                <a:latin typeface="Courier"/>
+              </a:rPr>
+              <a:t>"white"</a:t>
+            </a:r>
+            <a:r>
+              <a:rPr>
+                <a:solidFill>
+                  <a:srgbClr val="003B4F"/>
+                </a:solidFill>
+                <a:latin typeface="Courier"/>
+              </a:rPr>
+              <a:t>) </a:t>
+            </a:r>
+            <a:r>
+              <a:rPr>
+                <a:solidFill>
+                  <a:srgbClr val="5E5E5E"/>
+                </a:solidFill>
+                <a:latin typeface="Courier"/>
+              </a:rPr>
+              <a:t>+</a:t>
+            </a:r>
+            <a:br/>
+            <a:r>
+              <a:rPr>
+                <a:solidFill>
+                  <a:srgbClr val="003B4F"/>
+                </a:solidFill>
+                <a:latin typeface="Courier"/>
+              </a:rPr>
+              <a:t>  </a:t>
+            </a:r>
+            <a:r>
+              <a:rPr>
+                <a:solidFill>
+                  <a:srgbClr val="4758AB"/>
+                </a:solidFill>
+                <a:latin typeface="Courier"/>
+              </a:rPr>
+              <a:t>geom_errorbar</a:t>
+            </a:r>
+            <a:r>
+              <a:rPr>
+                <a:solidFill>
+                  <a:srgbClr val="003B4F"/>
+                </a:solidFill>
+                <a:latin typeface="Courier"/>
+              </a:rPr>
+              <a:t>(</a:t>
+            </a:r>
+            <a:r>
+              <a:rPr>
+                <a:solidFill>
+                  <a:srgbClr val="4758AB"/>
+                </a:solidFill>
+                <a:latin typeface="Courier"/>
+              </a:rPr>
+              <a:t>aes</a:t>
+            </a:r>
+            <a:r>
+              <a:rPr>
+                <a:solidFill>
+                  <a:srgbClr val="003B4F"/>
+                </a:solidFill>
+                <a:latin typeface="Courier"/>
+              </a:rPr>
+              <a:t>(</a:t>
+            </a:r>
+            <a:r>
+              <a:rPr>
+                <a:solidFill>
+                  <a:srgbClr val="657422"/>
+                </a:solidFill>
+                <a:latin typeface="Courier"/>
+              </a:rPr>
+              <a:t>ymin =</a:t>
+            </a:r>
+            <a:r>
+              <a:rPr>
+                <a:solidFill>
+                  <a:srgbClr val="003B4F"/>
+                </a:solidFill>
+                <a:latin typeface="Courier"/>
+              </a:rPr>
+              <a:t> mean </a:t>
+            </a:r>
+            <a:r>
+              <a:rPr>
+                <a:solidFill>
+                  <a:srgbClr val="5E5E5E"/>
+                </a:solidFill>
+                <a:latin typeface="Courier"/>
+              </a:rPr>
+              <a:t>-</a:t>
+            </a:r>
+            <a:r>
+              <a:rPr>
+                <a:solidFill>
+                  <a:srgbClr val="003B4F"/>
+                </a:solidFill>
+                <a:latin typeface="Courier"/>
+              </a:rPr>
+              <a:t> se, </a:t>
+            </a:r>
+            <a:r>
+              <a:rPr>
+                <a:solidFill>
+                  <a:srgbClr val="657422"/>
+                </a:solidFill>
+                <a:latin typeface="Courier"/>
+              </a:rPr>
+              <a:t>ymax =</a:t>
+            </a:r>
+            <a:r>
+              <a:rPr>
+                <a:solidFill>
+                  <a:srgbClr val="003B4F"/>
+                </a:solidFill>
+                <a:latin typeface="Courier"/>
+              </a:rPr>
+              <a:t> mean </a:t>
+            </a:r>
+            <a:r>
+              <a:rPr>
+                <a:solidFill>
+                  <a:srgbClr val="5E5E5E"/>
+                </a:solidFill>
+                <a:latin typeface="Courier"/>
+              </a:rPr>
+              <a:t>+</a:t>
+            </a:r>
+            <a:r>
+              <a:rPr>
+                <a:solidFill>
+                  <a:srgbClr val="003B4F"/>
+                </a:solidFill>
+                <a:latin typeface="Courier"/>
+              </a:rPr>
+              <a:t> se), </a:t>
+            </a:r>
+            <a:r>
+              <a:rPr>
+                <a:solidFill>
+                  <a:srgbClr val="657422"/>
+                </a:solidFill>
+                <a:latin typeface="Courier"/>
+              </a:rPr>
+              <a:t>width =</a:t>
+            </a:r>
+            <a:r>
+              <a:rPr>
+                <a:solidFill>
+                  <a:srgbClr val="003B4F"/>
+                </a:solidFill>
+                <a:latin typeface="Courier"/>
+              </a:rPr>
+              <a:t> </a:t>
+            </a:r>
+            <a:r>
+              <a:rPr>
+                <a:solidFill>
+                  <a:srgbClr val="AD0000"/>
+                </a:solidFill>
+                <a:latin typeface="Courier"/>
+              </a:rPr>
+              <a:t>0.2</a:t>
+            </a:r>
+            <a:r>
+              <a:rPr>
+                <a:solidFill>
+                  <a:srgbClr val="003B4F"/>
+                </a:solidFill>
+                <a:latin typeface="Courier"/>
+              </a:rPr>
+              <a:t>) </a:t>
+            </a:r>
+            <a:r>
+              <a:rPr>
+                <a:solidFill>
+                  <a:srgbClr val="5E5E5E"/>
+                </a:solidFill>
+                <a:latin typeface="Courier"/>
+              </a:rPr>
+              <a:t>+</a:t>
+            </a:r>
+            <a:br/>
+            <a:r>
+              <a:rPr>
+                <a:solidFill>
+                  <a:srgbClr val="003B4F"/>
+                </a:solidFill>
+                <a:latin typeface="Courier"/>
+              </a:rPr>
+              <a:t>  </a:t>
+            </a:r>
+            <a:r>
+              <a:rPr>
+                <a:solidFill>
+                  <a:srgbClr val="4758AB"/>
+                </a:solidFill>
+                <a:latin typeface="Courier"/>
+              </a:rPr>
+              <a:t>labs</a:t>
+            </a:r>
+            <a:r>
+              <a:rPr>
+                <a:solidFill>
+                  <a:srgbClr val="003B4F"/>
+                </a:solidFill>
+                <a:latin typeface="Courier"/>
+              </a:rPr>
+              <a:t>(</a:t>
+            </a:r>
+            <a:br/>
+            <a:r>
+              <a:rPr>
+                <a:solidFill>
+                  <a:srgbClr val="003B4F"/>
+                </a:solidFill>
+                <a:latin typeface="Courier"/>
+              </a:rPr>
+              <a:t>    </a:t>
+            </a:r>
+            <a:r>
+              <a:rPr>
+                <a:solidFill>
+                  <a:srgbClr val="657422"/>
+                </a:solidFill>
+                <a:latin typeface="Courier"/>
+              </a:rPr>
+              <a:t>title =</a:t>
+            </a:r>
+            <a:r>
+              <a:rPr>
+                <a:solidFill>
+                  <a:srgbClr val="003B4F"/>
+                </a:solidFill>
+                <a:latin typeface="Courier"/>
+              </a:rPr>
+              <a:t> </a:t>
+            </a:r>
+            <a:r>
+              <a:rPr>
+                <a:solidFill>
+                  <a:srgbClr val="20794D"/>
+                </a:solidFill>
+                <a:latin typeface="Courier"/>
+              </a:rPr>
+              <a:t>"Mean Algae Cover by Urchin Density Treatment"</a:t>
+            </a:r>
+            <a:r>
+              <a:rPr>
+                <a:solidFill>
+                  <a:srgbClr val="003B4F"/>
+                </a:solidFill>
+                <a:latin typeface="Courier"/>
+              </a:rPr>
+              <a:t>,</a:t>
+            </a:r>
+            <a:br/>
+            <a:r>
+              <a:rPr>
+                <a:solidFill>
+                  <a:srgbClr val="003B4F"/>
+                </a:solidFill>
+                <a:latin typeface="Courier"/>
+              </a:rPr>
+              <a:t>    </a:t>
+            </a:r>
+            <a:r>
+              <a:rPr>
+                <a:solidFill>
+                  <a:srgbClr val="657422"/>
+                </a:solidFill>
+                <a:latin typeface="Courier"/>
+              </a:rPr>
+              <a:t>x =</a:t>
+            </a:r>
+            <a:r>
+              <a:rPr>
+                <a:solidFill>
+                  <a:srgbClr val="003B4F"/>
+                </a:solidFill>
+                <a:latin typeface="Courier"/>
+              </a:rPr>
+              <a:t> </a:t>
+            </a:r>
+            <a:r>
+              <a:rPr>
+                <a:solidFill>
+                  <a:srgbClr val="20794D"/>
+                </a:solidFill>
+                <a:latin typeface="Courier"/>
+              </a:rPr>
+              <a:t>"Urchin Density Treatment"</a:t>
+            </a:r>
+            <a:r>
+              <a:rPr>
+                <a:solidFill>
+                  <a:srgbClr val="003B4F"/>
+                </a:solidFill>
+                <a:latin typeface="Courier"/>
+              </a:rPr>
+              <a:t>,</a:t>
+            </a:r>
+            <a:br/>
+            <a:r>
+              <a:rPr>
+                <a:solidFill>
+                  <a:srgbClr val="003B4F"/>
+                </a:solidFill>
+                <a:latin typeface="Courier"/>
+              </a:rPr>
+              <a:t>    </a:t>
+            </a:r>
+            <a:r>
+              <a:rPr>
+                <a:solidFill>
+                  <a:srgbClr val="657422"/>
+                </a:solidFill>
+                <a:latin typeface="Courier"/>
+              </a:rPr>
+              <a:t>y =</a:t>
+            </a:r>
+            <a:r>
+              <a:rPr>
+                <a:solidFill>
+                  <a:srgbClr val="003B4F"/>
+                </a:solidFill>
+                <a:latin typeface="Courier"/>
+              </a:rPr>
+              <a:t> </a:t>
+            </a:r>
+            <a:r>
+              <a:rPr>
+                <a:solidFill>
+                  <a:srgbClr val="20794D"/>
+                </a:solidFill>
+                <a:latin typeface="Courier"/>
+              </a:rPr>
+              <a:t>"Mean Filamentous Algae Cover (%)"</a:t>
+            </a:r>
+            <a:r>
+              <a:rPr>
+                <a:solidFill>
+                  <a:srgbClr val="003B4F"/>
+                </a:solidFill>
+                <a:latin typeface="Courier"/>
+              </a:rPr>
+              <a:t>,</a:t>
+            </a:r>
+            <a:br/>
+            <a:r>
+              <a:rPr>
+                <a:solidFill>
+                  <a:srgbClr val="003B4F"/>
+                </a:solidFill>
+                <a:latin typeface="Courier"/>
+              </a:rPr>
+              <a:t>    </a:t>
+            </a:r>
+            <a:r>
+              <a:rPr>
+                <a:solidFill>
+                  <a:srgbClr val="657422"/>
+                </a:solidFill>
+                <a:latin typeface="Courier"/>
+              </a:rPr>
+              <a:t>caption =</a:t>
+            </a:r>
+            <a:r>
+              <a:rPr>
+                <a:solidFill>
+                  <a:srgbClr val="003B4F"/>
+                </a:solidFill>
+                <a:latin typeface="Courier"/>
+              </a:rPr>
+              <a:t> </a:t>
+            </a:r>
+            <a:r>
+              <a:rPr>
+                <a:solidFill>
+                  <a:srgbClr val="20794D"/>
+                </a:solidFill>
+                <a:latin typeface="Courier"/>
+              </a:rPr>
+              <a:t>"Mean (+/- SE) percentage cover of filamentous algae across urchin density treatments."</a:t>
+            </a:r>
+            <a:br/>
+            <a:r>
+              <a:rPr>
+                <a:solidFill>
+                  <a:srgbClr val="003B4F"/>
+                </a:solidFill>
+                <a:latin typeface="Courier"/>
+              </a:rPr>
+              <a:t>  ) </a:t>
+            </a:r>
+            <a:r>
+              <a:rPr>
+                <a:solidFill>
+                  <a:srgbClr val="5E5E5E"/>
+                </a:solidFill>
+                <a:latin typeface="Courier"/>
+              </a:rPr>
+              <a:t>+</a:t>
+            </a:r>
+            <a:br/>
+            <a:r>
+              <a:rPr>
+                <a:solidFill>
+                  <a:srgbClr val="003B4F"/>
+                </a:solidFill>
+                <a:latin typeface="Courier"/>
+              </a:rPr>
+              <a:t>  </a:t>
+            </a:r>
+            <a:r>
+              <a:rPr>
+                <a:solidFill>
+                  <a:srgbClr val="4758AB"/>
+                </a:solidFill>
+                <a:latin typeface="Courier"/>
+              </a:rPr>
+              <a:t>theme</a:t>
+            </a:r>
+            <a:r>
+              <a:rPr>
+                <a:solidFill>
+                  <a:srgbClr val="003B4F"/>
+                </a:solidFill>
+                <a:latin typeface="Courier"/>
+              </a:rPr>
+              <a:t>(</a:t>
+            </a:r>
+            <a:br/>
+            <a:r>
+              <a:rPr>
+                <a:solidFill>
+                  <a:srgbClr val="003B4F"/>
+                </a:solidFill>
+                <a:latin typeface="Courier"/>
+              </a:rPr>
+              <a:t>    </a:t>
+            </a:r>
+            <a:r>
+              <a:rPr>
+                <a:solidFill>
+                  <a:srgbClr val="657422"/>
+                </a:solidFill>
+                <a:latin typeface="Courier"/>
+              </a:rPr>
+              <a:t>plot.title =</a:t>
+            </a:r>
+            <a:r>
+              <a:rPr>
+                <a:solidFill>
+                  <a:srgbClr val="003B4F"/>
+                </a:solidFill>
+                <a:latin typeface="Courier"/>
+              </a:rPr>
+              <a:t> </a:t>
+            </a:r>
+            <a:r>
+              <a:rPr>
+                <a:solidFill>
+                  <a:srgbClr val="4758AB"/>
+                </a:solidFill>
+                <a:latin typeface="Courier"/>
+              </a:rPr>
+              <a:t>element_text</a:t>
+            </a:r>
+            <a:r>
+              <a:rPr>
+                <a:solidFill>
+                  <a:srgbClr val="003B4F"/>
+                </a:solidFill>
+                <a:latin typeface="Courier"/>
+              </a:rPr>
+              <a:t>(</a:t>
+            </a:r>
+            <a:r>
+              <a:rPr>
+                <a:solidFill>
+                  <a:srgbClr val="657422"/>
+                </a:solidFill>
+                <a:latin typeface="Courier"/>
+              </a:rPr>
+              <a:t>face =</a:t>
+            </a:r>
+            <a:r>
+              <a:rPr>
+                <a:solidFill>
+                  <a:srgbClr val="003B4F"/>
+                </a:solidFill>
+                <a:latin typeface="Courier"/>
+              </a:rPr>
+              <a:t> </a:t>
+            </a:r>
+            <a:r>
+              <a:rPr>
+                <a:solidFill>
+                  <a:srgbClr val="20794D"/>
+                </a:solidFill>
+                <a:latin typeface="Courier"/>
+              </a:rPr>
+              <a:t>"bold"</a:t>
+            </a:r>
+            <a:r>
+              <a:rPr>
+                <a:solidFill>
+                  <a:srgbClr val="003B4F"/>
+                </a:solidFill>
+                <a:latin typeface="Courier"/>
+              </a:rPr>
+              <a:t>, </a:t>
+            </a:r>
+            <a:r>
+              <a:rPr>
+                <a:solidFill>
+                  <a:srgbClr val="657422"/>
+                </a:solidFill>
+                <a:latin typeface="Courier"/>
+              </a:rPr>
+              <a:t>size =</a:t>
+            </a:r>
+            <a:r>
+              <a:rPr>
+                <a:solidFill>
+                  <a:srgbClr val="003B4F"/>
+                </a:solidFill>
+                <a:latin typeface="Courier"/>
+              </a:rPr>
+              <a:t> </a:t>
+            </a:r>
+            <a:r>
+              <a:rPr>
+                <a:solidFill>
+                  <a:srgbClr val="AD0000"/>
+                </a:solidFill>
+                <a:latin typeface="Courier"/>
+              </a:rPr>
+              <a:t>14</a:t>
+            </a:r>
+            <a:r>
+              <a:rPr>
+                <a:solidFill>
+                  <a:srgbClr val="003B4F"/>
+                </a:solidFill>
+                <a:latin typeface="Courier"/>
+              </a:rPr>
+              <a:t>),</a:t>
+            </a:r>
+            <a:br/>
+            <a:r>
+              <a:rPr>
+                <a:solidFill>
+                  <a:srgbClr val="003B4F"/>
+                </a:solidFill>
+                <a:latin typeface="Courier"/>
+              </a:rPr>
+              <a:t>    </a:t>
+            </a:r>
+            <a:r>
+              <a:rPr>
+                <a:solidFill>
+                  <a:srgbClr val="657422"/>
+                </a:solidFill>
+                <a:latin typeface="Courier"/>
+              </a:rPr>
+              <a:t>axis.title =</a:t>
+            </a:r>
+            <a:r>
+              <a:rPr>
+                <a:solidFill>
+                  <a:srgbClr val="003B4F"/>
+                </a:solidFill>
+                <a:latin typeface="Courier"/>
+              </a:rPr>
+              <a:t> </a:t>
+            </a:r>
+            <a:r>
+              <a:rPr>
+                <a:solidFill>
+                  <a:srgbClr val="4758AB"/>
+                </a:solidFill>
+                <a:latin typeface="Courier"/>
+              </a:rPr>
+              <a:t>element_text</a:t>
+            </a:r>
+            <a:r>
+              <a:rPr>
+                <a:solidFill>
+                  <a:srgbClr val="003B4F"/>
+                </a:solidFill>
+                <a:latin typeface="Courier"/>
+              </a:rPr>
+              <a:t>(</a:t>
+            </a:r>
+            <a:r>
+              <a:rPr>
+                <a:solidFill>
+                  <a:srgbClr val="657422"/>
+                </a:solidFill>
+                <a:latin typeface="Courier"/>
+              </a:rPr>
+              <a:t>face =</a:t>
+            </a:r>
+            <a:r>
+              <a:rPr>
+                <a:solidFill>
+                  <a:srgbClr val="003B4F"/>
+                </a:solidFill>
+                <a:latin typeface="Courier"/>
+              </a:rPr>
+              <a:t> </a:t>
+            </a:r>
+            <a:r>
+              <a:rPr>
+                <a:solidFill>
+                  <a:srgbClr val="20794D"/>
+                </a:solidFill>
+                <a:latin typeface="Courier"/>
+              </a:rPr>
+              <a:t>"bold"</a:t>
+            </a:r>
+            <a:r>
+              <a:rPr>
+                <a:solidFill>
+                  <a:srgbClr val="003B4F"/>
+                </a:solidFill>
+                <a:latin typeface="Courier"/>
+              </a:rPr>
+              <a:t>, </a:t>
+            </a:r>
+            <a:r>
+              <a:rPr>
+                <a:solidFill>
+                  <a:srgbClr val="657422"/>
+                </a:solidFill>
+                <a:latin typeface="Courier"/>
+              </a:rPr>
+              <a:t>size =</a:t>
+            </a:r>
+            <a:r>
+              <a:rPr>
+                <a:solidFill>
+                  <a:srgbClr val="003B4F"/>
+                </a:solidFill>
+                <a:latin typeface="Courier"/>
+              </a:rPr>
+              <a:t> </a:t>
+            </a:r>
+            <a:r>
+              <a:rPr>
+                <a:solidFill>
+                  <a:srgbClr val="AD0000"/>
+                </a:solidFill>
+                <a:latin typeface="Courier"/>
+              </a:rPr>
+              <a:t>12</a:t>
+            </a:r>
+            <a:r>
+              <a:rPr>
+                <a:solidFill>
+                  <a:srgbClr val="003B4F"/>
+                </a:solidFill>
+                <a:latin typeface="Courier"/>
+              </a:rPr>
+              <a:t>),</a:t>
+            </a:r>
+            <a:br/>
+            <a:r>
+              <a:rPr>
+                <a:solidFill>
+                  <a:srgbClr val="003B4F"/>
+                </a:solidFill>
+                <a:latin typeface="Courier"/>
+              </a:rPr>
+              <a:t>    </a:t>
+            </a:r>
+            <a:r>
+              <a:rPr>
+                <a:solidFill>
+                  <a:srgbClr val="657422"/>
+                </a:solidFill>
+                <a:latin typeface="Courier"/>
+              </a:rPr>
+              <a:t>plot.caption =</a:t>
+            </a:r>
+            <a:r>
+              <a:rPr>
+                <a:solidFill>
+                  <a:srgbClr val="003B4F"/>
+                </a:solidFill>
+                <a:latin typeface="Courier"/>
+              </a:rPr>
+              <a:t> </a:t>
+            </a:r>
+            <a:r>
+              <a:rPr>
+                <a:solidFill>
+                  <a:srgbClr val="4758AB"/>
+                </a:solidFill>
+                <a:latin typeface="Courier"/>
+              </a:rPr>
+              <a:t>element_text</a:t>
+            </a:r>
+            <a:r>
+              <a:rPr>
+                <a:solidFill>
+                  <a:srgbClr val="003B4F"/>
+                </a:solidFill>
+                <a:latin typeface="Courier"/>
+              </a:rPr>
+              <a:t>(</a:t>
+            </a:r>
+            <a:r>
+              <a:rPr>
+                <a:solidFill>
+                  <a:srgbClr val="657422"/>
+                </a:solidFill>
+                <a:latin typeface="Courier"/>
+              </a:rPr>
+              <a:t>hjust =</a:t>
+            </a:r>
+            <a:r>
+              <a:rPr>
+                <a:solidFill>
+                  <a:srgbClr val="003B4F"/>
+                </a:solidFill>
+                <a:latin typeface="Courier"/>
+              </a:rPr>
+              <a:t> </a:t>
+            </a:r>
+            <a:r>
+              <a:rPr>
+                <a:solidFill>
+                  <a:srgbClr val="AD0000"/>
+                </a:solidFill>
+                <a:latin typeface="Courier"/>
+              </a:rPr>
+              <a:t>0</a:t>
+            </a:r>
+            <a:r>
+              <a:rPr>
+                <a:solidFill>
+                  <a:srgbClr val="003B4F"/>
+                </a:solidFill>
+                <a:latin typeface="Courier"/>
+              </a:rPr>
+              <a:t>, </a:t>
+            </a:r>
+            <a:r>
+              <a:rPr>
+                <a:solidFill>
+                  <a:srgbClr val="657422"/>
+                </a:solidFill>
+                <a:latin typeface="Courier"/>
+              </a:rPr>
+              <a:t>face =</a:t>
+            </a:r>
+            <a:r>
+              <a:rPr>
+                <a:solidFill>
+                  <a:srgbClr val="003B4F"/>
+                </a:solidFill>
+                <a:latin typeface="Courier"/>
+              </a:rPr>
+              <a:t> </a:t>
+            </a:r>
+            <a:r>
+              <a:rPr>
+                <a:solidFill>
+                  <a:srgbClr val="20794D"/>
+                </a:solidFill>
+                <a:latin typeface="Courier"/>
+              </a:rPr>
+              <a:t>"italic"</a:t>
+            </a:r>
+            <a:r>
+              <a:rPr>
+                <a:solidFill>
+                  <a:srgbClr val="003B4F"/>
+                </a:solidFill>
+                <a:latin typeface="Courier"/>
+              </a:rPr>
+              <a:t>, </a:t>
+            </a:r>
+            <a:r>
+              <a:rPr>
+                <a:solidFill>
+                  <a:srgbClr val="657422"/>
+                </a:solidFill>
+                <a:latin typeface="Courier"/>
+              </a:rPr>
+              <a:t>size =</a:t>
+            </a:r>
+            <a:r>
+              <a:rPr>
+                <a:solidFill>
+                  <a:srgbClr val="003B4F"/>
+                </a:solidFill>
+                <a:latin typeface="Courier"/>
+              </a:rPr>
+              <a:t> </a:t>
+            </a:r>
+            <a:r>
+              <a:rPr>
+                <a:solidFill>
+                  <a:srgbClr val="AD0000"/>
+                </a:solidFill>
+                <a:latin typeface="Courier"/>
+              </a:rPr>
+              <a:t>10</a:t>
+            </a:r>
+            <a:r>
+              <a:rPr>
+                <a:solidFill>
+                  <a:srgbClr val="003B4F"/>
+                </a:solidFill>
+                <a:latin typeface="Courier"/>
+              </a:rPr>
+              <a:t>)</a:t>
+            </a:r>
+            <a:br/>
+            <a:r>
+              <a:rPr>
+                <a:solidFill>
+                  <a:srgbClr val="003B4F"/>
+                </a:solidFill>
+                <a:latin typeface="Courier"/>
+              </a:rPr>
+              <a:t>  )</a:t>
+            </a:r>
+          </a:p>
+          <a:p>
+            <a:pPr lvl="0" indent="0" marL="1270000">
+              <a:buNone/>
+            </a:pPr>
+            <a:r>
+              <a:rPr sz="2000" b="1"/>
+              <a:t>Note</a:t>
+            </a:r>
+          </a:p>
+          <a:p>
+            <a:pPr lvl="0" indent="0" marL="1270000">
+              <a:buNone/>
+            </a:pPr>
+            <a:r>
+              <a:rPr sz="2000" b="1"/>
+              <a:t>Scientific interpretation</a:t>
+            </a:r>
+          </a:p>
+          <a:p>
+            <a:pPr lvl="0" indent="0" marL="1270000">
+              <a:buNone/>
+            </a:pPr>
+            <a:r>
+              <a:rPr sz="2000"/>
+              <a:t>This nested ANOVA reveals substantial spatial heterogeneity in algae cover, with significant variation among patches within each treatment. Whether the urchin-density treatment effect itself reaches significance depends on which test (F vs. Chi-square) and which model specification you use — a good reminder that “significant” is sensitive to analytical choices in nested designs. The substantial variance component associated with patches nested within treatments underscores the importance of accounting for spatial heterogeneity when designing and analyzing ecological field experiments.</a:t>
+            </a:r>
+          </a:p>
+          <a:p>
+            <a:pPr lvl="0" indent="0" marL="0">
+              <a:buNone/>
+            </a:pPr>
             <a:r>
               <a:rPr/>
-              <a:t>Better for small samples</a:t>
-            </a:r>
-          </a:p>
-          <a:p>
-            <a:pPr lvl="0"/>
+              <a:t>✏️ </a:t>
+            </a:r>
             <a:r>
               <a:rPr b="1"/>
-              <a:t>METHOD 2 - the Chi Square</a:t>
-            </a:r>
-          </a:p>
-          <a:p>
-            <a:pPr lvl="1"/>
+              <a:t>Your turn:</a:t>
+            </a:r>
             <a:r>
               <a:rPr/>
-              <a:t>Assumes variance components are known (not estimated)</a:t>
-            </a:r>
-          </a:p>
-          <a:p>
-            <a:pPr lvl="1"/>
-            <a:r>
-              <a:rPr/>
-              <a:t>More liberal (lower p-values)</a:t>
-            </a:r>
-          </a:p>
-          <a:p>
-            <a:pPr lvl="1"/>
-            <a:r>
-              <a:rPr/>
-              <a:t>Assumes large samples</a:t>
-            </a:r>
-          </a:p>
-          <a:p>
-            <a:pPr lvl="0"/>
-            <a:r>
-              <a:rPr b="1"/>
-              <a:t>Relationship between these tests is</a:t>
-            </a:r>
-          </a:p>
-          <a:p>
-            <a:pPr lvl="1"/>
-            <a:r>
-              <a:rPr/>
-              <a:t>Chi-square = F × numerator df</a:t>
-            </a:r>
-          </a:p>
-          <a:p>
-            <a:pPr lvl="0"/>
-            <a:r>
-              <a:rPr b="1"/>
-              <a:t>Why Different Results?</a:t>
-            </a:r>
-          </a:p>
-          <a:p>
-            <a:pPr lvl="1"/>
-            <a:r>
-              <a:rPr/>
-              <a:t>F-test accounts for denominator df (12 in your case) - reflects sample size</a:t>
-            </a:r>
-          </a:p>
-          <a:p>
-            <a:pPr lvl="1"/>
-            <a:r>
-              <a:rPr/>
-              <a:t>Chi-square assumes infinite denominator df - assumes large samples</a:t>
-            </a:r>
-          </a:p>
-          <a:p>
-            <a:pPr lvl="0"/>
-            <a:r>
-              <a:rPr b="1"/>
-              <a:t>Rule of Thumb</a:t>
-            </a:r>
-          </a:p>
-          <a:p>
-            <a:pPr lvl="1"/>
-            <a:r>
-              <a:rPr/>
-              <a:t>under 100 observations or &lt; 20 random effect levels: Use F-test</a:t>
-            </a:r>
-          </a:p>
-          <a:p>
-            <a:pPr lvl="1"/>
-            <a:r>
-              <a:rPr/>
-              <a:t>over 500 observations and &gt; 50 random effect levels: Chi-square is okay</a:t>
-            </a:r>
-          </a:p>
-          <a:p>
-            <a:pPr lvl="1"/>
-            <a:r>
-              <a:rPr/>
-              <a:t>In between: F-test is safer</a:t>
+              <a:t> Write a 2–3 sentence results paragraph for this analysis, using your own F-statistic, df, p-value, and variance component numbers from Parts 3–4.</a:t>
             </a:r>
           </a:p>
           <a:p>
@@ -6147,13 +11416,8 @@
               <a:rPr>
                 <a:latin typeface="Courier"/>
               </a:rPr>
-              <a:t>Analysis of Deviance Table (Type III Wald F tests with Kenward-Roger df)
-Response: algae
-                  F Df Df.res   Pr(&gt;F)   
-(Intercept) 17.3616  1     12 0.001307 **
-treat        2.7171  3     12 0.091262 . 
----
-Signif. codes:  0 '***' 0.001 '**' 0.01 '*' 0.05 '.' 0.1 ' ' 1</a:t>
+              <a:t>________________________________________________________
+________________________________________________________</a:t>
             </a:r>
           </a:p>
         </p:txBody>
@@ -6205,7 +11469,7 @@
             </a:pPr>
             <a:r>
               <a:rPr/>
-              <a:t>Alternative method to do the mixed model ANOVA</a:t>
+              <a:t>Part 7 · Comparing the Two Approaches</a:t>
             </a:r>
           </a:p>
         </p:txBody>
@@ -6225,20 +11489,105 @@
           <a:bodyPr/>
           <a:lstStyle/>
           <a:p>
-            <a:pPr lvl="0" indent="0">
+            <a:pPr lvl="0" indent="0" marL="0">
               <a:buNone/>
             </a:pPr>
             <a:r>
-              <a:rPr>
-                <a:latin typeface="Courier"/>
-              </a:rPr>
-              <a:t>Analysis of Deviance Table (Type III Wald chisquare tests)
-Response: algae
-              Chisq Df Pr(&gt;Chisq)    
-(Intercept) 17.3616  1  0.0000309 ***
-treat        8.1513  3    0.04299 *  
----
-Signif. codes:  0 '***' 0.001 '**' 0.01 '*' 0.05 '.' 0.1 ' ' 1</a:t>
+              <a:rPr/>
+              <a:t>The linear mixed-model approach (</a:t>
+            </a:r>
+            <a:r>
+              <a:rPr>
+                <a:latin typeface="Courier"/>
+              </a:rPr>
+              <a:t>lmer</a:t>
+            </a:r>
+            <a:r>
+              <a:rPr/>
+              <a:t>) gives similar results to the traditional nested ANOVA (</a:t>
+            </a:r>
+            <a:r>
+              <a:rPr>
+                <a:latin typeface="Courier"/>
+              </a:rPr>
+              <a:t>aov</a:t>
+            </a:r>
+            <a:r>
+              <a:rPr/>
+              <a:t> with an </a:t>
+            </a:r>
+            <a:r>
+              <a:rPr>
+                <a:latin typeface="Courier"/>
+              </a:rPr>
+              <a:t>Error()</a:t>
+            </a:r>
+            <a:r>
+              <a:rPr/>
+              <a:t> term). The main advantage of the mixed-model approach is its more elegant handling of random effects, easier extension to unbalanced or more complex designs, and the extensive diagnostic tools available through packages like </a:t>
+            </a:r>
+            <a:r>
+              <a:rPr>
+                <a:latin typeface="Courier"/>
+              </a:rPr>
+              <a:t>DHARMa</a:t>
+            </a:r>
+            <a:r>
+              <a:rPr/>
+              <a:t>.</a:t>
+            </a:r>
+          </a:p>
+          <a:p>
+            <a:pPr lvl="0" indent="0" marL="0">
+              <a:buNone/>
+            </a:pPr>
+            <a:r>
+              <a:rPr/>
+              <a:t>✏️ </a:t>
+            </a:r>
+            <a:r>
+              <a:rPr b="1"/>
+              <a:t>Your turn:</a:t>
+            </a:r>
+            <a:r>
+              <a:rPr/>
+              <a:t> Compare the p-value for </a:t>
+            </a:r>
+            <a:r>
+              <a:rPr>
+                <a:latin typeface="Courier"/>
+              </a:rPr>
+              <a:t>treat</a:t>
+            </a:r>
+            <a:r>
+              <a:rPr/>
+              <a:t> from </a:t>
+            </a:r>
+            <a:r>
+              <a:rPr>
+                <a:latin typeface="Courier"/>
+              </a:rPr>
+              <a:t>nested_model</a:t>
+            </a:r>
+            <a:r>
+              <a:rPr/>
+              <a:t> (Part 2) to the p-value from </a:t>
+            </a:r>
+            <a:r>
+              <a:rPr>
+                <a:latin typeface="Courier"/>
+              </a:rPr>
+              <a:t>satt_result</a:t>
+            </a:r>
+            <a:r>
+              <a:rPr/>
+              <a:t> (Part 3). Are they close? Which approach would you reach for first on a future nested design of your own, and why? </a:t>
+            </a:r>
+            <a:r>
+              <a:rPr>
+                <a:latin typeface="Courier"/>
+              </a:rPr>
+              <a:t>________________________</a:t>
             </a:r>
           </a:p>
         </p:txBody>

--- a/docs/content/nested_anova/nested_anova_activity.pptx
+++ b/docs/content/nested_anova/nested_anova_activity.pptx
@@ -11388,7 +11388,7 @@
             </a:pPr>
             <a:r>
               <a:rPr sz="2000"/>
-              <a:t>This nested ANOVA reveals substantial spatial heterogeneity in algae cover, with significant variation among patches within each treatment. Whether the urchin-density treatment effect itself reaches significance depends on which test (F vs. Chi-square) and which model specification you use — a good reminder that “significant” is sensitive to analytical choices in nested designs. The substantial variance component associated with patches nested within treatments underscores the importance of accounting for spatial heterogeneity when designing and analyzing ecological field experiments.</a:t>
+              <a:t>This nested ANOVA reveals substantial spatial heterogeneity in algae cover, with significant variation among patches within each treatment. Whether the urchin-density treatment effect itself reaches significance depends on which test (F vs. Chi-square) and which model specification you use — a good reminder that “significant” is sensitive to analytical choices in nested designs. The substantial variance component associated with patches nested within treatments shows why spatial heterogeneity needs to be accounted for when designing and analyzing ecological field experiments.</a:t>
             </a:r>
           </a:p>
           <a:p>

--- a/docs/content/nested_anova/nested_anova_activity.pptx
+++ b/docs/content/nested_anova/nested_anova_activity.pptx
@@ -16,6 +16,7 @@
     <p:sldId id="264" r:id="rId10"/>
     <p:sldId id="265" r:id="rId11"/>
     <p:sldId id="266" r:id="rId12"/>
+    <p:sldId id="267" r:id="rId13"/>
   </p:sldIdLst>
   <p:sldSz cx="9144000" cy="5143500" type="screen16x9"/>
   <p:notesSz cx="6858000" cy="9144000"/>
@@ -3580,6 +3581,470 @@
 </file>
 
 <file path=ppt/slides/slide11.xml><?xml version="1.0" encoding="utf-8"?>
+<p:sld xmlns:a="http://schemas.openxmlformats.org/drawingml/2006/main" xmlns:r="http://schemas.openxmlformats.org/officeDocument/2006/relationships" xmlns:p="http://schemas.openxmlformats.org/presentationml/2006/main">
+  <p:cSld>
+    <p:spTree>
+      <p:nvGrpSpPr>
+        <p:cNvPr id="1" name=""/>
+        <p:cNvGrpSpPr/>
+        <p:nvPr/>
+      </p:nvGrpSpPr>
+      <p:grpSpPr>
+        <a:xfrm>
+          <a:off x="0" y="0"/>
+          <a:ext cx="0" cy="0"/>
+          <a:chOff x="0" y="0"/>
+          <a:chExt cx="0" cy="0"/>
+        </a:xfrm>
+      </p:grpSpPr>
+      <p:sp>
+        <p:nvSpPr>
+          <p:cNvPr id="2" name="Title 1"/>
+          <p:cNvSpPr>
+            <a:spLocks noGrp="1"/>
+          </p:cNvSpPr>
+          <p:nvPr>
+            <p:ph type="title"/>
+          </p:nvPr>
+        </p:nvSpPr>
+        <p:spPr>
+          <a:xfrm>
+            <a:off x="0" y="0"/>
+            <a:ext cx="9144000" cy="582780"/>
+          </a:xfrm>
+        </p:spPr>
+        <p:txBody>
+          <a:bodyPr/>
+          <a:lstStyle/>
+          <a:p>
+            <a:pPr lvl="0" indent="0" marL="0">
+              <a:buNone/>
+            </a:pPr>
+            <a:r>
+              <a:rPr/>
+              <a:t>Part 8 · Take-Home Extension — A Linear Mixed Model for Crayfish Growth</a:t>
+            </a:r>
+          </a:p>
+        </p:txBody>
+      </p:sp>
+      <p:sp>
+        <p:nvSpPr>
+          <p:cNvPr id="3" name="Content Placeholder 2"/>
+          <p:cNvSpPr>
+            <a:spLocks noGrp="1"/>
+          </p:cNvSpPr>
+          <p:nvPr>
+            <p:ph idx="1"/>
+          </p:nvPr>
+        </p:nvSpPr>
+        <p:spPr/>
+        <p:txBody>
+          <a:bodyPr/>
+          <a:lstStyle/>
+          <a:p>
+            <a:pPr lvl="0" indent="0" marL="0">
+              <a:buNone/>
+            </a:pPr>
+            <a:r>
+              <a:rPr i="1"/>
+              <a:t>Due Wednesday, November 4 — before the next class.</a:t>
+            </a:r>
+          </a:p>
+          <a:p>
+            <a:pPr lvl="0" indent="0" marL="1270000">
+              <a:buNone/>
+            </a:pPr>
+            <a:r>
+              <a:rPr sz="2000" b="1"/>
+              <a:t>Note</a:t>
+            </a:r>
+          </a:p>
+          <a:p>
+            <a:pPr lvl="0" indent="0" marL="1270000">
+              <a:buNone/>
+            </a:pPr>
+            <a:r>
+              <a:rPr sz="2000"/>
+              <a:t>This is your first time building a mixed model from scratch, using the same </a:t>
+            </a:r>
+            <a:r>
+              <a:rPr sz="2000">
+                <a:latin typeface="Courier"/>
+              </a:rPr>
+              <a:t>lmer()</a:t>
+            </a:r>
+            <a:r>
+              <a:rPr sz="2000"/>
+              <a:t> syntax from Part 3, on a new dataset with a different kind of random effect (lake, rather than nested patches).</a:t>
+            </a:r>
+          </a:p>
+          <a:p>
+            <a:pPr lvl="0" indent="0" marL="0">
+              <a:spcBef>
+                <a:spcPts val="3000"/>
+              </a:spcBef>
+              <a:buNone/>
+            </a:pPr>
+            <a:r>
+              <a:rPr b="1"/>
+              <a:t>Background</a:t>
+            </a:r>
+          </a:p>
+          <a:p>
+            <a:pPr lvl="0" indent="0" marL="0">
+              <a:buNone/>
+            </a:pPr>
+            <a:r>
+              <a:rPr/>
+              <a:t>Sargent &amp; Lodge (2014) reared young-of-year rusty crayfish (</a:t>
+            </a:r>
+            <a:r>
+              <a:rPr i="1"/>
+              <a:t>Orconectes rusticus</a:t>
+            </a:r>
+            <a:r>
+              <a:rPr/>
+              <a:t>) from native (Ohio) and invasive (Wisconsin) populations in enclosures across three northern Wisconsin lakes. Individual crayfish within the same lake share that lake’s conditions, so they’re not independent of each other — lake should be treated as a random effect.</a:t>
+            </a:r>
+          </a:p>
+          <a:p>
+            <a:pPr lvl="0" indent="0" marL="0">
+              <a:buNone/>
+            </a:pPr>
+            <a:r>
+              <a:rPr b="1"/>
+              <a:t>▶ Run this:</a:t>
+            </a:r>
+          </a:p>
+          <a:p>
+            <a:pPr lvl="0" indent="0">
+              <a:buNone/>
+            </a:pPr>
+            <a:r>
+              <a:rPr>
+                <a:solidFill>
+                  <a:srgbClr val="003B4F"/>
+                </a:solidFill>
+                <a:latin typeface="Courier"/>
+              </a:rPr>
+              <a:t>cray_df &lt;- </a:t>
+            </a:r>
+            <a:r>
+              <a:rPr>
+                <a:solidFill>
+                  <a:srgbClr val="4758AB"/>
+                </a:solidFill>
+                <a:latin typeface="Courier"/>
+              </a:rPr>
+              <a:t>read_csv</a:t>
+            </a:r>
+            <a:r>
+              <a:rPr>
+                <a:solidFill>
+                  <a:srgbClr val="003B4F"/>
+                </a:solidFill>
+                <a:latin typeface="Courier"/>
+              </a:rPr>
+              <a:t>(</a:t>
+            </a:r>
+            <a:r>
+              <a:rPr>
+                <a:solidFill>
+                  <a:srgbClr val="20794D"/>
+                </a:solidFill>
+                <a:latin typeface="Courier"/>
+              </a:rPr>
+              <a:t>"data/sargent_lodge_crayfish.csv"</a:t>
+            </a:r>
+            <a:r>
+              <a:rPr>
+                <a:solidFill>
+                  <a:srgbClr val="003B4F"/>
+                </a:solidFill>
+                <a:latin typeface="Courier"/>
+              </a:rPr>
+              <a:t>)</a:t>
+            </a:r>
+            <a:br/>
+            <a:r>
+              <a:rPr>
+                <a:solidFill>
+                  <a:srgbClr val="4758AB"/>
+                </a:solidFill>
+                <a:latin typeface="Courier"/>
+              </a:rPr>
+              <a:t>head</a:t>
+            </a:r>
+            <a:r>
+              <a:rPr>
+                <a:solidFill>
+                  <a:srgbClr val="003B4F"/>
+                </a:solidFill>
+                <a:latin typeface="Courier"/>
+              </a:rPr>
+              <a:t>(cray_df)</a:t>
+            </a:r>
+          </a:p>
+          <a:p>
+            <a:pPr lvl="0" indent="0" marL="0">
+              <a:spcBef>
+                <a:spcPts val="3000"/>
+              </a:spcBef>
+              <a:buNone/>
+            </a:pPr>
+            <a:r>
+              <a:rPr b="1"/>
+              <a:t>Your Task</a:t>
+            </a:r>
+          </a:p>
+          <a:p>
+            <a:pPr lvl="0" indent="0" marL="0">
+              <a:buNone/>
+            </a:pPr>
+            <a:r>
+              <a:rPr b="1"/>
+              <a:t>Question:</a:t>
+            </a:r>
+            <a:r>
+              <a:rPr/>
+              <a:t> Does crayfish growth rate differ between native and invasive populations, once you account for the fact that crayfish were grown in different lakes?</a:t>
+            </a:r>
+          </a:p>
+          <a:p>
+            <a:pPr lvl="0" indent="0" marL="0">
+              <a:buNone/>
+            </a:pPr>
+            <a:r>
+              <a:rPr/>
+              <a:t>✏️ </a:t>
+            </a:r>
+            <a:r>
+              <a:rPr b="1"/>
+              <a:t>Your turn:</a:t>
+            </a:r>
+            <a:r>
+              <a:rPr/>
+              <a:t> State your hypotheses for the fixed effect of range. Decide how you want to specify the random effect of lake (a random intercept is enough here — this is not a nested design like Part 3’s patches-within-treatments). Justify your model, fit it, run diagnostics, interpret the fixed effect and the variance components, and report the result properly.</a:t>
+            </a:r>
+          </a:p>
+          <a:p>
+            <a:pPr lvl="0" indent="0">
+              <a:buNone/>
+            </a:pPr>
+            <a:r>
+              <a:rPr>
+                <a:latin typeface="Courier"/>
+              </a:rPr>
+              <a:t>H0 =
+________________________________________________________
+Ha =
+________________________________________________________
+Model I will use and why:
+________________________________________________________</a:t>
+            </a:r>
+          </a:p>
+          <a:p>
+            <a:pPr lvl="0" indent="0">
+              <a:buNone/>
+            </a:pPr>
+            <a:r>
+              <a:rPr>
+                <a:solidFill>
+                  <a:srgbClr val="5E5E5E"/>
+                </a:solidFill>
+                <a:latin typeface="Courier"/>
+              </a:rPr>
+              <a:t># Write your code here:</a:t>
+            </a:r>
+          </a:p>
+          <a:p>
+            <a:pPr lvl="0" indent="0">
+              <a:buNone/>
+            </a:pPr>
+            <a:r>
+              <a:rPr>
+                <a:latin typeface="Courier"/>
+              </a:rPr>
+              <a:t>Interpretation:
+________________________________________________________
+________________________________________________________</a:t>
+            </a:r>
+          </a:p>
+          <a:p>
+            <a:pPr lvl="0" indent="0" marL="0">
+              <a:spcBef>
+                <a:spcPts val="3000"/>
+              </a:spcBef>
+              <a:buNone/>
+            </a:pPr>
+            <a:r>
+              <a:rPr b="1"/>
+              <a:t>Final Figure</a:t>
+            </a:r>
+          </a:p>
+          <a:p>
+            <a:pPr lvl="0" indent="0" marL="0">
+              <a:buNone/>
+            </a:pPr>
+            <a:r>
+              <a:rPr/>
+              <a:t>Produce one publication-quality figure comparing growth rate between ranges — proper axis labels, no default </a:t>
+            </a:r>
+            <a:r>
+              <a:rPr>
+                <a:latin typeface="Courier"/>
+              </a:rPr>
+              <a:t>ggplot</a:t>
+            </a:r>
+            <a:r>
+              <a:rPr/>
+              <a:t> grey background — and export it with </a:t>
+            </a:r>
+            <a:r>
+              <a:rPr>
+                <a:latin typeface="Courier"/>
+              </a:rPr>
+              <a:t>ggsave()</a:t>
+            </a:r>
+            <a:r>
+              <a:rPr/>
+              <a:t>.</a:t>
+            </a:r>
+          </a:p>
+          <a:p>
+            <a:pPr lvl="0" indent="0">
+              <a:buNone/>
+            </a:pPr>
+            <a:r>
+              <a:rPr>
+                <a:solidFill>
+                  <a:srgbClr val="5E5E5E"/>
+                </a:solidFill>
+                <a:latin typeface="Courier"/>
+              </a:rPr>
+              <a:t># Write your code here:</a:t>
+            </a:r>
+          </a:p>
+          <a:p>
+            <a:pPr lvl="0" indent="0" marL="1270000">
+              <a:buNone/>
+            </a:pPr>
+            <a:r>
+              <a:rPr sz="2000" b="1"/>
+              <a:t>Note</a:t>
+            </a:r>
+          </a:p>
+          <a:p>
+            <a:pPr lvl="0" indent="0" marL="1270000">
+              <a:buNone/>
+            </a:pPr>
+            <a:r>
+              <a:rPr sz="2000" b="1"/>
+              <a:t>📤 What to turn in — due Nov 4</a:t>
+            </a:r>
+          </a:p>
+          <a:p>
+            <a:pPr lvl="0" indent="0" marL="1270000">
+              <a:buNone/>
+            </a:pPr>
+            <a:r>
+              <a:rPr sz="2000"/>
+              <a:t>Your write-up should include:</a:t>
+            </a:r>
+          </a:p>
+          <a:p>
+            <a:pPr lvl="0"/>
+            <a:r>
+              <a:rPr sz="2000"/>
+              <a:t>☐ The question</a:t>
+            </a:r>
+          </a:p>
+          <a:p>
+            <a:pPr lvl="0"/>
+            <a:r>
+              <a:rPr sz="2000"/>
+              <a:t>☐ Your hypotheses</a:t>
+            </a:r>
+          </a:p>
+          <a:p>
+            <a:pPr lvl="0"/>
+            <a:r>
+              <a:rPr sz="2000"/>
+              <a:t>☐ Which model you used, and your justification for it</a:t>
+            </a:r>
+          </a:p>
+          <a:p>
+            <a:pPr lvl="0"/>
+            <a:r>
+              <a:rPr sz="2000"/>
+              <a:t>☐ The code and its output</a:t>
+            </a:r>
+          </a:p>
+          <a:p>
+            <a:pPr lvl="0"/>
+            <a:r>
+              <a:rPr sz="2000"/>
+              <a:t>☐ Your interpretation of the result (including the random effect)</a:t>
+            </a:r>
+          </a:p>
+          <a:p>
+            <a:pPr lvl="0"/>
+            <a:r>
+              <a:rPr sz="2000"/>
+              <a:t>☐ A final figure showing the result</a:t>
+            </a:r>
+          </a:p>
+          <a:p>
+            <a:pPr lvl="0" indent="0" marL="1270000">
+              <a:buNone/>
+            </a:pPr>
+            <a:r>
+              <a:rPr sz="2000" b="1"/>
+              <a:t>Note</a:t>
+            </a:r>
+          </a:p>
+          <a:p>
+            <a:pPr lvl="0" indent="0" marL="1270000">
+              <a:buNone/>
+            </a:pPr>
+            <a:r>
+              <a:rPr sz="2000" b="1"/>
+              <a:t>Reference</a:t>
+            </a:r>
+          </a:p>
+          <a:p>
+            <a:pPr lvl="0" indent="0" marL="1270000">
+              <a:buNone/>
+            </a:pPr>
+            <a:r>
+              <a:rPr sz="2000"/>
+              <a:t>Sargent, L.W. &amp; Lodge, D.M. (2014). Evolution of invasive traits in nonindigenous species: increased survival and faster growth in invasive populations of rusty crayfish (</a:t>
+            </a:r>
+            <a:r>
+              <a:rPr sz="2000" i="1"/>
+              <a:t>Orconectes rusticus</a:t>
+            </a:r>
+            <a:r>
+              <a:rPr sz="2000"/>
+              <a:t>). </a:t>
+            </a:r>
+            <a:r>
+              <a:rPr sz="2000" i="1"/>
+              <a:t>Evolutionary Applications</a:t>
+            </a:r>
+            <a:r>
+              <a:rPr sz="2000"/>
+              <a:t>, 7, 949–961.</a:t>
+            </a:r>
+          </a:p>
+        </p:txBody>
+      </p:sp>
+    </p:spTree>
+  </p:cSld>
+</p:sld>
+</file>
+
+<file path=ppt/slides/slide12.xml><?xml version="1.0" encoding="utf-8"?>
 <p:sld xmlns:a="http://schemas.openxmlformats.org/drawingml/2006/main" xmlns:r="http://schemas.openxmlformats.org/officeDocument/2006/relationships" xmlns:p="http://schemas.openxmlformats.org/presentationml/2006/main">
   <p:cSld>
     <p:spTree>

--- a/docs/content/nested_anova/nested_anova_activity.pptx
+++ b/docs/content/nested_anova/nested_anova_activity.pptx
@@ -13,10 +13,6 @@
     <p:sldId id="261" r:id="rId7"/>
     <p:sldId id="262" r:id="rId8"/>
     <p:sldId id="263" r:id="rId9"/>
-    <p:sldId id="264" r:id="rId10"/>
-    <p:sldId id="265" r:id="rId11"/>
-    <p:sldId id="266" r:id="rId12"/>
-    <p:sldId id="267" r:id="rId13"/>
   </p:sldIdLst>
   <p:sldSz cx="9144000" cy="5143500" type="screen16x9"/>
   <p:notesSz cx="6858000" cy="9144000"/>
@@ -3350,946 +3346,6 @@
 </p:sld>
 </file>
 
-<file path=ppt/slides/slide10.xml><?xml version="1.0" encoding="utf-8"?>
-<p:sld xmlns:a="http://schemas.openxmlformats.org/drawingml/2006/main" xmlns:r="http://schemas.openxmlformats.org/officeDocument/2006/relationships" xmlns:p="http://schemas.openxmlformats.org/presentationml/2006/main">
-  <p:cSld>
-    <p:spTree>
-      <p:nvGrpSpPr>
-        <p:cNvPr id="1" name=""/>
-        <p:cNvGrpSpPr/>
-        <p:nvPr/>
-      </p:nvGrpSpPr>
-      <p:grpSpPr>
-        <a:xfrm>
-          <a:off x="0" y="0"/>
-          <a:ext cx="0" cy="0"/>
-          <a:chOff x="0" y="0"/>
-          <a:chExt cx="0" cy="0"/>
-        </a:xfrm>
-      </p:grpSpPr>
-      <p:sp>
-        <p:nvSpPr>
-          <p:cNvPr id="2" name="Title 1"/>
-          <p:cNvSpPr>
-            <a:spLocks noGrp="1"/>
-          </p:cNvSpPr>
-          <p:nvPr>
-            <p:ph type="title"/>
-          </p:nvPr>
-        </p:nvSpPr>
-        <p:spPr>
-          <a:xfrm>
-            <a:off x="0" y="0"/>
-            <a:ext cx="9144000" cy="582780"/>
-          </a:xfrm>
-        </p:spPr>
-        <p:txBody>
-          <a:bodyPr/>
-          <a:lstStyle/>
-          <a:p>
-            <a:pPr lvl="0" indent="0" marL="0">
-              <a:buNone/>
-            </a:pPr>
-            <a:r>
-              <a:rPr/>
-              <a:t>Review and checkpoint</a:t>
-            </a:r>
-          </a:p>
-        </p:txBody>
-      </p:sp>
-      <p:sp>
-        <p:nvSpPr>
-          <p:cNvPr id="3" name="Content Placeholder 2"/>
-          <p:cNvSpPr>
-            <a:spLocks noGrp="1"/>
-          </p:cNvSpPr>
-          <p:nvPr>
-            <p:ph idx="1"/>
-          </p:nvPr>
-        </p:nvSpPr>
-        <p:spPr/>
-        <p:txBody>
-          <a:bodyPr/>
-          <a:lstStyle/>
-          <a:p>
-            <a:pPr lvl="0" indent="0" marL="0">
-              <a:buNone/>
-            </a:pPr>
-            <a:r>
-              <a:rPr/>
-              <a:t>At this point you can:</a:t>
-            </a:r>
-          </a:p>
-          <a:p>
-            <a:pPr lvl="0"/>
-            <a:r>
-              <a:rPr/>
-              <a:t>☐ Explain why </a:t>
-            </a:r>
-            <a:r>
-              <a:rPr>
-                <a:latin typeface="Courier"/>
-              </a:rPr>
-              <a:t>patch</a:t>
-            </a:r>
-            <a:r>
-              <a:rPr/>
-              <a:t> nested in </a:t>
-            </a:r>
-            <a:r>
-              <a:rPr>
-                <a:latin typeface="Courier"/>
-              </a:rPr>
-              <a:t>treat</a:t>
-            </a:r>
-            <a:r>
-              <a:rPr/>
-              <a:t> cannot be analyzed as a simple factorial design</a:t>
-            </a:r>
-          </a:p>
-          <a:p>
-            <a:pPr lvl="0"/>
-            <a:r>
-              <a:rPr/>
-              <a:t>☐ Fit a nested ANOVA with </a:t>
-            </a:r>
-            <a:r>
-              <a:rPr>
-                <a:latin typeface="Courier"/>
-              </a:rPr>
-              <a:t>aov(..., Error(...))</a:t>
-            </a:r>
-            <a:r>
-              <a:rPr/>
-              <a:t> and with </a:t>
-            </a:r>
-            <a:r>
-              <a:rPr>
-                <a:latin typeface="Courier"/>
-              </a:rPr>
-              <a:t>afex::aov_car()</a:t>
-            </a:r>
-          </a:p>
-          <a:p>
-            <a:pPr lvl="0"/>
-            <a:r>
-              <a:rPr/>
-              <a:t>☐ Fit the same design as a mixed model with </a:t>
-            </a:r>
-            <a:r>
-              <a:rPr>
-                <a:latin typeface="Courier"/>
-              </a:rPr>
-              <a:t>lme4::lmer()</a:t>
-            </a:r>
-            <a:r>
-              <a:rPr/>
-              <a:t>, using correct random-effects notation</a:t>
-            </a:r>
-          </a:p>
-          <a:p>
-            <a:pPr lvl="0"/>
-            <a:r>
-              <a:rPr/>
-              <a:t>☐ Choose between the F-test and Chi-square test for a mixed model, using the rule of thumb from lecture</a:t>
-            </a:r>
-          </a:p>
-          <a:p>
-            <a:pPr lvl="0"/>
-            <a:r>
-              <a:rPr/>
-              <a:t>☐ Run DHARMa diagnostics on a mixed model</a:t>
-            </a:r>
-          </a:p>
-          <a:p>
-            <a:pPr lvl="0"/>
-            <a:r>
-              <a:rPr/>
-              <a:t>☐ Compute EMMs and post-hoc comparisons for a nested design</a:t>
-            </a:r>
-          </a:p>
-          <a:p>
-            <a:pPr lvl="0" indent="0" marL="1270000">
-              <a:buNone/>
-            </a:pPr>
-            <a:r>
-              <a:rPr sz="2000" b="1"/>
-              <a:t>Note</a:t>
-            </a:r>
-          </a:p>
-          <a:p>
-            <a:pPr lvl="0" indent="0" marL="1270000">
-              <a:buNone/>
-            </a:pPr>
-            <a:r>
-              <a:rPr sz="2000" b="1"/>
-              <a:t>📤 What to turn in before next class</a:t>
-            </a:r>
-          </a:p>
-          <a:p>
-            <a:pPr lvl="0" indent="0" marL="1270000">
-              <a:buNone/>
-            </a:pPr>
-            <a:r>
-              <a:rPr sz="2000"/>
-              <a:t>Upload both of these to the course management system:</a:t>
-            </a:r>
-          </a:p>
-          <a:p>
-            <a:pPr lvl="0" indent="-342900" marL="342900">
-              <a:buAutoNum type="arabicPeriod"/>
-            </a:pPr>
-            <a:r>
-              <a:rPr sz="2000"/>
-              <a:t>Your code — the </a:t>
-            </a:r>
-            <a:r>
-              <a:rPr sz="2000">
-                <a:latin typeface="Courier"/>
-              </a:rPr>
-              <a:t>scripts/</a:t>
-            </a:r>
-            <a:r>
-              <a:rPr sz="2000"/>
-              <a:t> folder (or just </a:t>
-            </a:r>
-            <a:r>
-              <a:rPr sz="2000">
-                <a:latin typeface="Courier"/>
-              </a:rPr>
-              <a:t>14_nested_anova.R</a:t>
-            </a:r>
-            <a:r>
-              <a:rPr sz="2000"/>
-              <a:t>)</a:t>
-            </a:r>
-          </a:p>
-          <a:p>
-            <a:pPr lvl="0" indent="-342900" marL="342900">
-              <a:buAutoNum type="arabicPeriod"/>
-            </a:pPr>
-            <a:r>
-              <a:rPr sz="2000"/>
-              <a:t>This worksheet, with your written answers</a:t>
-            </a:r>
-          </a:p>
-        </p:txBody>
-      </p:sp>
-    </p:spTree>
-  </p:cSld>
-</p:sld>
-</file>
-
-<file path=ppt/slides/slide11.xml><?xml version="1.0" encoding="utf-8"?>
-<p:sld xmlns:a="http://schemas.openxmlformats.org/drawingml/2006/main" xmlns:r="http://schemas.openxmlformats.org/officeDocument/2006/relationships" xmlns:p="http://schemas.openxmlformats.org/presentationml/2006/main">
-  <p:cSld>
-    <p:spTree>
-      <p:nvGrpSpPr>
-        <p:cNvPr id="1" name=""/>
-        <p:cNvGrpSpPr/>
-        <p:nvPr/>
-      </p:nvGrpSpPr>
-      <p:grpSpPr>
-        <a:xfrm>
-          <a:off x="0" y="0"/>
-          <a:ext cx="0" cy="0"/>
-          <a:chOff x="0" y="0"/>
-          <a:chExt cx="0" cy="0"/>
-        </a:xfrm>
-      </p:grpSpPr>
-      <p:sp>
-        <p:nvSpPr>
-          <p:cNvPr id="2" name="Title 1"/>
-          <p:cNvSpPr>
-            <a:spLocks noGrp="1"/>
-          </p:cNvSpPr>
-          <p:nvPr>
-            <p:ph type="title"/>
-          </p:nvPr>
-        </p:nvSpPr>
-        <p:spPr>
-          <a:xfrm>
-            <a:off x="0" y="0"/>
-            <a:ext cx="9144000" cy="582780"/>
-          </a:xfrm>
-        </p:spPr>
-        <p:txBody>
-          <a:bodyPr/>
-          <a:lstStyle/>
-          <a:p>
-            <a:pPr lvl="0" indent="0" marL="0">
-              <a:buNone/>
-            </a:pPr>
-            <a:r>
-              <a:rPr/>
-              <a:t>Part 8 · Take-Home Extension — A Linear Mixed Model for Crayfish Growth</a:t>
-            </a:r>
-          </a:p>
-        </p:txBody>
-      </p:sp>
-      <p:sp>
-        <p:nvSpPr>
-          <p:cNvPr id="3" name="Content Placeholder 2"/>
-          <p:cNvSpPr>
-            <a:spLocks noGrp="1"/>
-          </p:cNvSpPr>
-          <p:nvPr>
-            <p:ph idx="1"/>
-          </p:nvPr>
-        </p:nvSpPr>
-        <p:spPr/>
-        <p:txBody>
-          <a:bodyPr/>
-          <a:lstStyle/>
-          <a:p>
-            <a:pPr lvl="0" indent="0" marL="0">
-              <a:buNone/>
-            </a:pPr>
-            <a:r>
-              <a:rPr i="1"/>
-              <a:t>Due Wednesday, November 4 — before the next class.</a:t>
-            </a:r>
-          </a:p>
-          <a:p>
-            <a:pPr lvl="0" indent="0" marL="1270000">
-              <a:buNone/>
-            </a:pPr>
-            <a:r>
-              <a:rPr sz="2000" b="1"/>
-              <a:t>Note</a:t>
-            </a:r>
-          </a:p>
-          <a:p>
-            <a:pPr lvl="0" indent="0" marL="1270000">
-              <a:buNone/>
-            </a:pPr>
-            <a:r>
-              <a:rPr sz="2000"/>
-              <a:t>This is your first time building a mixed model from scratch, using the same </a:t>
-            </a:r>
-            <a:r>
-              <a:rPr sz="2000">
-                <a:latin typeface="Courier"/>
-              </a:rPr>
-              <a:t>lmer()</a:t>
-            </a:r>
-            <a:r>
-              <a:rPr sz="2000"/>
-              <a:t> syntax from Part 3, on a new dataset with a different kind of random effect (lake, rather than nested patches).</a:t>
-            </a:r>
-          </a:p>
-          <a:p>
-            <a:pPr lvl="0" indent="0" marL="0">
-              <a:spcBef>
-                <a:spcPts val="3000"/>
-              </a:spcBef>
-              <a:buNone/>
-            </a:pPr>
-            <a:r>
-              <a:rPr b="1"/>
-              <a:t>Background</a:t>
-            </a:r>
-          </a:p>
-          <a:p>
-            <a:pPr lvl="0" indent="0" marL="0">
-              <a:buNone/>
-            </a:pPr>
-            <a:r>
-              <a:rPr/>
-              <a:t>Sargent &amp; Lodge (2014) reared young-of-year rusty crayfish (</a:t>
-            </a:r>
-            <a:r>
-              <a:rPr i="1"/>
-              <a:t>Orconectes rusticus</a:t>
-            </a:r>
-            <a:r>
-              <a:rPr/>
-              <a:t>) from native (Ohio) and invasive (Wisconsin) populations in enclosures across three northern Wisconsin lakes. Individual crayfish within the same lake share that lake’s conditions, so they’re not independent of each other — lake should be treated as a random effect.</a:t>
-            </a:r>
-          </a:p>
-          <a:p>
-            <a:pPr lvl="0" indent="0" marL="0">
-              <a:buNone/>
-            </a:pPr>
-            <a:r>
-              <a:rPr b="1"/>
-              <a:t>▶ Run this:</a:t>
-            </a:r>
-          </a:p>
-          <a:p>
-            <a:pPr lvl="0" indent="0">
-              <a:buNone/>
-            </a:pPr>
-            <a:r>
-              <a:rPr>
-                <a:solidFill>
-                  <a:srgbClr val="003B4F"/>
-                </a:solidFill>
-                <a:latin typeface="Courier"/>
-              </a:rPr>
-              <a:t>cray_df &lt;- </a:t>
-            </a:r>
-            <a:r>
-              <a:rPr>
-                <a:solidFill>
-                  <a:srgbClr val="4758AB"/>
-                </a:solidFill>
-                <a:latin typeface="Courier"/>
-              </a:rPr>
-              <a:t>read_csv</a:t>
-            </a:r>
-            <a:r>
-              <a:rPr>
-                <a:solidFill>
-                  <a:srgbClr val="003B4F"/>
-                </a:solidFill>
-                <a:latin typeface="Courier"/>
-              </a:rPr>
-              <a:t>(</a:t>
-            </a:r>
-            <a:r>
-              <a:rPr>
-                <a:solidFill>
-                  <a:srgbClr val="20794D"/>
-                </a:solidFill>
-                <a:latin typeface="Courier"/>
-              </a:rPr>
-              <a:t>"data/sargent_lodge_crayfish.csv"</a:t>
-            </a:r>
-            <a:r>
-              <a:rPr>
-                <a:solidFill>
-                  <a:srgbClr val="003B4F"/>
-                </a:solidFill>
-                <a:latin typeface="Courier"/>
-              </a:rPr>
-              <a:t>)</a:t>
-            </a:r>
-            <a:br/>
-            <a:r>
-              <a:rPr>
-                <a:solidFill>
-                  <a:srgbClr val="4758AB"/>
-                </a:solidFill>
-                <a:latin typeface="Courier"/>
-              </a:rPr>
-              <a:t>head</a:t>
-            </a:r>
-            <a:r>
-              <a:rPr>
-                <a:solidFill>
-                  <a:srgbClr val="003B4F"/>
-                </a:solidFill>
-                <a:latin typeface="Courier"/>
-              </a:rPr>
-              <a:t>(cray_df)</a:t>
-            </a:r>
-          </a:p>
-          <a:p>
-            <a:pPr lvl="0" indent="0" marL="0">
-              <a:spcBef>
-                <a:spcPts val="3000"/>
-              </a:spcBef>
-              <a:buNone/>
-            </a:pPr>
-            <a:r>
-              <a:rPr b="1"/>
-              <a:t>Your Task</a:t>
-            </a:r>
-          </a:p>
-          <a:p>
-            <a:pPr lvl="0" indent="0" marL="0">
-              <a:buNone/>
-            </a:pPr>
-            <a:r>
-              <a:rPr b="1"/>
-              <a:t>Question:</a:t>
-            </a:r>
-            <a:r>
-              <a:rPr/>
-              <a:t> Does crayfish growth rate differ between native and invasive populations, once you account for the fact that crayfish were grown in different lakes?</a:t>
-            </a:r>
-          </a:p>
-          <a:p>
-            <a:pPr lvl="0" indent="0" marL="0">
-              <a:buNone/>
-            </a:pPr>
-            <a:r>
-              <a:rPr/>
-              <a:t>✏️ </a:t>
-            </a:r>
-            <a:r>
-              <a:rPr b="1"/>
-              <a:t>Your turn:</a:t>
-            </a:r>
-            <a:r>
-              <a:rPr/>
-              <a:t> State your hypotheses for the fixed effect of range. Decide how you want to specify the random effect of lake (a random intercept is enough here — this is not a nested design like Part 3’s patches-within-treatments). Justify your model, fit it, run diagnostics, interpret the fixed effect and the variance components, and report the result properly.</a:t>
-            </a:r>
-          </a:p>
-          <a:p>
-            <a:pPr lvl="0" indent="0">
-              <a:buNone/>
-            </a:pPr>
-            <a:r>
-              <a:rPr>
-                <a:latin typeface="Courier"/>
-              </a:rPr>
-              <a:t>H0 =
-________________________________________________________
-Ha =
-________________________________________________________
-Model I will use and why:
-________________________________________________________</a:t>
-            </a:r>
-          </a:p>
-          <a:p>
-            <a:pPr lvl="0" indent="0">
-              <a:buNone/>
-            </a:pPr>
-            <a:r>
-              <a:rPr>
-                <a:solidFill>
-                  <a:srgbClr val="5E5E5E"/>
-                </a:solidFill>
-                <a:latin typeface="Courier"/>
-              </a:rPr>
-              <a:t># Write your code here:</a:t>
-            </a:r>
-          </a:p>
-          <a:p>
-            <a:pPr lvl="0" indent="0">
-              <a:buNone/>
-            </a:pPr>
-            <a:r>
-              <a:rPr>
-                <a:latin typeface="Courier"/>
-              </a:rPr>
-              <a:t>Interpretation:
-________________________________________________________
-________________________________________________________</a:t>
-            </a:r>
-          </a:p>
-          <a:p>
-            <a:pPr lvl="0" indent="0" marL="0">
-              <a:spcBef>
-                <a:spcPts val="3000"/>
-              </a:spcBef>
-              <a:buNone/>
-            </a:pPr>
-            <a:r>
-              <a:rPr b="1"/>
-              <a:t>Final Figure</a:t>
-            </a:r>
-          </a:p>
-          <a:p>
-            <a:pPr lvl="0" indent="0" marL="0">
-              <a:buNone/>
-            </a:pPr>
-            <a:r>
-              <a:rPr/>
-              <a:t>Produce one publication-quality figure comparing growth rate between ranges — proper axis labels, no default </a:t>
-            </a:r>
-            <a:r>
-              <a:rPr>
-                <a:latin typeface="Courier"/>
-              </a:rPr>
-              <a:t>ggplot</a:t>
-            </a:r>
-            <a:r>
-              <a:rPr/>
-              <a:t> grey background — and export it with </a:t>
-            </a:r>
-            <a:r>
-              <a:rPr>
-                <a:latin typeface="Courier"/>
-              </a:rPr>
-              <a:t>ggsave()</a:t>
-            </a:r>
-            <a:r>
-              <a:rPr/>
-              <a:t>.</a:t>
-            </a:r>
-          </a:p>
-          <a:p>
-            <a:pPr lvl="0" indent="0">
-              <a:buNone/>
-            </a:pPr>
-            <a:r>
-              <a:rPr>
-                <a:solidFill>
-                  <a:srgbClr val="5E5E5E"/>
-                </a:solidFill>
-                <a:latin typeface="Courier"/>
-              </a:rPr>
-              <a:t># Write your code here:</a:t>
-            </a:r>
-          </a:p>
-          <a:p>
-            <a:pPr lvl="0" indent="0" marL="1270000">
-              <a:buNone/>
-            </a:pPr>
-            <a:r>
-              <a:rPr sz="2000" b="1"/>
-              <a:t>Note</a:t>
-            </a:r>
-          </a:p>
-          <a:p>
-            <a:pPr lvl="0" indent="0" marL="1270000">
-              <a:buNone/>
-            </a:pPr>
-            <a:r>
-              <a:rPr sz="2000" b="1"/>
-              <a:t>📤 What to turn in — due Nov 4</a:t>
-            </a:r>
-          </a:p>
-          <a:p>
-            <a:pPr lvl="0" indent="0" marL="1270000">
-              <a:buNone/>
-            </a:pPr>
-            <a:r>
-              <a:rPr sz="2000"/>
-              <a:t>Your write-up should include:</a:t>
-            </a:r>
-          </a:p>
-          <a:p>
-            <a:pPr lvl="0"/>
-            <a:r>
-              <a:rPr sz="2000"/>
-              <a:t>☐ The question</a:t>
-            </a:r>
-          </a:p>
-          <a:p>
-            <a:pPr lvl="0"/>
-            <a:r>
-              <a:rPr sz="2000"/>
-              <a:t>☐ Your hypotheses</a:t>
-            </a:r>
-          </a:p>
-          <a:p>
-            <a:pPr lvl="0"/>
-            <a:r>
-              <a:rPr sz="2000"/>
-              <a:t>☐ Which model you used, and your justification for it</a:t>
-            </a:r>
-          </a:p>
-          <a:p>
-            <a:pPr lvl="0"/>
-            <a:r>
-              <a:rPr sz="2000"/>
-              <a:t>☐ The code and its output</a:t>
-            </a:r>
-          </a:p>
-          <a:p>
-            <a:pPr lvl="0"/>
-            <a:r>
-              <a:rPr sz="2000"/>
-              <a:t>☐ Your interpretation of the result (including the random effect)</a:t>
-            </a:r>
-          </a:p>
-          <a:p>
-            <a:pPr lvl="0"/>
-            <a:r>
-              <a:rPr sz="2000"/>
-              <a:t>☐ A final figure showing the result</a:t>
-            </a:r>
-          </a:p>
-          <a:p>
-            <a:pPr lvl="0" indent="0" marL="1270000">
-              <a:buNone/>
-            </a:pPr>
-            <a:r>
-              <a:rPr sz="2000" b="1"/>
-              <a:t>Note</a:t>
-            </a:r>
-          </a:p>
-          <a:p>
-            <a:pPr lvl="0" indent="0" marL="1270000">
-              <a:buNone/>
-            </a:pPr>
-            <a:r>
-              <a:rPr sz="2000" b="1"/>
-              <a:t>Reference</a:t>
-            </a:r>
-          </a:p>
-          <a:p>
-            <a:pPr lvl="0" indent="0" marL="1270000">
-              <a:buNone/>
-            </a:pPr>
-            <a:r>
-              <a:rPr sz="2000"/>
-              <a:t>Sargent, L.W. &amp; Lodge, D.M. (2014). Evolution of invasive traits in nonindigenous species: increased survival and faster growth in invasive populations of rusty crayfish (</a:t>
-            </a:r>
-            <a:r>
-              <a:rPr sz="2000" i="1"/>
-              <a:t>Orconectes rusticus</a:t>
-            </a:r>
-            <a:r>
-              <a:rPr sz="2000"/>
-              <a:t>). </a:t>
-            </a:r>
-            <a:r>
-              <a:rPr sz="2000" i="1"/>
-              <a:t>Evolutionary Applications</a:t>
-            </a:r>
-            <a:r>
-              <a:rPr sz="2000"/>
-              <a:t>, 7, 949–961.</a:t>
-            </a:r>
-          </a:p>
-        </p:txBody>
-      </p:sp>
-    </p:spTree>
-  </p:cSld>
-</p:sld>
-</file>
-
-<file path=ppt/slides/slide12.xml><?xml version="1.0" encoding="utf-8"?>
-<p:sld xmlns:a="http://schemas.openxmlformats.org/drawingml/2006/main" xmlns:r="http://schemas.openxmlformats.org/officeDocument/2006/relationships" xmlns:p="http://schemas.openxmlformats.org/presentationml/2006/main">
-  <p:cSld>
-    <p:spTree>
-      <p:nvGrpSpPr>
-        <p:cNvPr id="1" name=""/>
-        <p:cNvGrpSpPr/>
-        <p:nvPr/>
-      </p:nvGrpSpPr>
-      <p:grpSpPr>
-        <a:xfrm>
-          <a:off x="0" y="0"/>
-          <a:ext cx="0" cy="0"/>
-          <a:chOff x="0" y="0"/>
-          <a:chExt cx="0" cy="0"/>
-        </a:xfrm>
-      </p:grpSpPr>
-      <p:sp>
-        <p:nvSpPr>
-          <p:cNvPr id="2" name="Title 1"/>
-          <p:cNvSpPr>
-            <a:spLocks noGrp="1"/>
-          </p:cNvSpPr>
-          <p:nvPr>
-            <p:ph type="title"/>
-          </p:nvPr>
-        </p:nvSpPr>
-        <p:spPr>
-          <a:xfrm>
-            <a:off x="0" y="0"/>
-            <a:ext cx="9144000" cy="582780"/>
-          </a:xfrm>
-        </p:spPr>
-        <p:txBody>
-          <a:bodyPr/>
-          <a:lstStyle/>
-          <a:p>
-            <a:pPr lvl="0" indent="0" marL="0">
-              <a:buNone/>
-            </a:pPr>
-            <a:r>
-              <a:rPr/>
-              <a:t>Getting unstuck</a:t>
-            </a:r>
-          </a:p>
-        </p:txBody>
-      </p:sp>
-      <p:sp>
-        <p:nvSpPr>
-          <p:cNvPr id="3" name="Content Placeholder 2"/>
-          <p:cNvSpPr>
-            <a:spLocks noGrp="1"/>
-          </p:cNvSpPr>
-          <p:nvPr>
-            <p:ph idx="1"/>
-          </p:nvPr>
-        </p:nvSpPr>
-        <p:spPr/>
-        <p:txBody>
-          <a:bodyPr/>
-          <a:lstStyle/>
-          <a:p>
-            <a:pPr lvl="0" indent="0" marL="0">
-              <a:buNone/>
-            </a:pPr>
-            <a:r>
-              <a:rPr/>
-              <a:t>When code breaks — and it will, that is normal:</a:t>
-            </a:r>
-          </a:p>
-          <a:p>
-            <a:pPr lvl="0" indent="-342900" marL="342900">
-              <a:buAutoNum type="arabicPeriod"/>
-            </a:pPr>
-            <a:r>
-              <a:rPr b="1"/>
-              <a:t>Read the error message out loud.</a:t>
-            </a:r>
-            <a:r>
-              <a:rPr/>
-              <a:t> R usually names the line and the problem.</a:t>
-            </a:r>
-          </a:p>
-          <a:p>
-            <a:pPr lvl="0" indent="-342900" marL="342900">
-              <a:buAutoNum type="arabicPeriod"/>
-            </a:pPr>
-            <a:r>
-              <a:rPr b="1"/>
-              <a:t>Check the usual suspects:</a:t>
-            </a:r>
-            <a:r>
-              <a:rPr/>
-              <a:t> did you run </a:t>
-            </a:r>
-            <a:r>
-              <a:rPr>
-                <a:latin typeface="Courier"/>
-              </a:rPr>
-              <a:t>library(lme4)</a:t>
-            </a:r>
-            <a:r>
-              <a:rPr/>
-              <a:t>, </a:t>
-            </a:r>
-            <a:r>
-              <a:rPr>
-                <a:latin typeface="Courier"/>
-              </a:rPr>
-              <a:t>library(lmerTest)</a:t>
-            </a:r>
-            <a:r>
-              <a:rPr/>
-              <a:t>, </a:t>
-            </a:r>
-            <a:r>
-              <a:rPr>
-                <a:latin typeface="Courier"/>
-              </a:rPr>
-              <a:t>library(car)</a:t>
-            </a:r>
-            <a:r>
-              <a:rPr/>
-              <a:t>, </a:t>
-            </a:r>
-            <a:r>
-              <a:rPr>
-                <a:latin typeface="Courier"/>
-              </a:rPr>
-              <a:t>library(emmeans)</a:t>
-            </a:r>
-            <a:r>
-              <a:rPr/>
-              <a:t>, </a:t>
-            </a:r>
-            <a:r>
-              <a:rPr>
-                <a:latin typeface="Courier"/>
-              </a:rPr>
-              <a:t>library(DHARMa)</a:t>
-            </a:r>
-            <a:r>
-              <a:rPr/>
-              <a:t>, </a:t>
-            </a:r>
-            <a:r>
-              <a:rPr>
-                <a:latin typeface="Courier"/>
-              </a:rPr>
-              <a:t>library(afex)</a:t>
-            </a:r>
-            <a:r>
-              <a:rPr/>
-              <a:t>, and </a:t>
-            </a:r>
-            <a:r>
-              <a:rPr>
-                <a:latin typeface="Courier"/>
-              </a:rPr>
-              <a:t>library(tidyverse)</a:t>
-            </a:r>
-            <a:r>
-              <a:rPr/>
-              <a:t>? Spelling? A missing </a:t>
-            </a:r>
-            <a:r>
-              <a:rPr>
-                <a:latin typeface="Courier"/>
-              </a:rPr>
-              <a:t>)</a:t>
-            </a:r>
-            <a:r>
-              <a:rPr/>
-              <a:t> or </a:t>
-            </a:r>
-            <a:r>
-              <a:rPr>
-                <a:latin typeface="Courier"/>
-              </a:rPr>
-              <a:t>%&gt;%</a:t>
-            </a:r>
-            <a:r>
-              <a:rPr/>
-              <a:t> at the </a:t>
-            </a:r>
-            <a:r>
-              <a:rPr i="1"/>
-              <a:t>start</a:t>
-            </a:r>
-            <a:r>
-              <a:rPr/>
-              <a:t> of a line?</a:t>
-            </a:r>
-          </a:p>
-          <a:p>
-            <a:pPr lvl="0" indent="-342900" marL="342900">
-              <a:buAutoNum type="arabicPeriod"/>
-            </a:pPr>
-            <a:r>
-              <a:rPr>
-                <a:latin typeface="Courier"/>
-              </a:rPr>
-              <a:t>?function_name</a:t>
-            </a:r>
-            <a:r>
-              <a:rPr/>
-              <a:t> opens the built-in help page.</a:t>
-            </a:r>
-          </a:p>
-          <a:p>
-            <a:pPr lvl="0" indent="-342900" marL="342900">
-              <a:buAutoNum type="arabicPeriod"/>
-            </a:pPr>
-            <a:r>
-              <a:rPr b="1"/>
-              <a:t>Bring the exact error</a:t>
-            </a:r>
-            <a:r>
-              <a:rPr/>
-              <a:t> (copy-paste it) to class or office hours.</a:t>
-            </a:r>
-          </a:p>
-          <a:p>
-            <a:pPr lvl="0" indent="0" marL="1270000">
-              <a:buNone/>
-            </a:pPr>
-            <a:r>
-              <a:rPr sz="2000"/>
-              <a:t>💡 </a:t>
-            </a:r>
-            <a:r>
-              <a:rPr sz="2000" b="1"/>
-              <a:t>Key idea:</a:t>
-            </a:r>
-            <a:r>
-              <a:rPr sz="2000"/>
-              <a:t> Every working scientist googles error messages daily. Getting stuck is not failing — it is the job.</a:t>
-            </a:r>
-          </a:p>
-        </p:txBody>
-      </p:sp>
-    </p:spTree>
-  </p:cSld>
-</p:sld>
-</file>
-
 <file path=ppt/slides/slide2.xml><?xml version="1.0" encoding="utf-8"?>
 <p:sld xmlns:a="http://schemas.openxmlformats.org/drawingml/2006/main" xmlns:r="http://schemas.openxmlformats.org/officeDocument/2006/relationships" xmlns:p="http://schemas.openxmlformats.org/presentationml/2006/main">
   <p:cSld>
@@ -4430,7 +3486,7 @@
             </a:r>
             <a:r>
               <a:rPr sz="2000"/>
-              <a:t> (each patch received only one urchin-density treatment).</a:t>
+              <a:t> (each patch received only one urchin-density treatment). Next class, the Linear Mixed Models activity revisits this exact same dataset with a different (and more flexible) modeling approach — this worksheet stays entirely with the traditional method.</a:t>
             </a:r>
           </a:p>
         </p:txBody>
@@ -4530,7 +3586,7 @@
                 </a:solidFill>
                 <a:latin typeface="Courier"/>
               </a:rPr>
-              <a:t>(dotwhisker)</a:t>
+              <a:t>(janitor)</a:t>
             </a:r>
             <a:br/>
             <a:r>
@@ -4549,7 +3605,7 @@
                 </a:solidFill>
                 <a:latin typeface="Courier"/>
               </a:rPr>
-              <a:t>(janitor)</a:t>
+              <a:t>(afex)</a:t>
             </a:r>
             <a:br/>
             <a:r>
@@ -4568,7 +3624,7 @@
                 </a:solidFill>
                 <a:latin typeface="Courier"/>
               </a:rPr>
-              <a:t>(car)          </a:t>
+              <a:t>(emmeans)       </a:t>
             </a:r>
             <a:r>
               <a:rPr>
@@ -4577,185 +3633,7 @@
                 </a:solidFill>
                 <a:latin typeface="Courier"/>
               </a:rPr>
-              <a:t># For Levene's test and Type III SS</a:t>
-            </a:r>
-            <a:br/>
-            <a:r>
-              <a:rPr>
-                <a:solidFill>
-                  <a:srgbClr val="4758AB"/>
-                </a:solidFill>
-                <a:latin typeface="Courier"/>
-              </a:rPr>
-              <a:t>library</a:t>
-            </a:r>
-            <a:r>
-              <a:rPr>
-                <a:solidFill>
-                  <a:srgbClr val="003B4F"/>
-                </a:solidFill>
-                <a:latin typeface="Courier"/>
-              </a:rPr>
-              <a:t>(lme4)          </a:t>
-            </a:r>
-            <a:r>
-              <a:rPr>
-                <a:solidFill>
-                  <a:srgbClr val="5E5E5E"/>
-                </a:solidFill>
-                <a:latin typeface="Courier"/>
-              </a:rPr>
-              <a:t># For mixed-effects models</a:t>
-            </a:r>
-            <a:br/>
-            <a:r>
-              <a:rPr>
-                <a:solidFill>
-                  <a:srgbClr val="4758AB"/>
-                </a:solidFill>
-                <a:latin typeface="Courier"/>
-              </a:rPr>
-              <a:t>library</a:t>
-            </a:r>
-            <a:r>
-              <a:rPr>
-                <a:solidFill>
-                  <a:srgbClr val="003B4F"/>
-                </a:solidFill>
-                <a:latin typeface="Courier"/>
-              </a:rPr>
-              <a:t>(lmerTest)      </a:t>
-            </a:r>
-            <a:r>
-              <a:rPr>
-                <a:solidFill>
-                  <a:srgbClr val="5E5E5E"/>
-                </a:solidFill>
-                <a:latin typeface="Courier"/>
-              </a:rPr>
-              <a:t># For p-values in mixed models</a:t>
-            </a:r>
-            <a:br/>
-            <a:r>
-              <a:rPr>
-                <a:solidFill>
-                  <a:srgbClr val="4758AB"/>
-                </a:solidFill>
-                <a:latin typeface="Courier"/>
-              </a:rPr>
-              <a:t>library</a:t>
-            </a:r>
-            <a:r>
-              <a:rPr>
-                <a:solidFill>
-                  <a:srgbClr val="003B4F"/>
-                </a:solidFill>
-                <a:latin typeface="Courier"/>
-              </a:rPr>
-              <a:t>(emmeans)       </a:t>
-            </a:r>
-            <a:r>
-              <a:rPr>
-                <a:solidFill>
-                  <a:srgbClr val="5E5E5E"/>
-                </a:solidFill>
-                <a:latin typeface="Courier"/>
-              </a:rPr>
               <a:t># For estimated marginal means</a:t>
-            </a:r>
-            <a:br/>
-            <a:r>
-              <a:rPr>
-                <a:solidFill>
-                  <a:srgbClr val="4758AB"/>
-                </a:solidFill>
-                <a:latin typeface="Courier"/>
-              </a:rPr>
-              <a:t>library</a:t>
-            </a:r>
-            <a:r>
-              <a:rPr>
-                <a:solidFill>
-                  <a:srgbClr val="003B4F"/>
-                </a:solidFill>
-                <a:latin typeface="Courier"/>
-              </a:rPr>
-              <a:t>(performance)   </a:t>
-            </a:r>
-            <a:r>
-              <a:rPr>
-                <a:solidFill>
-                  <a:srgbClr val="5E5E5E"/>
-                </a:solidFill>
-                <a:latin typeface="Courier"/>
-              </a:rPr>
-              <a:t># For model diagnostics</a:t>
-            </a:r>
-            <a:br/>
-            <a:r>
-              <a:rPr>
-                <a:solidFill>
-                  <a:srgbClr val="4758AB"/>
-                </a:solidFill>
-                <a:latin typeface="Courier"/>
-              </a:rPr>
-              <a:t>library</a:t>
-            </a:r>
-            <a:r>
-              <a:rPr>
-                <a:solidFill>
-                  <a:srgbClr val="003B4F"/>
-                </a:solidFill>
-                <a:latin typeface="Courier"/>
-              </a:rPr>
-              <a:t>(DHARMa)        </a:t>
-            </a:r>
-            <a:r>
-              <a:rPr>
-                <a:solidFill>
-                  <a:srgbClr val="5E5E5E"/>
-                </a:solidFill>
-                <a:latin typeface="Courier"/>
-              </a:rPr>
-              <a:t># For residual diagnostics</a:t>
-            </a:r>
-            <a:br/>
-            <a:r>
-              <a:rPr>
-                <a:solidFill>
-                  <a:srgbClr val="4758AB"/>
-                </a:solidFill>
-                <a:latin typeface="Courier"/>
-              </a:rPr>
-              <a:t>library</a:t>
-            </a:r>
-            <a:r>
-              <a:rPr>
-                <a:solidFill>
-                  <a:srgbClr val="003B4F"/>
-                </a:solidFill>
-                <a:latin typeface="Courier"/>
-              </a:rPr>
-              <a:t>(patchwork)</a:t>
-            </a:r>
-            <a:br/>
-            <a:r>
-              <a:rPr>
-                <a:solidFill>
-                  <a:srgbClr val="4758AB"/>
-                </a:solidFill>
-                <a:latin typeface="Courier"/>
-              </a:rPr>
-              <a:t>library</a:t>
-            </a:r>
-            <a:r>
-              <a:rPr>
-                <a:solidFill>
-                  <a:srgbClr val="003B4F"/>
-                </a:solidFill>
-                <a:latin typeface="Courier"/>
-              </a:rPr>
-              <a:t>(afex)</a:t>
             </a:r>
             <a:br/>
             <a:r>
@@ -7550,7 +6428,7 @@
             </a:pPr>
             <a:r>
               <a:rPr/>
-              <a:t>Part 3 · The Modern Way — Mixed Models</a:t>
+              <a:t>Part 3 · Post-Hoc Comparisons</a:t>
             </a:r>
           </a:p>
         </p:txBody>
@@ -7574,218 +6452,226 @@
               <a:buNone/>
             </a:pPr>
             <a:r>
-              <a:rPr/>
-              <a:t>Fixed effects go in as a plain variable name. Random effects can be coded a few different ways, depending on the design:</a:t>
-            </a:r>
-          </a:p>
-          <a:p>
-            <a:pPr lvl="0"/>
-            <a:r>
               <a:rPr b="1"/>
-              <a:t>Random intercept, fixed slope:</a:t>
-            </a:r>
-            <a:r>
-              <a:rPr/>
+              <a:t>▶ Run this:</a:t>
+            </a:r>
+          </a:p>
+          <a:p>
+            <a:pPr lvl="0" indent="0">
+              <a:buNone/>
+            </a:pPr>
+            <a:r>
+              <a:rPr>
+                <a:solidFill>
+                  <a:srgbClr val="003B4F"/>
+                </a:solidFill>
+                <a:latin typeface="Courier"/>
+              </a:rPr>
+              <a:t>emm &lt;- </a:t>
+            </a:r>
+            <a:r>
+              <a:rPr>
+                <a:solidFill>
+                  <a:srgbClr val="4758AB"/>
+                </a:solidFill>
+                <a:latin typeface="Courier"/>
+              </a:rPr>
+              <a:t>emmeans</a:t>
+            </a:r>
+            <a:r>
+              <a:rPr>
+                <a:solidFill>
+                  <a:srgbClr val="003B4F"/>
+                </a:solidFill>
+                <a:latin typeface="Courier"/>
+              </a:rPr>
+              <a:t>(nested_model, </a:t>
+            </a:r>
+            <a:r>
+              <a:rPr>
+                <a:solidFill>
+                  <a:srgbClr val="5E5E5E"/>
+                </a:solidFill>
+                <a:latin typeface="Courier"/>
+              </a:rPr>
+              <a:t>~</a:t>
+            </a:r>
+            <a:r>
+              <a:rPr>
+                <a:solidFill>
+                  <a:srgbClr val="003B4F"/>
+                </a:solidFill>
+                <a:latin typeface="Courier"/>
+              </a:rPr>
+              <a:t> treat)</a:t>
+            </a:r>
+            <a:br/>
+            <a:r>
+              <a:rPr>
+                <a:solidFill>
+                  <a:srgbClr val="4758AB"/>
+                </a:solidFill>
+                <a:latin typeface="Courier"/>
+              </a:rPr>
+              <a:t>summary</a:t>
+            </a:r>
+            <a:r>
+              <a:rPr>
+                <a:solidFill>
+                  <a:srgbClr val="003B4F"/>
+                </a:solidFill>
+                <a:latin typeface="Courier"/>
+              </a:rPr>
+              <a:t>(emm)</a:t>
+            </a:r>
+            <a:br/>
+            <a:br/>
+            <a:r>
+              <a:rPr>
+                <a:solidFill>
+                  <a:srgbClr val="003B4F"/>
+                </a:solidFill>
+                <a:latin typeface="Courier"/>
+              </a:rPr>
+              <a:t>pairs_result &lt;- </a:t>
+            </a:r>
+            <a:r>
+              <a:rPr>
+                <a:solidFill>
+                  <a:srgbClr val="4758AB"/>
+                </a:solidFill>
+                <a:latin typeface="Courier"/>
+              </a:rPr>
+              <a:t>pairs</a:t>
+            </a:r>
+            <a:r>
+              <a:rPr>
+                <a:solidFill>
+                  <a:srgbClr val="003B4F"/>
+                </a:solidFill>
+                <a:latin typeface="Courier"/>
+              </a:rPr>
+              <a:t>(emm, </a:t>
+            </a:r>
+            <a:r>
+              <a:rPr>
+                <a:solidFill>
+                  <a:srgbClr val="657422"/>
+                </a:solidFill>
+                <a:latin typeface="Courier"/>
+              </a:rPr>
+              <a:t>adjust =</a:t>
+            </a:r>
+            <a:r>
+              <a:rPr>
+                <a:solidFill>
+                  <a:srgbClr val="003B4F"/>
+                </a:solidFill>
+                <a:latin typeface="Courier"/>
+              </a:rPr>
               <a:t> </a:t>
             </a:r>
             <a:r>
               <a:rPr>
-                <a:latin typeface="Courier"/>
-              </a:rPr>
-              <a:t>+ (1|random)</a:t>
-            </a:r>
-            <a:r>
-              <a:rPr/>
-              <a:t> — e.g., </a:t>
-            </a:r>
-            <a:r>
-              <a:rPr>
-                <a:latin typeface="Courier"/>
-              </a:rPr>
-              <a:t>color ~ fixed + (1|group)</a:t>
-            </a:r>
-          </a:p>
-          <a:p>
-            <a:pPr lvl="0"/>
-            <a:r>
-              <a:rPr b="1"/>
-              <a:t>Random intercept, random slope:</a:t>
-            </a:r>
-            <a:r>
-              <a:rPr/>
+                <a:solidFill>
+                  <a:srgbClr val="20794D"/>
+                </a:solidFill>
+                <a:latin typeface="Courier"/>
+              </a:rPr>
+              <a:t>"sidak"</a:t>
+            </a:r>
+            <a:r>
+              <a:rPr>
+                <a:solidFill>
+                  <a:srgbClr val="003B4F"/>
+                </a:solidFill>
+                <a:latin typeface="Courier"/>
+              </a:rPr>
+              <a:t>)</a:t>
+            </a:r>
+            <a:br/>
+            <a:r>
+              <a:rPr>
+                <a:solidFill>
+                  <a:srgbClr val="003B4F"/>
+                </a:solidFill>
+                <a:latin typeface="Courier"/>
+              </a:rPr>
+              <a:t>pairs_result</a:t>
+            </a:r>
+            <a:br/>
+            <a:br/>
+            <a:r>
+              <a:rPr>
+                <a:solidFill>
+                  <a:srgbClr val="003B4F"/>
+                </a:solidFill>
+                <a:latin typeface="Courier"/>
+              </a:rPr>
+              <a:t>cld_result &lt;- multcomp</a:t>
+            </a:r>
+            <a:r>
+              <a:rPr>
+                <a:solidFill>
+                  <a:srgbClr val="5E5E5E"/>
+                </a:solidFill>
+                <a:latin typeface="Courier"/>
+              </a:rPr>
+              <a:t>::</a:t>
+            </a:r>
+            <a:r>
+              <a:rPr>
+                <a:solidFill>
+                  <a:srgbClr val="4758AB"/>
+                </a:solidFill>
+                <a:latin typeface="Courier"/>
+              </a:rPr>
+              <a:t>cld</a:t>
+            </a:r>
+            <a:r>
+              <a:rPr>
+                <a:solidFill>
+                  <a:srgbClr val="003B4F"/>
+                </a:solidFill>
+                <a:latin typeface="Courier"/>
+              </a:rPr>
+              <a:t>(emm, </a:t>
+            </a:r>
+            <a:r>
+              <a:rPr>
+                <a:solidFill>
+                  <a:srgbClr val="657422"/>
+                </a:solidFill>
+                <a:latin typeface="Courier"/>
+              </a:rPr>
+              <a:t>alpha =</a:t>
+            </a:r>
+            <a:r>
+              <a:rPr>
+                <a:solidFill>
+                  <a:srgbClr val="003B4F"/>
+                </a:solidFill>
+                <a:latin typeface="Courier"/>
+              </a:rPr>
               <a:t> </a:t>
             </a:r>
             <a:r>
               <a:rPr>
-                <a:latin typeface="Courier"/>
-              </a:rPr>
-              <a:t>+ (fixed|random)</a:t>
-            </a:r>
-            <a:r>
-              <a:rPr/>
-              <a:t> — e.g., </a:t>
-            </a:r>
-            <a:r>
-              <a:rPr>
-                <a:latin typeface="Courier"/>
-              </a:rPr>
-              <a:t>color ~ fixed + (fixed|group)</a:t>
-            </a:r>
-          </a:p>
-          <a:p>
-            <a:pPr lvl="0"/>
-            <a:r>
-              <a:rPr b="1"/>
-              <a:t>Nested design</a:t>
-            </a:r>
-            <a:r>
-              <a:rPr/>
-              <a:t> (a sample can exist only within a larger grouping): </a:t>
-            </a:r>
-            <a:r>
-              <a:rPr>
-                <a:latin typeface="Courier"/>
-              </a:rPr>
-              <a:t>y ~ color + (1|greenbox/graybox)</a:t>
-            </a:r>
-            <a:r>
-              <a:rPr/>
-              <a:t>, equivalent to </a:t>
-            </a:r>
-            <a:r>
-              <a:rPr>
-                <a:latin typeface="Courier"/>
-              </a:rPr>
-              <a:t>y ~ color + (1|greenbox) + (1|greenbox:graybox)</a:t>
-            </a:r>
-            <a:r>
-              <a:rPr/>
-              <a:t> — this models random variation in the intercept for each patch, and also for each quadrat within each patch</a:t>
-            </a:r>
-          </a:p>
-          <a:p>
-            <a:pPr lvl="0"/>
-            <a:r>
-              <a:rPr b="1"/>
-              <a:t>Fully crossed design</a:t>
-            </a:r>
-            <a:r>
-              <a:rPr/>
-              <a:t> (not nested): </a:t>
-            </a:r>
-            <a:r>
-              <a:rPr>
-                <a:latin typeface="Courier"/>
-              </a:rPr>
-              <a:t>y ~ color + (1|green_box) + (1|gray_box)</a:t>
-            </a:r>
-          </a:p>
-          <a:p>
-            <a:pPr lvl="0" indent="0" marL="0">
-              <a:buNone/>
-            </a:pPr>
-            <a:r>
-              <a:rPr b="1"/>
-              <a:t>▶ Run this</a:t>
-            </a:r>
-            <a:r>
-              <a:rPr/>
-              <a:t> — fit the mixed model:</a:t>
-            </a:r>
-          </a:p>
-          <a:p>
-            <a:pPr lvl="0" indent="0">
-              <a:buNone/>
-            </a:pPr>
-            <a:r>
-              <a:rPr>
-                <a:solidFill>
-                  <a:srgbClr val="003B4F"/>
-                </a:solidFill>
-                <a:latin typeface="Courier"/>
-              </a:rPr>
-              <a:t>mixed_model &lt;- </a:t>
-            </a:r>
-            <a:r>
-              <a:rPr>
-                <a:solidFill>
-                  <a:srgbClr val="4758AB"/>
-                </a:solidFill>
-                <a:latin typeface="Courier"/>
-              </a:rPr>
-              <a:t>lmer</a:t>
-            </a:r>
-            <a:r>
-              <a:rPr>
-                <a:solidFill>
-                  <a:srgbClr val="003B4F"/>
-                </a:solidFill>
-                <a:latin typeface="Courier"/>
-              </a:rPr>
-              <a:t>(algae </a:t>
-            </a:r>
-            <a:r>
-              <a:rPr>
-                <a:solidFill>
-                  <a:srgbClr val="5E5E5E"/>
-                </a:solidFill>
-                <a:latin typeface="Courier"/>
-              </a:rPr>
-              <a:t>~</a:t>
-            </a:r>
-            <a:r>
-              <a:rPr>
-                <a:solidFill>
-                  <a:srgbClr val="003B4F"/>
-                </a:solidFill>
-                <a:latin typeface="Courier"/>
-              </a:rPr>
-              <a:t> treat </a:t>
-            </a:r>
-            <a:r>
-              <a:rPr>
-                <a:solidFill>
-                  <a:srgbClr val="5E5E5E"/>
-                </a:solidFill>
-                <a:latin typeface="Courier"/>
-              </a:rPr>
-              <a:t>+</a:t>
-            </a:r>
-            <a:r>
-              <a:rPr>
-                <a:solidFill>
-                  <a:srgbClr val="003B4F"/>
-                </a:solidFill>
-                <a:latin typeface="Courier"/>
-              </a:rPr>
-              <a:t> (</a:t>
-            </a:r>
-            <a:r>
-              <a:rPr>
                 <a:solidFill>
                   <a:srgbClr val="AD0000"/>
                 </a:solidFill>
                 <a:latin typeface="Courier"/>
               </a:rPr>
-              <a:t>1</a:t>
-            </a:r>
-            <a:r>
-              <a:rPr>
-                <a:solidFill>
-                  <a:srgbClr val="5E5E5E"/>
-                </a:solidFill>
-                <a:latin typeface="Courier"/>
-              </a:rPr>
-              <a:t>|</a:t>
-            </a:r>
-            <a:r>
-              <a:rPr>
-                <a:solidFill>
-                  <a:srgbClr val="003B4F"/>
-                </a:solidFill>
-                <a:latin typeface="Courier"/>
-              </a:rPr>
-              <a:t>patch), </a:t>
+              <a:t>0.05</a:t>
+            </a:r>
+            <a:r>
+              <a:rPr>
+                <a:solidFill>
+                  <a:srgbClr val="003B4F"/>
+                </a:solidFill>
+                <a:latin typeface="Courier"/>
+              </a:rPr>
+              <a:t>, </a:t>
             </a:r>
             <a:r>
               <a:rPr>
@@ -7794,16 +6680,16 @@
                 </a:solidFill>
                 <a:latin typeface="Courier"/>
               </a:rPr>
-              <a:t>data =</a:t>
-            </a:r>
-            <a:r>
-              <a:rPr>
-                <a:solidFill>
-                  <a:srgbClr val="003B4F"/>
-                </a:solidFill>
-                <a:latin typeface="Courier"/>
-              </a:rPr>
-              <a:t> u_df,</a:t>
+              <a:t>Letters =</a:t>
+            </a:r>
+            <a:r>
+              <a:rPr>
+                <a:solidFill>
+                  <a:srgbClr val="003B4F"/>
+                </a:solidFill>
+                <a:latin typeface="Courier"/>
+              </a:rPr>
+              <a:t> letters)</a:t>
             </a:r>
             <a:br/>
             <a:r>
@@ -7813,445 +6699,7 @@
                 </a:solidFill>
                 <a:latin typeface="Courier"/>
               </a:rPr>
-              <a:t>                    </a:t>
-            </a:r>
-            <a:r>
-              <a:rPr>
-                <a:solidFill>
-                  <a:srgbClr val="657422"/>
-                </a:solidFill>
-                <a:latin typeface="Courier"/>
-              </a:rPr>
-              <a:t>control =</a:t>
-            </a:r>
-            <a:r>
-              <a:rPr>
-                <a:solidFill>
-                  <a:srgbClr val="003B4F"/>
-                </a:solidFill>
-                <a:latin typeface="Courier"/>
-              </a:rPr>
-              <a:t> </a:t>
-            </a:r>
-            <a:r>
-              <a:rPr>
-                <a:solidFill>
-                  <a:srgbClr val="4758AB"/>
-                </a:solidFill>
-                <a:latin typeface="Courier"/>
-              </a:rPr>
-              <a:t>lmerControl</a:t>
-            </a:r>
-            <a:r>
-              <a:rPr>
-                <a:solidFill>
-                  <a:srgbClr val="003B4F"/>
-                </a:solidFill>
-                <a:latin typeface="Courier"/>
-              </a:rPr>
-              <a:t>(</a:t>
-            </a:r>
-            <a:r>
-              <a:rPr>
-                <a:solidFill>
-                  <a:srgbClr val="657422"/>
-                </a:solidFill>
-                <a:latin typeface="Courier"/>
-              </a:rPr>
-              <a:t>calc.derivs =</a:t>
-            </a:r>
-            <a:r>
-              <a:rPr>
-                <a:solidFill>
-                  <a:srgbClr val="003B4F"/>
-                </a:solidFill>
-                <a:latin typeface="Courier"/>
-              </a:rPr>
-              <a:t> </a:t>
-            </a:r>
-            <a:r>
-              <a:rPr>
-                <a:solidFill>
-                  <a:srgbClr val="8F5902"/>
-                </a:solidFill>
-                <a:latin typeface="Courier"/>
-              </a:rPr>
-              <a:t>FALSE</a:t>
-            </a:r>
-            <a:r>
-              <a:rPr>
-                <a:solidFill>
-                  <a:srgbClr val="003B4F"/>
-                </a:solidFill>
-                <a:latin typeface="Courier"/>
-              </a:rPr>
-              <a:t>))</a:t>
-            </a:r>
-            <a:br/>
-            <a:r>
-              <a:rPr>
-                <a:solidFill>
-                  <a:srgbClr val="4758AB"/>
-                </a:solidFill>
-                <a:latin typeface="Courier"/>
-              </a:rPr>
-              <a:t>summary</a:t>
-            </a:r>
-            <a:r>
-              <a:rPr>
-                <a:solidFill>
-                  <a:srgbClr val="003B4F"/>
-                </a:solidFill>
-                <a:latin typeface="Courier"/>
-              </a:rPr>
-              <a:t>(mixed_model)</a:t>
-            </a:r>
-          </a:p>
-          <a:p>
-            <a:pPr lvl="0" indent="0" marL="0">
-              <a:buNone/>
-            </a:pPr>
-            <a:r>
-              <a:rPr b="1"/>
-              <a:t>▶ Run this</a:t>
-            </a:r>
-            <a:r>
-              <a:rPr/>
-              <a:t> — Method 1, the F-test with Satterthwaite degrees of freedom (more conservative, better for small samples):</a:t>
-            </a:r>
-          </a:p>
-          <a:p>
-            <a:pPr lvl="0" indent="0">
-              <a:buNone/>
-            </a:pPr>
-            <a:r>
-              <a:rPr>
-                <a:solidFill>
-                  <a:srgbClr val="003B4F"/>
-                </a:solidFill>
-                <a:latin typeface="Courier"/>
-              </a:rPr>
-              <a:t>satt_result &lt;- </a:t>
-            </a:r>
-            <a:r>
-              <a:rPr>
-                <a:solidFill>
-                  <a:srgbClr val="4758AB"/>
-                </a:solidFill>
-                <a:latin typeface="Courier"/>
-              </a:rPr>
-              <a:t>Anova</a:t>
-            </a:r>
-            <a:r>
-              <a:rPr>
-                <a:solidFill>
-                  <a:srgbClr val="003B4F"/>
-                </a:solidFill>
-                <a:latin typeface="Courier"/>
-              </a:rPr>
-              <a:t>(mixed_model, </a:t>
-            </a:r>
-            <a:r>
-              <a:rPr>
-                <a:solidFill>
-                  <a:srgbClr val="657422"/>
-                </a:solidFill>
-                <a:latin typeface="Courier"/>
-              </a:rPr>
-              <a:t>type =</a:t>
-            </a:r>
-            <a:r>
-              <a:rPr>
-                <a:solidFill>
-                  <a:srgbClr val="003B4F"/>
-                </a:solidFill>
-                <a:latin typeface="Courier"/>
-              </a:rPr>
-              <a:t> </a:t>
-            </a:r>
-            <a:r>
-              <a:rPr>
-                <a:solidFill>
-                  <a:srgbClr val="AD0000"/>
-                </a:solidFill>
-                <a:latin typeface="Courier"/>
-              </a:rPr>
-              <a:t>3</a:t>
-            </a:r>
-            <a:r>
-              <a:rPr>
-                <a:solidFill>
-                  <a:srgbClr val="003B4F"/>
-                </a:solidFill>
-                <a:latin typeface="Courier"/>
-              </a:rPr>
-              <a:t>,</a:t>
-            </a:r>
-            <a:br/>
-            <a:r>
-              <a:rPr>
-                <a:solidFill>
-                  <a:srgbClr val="003B4F"/>
-                </a:solidFill>
-                <a:latin typeface="Courier"/>
-              </a:rPr>
-              <a:t>                      </a:t>
-            </a:r>
-            <a:r>
-              <a:rPr>
-                <a:solidFill>
-                  <a:srgbClr val="657422"/>
-                </a:solidFill>
-                <a:latin typeface="Courier"/>
-              </a:rPr>
-              <a:t>test.statistic =</a:t>
-            </a:r>
-            <a:r>
-              <a:rPr>
-                <a:solidFill>
-                  <a:srgbClr val="003B4F"/>
-                </a:solidFill>
-                <a:latin typeface="Courier"/>
-              </a:rPr>
-              <a:t> </a:t>
-            </a:r>
-            <a:r>
-              <a:rPr>
-                <a:solidFill>
-                  <a:srgbClr val="20794D"/>
-                </a:solidFill>
-                <a:latin typeface="Courier"/>
-              </a:rPr>
-              <a:t>"F"</a:t>
-            </a:r>
-            <a:r>
-              <a:rPr>
-                <a:solidFill>
-                  <a:srgbClr val="003B4F"/>
-                </a:solidFill>
-                <a:latin typeface="Courier"/>
-              </a:rPr>
-              <a:t>,</a:t>
-            </a:r>
-            <a:br/>
-            <a:r>
-              <a:rPr>
-                <a:solidFill>
-                  <a:srgbClr val="003B4F"/>
-                </a:solidFill>
-                <a:latin typeface="Courier"/>
-              </a:rPr>
-              <a:t>                      </a:t>
-            </a:r>
-            <a:r>
-              <a:rPr>
-                <a:solidFill>
-                  <a:srgbClr val="657422"/>
-                </a:solidFill>
-                <a:latin typeface="Courier"/>
-              </a:rPr>
-              <a:t>ddf =</a:t>
-            </a:r>
-            <a:r>
-              <a:rPr>
-                <a:solidFill>
-                  <a:srgbClr val="003B4F"/>
-                </a:solidFill>
-                <a:latin typeface="Courier"/>
-              </a:rPr>
-              <a:t> </a:t>
-            </a:r>
-            <a:r>
-              <a:rPr>
-                <a:solidFill>
-                  <a:srgbClr val="20794D"/>
-                </a:solidFill>
-                <a:latin typeface="Courier"/>
-              </a:rPr>
-              <a:t>"Satterthwaite"</a:t>
-            </a:r>
-            <a:r>
-              <a:rPr>
-                <a:solidFill>
-                  <a:srgbClr val="003B4F"/>
-                </a:solidFill>
-                <a:latin typeface="Courier"/>
-              </a:rPr>
-              <a:t>)</a:t>
-            </a:r>
-            <a:br/>
-            <a:r>
-              <a:rPr>
-                <a:solidFill>
-                  <a:srgbClr val="003B4F"/>
-                </a:solidFill>
-                <a:latin typeface="Courier"/>
-              </a:rPr>
-              <a:t>satt_result</a:t>
-            </a:r>
-          </a:p>
-          <a:p>
-            <a:pPr lvl="0" indent="0" marL="0">
-              <a:buNone/>
-            </a:pPr>
-            <a:r>
-              <a:rPr b="1"/>
-              <a:t>▶ Run this</a:t>
-            </a:r>
-            <a:r>
-              <a:rPr/>
-              <a:t> — Method 2, the Chi-square test (more liberal, assumes large samples):</a:t>
-            </a:r>
-          </a:p>
-          <a:p>
-            <a:pPr lvl="0" indent="0">
-              <a:buNone/>
-            </a:pPr>
-            <a:r>
-              <a:rPr>
-                <a:solidFill>
-                  <a:srgbClr val="003B4F"/>
-                </a:solidFill>
-                <a:latin typeface="Courier"/>
-              </a:rPr>
-              <a:t>anova_car &lt;- </a:t>
-            </a:r>
-            <a:r>
-              <a:rPr>
-                <a:solidFill>
-                  <a:srgbClr val="4758AB"/>
-                </a:solidFill>
-                <a:latin typeface="Courier"/>
-              </a:rPr>
-              <a:t>Anova</a:t>
-            </a:r>
-            <a:r>
-              <a:rPr>
-                <a:solidFill>
-                  <a:srgbClr val="003B4F"/>
-                </a:solidFill>
-                <a:latin typeface="Courier"/>
-              </a:rPr>
-              <a:t>(mixed_model,</a:t>
-            </a:r>
-            <a:br/>
-            <a:r>
-              <a:rPr>
-                <a:solidFill>
-                  <a:srgbClr val="003B4F"/>
-                </a:solidFill>
-                <a:latin typeface="Courier"/>
-              </a:rPr>
-              <a:t>                   </a:t>
-            </a:r>
-            <a:r>
-              <a:rPr>
-                <a:solidFill>
-                  <a:srgbClr val="657422"/>
-                </a:solidFill>
-                <a:latin typeface="Courier"/>
-              </a:rPr>
-              <a:t>type =</a:t>
-            </a:r>
-            <a:r>
-              <a:rPr>
-                <a:solidFill>
-                  <a:srgbClr val="003B4F"/>
-                </a:solidFill>
-                <a:latin typeface="Courier"/>
-              </a:rPr>
-              <a:t> </a:t>
-            </a:r>
-            <a:r>
-              <a:rPr>
-                <a:solidFill>
-                  <a:srgbClr val="AD0000"/>
-                </a:solidFill>
-                <a:latin typeface="Courier"/>
-              </a:rPr>
-              <a:t>3</a:t>
-            </a:r>
-            <a:r>
-              <a:rPr>
-                <a:solidFill>
-                  <a:srgbClr val="003B4F"/>
-                </a:solidFill>
-                <a:latin typeface="Courier"/>
-              </a:rPr>
-              <a:t>,</a:t>
-            </a:r>
-            <a:br/>
-            <a:r>
-              <a:rPr>
-                <a:solidFill>
-                  <a:srgbClr val="003B4F"/>
-                </a:solidFill>
-                <a:latin typeface="Courier"/>
-              </a:rPr>
-              <a:t>                   </a:t>
-            </a:r>
-            <a:r>
-              <a:rPr>
-                <a:solidFill>
-                  <a:srgbClr val="657422"/>
-                </a:solidFill>
-                <a:latin typeface="Courier"/>
-              </a:rPr>
-              <a:t>test.statistic =</a:t>
-            </a:r>
-            <a:r>
-              <a:rPr>
-                <a:solidFill>
-                  <a:srgbClr val="003B4F"/>
-                </a:solidFill>
-                <a:latin typeface="Courier"/>
-              </a:rPr>
-              <a:t> </a:t>
-            </a:r>
-            <a:r>
-              <a:rPr>
-                <a:solidFill>
-                  <a:srgbClr val="20794D"/>
-                </a:solidFill>
-                <a:latin typeface="Courier"/>
-              </a:rPr>
-              <a:t>"Chisq"</a:t>
-            </a:r>
-            <a:r>
-              <a:rPr>
-                <a:solidFill>
-                  <a:srgbClr val="003B4F"/>
-                </a:solidFill>
-                <a:latin typeface="Courier"/>
-              </a:rPr>
-              <a:t>)</a:t>
-            </a:r>
-            <a:br/>
-            <a:r>
-              <a:rPr>
-                <a:solidFill>
-                  <a:srgbClr val="003B4F"/>
-                </a:solidFill>
-                <a:latin typeface="Courier"/>
-              </a:rPr>
-              <a:t>anova_car</a:t>
-            </a:r>
-          </a:p>
-          <a:p>
-            <a:pPr lvl="0" indent="0" marL="1270000">
-              <a:buNone/>
-            </a:pPr>
-            <a:r>
-              <a:rPr sz="2000"/>
-              <a:t>💡 Chi-square = F × numerator df. The two differ because the F-test accounts for the denominator df (reflecting sample size), while Chi-square assumes infinite denominator df. </a:t>
-            </a:r>
-            <a:r>
-              <a:rPr sz="2000" b="1"/>
-              <a:t>Rule of thumb:</a:t>
-            </a:r>
-            <a:r>
-              <a:rPr sz="2000"/>
-              <a:t> under 100 observations or &lt; 20 random-effect levels, use the F-test; over 500 observations and &gt; 50 random-effect levels, Chi-square is fine; in between, the F-test is safer.</a:t>
+              <a:t>cld_result</a:t>
             </a:r>
           </a:p>
           <a:p>
@@ -8268,79 +6716,13 @@
             </a:r>
             <a:r>
               <a:rPr/>
-              <a:t> Do the F-test and Chi-square p-values agree on significance here? Given the rule of thumb above, which one should you trust more for this dataset (16 patches)? </a:t>
+              <a:t> Mean algae cover for Control (1.30%) looks much lower than the reduced-density treatments (66%: 21.55%, 33%: 19.00%, Removed: 39.20%). Based on your compact letter display, are any of those differences actually statistically significant at α = 0.05? </a:t>
             </a:r>
             <a:r>
               <a:rPr>
                 <a:latin typeface="Courier"/>
               </a:rPr>
               <a:t>________________________</a:t>
-            </a:r>
-          </a:p>
-          <a:p>
-            <a:pPr lvl="0" indent="0" marL="1270000">
-              <a:buNone/>
-            </a:pPr>
-            <a:r>
-              <a:rPr sz="2000" b="1"/>
-              <a:t>Tip</a:t>
-            </a:r>
-          </a:p>
-          <a:p>
-            <a:pPr lvl="0" indent="0" marL="1270000">
-              <a:buNone/>
-            </a:pPr>
-            <a:r>
-              <a:rPr sz="2000" b="1"/>
-              <a:t>🚀 If you finish early:</a:t>
-            </a:r>
-            <a:r>
-              <a:rPr sz="2000"/>
-              <a:t> Refit </a:t>
-            </a:r>
-            <a:r>
-              <a:rPr sz="2000">
-                <a:latin typeface="Courier"/>
-              </a:rPr>
-              <a:t>mixed_model</a:t>
-            </a:r>
-            <a:r>
-              <a:rPr sz="2000"/>
-              <a:t> using </a:t>
-            </a:r>
-            <a:r>
-              <a:rPr sz="2000">
-                <a:latin typeface="Courier"/>
-              </a:rPr>
-              <a:t>(1|treat:patch)</a:t>
-            </a:r>
-            <a:r>
-              <a:rPr sz="2000"/>
-              <a:t> instead of </a:t>
-            </a:r>
-            <a:r>
-              <a:rPr sz="2000">
-                <a:latin typeface="Courier"/>
-              </a:rPr>
-              <a:t>(1|patch)</a:t>
-            </a:r>
-            <a:r>
-              <a:rPr sz="2000"/>
-              <a:t>. Does the model summary change? (Hint: since patch numbers are already unique to a treatment in this dataset, the two notations should behave the same here — but they wouldn’t if patch IDs were reused across treatments.)</a:t>
-            </a:r>
-          </a:p>
-          <a:p>
-            <a:pPr lvl="0" indent="0">
-              <a:buNone/>
-            </a:pPr>
-            <a:r>
-              <a:rPr>
-                <a:solidFill>
-                  <a:srgbClr val="5E5E5E"/>
-                </a:solidFill>
-                <a:latin typeface="Courier"/>
-              </a:rPr>
-              <a:t># Write your code here:</a:t>
             </a:r>
           </a:p>
         </p:txBody>
@@ -8392,7 +6774,7 @@
             </a:pPr>
             <a:r>
               <a:rPr/>
-              <a:t>Part 4 · Model Diagnostics</a:t>
+              <a:t>Part 4 · Visualization and Reporting</a:t>
             </a:r>
           </a:p>
         </p:txBody>
@@ -8421,7 +6803,7 @@
             </a:r>
             <a:r>
               <a:rPr/>
-              <a:t> — DHARMa’s simulation-based diagnostics, purpose-built for mixed models:</a:t>
+              <a:t> — a publication-style boxplot:</a:t>
             </a:r>
           </a:p>
           <a:p>
@@ -8435,7 +6817,25 @@
                 </a:solidFill>
                 <a:latin typeface="Courier"/>
               </a:rPr>
-              <a:t>set.seed</a:t>
+              <a:t>ggplot</a:t>
+            </a:r>
+            <a:r>
+              <a:rPr>
+                <a:solidFill>
+                  <a:srgbClr val="003B4F"/>
+                </a:solidFill>
+                <a:latin typeface="Courier"/>
+              </a:rPr>
+              <a:t>(u_df, </a:t>
+            </a:r>
+            <a:r>
+              <a:rPr>
+                <a:solidFill>
+                  <a:srgbClr val="4758AB"/>
+                </a:solidFill>
+                <a:latin typeface="Courier"/>
+              </a:rPr>
+              <a:t>aes</a:t>
             </a:r>
             <a:r>
               <a:rPr>
@@ -8449,11 +6849,1105 @@
             <a:r>
               <a:rPr>
                 <a:solidFill>
+                  <a:srgbClr val="657422"/>
+                </a:solidFill>
+                <a:latin typeface="Courier"/>
+              </a:rPr>
+              <a:t>x =</a:t>
+            </a:r>
+            <a:r>
+              <a:rPr>
+                <a:solidFill>
+                  <a:srgbClr val="003B4F"/>
+                </a:solidFill>
+                <a:latin typeface="Courier"/>
+              </a:rPr>
+              <a:t> treat, </a:t>
+            </a:r>
+            <a:r>
+              <a:rPr>
+                <a:solidFill>
+                  <a:srgbClr val="657422"/>
+                </a:solidFill>
+                <a:latin typeface="Courier"/>
+              </a:rPr>
+              <a:t>y =</a:t>
+            </a:r>
+            <a:r>
+              <a:rPr>
+                <a:solidFill>
+                  <a:srgbClr val="003B4F"/>
+                </a:solidFill>
+                <a:latin typeface="Courier"/>
+              </a:rPr>
+              <a:t> algae, </a:t>
+            </a:r>
+            <a:r>
+              <a:rPr>
+                <a:solidFill>
+                  <a:srgbClr val="657422"/>
+                </a:solidFill>
+                <a:latin typeface="Courier"/>
+              </a:rPr>
+              <a:t>fill =</a:t>
+            </a:r>
+            <a:r>
+              <a:rPr>
+                <a:solidFill>
+                  <a:srgbClr val="003B4F"/>
+                </a:solidFill>
+                <a:latin typeface="Courier"/>
+              </a:rPr>
+              <a:t> treat)) </a:t>
+            </a:r>
+            <a:r>
+              <a:rPr>
+                <a:solidFill>
+                  <a:srgbClr val="5E5E5E"/>
+                </a:solidFill>
+                <a:latin typeface="Courier"/>
+              </a:rPr>
+              <a:t>+</a:t>
+            </a:r>
+            <a:br/>
+            <a:r>
+              <a:rPr>
+                <a:solidFill>
+                  <a:srgbClr val="003B4F"/>
+                </a:solidFill>
+                <a:latin typeface="Courier"/>
+              </a:rPr>
+              <a:t>  </a:t>
+            </a:r>
+            <a:r>
+              <a:rPr>
+                <a:solidFill>
+                  <a:srgbClr val="4758AB"/>
+                </a:solidFill>
+                <a:latin typeface="Courier"/>
+              </a:rPr>
+              <a:t>geom_boxplot</a:t>
+            </a:r>
+            <a:r>
+              <a:rPr>
+                <a:solidFill>
+                  <a:srgbClr val="003B4F"/>
+                </a:solidFill>
+                <a:latin typeface="Courier"/>
+              </a:rPr>
+              <a:t>(</a:t>
+            </a:r>
+            <a:r>
+              <a:rPr>
+                <a:solidFill>
+                  <a:srgbClr val="657422"/>
+                </a:solidFill>
+                <a:latin typeface="Courier"/>
+              </a:rPr>
+              <a:t>alpha =</a:t>
+            </a:r>
+            <a:r>
+              <a:rPr>
+                <a:solidFill>
+                  <a:srgbClr val="003B4F"/>
+                </a:solidFill>
+                <a:latin typeface="Courier"/>
+              </a:rPr>
+              <a:t> </a:t>
+            </a:r>
+            <a:r>
+              <a:rPr>
+                <a:solidFill>
                   <a:srgbClr val="AD0000"/>
                 </a:solidFill>
                 <a:latin typeface="Courier"/>
               </a:rPr>
-              <a:t>123</a:t>
+              <a:t>0.7</a:t>
+            </a:r>
+            <a:r>
+              <a:rPr>
+                <a:solidFill>
+                  <a:srgbClr val="003B4F"/>
+                </a:solidFill>
+                <a:latin typeface="Courier"/>
+              </a:rPr>
+              <a:t>, </a:t>
+            </a:r>
+            <a:r>
+              <a:rPr>
+                <a:solidFill>
+                  <a:srgbClr val="657422"/>
+                </a:solidFill>
+                <a:latin typeface="Courier"/>
+              </a:rPr>
+              <a:t>outlier.shape =</a:t>
+            </a:r>
+            <a:r>
+              <a:rPr>
+                <a:solidFill>
+                  <a:srgbClr val="003B4F"/>
+                </a:solidFill>
+                <a:latin typeface="Courier"/>
+              </a:rPr>
+              <a:t> </a:t>
+            </a:r>
+            <a:r>
+              <a:rPr>
+                <a:solidFill>
+                  <a:srgbClr val="8F5902"/>
+                </a:solidFill>
+                <a:latin typeface="Courier"/>
+              </a:rPr>
+              <a:t>NA</a:t>
+            </a:r>
+            <a:r>
+              <a:rPr>
+                <a:solidFill>
+                  <a:srgbClr val="003B4F"/>
+                </a:solidFill>
+                <a:latin typeface="Courier"/>
+              </a:rPr>
+              <a:t>) </a:t>
+            </a:r>
+            <a:r>
+              <a:rPr>
+                <a:solidFill>
+                  <a:srgbClr val="5E5E5E"/>
+                </a:solidFill>
+                <a:latin typeface="Courier"/>
+              </a:rPr>
+              <a:t>+</a:t>
+            </a:r>
+            <a:br/>
+            <a:r>
+              <a:rPr>
+                <a:solidFill>
+                  <a:srgbClr val="003B4F"/>
+                </a:solidFill>
+                <a:latin typeface="Courier"/>
+              </a:rPr>
+              <a:t>  </a:t>
+            </a:r>
+            <a:r>
+              <a:rPr>
+                <a:solidFill>
+                  <a:srgbClr val="4758AB"/>
+                </a:solidFill>
+                <a:latin typeface="Courier"/>
+              </a:rPr>
+              <a:t>geom_jitter</a:t>
+            </a:r>
+            <a:r>
+              <a:rPr>
+                <a:solidFill>
+                  <a:srgbClr val="003B4F"/>
+                </a:solidFill>
+                <a:latin typeface="Courier"/>
+              </a:rPr>
+              <a:t>(</a:t>
+            </a:r>
+            <a:r>
+              <a:rPr>
+                <a:solidFill>
+                  <a:srgbClr val="657422"/>
+                </a:solidFill>
+                <a:latin typeface="Courier"/>
+              </a:rPr>
+              <a:t>width =</a:t>
+            </a:r>
+            <a:r>
+              <a:rPr>
+                <a:solidFill>
+                  <a:srgbClr val="003B4F"/>
+                </a:solidFill>
+                <a:latin typeface="Courier"/>
+              </a:rPr>
+              <a:t> </a:t>
+            </a:r>
+            <a:r>
+              <a:rPr>
+                <a:solidFill>
+                  <a:srgbClr val="AD0000"/>
+                </a:solidFill>
+                <a:latin typeface="Courier"/>
+              </a:rPr>
+              <a:t>0.2</a:t>
+            </a:r>
+            <a:r>
+              <a:rPr>
+                <a:solidFill>
+                  <a:srgbClr val="003B4F"/>
+                </a:solidFill>
+                <a:latin typeface="Courier"/>
+              </a:rPr>
+              <a:t>, </a:t>
+            </a:r>
+            <a:r>
+              <a:rPr>
+                <a:solidFill>
+                  <a:srgbClr val="657422"/>
+                </a:solidFill>
+                <a:latin typeface="Courier"/>
+              </a:rPr>
+              <a:t>alpha =</a:t>
+            </a:r>
+            <a:r>
+              <a:rPr>
+                <a:solidFill>
+                  <a:srgbClr val="003B4F"/>
+                </a:solidFill>
+                <a:latin typeface="Courier"/>
+              </a:rPr>
+              <a:t> </a:t>
+            </a:r>
+            <a:r>
+              <a:rPr>
+                <a:solidFill>
+                  <a:srgbClr val="AD0000"/>
+                </a:solidFill>
+                <a:latin typeface="Courier"/>
+              </a:rPr>
+              <a:t>0.4</a:t>
+            </a:r>
+            <a:r>
+              <a:rPr>
+                <a:solidFill>
+                  <a:srgbClr val="003B4F"/>
+                </a:solidFill>
+                <a:latin typeface="Courier"/>
+              </a:rPr>
+              <a:t>, </a:t>
+            </a:r>
+            <a:r>
+              <a:rPr>
+                <a:solidFill>
+                  <a:srgbClr val="657422"/>
+                </a:solidFill>
+                <a:latin typeface="Courier"/>
+              </a:rPr>
+              <a:t>size =</a:t>
+            </a:r>
+            <a:r>
+              <a:rPr>
+                <a:solidFill>
+                  <a:srgbClr val="003B4F"/>
+                </a:solidFill>
+                <a:latin typeface="Courier"/>
+              </a:rPr>
+              <a:t> </a:t>
+            </a:r>
+            <a:r>
+              <a:rPr>
+                <a:solidFill>
+                  <a:srgbClr val="AD0000"/>
+                </a:solidFill>
+                <a:latin typeface="Courier"/>
+              </a:rPr>
+              <a:t>1</a:t>
+            </a:r>
+            <a:r>
+              <a:rPr>
+                <a:solidFill>
+                  <a:srgbClr val="003B4F"/>
+                </a:solidFill>
+                <a:latin typeface="Courier"/>
+              </a:rPr>
+              <a:t>) </a:t>
+            </a:r>
+            <a:r>
+              <a:rPr>
+                <a:solidFill>
+                  <a:srgbClr val="5E5E5E"/>
+                </a:solidFill>
+                <a:latin typeface="Courier"/>
+              </a:rPr>
+              <a:t>+</a:t>
+            </a:r>
+            <a:br/>
+            <a:r>
+              <a:rPr>
+                <a:solidFill>
+                  <a:srgbClr val="003B4F"/>
+                </a:solidFill>
+                <a:latin typeface="Courier"/>
+              </a:rPr>
+              <a:t>  </a:t>
+            </a:r>
+            <a:r>
+              <a:rPr>
+                <a:solidFill>
+                  <a:srgbClr val="4758AB"/>
+                </a:solidFill>
+                <a:latin typeface="Courier"/>
+              </a:rPr>
+              <a:t>scale_fill_viridis_d</a:t>
+            </a:r>
+            <a:r>
+              <a:rPr>
+                <a:solidFill>
+                  <a:srgbClr val="003B4F"/>
+                </a:solidFill>
+                <a:latin typeface="Courier"/>
+              </a:rPr>
+              <a:t>(</a:t>
+            </a:r>
+            <a:r>
+              <a:rPr>
+                <a:solidFill>
+                  <a:srgbClr val="657422"/>
+                </a:solidFill>
+                <a:latin typeface="Courier"/>
+              </a:rPr>
+              <a:t>option =</a:t>
+            </a:r>
+            <a:r>
+              <a:rPr>
+                <a:solidFill>
+                  <a:srgbClr val="003B4F"/>
+                </a:solidFill>
+                <a:latin typeface="Courier"/>
+              </a:rPr>
+              <a:t> </a:t>
+            </a:r>
+            <a:r>
+              <a:rPr>
+                <a:solidFill>
+                  <a:srgbClr val="20794D"/>
+                </a:solidFill>
+                <a:latin typeface="Courier"/>
+              </a:rPr>
+              <a:t>"D"</a:t>
+            </a:r>
+            <a:r>
+              <a:rPr>
+                <a:solidFill>
+                  <a:srgbClr val="003B4F"/>
+                </a:solidFill>
+                <a:latin typeface="Courier"/>
+              </a:rPr>
+              <a:t>, </a:t>
+            </a:r>
+            <a:r>
+              <a:rPr>
+                <a:solidFill>
+                  <a:srgbClr val="657422"/>
+                </a:solidFill>
+                <a:latin typeface="Courier"/>
+              </a:rPr>
+              <a:t>end =</a:t>
+            </a:r>
+            <a:r>
+              <a:rPr>
+                <a:solidFill>
+                  <a:srgbClr val="003B4F"/>
+                </a:solidFill>
+                <a:latin typeface="Courier"/>
+              </a:rPr>
+              <a:t> </a:t>
+            </a:r>
+            <a:r>
+              <a:rPr>
+                <a:solidFill>
+                  <a:srgbClr val="AD0000"/>
+                </a:solidFill>
+                <a:latin typeface="Courier"/>
+              </a:rPr>
+              <a:t>0.85</a:t>
+            </a:r>
+            <a:r>
+              <a:rPr>
+                <a:solidFill>
+                  <a:srgbClr val="003B4F"/>
+                </a:solidFill>
+                <a:latin typeface="Courier"/>
+              </a:rPr>
+              <a:t>) </a:t>
+            </a:r>
+            <a:r>
+              <a:rPr>
+                <a:solidFill>
+                  <a:srgbClr val="5E5E5E"/>
+                </a:solidFill>
+                <a:latin typeface="Courier"/>
+              </a:rPr>
+              <a:t>+</a:t>
+            </a:r>
+            <a:br/>
+            <a:r>
+              <a:rPr>
+                <a:solidFill>
+                  <a:srgbClr val="003B4F"/>
+                </a:solidFill>
+                <a:latin typeface="Courier"/>
+              </a:rPr>
+              <a:t>  </a:t>
+            </a:r>
+            <a:r>
+              <a:rPr>
+                <a:solidFill>
+                  <a:srgbClr val="4758AB"/>
+                </a:solidFill>
+                <a:latin typeface="Courier"/>
+              </a:rPr>
+              <a:t>labs</a:t>
+            </a:r>
+            <a:r>
+              <a:rPr>
+                <a:solidFill>
+                  <a:srgbClr val="003B4F"/>
+                </a:solidFill>
+                <a:latin typeface="Courier"/>
+              </a:rPr>
+              <a:t>(</a:t>
+            </a:r>
+            <a:br/>
+            <a:r>
+              <a:rPr>
+                <a:solidFill>
+                  <a:srgbClr val="003B4F"/>
+                </a:solidFill>
+                <a:latin typeface="Courier"/>
+              </a:rPr>
+              <a:t>    </a:t>
+            </a:r>
+            <a:r>
+              <a:rPr>
+                <a:solidFill>
+                  <a:srgbClr val="657422"/>
+                </a:solidFill>
+                <a:latin typeface="Courier"/>
+              </a:rPr>
+              <a:t>title =</a:t>
+            </a:r>
+            <a:r>
+              <a:rPr>
+                <a:solidFill>
+                  <a:srgbClr val="003B4F"/>
+                </a:solidFill>
+                <a:latin typeface="Courier"/>
+              </a:rPr>
+              <a:t> </a:t>
+            </a:r>
+            <a:r>
+              <a:rPr>
+                <a:solidFill>
+                  <a:srgbClr val="20794D"/>
+                </a:solidFill>
+                <a:latin typeface="Courier"/>
+              </a:rPr>
+              <a:t>"Effect of Urchin Density on Filamentous Algae Cover"</a:t>
+            </a:r>
+            <a:r>
+              <a:rPr>
+                <a:solidFill>
+                  <a:srgbClr val="003B4F"/>
+                </a:solidFill>
+                <a:latin typeface="Courier"/>
+              </a:rPr>
+              <a:t>,</a:t>
+            </a:r>
+            <a:br/>
+            <a:r>
+              <a:rPr>
+                <a:solidFill>
+                  <a:srgbClr val="003B4F"/>
+                </a:solidFill>
+                <a:latin typeface="Courier"/>
+              </a:rPr>
+              <a:t>    </a:t>
+            </a:r>
+            <a:r>
+              <a:rPr>
+                <a:solidFill>
+                  <a:srgbClr val="657422"/>
+                </a:solidFill>
+                <a:latin typeface="Courier"/>
+              </a:rPr>
+              <a:t>x =</a:t>
+            </a:r>
+            <a:r>
+              <a:rPr>
+                <a:solidFill>
+                  <a:srgbClr val="003B4F"/>
+                </a:solidFill>
+                <a:latin typeface="Courier"/>
+              </a:rPr>
+              <a:t> </a:t>
+            </a:r>
+            <a:r>
+              <a:rPr>
+                <a:solidFill>
+                  <a:srgbClr val="20794D"/>
+                </a:solidFill>
+                <a:latin typeface="Courier"/>
+              </a:rPr>
+              <a:t>"Urchin Density Treatment"</a:t>
+            </a:r>
+            <a:r>
+              <a:rPr>
+                <a:solidFill>
+                  <a:srgbClr val="003B4F"/>
+                </a:solidFill>
+                <a:latin typeface="Courier"/>
+              </a:rPr>
+              <a:t>,</a:t>
+            </a:r>
+            <a:br/>
+            <a:r>
+              <a:rPr>
+                <a:solidFill>
+                  <a:srgbClr val="003B4F"/>
+                </a:solidFill>
+                <a:latin typeface="Courier"/>
+              </a:rPr>
+              <a:t>    </a:t>
+            </a:r>
+            <a:r>
+              <a:rPr>
+                <a:solidFill>
+                  <a:srgbClr val="657422"/>
+                </a:solidFill>
+                <a:latin typeface="Courier"/>
+              </a:rPr>
+              <a:t>y =</a:t>
+            </a:r>
+            <a:r>
+              <a:rPr>
+                <a:solidFill>
+                  <a:srgbClr val="003B4F"/>
+                </a:solidFill>
+                <a:latin typeface="Courier"/>
+              </a:rPr>
+              <a:t> </a:t>
+            </a:r>
+            <a:r>
+              <a:rPr>
+                <a:solidFill>
+                  <a:srgbClr val="20794D"/>
+                </a:solidFill>
+                <a:latin typeface="Courier"/>
+              </a:rPr>
+              <a:t>"Filamentous Algae Cover (%)"</a:t>
+            </a:r>
+            <a:r>
+              <a:rPr>
+                <a:solidFill>
+                  <a:srgbClr val="003B4F"/>
+                </a:solidFill>
+                <a:latin typeface="Courier"/>
+              </a:rPr>
+              <a:t>,</a:t>
+            </a:r>
+            <a:br/>
+            <a:r>
+              <a:rPr>
+                <a:solidFill>
+                  <a:srgbClr val="003B4F"/>
+                </a:solidFill>
+                <a:latin typeface="Courier"/>
+              </a:rPr>
+              <a:t>    </a:t>
+            </a:r>
+            <a:r>
+              <a:rPr>
+                <a:solidFill>
+                  <a:srgbClr val="657422"/>
+                </a:solidFill>
+                <a:latin typeface="Courier"/>
+              </a:rPr>
+              <a:t>caption =</a:t>
+            </a:r>
+            <a:r>
+              <a:rPr>
+                <a:solidFill>
+                  <a:srgbClr val="003B4F"/>
+                </a:solidFill>
+                <a:latin typeface="Courier"/>
+              </a:rPr>
+              <a:t> </a:t>
+            </a:r>
+            <a:r>
+              <a:rPr>
+                <a:solidFill>
+                  <a:srgbClr val="20794D"/>
+                </a:solidFill>
+                <a:latin typeface="Courier"/>
+              </a:rPr>
+              <a:t>"Boxplots showing the distribution of algal cover across urchin density treatments."</a:t>
+            </a:r>
+            <a:br/>
+            <a:r>
+              <a:rPr>
+                <a:solidFill>
+                  <a:srgbClr val="003B4F"/>
+                </a:solidFill>
+                <a:latin typeface="Courier"/>
+              </a:rPr>
+              <a:t>  ) </a:t>
+            </a:r>
+            <a:r>
+              <a:rPr>
+                <a:solidFill>
+                  <a:srgbClr val="5E5E5E"/>
+                </a:solidFill>
+                <a:latin typeface="Courier"/>
+              </a:rPr>
+              <a:t>+</a:t>
+            </a:r>
+            <a:br/>
+            <a:r>
+              <a:rPr>
+                <a:solidFill>
+                  <a:srgbClr val="003B4F"/>
+                </a:solidFill>
+                <a:latin typeface="Courier"/>
+              </a:rPr>
+              <a:t>  </a:t>
+            </a:r>
+            <a:r>
+              <a:rPr>
+                <a:solidFill>
+                  <a:srgbClr val="4758AB"/>
+                </a:solidFill>
+                <a:latin typeface="Courier"/>
+              </a:rPr>
+              <a:t>theme</a:t>
+            </a:r>
+            <a:r>
+              <a:rPr>
+                <a:solidFill>
+                  <a:srgbClr val="003B4F"/>
+                </a:solidFill>
+                <a:latin typeface="Courier"/>
+              </a:rPr>
+              <a:t>(</a:t>
+            </a:r>
+            <a:br/>
+            <a:r>
+              <a:rPr>
+                <a:solidFill>
+                  <a:srgbClr val="003B4F"/>
+                </a:solidFill>
+                <a:latin typeface="Courier"/>
+              </a:rPr>
+              <a:t>    </a:t>
+            </a:r>
+            <a:r>
+              <a:rPr>
+                <a:solidFill>
+                  <a:srgbClr val="657422"/>
+                </a:solidFill>
+                <a:latin typeface="Courier"/>
+              </a:rPr>
+              <a:t>legend.position =</a:t>
+            </a:r>
+            <a:r>
+              <a:rPr>
+                <a:solidFill>
+                  <a:srgbClr val="003B4F"/>
+                </a:solidFill>
+                <a:latin typeface="Courier"/>
+              </a:rPr>
+              <a:t> </a:t>
+            </a:r>
+            <a:r>
+              <a:rPr>
+                <a:solidFill>
+                  <a:srgbClr val="20794D"/>
+                </a:solidFill>
+                <a:latin typeface="Courier"/>
+              </a:rPr>
+              <a:t>"none"</a:t>
+            </a:r>
+            <a:r>
+              <a:rPr>
+                <a:solidFill>
+                  <a:srgbClr val="003B4F"/>
+                </a:solidFill>
+                <a:latin typeface="Courier"/>
+              </a:rPr>
+              <a:t>,</a:t>
+            </a:r>
+            <a:br/>
+            <a:r>
+              <a:rPr>
+                <a:solidFill>
+                  <a:srgbClr val="003B4F"/>
+                </a:solidFill>
+                <a:latin typeface="Courier"/>
+              </a:rPr>
+              <a:t>    </a:t>
+            </a:r>
+            <a:r>
+              <a:rPr>
+                <a:solidFill>
+                  <a:srgbClr val="657422"/>
+                </a:solidFill>
+                <a:latin typeface="Courier"/>
+              </a:rPr>
+              <a:t>plot.title =</a:t>
+            </a:r>
+            <a:r>
+              <a:rPr>
+                <a:solidFill>
+                  <a:srgbClr val="003B4F"/>
+                </a:solidFill>
+                <a:latin typeface="Courier"/>
+              </a:rPr>
+              <a:t> </a:t>
+            </a:r>
+            <a:r>
+              <a:rPr>
+                <a:solidFill>
+                  <a:srgbClr val="4758AB"/>
+                </a:solidFill>
+                <a:latin typeface="Courier"/>
+              </a:rPr>
+              <a:t>element_text</a:t>
+            </a:r>
+            <a:r>
+              <a:rPr>
+                <a:solidFill>
+                  <a:srgbClr val="003B4F"/>
+                </a:solidFill>
+                <a:latin typeface="Courier"/>
+              </a:rPr>
+              <a:t>(</a:t>
+            </a:r>
+            <a:r>
+              <a:rPr>
+                <a:solidFill>
+                  <a:srgbClr val="657422"/>
+                </a:solidFill>
+                <a:latin typeface="Courier"/>
+              </a:rPr>
+              <a:t>face =</a:t>
+            </a:r>
+            <a:r>
+              <a:rPr>
+                <a:solidFill>
+                  <a:srgbClr val="003B4F"/>
+                </a:solidFill>
+                <a:latin typeface="Courier"/>
+              </a:rPr>
+              <a:t> </a:t>
+            </a:r>
+            <a:r>
+              <a:rPr>
+                <a:solidFill>
+                  <a:srgbClr val="20794D"/>
+                </a:solidFill>
+                <a:latin typeface="Courier"/>
+              </a:rPr>
+              <a:t>"bold"</a:t>
+            </a:r>
+            <a:r>
+              <a:rPr>
+                <a:solidFill>
+                  <a:srgbClr val="003B4F"/>
+                </a:solidFill>
+                <a:latin typeface="Courier"/>
+              </a:rPr>
+              <a:t>, </a:t>
+            </a:r>
+            <a:r>
+              <a:rPr>
+                <a:solidFill>
+                  <a:srgbClr val="657422"/>
+                </a:solidFill>
+                <a:latin typeface="Courier"/>
+              </a:rPr>
+              <a:t>size =</a:t>
+            </a:r>
+            <a:r>
+              <a:rPr>
+                <a:solidFill>
+                  <a:srgbClr val="003B4F"/>
+                </a:solidFill>
+                <a:latin typeface="Courier"/>
+              </a:rPr>
+              <a:t> </a:t>
+            </a:r>
+            <a:r>
+              <a:rPr>
+                <a:solidFill>
+                  <a:srgbClr val="AD0000"/>
+                </a:solidFill>
+                <a:latin typeface="Courier"/>
+              </a:rPr>
+              <a:t>14</a:t>
+            </a:r>
+            <a:r>
+              <a:rPr>
+                <a:solidFill>
+                  <a:srgbClr val="003B4F"/>
+                </a:solidFill>
+                <a:latin typeface="Courier"/>
+              </a:rPr>
+              <a:t>),</a:t>
+            </a:r>
+            <a:br/>
+            <a:r>
+              <a:rPr>
+                <a:solidFill>
+                  <a:srgbClr val="003B4F"/>
+                </a:solidFill>
+                <a:latin typeface="Courier"/>
+              </a:rPr>
+              <a:t>    </a:t>
+            </a:r>
+            <a:r>
+              <a:rPr>
+                <a:solidFill>
+                  <a:srgbClr val="657422"/>
+                </a:solidFill>
+                <a:latin typeface="Courier"/>
+              </a:rPr>
+              <a:t>axis.title =</a:t>
+            </a:r>
+            <a:r>
+              <a:rPr>
+                <a:solidFill>
+                  <a:srgbClr val="003B4F"/>
+                </a:solidFill>
+                <a:latin typeface="Courier"/>
+              </a:rPr>
+              <a:t> </a:t>
+            </a:r>
+            <a:r>
+              <a:rPr>
+                <a:solidFill>
+                  <a:srgbClr val="4758AB"/>
+                </a:solidFill>
+                <a:latin typeface="Courier"/>
+              </a:rPr>
+              <a:t>element_text</a:t>
+            </a:r>
+            <a:r>
+              <a:rPr>
+                <a:solidFill>
+                  <a:srgbClr val="003B4F"/>
+                </a:solidFill>
+                <a:latin typeface="Courier"/>
+              </a:rPr>
+              <a:t>(</a:t>
+            </a:r>
+            <a:r>
+              <a:rPr>
+                <a:solidFill>
+                  <a:srgbClr val="657422"/>
+                </a:solidFill>
+                <a:latin typeface="Courier"/>
+              </a:rPr>
+              <a:t>face =</a:t>
+            </a:r>
+            <a:r>
+              <a:rPr>
+                <a:solidFill>
+                  <a:srgbClr val="003B4F"/>
+                </a:solidFill>
+                <a:latin typeface="Courier"/>
+              </a:rPr>
+              <a:t> </a:t>
+            </a:r>
+            <a:r>
+              <a:rPr>
+                <a:solidFill>
+                  <a:srgbClr val="20794D"/>
+                </a:solidFill>
+                <a:latin typeface="Courier"/>
+              </a:rPr>
+              <a:t>"bold"</a:t>
+            </a:r>
+            <a:r>
+              <a:rPr>
+                <a:solidFill>
+                  <a:srgbClr val="003B4F"/>
+                </a:solidFill>
+                <a:latin typeface="Courier"/>
+              </a:rPr>
+              <a:t>, </a:t>
+            </a:r>
+            <a:r>
+              <a:rPr>
+                <a:solidFill>
+                  <a:srgbClr val="657422"/>
+                </a:solidFill>
+                <a:latin typeface="Courier"/>
+              </a:rPr>
+              <a:t>size =</a:t>
+            </a:r>
+            <a:r>
+              <a:rPr>
+                <a:solidFill>
+                  <a:srgbClr val="003B4F"/>
+                </a:solidFill>
+                <a:latin typeface="Courier"/>
+              </a:rPr>
+              <a:t> </a:t>
+            </a:r>
+            <a:r>
+              <a:rPr>
+                <a:solidFill>
+                  <a:srgbClr val="AD0000"/>
+                </a:solidFill>
+                <a:latin typeface="Courier"/>
+              </a:rPr>
+              <a:t>12</a:t>
+            </a:r>
+            <a:r>
+              <a:rPr>
+                <a:solidFill>
+                  <a:srgbClr val="003B4F"/>
+                </a:solidFill>
+                <a:latin typeface="Courier"/>
+              </a:rPr>
+              <a:t>),</a:t>
+            </a:r>
+            <a:br/>
+            <a:r>
+              <a:rPr>
+                <a:solidFill>
+                  <a:srgbClr val="003B4F"/>
+                </a:solidFill>
+                <a:latin typeface="Courier"/>
+              </a:rPr>
+              <a:t>    </a:t>
+            </a:r>
+            <a:r>
+              <a:rPr>
+                <a:solidFill>
+                  <a:srgbClr val="657422"/>
+                </a:solidFill>
+                <a:latin typeface="Courier"/>
+              </a:rPr>
+              <a:t>plot.caption =</a:t>
+            </a:r>
+            <a:r>
+              <a:rPr>
+                <a:solidFill>
+                  <a:srgbClr val="003B4F"/>
+                </a:solidFill>
+                <a:latin typeface="Courier"/>
+              </a:rPr>
+              <a:t> </a:t>
+            </a:r>
+            <a:r>
+              <a:rPr>
+                <a:solidFill>
+                  <a:srgbClr val="4758AB"/>
+                </a:solidFill>
+                <a:latin typeface="Courier"/>
+              </a:rPr>
+              <a:t>element_text</a:t>
+            </a:r>
+            <a:r>
+              <a:rPr>
+                <a:solidFill>
+                  <a:srgbClr val="003B4F"/>
+                </a:solidFill>
+                <a:latin typeface="Courier"/>
+              </a:rPr>
+              <a:t>(</a:t>
+            </a:r>
+            <a:r>
+              <a:rPr>
+                <a:solidFill>
+                  <a:srgbClr val="657422"/>
+                </a:solidFill>
+                <a:latin typeface="Courier"/>
+              </a:rPr>
+              <a:t>hjust =</a:t>
+            </a:r>
+            <a:r>
+              <a:rPr>
+                <a:solidFill>
+                  <a:srgbClr val="003B4F"/>
+                </a:solidFill>
+                <a:latin typeface="Courier"/>
+              </a:rPr>
+              <a:t> </a:t>
+            </a:r>
+            <a:r>
+              <a:rPr>
+                <a:solidFill>
+                  <a:srgbClr val="AD0000"/>
+                </a:solidFill>
+                <a:latin typeface="Courier"/>
+              </a:rPr>
+              <a:t>0</a:t>
+            </a:r>
+            <a:r>
+              <a:rPr>
+                <a:solidFill>
+                  <a:srgbClr val="003B4F"/>
+                </a:solidFill>
+                <a:latin typeface="Courier"/>
+              </a:rPr>
+              <a:t>, </a:t>
+            </a:r>
+            <a:r>
+              <a:rPr>
+                <a:solidFill>
+                  <a:srgbClr val="657422"/>
+                </a:solidFill>
+                <a:latin typeface="Courier"/>
+              </a:rPr>
+              <a:t>face =</a:t>
+            </a:r>
+            <a:r>
+              <a:rPr>
+                <a:solidFill>
+                  <a:srgbClr val="003B4F"/>
+                </a:solidFill>
+                <a:latin typeface="Courier"/>
+              </a:rPr>
+              <a:t> </a:t>
+            </a:r>
+            <a:r>
+              <a:rPr>
+                <a:solidFill>
+                  <a:srgbClr val="20794D"/>
+                </a:solidFill>
+                <a:latin typeface="Courier"/>
+              </a:rPr>
+              <a:t>"italic"</a:t>
+            </a:r>
+            <a:r>
+              <a:rPr>
+                <a:solidFill>
+                  <a:srgbClr val="003B4F"/>
+                </a:solidFill>
+                <a:latin typeface="Courier"/>
+              </a:rPr>
+              <a:t>, </a:t>
+            </a:r>
+            <a:r>
+              <a:rPr>
+                <a:solidFill>
+                  <a:srgbClr val="657422"/>
+                </a:solidFill>
+                <a:latin typeface="Courier"/>
+              </a:rPr>
+              <a:t>size =</a:t>
+            </a:r>
+            <a:r>
+              <a:rPr>
+                <a:solidFill>
+                  <a:srgbClr val="003B4F"/>
+                </a:solidFill>
+                <a:latin typeface="Courier"/>
+              </a:rPr>
+              <a:t> </a:t>
+            </a:r>
+            <a:r>
+              <a:rPr>
+                <a:solidFill>
+                  <a:srgbClr val="AD0000"/>
+                </a:solidFill>
+                <a:latin typeface="Courier"/>
+              </a:rPr>
+              <a:t>10</a:t>
             </a:r>
             <a:r>
               <a:rPr>
@@ -8472,167 +7966,7 @@
                 </a:solidFill>
                 <a:latin typeface="Courier"/>
               </a:rPr>
-              <a:t>simulation_output &lt;- </a:t>
-            </a:r>
-            <a:r>
-              <a:rPr>
-                <a:solidFill>
-                  <a:srgbClr val="4758AB"/>
-                </a:solidFill>
-                <a:latin typeface="Courier"/>
-              </a:rPr>
-              <a:t>simulateResiduals</a:t>
-            </a:r>
-            <a:r>
-              <a:rPr>
-                <a:solidFill>
-                  <a:srgbClr val="003B4F"/>
-                </a:solidFill>
-                <a:latin typeface="Courier"/>
-              </a:rPr>
-              <a:t>(</a:t>
-            </a:r>
-            <a:r>
-              <a:rPr>
-                <a:solidFill>
-                  <a:srgbClr val="657422"/>
-                </a:solidFill>
-                <a:latin typeface="Courier"/>
-              </a:rPr>
-              <a:t>fittedModel =</a:t>
-            </a:r>
-            <a:r>
-              <a:rPr>
-                <a:solidFill>
-                  <a:srgbClr val="003B4F"/>
-                </a:solidFill>
-                <a:latin typeface="Courier"/>
-              </a:rPr>
-              <a:t> mixed_model,</a:t>
-            </a:r>
-            <a:br/>
-            <a:r>
-              <a:rPr>
-                <a:solidFill>
-                  <a:srgbClr val="003B4F"/>
-                </a:solidFill>
-                <a:latin typeface="Courier"/>
-              </a:rPr>
-              <a:t>                                       </a:t>
-            </a:r>
-            <a:r>
-              <a:rPr>
-                <a:solidFill>
-                  <a:srgbClr val="657422"/>
-                </a:solidFill>
-                <a:latin typeface="Courier"/>
-              </a:rPr>
-              <a:t>plot =</a:t>
-            </a:r>
-            <a:r>
-              <a:rPr>
-                <a:solidFill>
-                  <a:srgbClr val="003B4F"/>
-                </a:solidFill>
-                <a:latin typeface="Courier"/>
-              </a:rPr>
-              <a:t> </a:t>
-            </a:r>
-            <a:r>
-              <a:rPr>
-                <a:solidFill>
-                  <a:srgbClr val="8F5902"/>
-                </a:solidFill>
-                <a:latin typeface="Courier"/>
-              </a:rPr>
-              <a:t>FALSE</a:t>
-            </a:r>
-            <a:r>
-              <a:rPr>
-                <a:solidFill>
-                  <a:srgbClr val="003B4F"/>
-                </a:solidFill>
-                <a:latin typeface="Courier"/>
-              </a:rPr>
-              <a:t>)</a:t>
-            </a:r>
-            <a:br/>
-            <a:br/>
-            <a:r>
-              <a:rPr>
-                <a:solidFill>
-                  <a:srgbClr val="4758AB"/>
-                </a:solidFill>
-                <a:latin typeface="Courier"/>
-              </a:rPr>
-              <a:t>plotQQunif</a:t>
-            </a:r>
-            <a:r>
-              <a:rPr>
-                <a:solidFill>
-                  <a:srgbClr val="003B4F"/>
-                </a:solidFill>
-                <a:latin typeface="Courier"/>
-              </a:rPr>
-              <a:t>(simulation_output)</a:t>
-            </a:r>
-            <a:br/>
-            <a:r>
-              <a:rPr>
-                <a:solidFill>
-                  <a:srgbClr val="4758AB"/>
-                </a:solidFill>
-                <a:latin typeface="Courier"/>
-              </a:rPr>
-              <a:t>plotResiduals</a:t>
-            </a:r>
-            <a:r>
-              <a:rPr>
-                <a:solidFill>
-                  <a:srgbClr val="003B4F"/>
-                </a:solidFill>
-                <a:latin typeface="Courier"/>
-              </a:rPr>
-              <a:t>(simulation_output)</a:t>
-            </a:r>
-            <a:br/>
-            <a:br/>
-            <a:r>
-              <a:rPr>
-                <a:solidFill>
-                  <a:srgbClr val="4758AB"/>
-                </a:solidFill>
-                <a:latin typeface="Courier"/>
-              </a:rPr>
-              <a:t>testDispersion</a:t>
-            </a:r>
-            <a:r>
-              <a:rPr>
-                <a:solidFill>
-                  <a:srgbClr val="003B4F"/>
-                </a:solidFill>
-                <a:latin typeface="Courier"/>
-              </a:rPr>
-              <a:t>(simulation_output)</a:t>
-            </a:r>
-            <a:br/>
-            <a:r>
-              <a:rPr>
-                <a:solidFill>
-                  <a:srgbClr val="4758AB"/>
-                </a:solidFill>
-                <a:latin typeface="Courier"/>
-              </a:rPr>
-              <a:t>testOutliers</a:t>
-            </a:r>
-            <a:r>
-              <a:rPr>
-                <a:solidFill>
-                  <a:srgbClr val="003B4F"/>
-                </a:solidFill>
-                <a:latin typeface="Courier"/>
-              </a:rPr>
-              <a:t>(simulation_output)</a:t>
+              <a:t>  )</a:t>
             </a:r>
           </a:p>
           <a:p>
@@ -8645,7 +7979,7 @@
             </a:r>
             <a:r>
               <a:rPr/>
-              <a:t> — a couple of other useful diagnostic views:</a:t>
+              <a:t> — a mean ± SE plot:</a:t>
             </a:r>
           </a:p>
           <a:p>
@@ -8659,16 +7993,34 @@
                 </a:solidFill>
                 <a:latin typeface="Courier"/>
               </a:rPr>
-              <a:t>plot</a:t>
-            </a:r>
-            <a:r>
-              <a:rPr>
-                <a:solidFill>
-                  <a:srgbClr val="003B4F"/>
-                </a:solidFill>
-                <a:latin typeface="Courier"/>
-              </a:rPr>
-              <a:t>(mixed_model, </a:t>
+              <a:t>ggplot</a:t>
+            </a:r>
+            <a:r>
+              <a:rPr>
+                <a:solidFill>
+                  <a:srgbClr val="003B4F"/>
+                </a:solidFill>
+                <a:latin typeface="Courier"/>
+              </a:rPr>
+              <a:t>(summary_stats, </a:t>
+            </a:r>
+            <a:r>
+              <a:rPr>
+                <a:solidFill>
+                  <a:srgbClr val="4758AB"/>
+                </a:solidFill>
+                <a:latin typeface="Courier"/>
+              </a:rPr>
+              <a:t>aes</a:t>
+            </a:r>
+            <a:r>
+              <a:rPr>
+                <a:solidFill>
+                  <a:srgbClr val="003B4F"/>
+                </a:solidFill>
+                <a:latin typeface="Courier"/>
+              </a:rPr>
+              <a:t>(</a:t>
             </a:r>
             <a:r>
               <a:rPr>
@@ -8677,7 +8029,43 @@
                 </a:solidFill>
                 <a:latin typeface="Courier"/>
               </a:rPr>
-              <a:t>type =</a:t>
+              <a:t>x =</a:t>
+            </a:r>
+            <a:r>
+              <a:rPr>
+                <a:solidFill>
+                  <a:srgbClr val="003B4F"/>
+                </a:solidFill>
+                <a:latin typeface="Courier"/>
+              </a:rPr>
+              <a:t> treat, </a:t>
+            </a:r>
+            <a:r>
+              <a:rPr>
+                <a:solidFill>
+                  <a:srgbClr val="657422"/>
+                </a:solidFill>
+                <a:latin typeface="Courier"/>
+              </a:rPr>
+              <a:t>y =</a:t>
+            </a:r>
+            <a:r>
+              <a:rPr>
+                <a:solidFill>
+                  <a:srgbClr val="003B4F"/>
+                </a:solidFill>
+                <a:latin typeface="Courier"/>
+              </a:rPr>
+              <a:t> mean, </a:t>
+            </a:r>
+            <a:r>
+              <a:rPr>
+                <a:solidFill>
+                  <a:srgbClr val="657422"/>
+                </a:solidFill>
+                <a:latin typeface="Courier"/>
+              </a:rPr>
+              <a:t>group =</a:t>
             </a:r>
             <a:r>
               <a:rPr>
@@ -8691,11 +8079,48 @@
             <a:r>
               <a:rPr>
                 <a:solidFill>
+                  <a:srgbClr val="AD0000"/>
+                </a:solidFill>
+                <a:latin typeface="Courier"/>
+              </a:rPr>
+              <a:t>1</a:t>
+            </a:r>
+            <a:r>
+              <a:rPr>
+                <a:solidFill>
+                  <a:srgbClr val="003B4F"/>
+                </a:solidFill>
+                <a:latin typeface="Courier"/>
+              </a:rPr>
+              <a:t>)) </a:t>
+            </a:r>
+            <a:r>
+              <a:rPr>
+                <a:solidFill>
+                  <a:srgbClr val="5E5E5E"/>
+                </a:solidFill>
+                <a:latin typeface="Courier"/>
+              </a:rPr>
+              <a:t>+</a:t>
+            </a:r>
+            <a:br/>
+            <a:r>
+              <a:rPr>
+                <a:solidFill>
+                  <a:srgbClr val="003B4F"/>
+                </a:solidFill>
+                <a:latin typeface="Courier"/>
+              </a:rPr>
+              <a:t>  </a:t>
+            </a:r>
+            <a:r>
+              <a:rPr>
+                <a:solidFill>
                   <a:srgbClr val="4758AB"/>
                 </a:solidFill>
                 <a:latin typeface="Courier"/>
               </a:rPr>
-              <a:t>c</a:t>
+              <a:t>geom_point</a:t>
             </a:r>
             <a:r>
               <a:rPr>
@@ -8709,11 +8134,605 @@
             <a:r>
               <a:rPr>
                 <a:solidFill>
+                  <a:srgbClr val="657422"/>
+                </a:solidFill>
+                <a:latin typeface="Courier"/>
+              </a:rPr>
+              <a:t>size =</a:t>
+            </a:r>
+            <a:r>
+              <a:rPr>
+                <a:solidFill>
+                  <a:srgbClr val="003B4F"/>
+                </a:solidFill>
+                <a:latin typeface="Courier"/>
+              </a:rPr>
+              <a:t> </a:t>
+            </a:r>
+            <a:r>
+              <a:rPr>
+                <a:solidFill>
+                  <a:srgbClr val="AD0000"/>
+                </a:solidFill>
+                <a:latin typeface="Courier"/>
+              </a:rPr>
+              <a:t>3</a:t>
+            </a:r>
+            <a:r>
+              <a:rPr>
+                <a:solidFill>
+                  <a:srgbClr val="003B4F"/>
+                </a:solidFill>
+                <a:latin typeface="Courier"/>
+              </a:rPr>
+              <a:t>, </a:t>
+            </a:r>
+            <a:r>
+              <a:rPr>
+                <a:solidFill>
+                  <a:srgbClr val="657422"/>
+                </a:solidFill>
+                <a:latin typeface="Courier"/>
+              </a:rPr>
+              <a:t>shape =</a:t>
+            </a:r>
+            <a:r>
+              <a:rPr>
+                <a:solidFill>
+                  <a:srgbClr val="003B4F"/>
+                </a:solidFill>
+                <a:latin typeface="Courier"/>
+              </a:rPr>
+              <a:t> </a:t>
+            </a:r>
+            <a:r>
+              <a:rPr>
+                <a:solidFill>
+                  <a:srgbClr val="AD0000"/>
+                </a:solidFill>
+                <a:latin typeface="Courier"/>
+              </a:rPr>
+              <a:t>21</a:t>
+            </a:r>
+            <a:r>
+              <a:rPr>
+                <a:solidFill>
+                  <a:srgbClr val="003B4F"/>
+                </a:solidFill>
+                <a:latin typeface="Courier"/>
+              </a:rPr>
+              <a:t>, </a:t>
+            </a:r>
+            <a:r>
+              <a:rPr>
+                <a:solidFill>
+                  <a:srgbClr val="657422"/>
+                </a:solidFill>
+                <a:latin typeface="Courier"/>
+              </a:rPr>
+              <a:t>fill =</a:t>
+            </a:r>
+            <a:r>
+              <a:rPr>
+                <a:solidFill>
+                  <a:srgbClr val="003B4F"/>
+                </a:solidFill>
+                <a:latin typeface="Courier"/>
+              </a:rPr>
+              <a:t> </a:t>
+            </a:r>
+            <a:r>
+              <a:rPr>
+                <a:solidFill>
                   <a:srgbClr val="20794D"/>
                 </a:solidFill>
                 <a:latin typeface="Courier"/>
               </a:rPr>
-              <a:t>"p"</a:t>
+              <a:t>"white"</a:t>
+            </a:r>
+            <a:r>
+              <a:rPr>
+                <a:solidFill>
+                  <a:srgbClr val="003B4F"/>
+                </a:solidFill>
+                <a:latin typeface="Courier"/>
+              </a:rPr>
+              <a:t>) </a:t>
+            </a:r>
+            <a:r>
+              <a:rPr>
+                <a:solidFill>
+                  <a:srgbClr val="5E5E5E"/>
+                </a:solidFill>
+                <a:latin typeface="Courier"/>
+              </a:rPr>
+              <a:t>+</a:t>
+            </a:r>
+            <a:br/>
+            <a:r>
+              <a:rPr>
+                <a:solidFill>
+                  <a:srgbClr val="003B4F"/>
+                </a:solidFill>
+                <a:latin typeface="Courier"/>
+              </a:rPr>
+              <a:t>  </a:t>
+            </a:r>
+            <a:r>
+              <a:rPr>
+                <a:solidFill>
+                  <a:srgbClr val="4758AB"/>
+                </a:solidFill>
+                <a:latin typeface="Courier"/>
+              </a:rPr>
+              <a:t>geom_errorbar</a:t>
+            </a:r>
+            <a:r>
+              <a:rPr>
+                <a:solidFill>
+                  <a:srgbClr val="003B4F"/>
+                </a:solidFill>
+                <a:latin typeface="Courier"/>
+              </a:rPr>
+              <a:t>(</a:t>
+            </a:r>
+            <a:r>
+              <a:rPr>
+                <a:solidFill>
+                  <a:srgbClr val="4758AB"/>
+                </a:solidFill>
+                <a:latin typeface="Courier"/>
+              </a:rPr>
+              <a:t>aes</a:t>
+            </a:r>
+            <a:r>
+              <a:rPr>
+                <a:solidFill>
+                  <a:srgbClr val="003B4F"/>
+                </a:solidFill>
+                <a:latin typeface="Courier"/>
+              </a:rPr>
+              <a:t>(</a:t>
+            </a:r>
+            <a:r>
+              <a:rPr>
+                <a:solidFill>
+                  <a:srgbClr val="657422"/>
+                </a:solidFill>
+                <a:latin typeface="Courier"/>
+              </a:rPr>
+              <a:t>ymin =</a:t>
+            </a:r>
+            <a:r>
+              <a:rPr>
+                <a:solidFill>
+                  <a:srgbClr val="003B4F"/>
+                </a:solidFill>
+                <a:latin typeface="Courier"/>
+              </a:rPr>
+              <a:t> mean </a:t>
+            </a:r>
+            <a:r>
+              <a:rPr>
+                <a:solidFill>
+                  <a:srgbClr val="5E5E5E"/>
+                </a:solidFill>
+                <a:latin typeface="Courier"/>
+              </a:rPr>
+              <a:t>-</a:t>
+            </a:r>
+            <a:r>
+              <a:rPr>
+                <a:solidFill>
+                  <a:srgbClr val="003B4F"/>
+                </a:solidFill>
+                <a:latin typeface="Courier"/>
+              </a:rPr>
+              <a:t> se, </a:t>
+            </a:r>
+            <a:r>
+              <a:rPr>
+                <a:solidFill>
+                  <a:srgbClr val="657422"/>
+                </a:solidFill>
+                <a:latin typeface="Courier"/>
+              </a:rPr>
+              <a:t>ymax =</a:t>
+            </a:r>
+            <a:r>
+              <a:rPr>
+                <a:solidFill>
+                  <a:srgbClr val="003B4F"/>
+                </a:solidFill>
+                <a:latin typeface="Courier"/>
+              </a:rPr>
+              <a:t> mean </a:t>
+            </a:r>
+            <a:r>
+              <a:rPr>
+                <a:solidFill>
+                  <a:srgbClr val="5E5E5E"/>
+                </a:solidFill>
+                <a:latin typeface="Courier"/>
+              </a:rPr>
+              <a:t>+</a:t>
+            </a:r>
+            <a:r>
+              <a:rPr>
+                <a:solidFill>
+                  <a:srgbClr val="003B4F"/>
+                </a:solidFill>
+                <a:latin typeface="Courier"/>
+              </a:rPr>
+              <a:t> se), </a:t>
+            </a:r>
+            <a:r>
+              <a:rPr>
+                <a:solidFill>
+                  <a:srgbClr val="657422"/>
+                </a:solidFill>
+                <a:latin typeface="Courier"/>
+              </a:rPr>
+              <a:t>width =</a:t>
+            </a:r>
+            <a:r>
+              <a:rPr>
+                <a:solidFill>
+                  <a:srgbClr val="003B4F"/>
+                </a:solidFill>
+                <a:latin typeface="Courier"/>
+              </a:rPr>
+              <a:t> </a:t>
+            </a:r>
+            <a:r>
+              <a:rPr>
+                <a:solidFill>
+                  <a:srgbClr val="AD0000"/>
+                </a:solidFill>
+                <a:latin typeface="Courier"/>
+              </a:rPr>
+              <a:t>0.2</a:t>
+            </a:r>
+            <a:r>
+              <a:rPr>
+                <a:solidFill>
+                  <a:srgbClr val="003B4F"/>
+                </a:solidFill>
+                <a:latin typeface="Courier"/>
+              </a:rPr>
+              <a:t>) </a:t>
+            </a:r>
+            <a:r>
+              <a:rPr>
+                <a:solidFill>
+                  <a:srgbClr val="5E5E5E"/>
+                </a:solidFill>
+                <a:latin typeface="Courier"/>
+              </a:rPr>
+              <a:t>+</a:t>
+            </a:r>
+            <a:br/>
+            <a:r>
+              <a:rPr>
+                <a:solidFill>
+                  <a:srgbClr val="003B4F"/>
+                </a:solidFill>
+                <a:latin typeface="Courier"/>
+              </a:rPr>
+              <a:t>  </a:t>
+            </a:r>
+            <a:r>
+              <a:rPr>
+                <a:solidFill>
+                  <a:srgbClr val="4758AB"/>
+                </a:solidFill>
+                <a:latin typeface="Courier"/>
+              </a:rPr>
+              <a:t>labs</a:t>
+            </a:r>
+            <a:r>
+              <a:rPr>
+                <a:solidFill>
+                  <a:srgbClr val="003B4F"/>
+                </a:solidFill>
+                <a:latin typeface="Courier"/>
+              </a:rPr>
+              <a:t>(</a:t>
+            </a:r>
+            <a:br/>
+            <a:r>
+              <a:rPr>
+                <a:solidFill>
+                  <a:srgbClr val="003B4F"/>
+                </a:solidFill>
+                <a:latin typeface="Courier"/>
+              </a:rPr>
+              <a:t>    </a:t>
+            </a:r>
+            <a:r>
+              <a:rPr>
+                <a:solidFill>
+                  <a:srgbClr val="657422"/>
+                </a:solidFill>
+                <a:latin typeface="Courier"/>
+              </a:rPr>
+              <a:t>title =</a:t>
+            </a:r>
+            <a:r>
+              <a:rPr>
+                <a:solidFill>
+                  <a:srgbClr val="003B4F"/>
+                </a:solidFill>
+                <a:latin typeface="Courier"/>
+              </a:rPr>
+              <a:t> </a:t>
+            </a:r>
+            <a:r>
+              <a:rPr>
+                <a:solidFill>
+                  <a:srgbClr val="20794D"/>
+                </a:solidFill>
+                <a:latin typeface="Courier"/>
+              </a:rPr>
+              <a:t>"Mean Algae Cover by Urchin Density Treatment"</a:t>
+            </a:r>
+            <a:r>
+              <a:rPr>
+                <a:solidFill>
+                  <a:srgbClr val="003B4F"/>
+                </a:solidFill>
+                <a:latin typeface="Courier"/>
+              </a:rPr>
+              <a:t>,</a:t>
+            </a:r>
+            <a:br/>
+            <a:r>
+              <a:rPr>
+                <a:solidFill>
+                  <a:srgbClr val="003B4F"/>
+                </a:solidFill>
+                <a:latin typeface="Courier"/>
+              </a:rPr>
+              <a:t>    </a:t>
+            </a:r>
+            <a:r>
+              <a:rPr>
+                <a:solidFill>
+                  <a:srgbClr val="657422"/>
+                </a:solidFill>
+                <a:latin typeface="Courier"/>
+              </a:rPr>
+              <a:t>x =</a:t>
+            </a:r>
+            <a:r>
+              <a:rPr>
+                <a:solidFill>
+                  <a:srgbClr val="003B4F"/>
+                </a:solidFill>
+                <a:latin typeface="Courier"/>
+              </a:rPr>
+              <a:t> </a:t>
+            </a:r>
+            <a:r>
+              <a:rPr>
+                <a:solidFill>
+                  <a:srgbClr val="20794D"/>
+                </a:solidFill>
+                <a:latin typeface="Courier"/>
+              </a:rPr>
+              <a:t>"Urchin Density Treatment"</a:t>
+            </a:r>
+            <a:r>
+              <a:rPr>
+                <a:solidFill>
+                  <a:srgbClr val="003B4F"/>
+                </a:solidFill>
+                <a:latin typeface="Courier"/>
+              </a:rPr>
+              <a:t>,</a:t>
+            </a:r>
+            <a:br/>
+            <a:r>
+              <a:rPr>
+                <a:solidFill>
+                  <a:srgbClr val="003B4F"/>
+                </a:solidFill>
+                <a:latin typeface="Courier"/>
+              </a:rPr>
+              <a:t>    </a:t>
+            </a:r>
+            <a:r>
+              <a:rPr>
+                <a:solidFill>
+                  <a:srgbClr val="657422"/>
+                </a:solidFill>
+                <a:latin typeface="Courier"/>
+              </a:rPr>
+              <a:t>y =</a:t>
+            </a:r>
+            <a:r>
+              <a:rPr>
+                <a:solidFill>
+                  <a:srgbClr val="003B4F"/>
+                </a:solidFill>
+                <a:latin typeface="Courier"/>
+              </a:rPr>
+              <a:t> </a:t>
+            </a:r>
+            <a:r>
+              <a:rPr>
+                <a:solidFill>
+                  <a:srgbClr val="20794D"/>
+                </a:solidFill>
+                <a:latin typeface="Courier"/>
+              </a:rPr>
+              <a:t>"Mean Filamentous Algae Cover (%)"</a:t>
+            </a:r>
+            <a:r>
+              <a:rPr>
+                <a:solidFill>
+                  <a:srgbClr val="003B4F"/>
+                </a:solidFill>
+                <a:latin typeface="Courier"/>
+              </a:rPr>
+              <a:t>,</a:t>
+            </a:r>
+            <a:br/>
+            <a:r>
+              <a:rPr>
+                <a:solidFill>
+                  <a:srgbClr val="003B4F"/>
+                </a:solidFill>
+                <a:latin typeface="Courier"/>
+              </a:rPr>
+              <a:t>    </a:t>
+            </a:r>
+            <a:r>
+              <a:rPr>
+                <a:solidFill>
+                  <a:srgbClr val="657422"/>
+                </a:solidFill>
+                <a:latin typeface="Courier"/>
+              </a:rPr>
+              <a:t>caption =</a:t>
+            </a:r>
+            <a:r>
+              <a:rPr>
+                <a:solidFill>
+                  <a:srgbClr val="003B4F"/>
+                </a:solidFill>
+                <a:latin typeface="Courier"/>
+              </a:rPr>
+              <a:t> </a:t>
+            </a:r>
+            <a:r>
+              <a:rPr>
+                <a:solidFill>
+                  <a:srgbClr val="20794D"/>
+                </a:solidFill>
+                <a:latin typeface="Courier"/>
+              </a:rPr>
+              <a:t>"Mean (+/- SE) percentage cover of filamentous algae across urchin density treatments."</a:t>
+            </a:r>
+            <a:br/>
+            <a:r>
+              <a:rPr>
+                <a:solidFill>
+                  <a:srgbClr val="003B4F"/>
+                </a:solidFill>
+                <a:latin typeface="Courier"/>
+              </a:rPr>
+              <a:t>  ) </a:t>
+            </a:r>
+            <a:r>
+              <a:rPr>
+                <a:solidFill>
+                  <a:srgbClr val="5E5E5E"/>
+                </a:solidFill>
+                <a:latin typeface="Courier"/>
+              </a:rPr>
+              <a:t>+</a:t>
+            </a:r>
+            <a:br/>
+            <a:r>
+              <a:rPr>
+                <a:solidFill>
+                  <a:srgbClr val="003B4F"/>
+                </a:solidFill>
+                <a:latin typeface="Courier"/>
+              </a:rPr>
+              <a:t>  </a:t>
+            </a:r>
+            <a:r>
+              <a:rPr>
+                <a:solidFill>
+                  <a:srgbClr val="4758AB"/>
+                </a:solidFill>
+                <a:latin typeface="Courier"/>
+              </a:rPr>
+              <a:t>theme</a:t>
+            </a:r>
+            <a:r>
+              <a:rPr>
+                <a:solidFill>
+                  <a:srgbClr val="003B4F"/>
+                </a:solidFill>
+                <a:latin typeface="Courier"/>
+              </a:rPr>
+              <a:t>(</a:t>
+            </a:r>
+            <a:br/>
+            <a:r>
+              <a:rPr>
+                <a:solidFill>
+                  <a:srgbClr val="003B4F"/>
+                </a:solidFill>
+                <a:latin typeface="Courier"/>
+              </a:rPr>
+              <a:t>    </a:t>
+            </a:r>
+            <a:r>
+              <a:rPr>
+                <a:solidFill>
+                  <a:srgbClr val="657422"/>
+                </a:solidFill>
+                <a:latin typeface="Courier"/>
+              </a:rPr>
+              <a:t>plot.title =</a:t>
+            </a:r>
+            <a:r>
+              <a:rPr>
+                <a:solidFill>
+                  <a:srgbClr val="003B4F"/>
+                </a:solidFill>
+                <a:latin typeface="Courier"/>
+              </a:rPr>
+              <a:t> </a:t>
+            </a:r>
+            <a:r>
+              <a:rPr>
+                <a:solidFill>
+                  <a:srgbClr val="4758AB"/>
+                </a:solidFill>
+                <a:latin typeface="Courier"/>
+              </a:rPr>
+              <a:t>element_text</a:t>
+            </a:r>
+            <a:r>
+              <a:rPr>
+                <a:solidFill>
+                  <a:srgbClr val="003B4F"/>
+                </a:solidFill>
+                <a:latin typeface="Courier"/>
+              </a:rPr>
+              <a:t>(</a:t>
+            </a:r>
+            <a:r>
+              <a:rPr>
+                <a:solidFill>
+                  <a:srgbClr val="657422"/>
+                </a:solidFill>
+                <a:latin typeface="Courier"/>
+              </a:rPr>
+              <a:t>face =</a:t>
+            </a:r>
+            <a:r>
+              <a:rPr>
+                <a:solidFill>
+                  <a:srgbClr val="003B4F"/>
+                </a:solidFill>
+                <a:latin typeface="Courier"/>
+              </a:rPr>
+              <a:t> </a:t>
+            </a:r>
+            <a:r>
+              <a:rPr>
+                <a:solidFill>
+                  <a:srgbClr val="20794D"/>
+                </a:solidFill>
+                <a:latin typeface="Courier"/>
+              </a:rPr>
+              <a:t>"bold"</a:t>
             </a:r>
             <a:r>
               <a:rPr>
@@ -8727,327 +8746,357 @@
             <a:r>
               <a:rPr>
                 <a:solidFill>
+                  <a:srgbClr val="657422"/>
+                </a:solidFill>
+                <a:latin typeface="Courier"/>
+              </a:rPr>
+              <a:t>size =</a:t>
+            </a:r>
+            <a:r>
+              <a:rPr>
+                <a:solidFill>
+                  <a:srgbClr val="003B4F"/>
+                </a:solidFill>
+                <a:latin typeface="Courier"/>
+              </a:rPr>
+              <a:t> </a:t>
+            </a:r>
+            <a:r>
+              <a:rPr>
+                <a:solidFill>
+                  <a:srgbClr val="AD0000"/>
+                </a:solidFill>
+                <a:latin typeface="Courier"/>
+              </a:rPr>
+              <a:t>14</a:t>
+            </a:r>
+            <a:r>
+              <a:rPr>
+                <a:solidFill>
+                  <a:srgbClr val="003B4F"/>
+                </a:solidFill>
+                <a:latin typeface="Courier"/>
+              </a:rPr>
+              <a:t>),</a:t>
+            </a:r>
+            <a:br/>
+            <a:r>
+              <a:rPr>
+                <a:solidFill>
+                  <a:srgbClr val="003B4F"/>
+                </a:solidFill>
+                <a:latin typeface="Courier"/>
+              </a:rPr>
+              <a:t>    </a:t>
+            </a:r>
+            <a:r>
+              <a:rPr>
+                <a:solidFill>
+                  <a:srgbClr val="657422"/>
+                </a:solidFill>
+                <a:latin typeface="Courier"/>
+              </a:rPr>
+              <a:t>axis.title =</a:t>
+            </a:r>
+            <a:r>
+              <a:rPr>
+                <a:solidFill>
+                  <a:srgbClr val="003B4F"/>
+                </a:solidFill>
+                <a:latin typeface="Courier"/>
+              </a:rPr>
+              <a:t> </a:t>
+            </a:r>
+            <a:r>
+              <a:rPr>
+                <a:solidFill>
+                  <a:srgbClr val="4758AB"/>
+                </a:solidFill>
+                <a:latin typeface="Courier"/>
+              </a:rPr>
+              <a:t>element_text</a:t>
+            </a:r>
+            <a:r>
+              <a:rPr>
+                <a:solidFill>
+                  <a:srgbClr val="003B4F"/>
+                </a:solidFill>
+                <a:latin typeface="Courier"/>
+              </a:rPr>
+              <a:t>(</a:t>
+            </a:r>
+            <a:r>
+              <a:rPr>
+                <a:solidFill>
+                  <a:srgbClr val="657422"/>
+                </a:solidFill>
+                <a:latin typeface="Courier"/>
+              </a:rPr>
+              <a:t>face =</a:t>
+            </a:r>
+            <a:r>
+              <a:rPr>
+                <a:solidFill>
+                  <a:srgbClr val="003B4F"/>
+                </a:solidFill>
+                <a:latin typeface="Courier"/>
+              </a:rPr>
+              <a:t> </a:t>
+            </a:r>
+            <a:r>
+              <a:rPr>
+                <a:solidFill>
                   <a:srgbClr val="20794D"/>
                 </a:solidFill>
                 <a:latin typeface="Courier"/>
               </a:rPr>
-              <a:t>"smooth"</a:t>
-            </a:r>
-            <a:r>
-              <a:rPr>
-                <a:solidFill>
-                  <a:srgbClr val="003B4F"/>
-                </a:solidFill>
-                <a:latin typeface="Courier"/>
-              </a:rPr>
-              <a:t>))</a:t>
+              <a:t>"bold"</a:t>
+            </a:r>
+            <a:r>
+              <a:rPr>
+                <a:solidFill>
+                  <a:srgbClr val="003B4F"/>
+                </a:solidFill>
+                <a:latin typeface="Courier"/>
+              </a:rPr>
+              <a:t>, </a:t>
+            </a:r>
+            <a:r>
+              <a:rPr>
+                <a:solidFill>
+                  <a:srgbClr val="657422"/>
+                </a:solidFill>
+                <a:latin typeface="Courier"/>
+              </a:rPr>
+              <a:t>size =</a:t>
+            </a:r>
+            <a:r>
+              <a:rPr>
+                <a:solidFill>
+                  <a:srgbClr val="003B4F"/>
+                </a:solidFill>
+                <a:latin typeface="Courier"/>
+              </a:rPr>
+              <a:t> </a:t>
+            </a:r>
+            <a:r>
+              <a:rPr>
+                <a:solidFill>
+                  <a:srgbClr val="AD0000"/>
+                </a:solidFill>
+                <a:latin typeface="Courier"/>
+              </a:rPr>
+              <a:t>12</a:t>
+            </a:r>
+            <a:r>
+              <a:rPr>
+                <a:solidFill>
+                  <a:srgbClr val="003B4F"/>
+                </a:solidFill>
+                <a:latin typeface="Courier"/>
+              </a:rPr>
+              <a:t>),</a:t>
             </a:r>
             <a:br/>
+            <a:r>
+              <a:rPr>
+                <a:solidFill>
+                  <a:srgbClr val="003B4F"/>
+                </a:solidFill>
+                <a:latin typeface="Courier"/>
+              </a:rPr>
+              <a:t>    </a:t>
+            </a:r>
+            <a:r>
+              <a:rPr>
+                <a:solidFill>
+                  <a:srgbClr val="657422"/>
+                </a:solidFill>
+                <a:latin typeface="Courier"/>
+              </a:rPr>
+              <a:t>plot.caption =</a:t>
+            </a:r>
+            <a:r>
+              <a:rPr>
+                <a:solidFill>
+                  <a:srgbClr val="003B4F"/>
+                </a:solidFill>
+                <a:latin typeface="Courier"/>
+              </a:rPr>
+              <a:t> </a:t>
+            </a:r>
+            <a:r>
+              <a:rPr>
+                <a:solidFill>
+                  <a:srgbClr val="4758AB"/>
+                </a:solidFill>
+                <a:latin typeface="Courier"/>
+              </a:rPr>
+              <a:t>element_text</a:t>
+            </a:r>
+            <a:r>
+              <a:rPr>
+                <a:solidFill>
+                  <a:srgbClr val="003B4F"/>
+                </a:solidFill>
+                <a:latin typeface="Courier"/>
+              </a:rPr>
+              <a:t>(</a:t>
+            </a:r>
+            <a:r>
+              <a:rPr>
+                <a:solidFill>
+                  <a:srgbClr val="657422"/>
+                </a:solidFill>
+                <a:latin typeface="Courier"/>
+              </a:rPr>
+              <a:t>hjust =</a:t>
+            </a:r>
+            <a:r>
+              <a:rPr>
+                <a:solidFill>
+                  <a:srgbClr val="003B4F"/>
+                </a:solidFill>
+                <a:latin typeface="Courier"/>
+              </a:rPr>
+              <a:t> </a:t>
+            </a:r>
+            <a:r>
+              <a:rPr>
+                <a:solidFill>
+                  <a:srgbClr val="AD0000"/>
+                </a:solidFill>
+                <a:latin typeface="Courier"/>
+              </a:rPr>
+              <a:t>0</a:t>
+            </a:r>
+            <a:r>
+              <a:rPr>
+                <a:solidFill>
+                  <a:srgbClr val="003B4F"/>
+                </a:solidFill>
+                <a:latin typeface="Courier"/>
+              </a:rPr>
+              <a:t>, </a:t>
+            </a:r>
+            <a:r>
+              <a:rPr>
+                <a:solidFill>
+                  <a:srgbClr val="657422"/>
+                </a:solidFill>
+                <a:latin typeface="Courier"/>
+              </a:rPr>
+              <a:t>face =</a:t>
+            </a:r>
+            <a:r>
+              <a:rPr>
+                <a:solidFill>
+                  <a:srgbClr val="003B4F"/>
+                </a:solidFill>
+                <a:latin typeface="Courier"/>
+              </a:rPr>
+              <a:t> </a:t>
+            </a:r>
+            <a:r>
+              <a:rPr>
+                <a:solidFill>
+                  <a:srgbClr val="20794D"/>
+                </a:solidFill>
+                <a:latin typeface="Courier"/>
+              </a:rPr>
+              <a:t>"italic"</a:t>
+            </a:r>
+            <a:r>
+              <a:rPr>
+                <a:solidFill>
+                  <a:srgbClr val="003B4F"/>
+                </a:solidFill>
+                <a:latin typeface="Courier"/>
+              </a:rPr>
+              <a:t>, </a:t>
+            </a:r>
+            <a:r>
+              <a:rPr>
+                <a:solidFill>
+                  <a:srgbClr val="657422"/>
+                </a:solidFill>
+                <a:latin typeface="Courier"/>
+              </a:rPr>
+              <a:t>size =</a:t>
+            </a:r>
+            <a:r>
+              <a:rPr>
+                <a:solidFill>
+                  <a:srgbClr val="003B4F"/>
+                </a:solidFill>
+                <a:latin typeface="Courier"/>
+              </a:rPr>
+              <a:t> </a:t>
+            </a:r>
+            <a:r>
+              <a:rPr>
+                <a:solidFill>
+                  <a:srgbClr val="AD0000"/>
+                </a:solidFill>
+                <a:latin typeface="Courier"/>
+              </a:rPr>
+              <a:t>10</a:t>
+            </a:r>
+            <a:r>
+              <a:rPr>
+                <a:solidFill>
+                  <a:srgbClr val="003B4F"/>
+                </a:solidFill>
+                <a:latin typeface="Courier"/>
+              </a:rPr>
+              <a:t>)</a:t>
+            </a:r>
             <a:br/>
             <a:r>
               <a:rPr>
                 <a:solidFill>
-                  <a:srgbClr val="5E5E5E"/>
-                </a:solidFill>
-                <a:latin typeface="Courier"/>
-              </a:rPr>
-              <a:t># Cook's-distance-style influence plot (values &gt; 0.5 are worth a look)</a:t>
-            </a:r>
-            <a:br/>
-            <a:r>
-              <a:rPr>
-                <a:solidFill>
-                  <a:srgbClr val="003B4F"/>
-                </a:solidFill>
-                <a:latin typeface="Courier"/>
-              </a:rPr>
-              <a:t>car</a:t>
-            </a:r>
-            <a:r>
-              <a:rPr>
-                <a:solidFill>
-                  <a:srgbClr val="5E5E5E"/>
-                </a:solidFill>
-                <a:latin typeface="Courier"/>
-              </a:rPr>
-              <a:t>::</a:t>
-            </a:r>
-            <a:r>
-              <a:rPr>
-                <a:solidFill>
-                  <a:srgbClr val="4758AB"/>
-                </a:solidFill>
-                <a:latin typeface="Courier"/>
-              </a:rPr>
-              <a:t>influencePlot</a:t>
-            </a:r>
-            <a:r>
-              <a:rPr>
-                <a:solidFill>
-                  <a:srgbClr val="003B4F"/>
-                </a:solidFill>
-                <a:latin typeface="Courier"/>
-              </a:rPr>
-              <a:t>(mixed_model)</a:t>
-            </a:r>
-            <a:br/>
-            <a:br/>
-            <a:r>
-              <a:rPr>
-                <a:solidFill>
-                  <a:srgbClr val="5E5E5E"/>
-                </a:solidFill>
-                <a:latin typeface="Courier"/>
-              </a:rPr>
-              <a:t># Coefficient plot for the fixed effects</a:t>
-            </a:r>
-            <a:br/>
-            <a:r>
-              <a:rPr>
-                <a:solidFill>
-                  <a:srgbClr val="003B4F"/>
-                </a:solidFill>
-                <a:latin typeface="Courier"/>
-              </a:rPr>
-              <a:t>dotwhisker</a:t>
-            </a:r>
-            <a:r>
-              <a:rPr>
-                <a:solidFill>
-                  <a:srgbClr val="5E5E5E"/>
-                </a:solidFill>
-                <a:latin typeface="Courier"/>
-              </a:rPr>
-              <a:t>::</a:t>
-            </a:r>
-            <a:r>
-              <a:rPr>
-                <a:solidFill>
-                  <a:srgbClr val="4758AB"/>
-                </a:solidFill>
-                <a:latin typeface="Courier"/>
-              </a:rPr>
-              <a:t>dwplot</a:t>
-            </a:r>
-            <a:r>
-              <a:rPr>
-                <a:solidFill>
-                  <a:srgbClr val="003B4F"/>
-                </a:solidFill>
-                <a:latin typeface="Courier"/>
-              </a:rPr>
-              <a:t>(mixed_model, </a:t>
-            </a:r>
-            <a:r>
-              <a:rPr>
-                <a:solidFill>
-                  <a:srgbClr val="657422"/>
-                </a:solidFill>
-                <a:latin typeface="Courier"/>
-              </a:rPr>
-              <a:t>effects =</a:t>
-            </a:r>
-            <a:r>
-              <a:rPr>
-                <a:solidFill>
-                  <a:srgbClr val="003B4F"/>
-                </a:solidFill>
-                <a:latin typeface="Courier"/>
-              </a:rPr>
-              <a:t> </a:t>
-            </a:r>
-            <a:r>
-              <a:rPr>
-                <a:solidFill>
-                  <a:srgbClr val="20794D"/>
-                </a:solidFill>
-                <a:latin typeface="Courier"/>
-              </a:rPr>
-              <a:t>"fixed"</a:t>
-            </a:r>
-            <a:r>
-              <a:rPr>
-                <a:solidFill>
-                  <a:srgbClr val="003B4F"/>
-                </a:solidFill>
-                <a:latin typeface="Courier"/>
-              </a:rPr>
-              <a:t>) </a:t>
-            </a:r>
-            <a:r>
-              <a:rPr>
-                <a:solidFill>
-                  <a:srgbClr val="5E5E5E"/>
-                </a:solidFill>
-                <a:latin typeface="Courier"/>
-              </a:rPr>
-              <a:t>+</a:t>
-            </a:r>
-            <a:br/>
-            <a:r>
-              <a:rPr>
-                <a:solidFill>
-                  <a:srgbClr val="003B4F"/>
-                </a:solidFill>
-                <a:latin typeface="Courier"/>
-              </a:rPr>
-              <a:t>  </a:t>
-            </a:r>
-            <a:r>
-              <a:rPr>
-                <a:solidFill>
-                  <a:srgbClr val="4758AB"/>
-                </a:solidFill>
-                <a:latin typeface="Courier"/>
-              </a:rPr>
-              <a:t>geom_vline</a:t>
-            </a:r>
-            <a:r>
-              <a:rPr>
-                <a:solidFill>
-                  <a:srgbClr val="003B4F"/>
-                </a:solidFill>
-                <a:latin typeface="Courier"/>
-              </a:rPr>
-              <a:t>(</a:t>
-            </a:r>
-            <a:r>
-              <a:rPr>
-                <a:solidFill>
-                  <a:srgbClr val="657422"/>
-                </a:solidFill>
-                <a:latin typeface="Courier"/>
-              </a:rPr>
-              <a:t>xintercept =</a:t>
-            </a:r>
-            <a:r>
-              <a:rPr>
-                <a:solidFill>
-                  <a:srgbClr val="003B4F"/>
-                </a:solidFill>
-                <a:latin typeface="Courier"/>
-              </a:rPr>
-              <a:t> </a:t>
-            </a:r>
-            <a:r>
-              <a:rPr>
-                <a:solidFill>
-                  <a:srgbClr val="AD0000"/>
-                </a:solidFill>
-                <a:latin typeface="Courier"/>
-              </a:rPr>
-              <a:t>0</a:t>
-            </a:r>
-            <a:r>
-              <a:rPr>
-                <a:solidFill>
-                  <a:srgbClr val="003B4F"/>
-                </a:solidFill>
-                <a:latin typeface="Courier"/>
-              </a:rPr>
-              <a:t>, </a:t>
-            </a:r>
-            <a:r>
-              <a:rPr>
-                <a:solidFill>
-                  <a:srgbClr val="657422"/>
-                </a:solidFill>
-                <a:latin typeface="Courier"/>
-              </a:rPr>
-              <a:t>color =</a:t>
-            </a:r>
-            <a:r>
-              <a:rPr>
-                <a:solidFill>
-                  <a:srgbClr val="003B4F"/>
-                </a:solidFill>
-                <a:latin typeface="Courier"/>
-              </a:rPr>
-              <a:t> </a:t>
-            </a:r>
-            <a:r>
-              <a:rPr>
-                <a:solidFill>
-                  <a:srgbClr val="20794D"/>
-                </a:solidFill>
-                <a:latin typeface="Courier"/>
-              </a:rPr>
-              <a:t>"darkblue"</a:t>
-            </a:r>
-            <a:r>
-              <a:rPr>
-                <a:solidFill>
-                  <a:srgbClr val="003B4F"/>
-                </a:solidFill>
-                <a:latin typeface="Courier"/>
-              </a:rPr>
-              <a:t>, </a:t>
-            </a:r>
-            <a:r>
-              <a:rPr>
-                <a:solidFill>
-                  <a:srgbClr val="657422"/>
-                </a:solidFill>
-                <a:latin typeface="Courier"/>
-              </a:rPr>
-              <a:t>linewidth =</a:t>
-            </a:r>
-            <a:r>
-              <a:rPr>
-                <a:solidFill>
-                  <a:srgbClr val="003B4F"/>
-                </a:solidFill>
-                <a:latin typeface="Courier"/>
-              </a:rPr>
-              <a:t> </a:t>
-            </a:r>
-            <a:r>
-              <a:rPr>
-                <a:solidFill>
-                  <a:srgbClr val="AD0000"/>
-                </a:solidFill>
-                <a:latin typeface="Courier"/>
-              </a:rPr>
-              <a:t>1</a:t>
-            </a:r>
-            <a:r>
-              <a:rPr>
-                <a:solidFill>
-                  <a:srgbClr val="003B4F"/>
-                </a:solidFill>
-                <a:latin typeface="Courier"/>
-              </a:rPr>
-              <a:t>)</a:t>
-            </a:r>
-            <a:br/>
-            <a:br/>
-            <a:r>
-              <a:rPr>
-                <a:solidFill>
-                  <a:srgbClr val="5E5E5E"/>
-                </a:solidFill>
-                <a:latin typeface="Courier"/>
-              </a:rPr>
-              <a:t># Variance components</a:t>
-            </a:r>
-            <a:br/>
-            <a:r>
-              <a:rPr>
-                <a:solidFill>
-                  <a:srgbClr val="4758AB"/>
-                </a:solidFill>
-                <a:latin typeface="Courier"/>
-              </a:rPr>
-              <a:t>VarCorr</a:t>
-            </a:r>
-            <a:r>
-              <a:rPr>
-                <a:solidFill>
-                  <a:srgbClr val="003B4F"/>
-                </a:solidFill>
-                <a:latin typeface="Courier"/>
-              </a:rPr>
-              <a:t>(mixed_model)</a:t>
+                  <a:srgbClr val="003B4F"/>
+                </a:solidFill>
+                <a:latin typeface="Courier"/>
+              </a:rPr>
+              <a:t>  )</a:t>
+            </a:r>
+          </a:p>
+          <a:p>
+            <a:pPr lvl="0" indent="0" marL="1270000">
+              <a:buNone/>
+            </a:pPr>
+            <a:r>
+              <a:rPr sz="2000" b="1"/>
+              <a:t>Note</a:t>
+            </a:r>
+          </a:p>
+          <a:p>
+            <a:pPr lvl="0" indent="0" marL="1270000">
+              <a:buNone/>
+            </a:pPr>
+            <a:r>
+              <a:rPr sz="2000" b="1"/>
+              <a:t>Scientific interpretation</a:t>
+            </a:r>
+          </a:p>
+          <a:p>
+            <a:pPr lvl="0" indent="0" marL="1270000">
+              <a:buNone/>
+            </a:pPr>
+            <a:r>
+              <a:rPr sz="2000"/>
+              <a:t>This nested ANOVA reveals substantial spatial heterogeneity in algae cover, with significant variation among patches within each treatment. The substantial patch-to-patch variability shown in Part 2’s ANOVA table is exactly why </a:t>
+            </a:r>
+            <a:r>
+              <a:rPr sz="2000">
+                <a:latin typeface="Courier"/>
+              </a:rPr>
+              <a:t>patch</a:t>
+            </a:r>
+            <a:r>
+              <a:rPr sz="2000"/>
+              <a:t> needed to be modeled explicitly, rather than being pooled into the residual — a good reminder that pseudoreplication doesn’t just bias your F-test, it hides real biological variation.</a:t>
             </a:r>
           </a:p>
           <a:p>
@@ -9064,86 +9113,19 @@
             </a:r>
             <a:r>
               <a:rPr/>
-              <a:t> From </a:t>
-            </a:r>
-            <a:r>
-              <a:rPr>
-                <a:latin typeface="Courier"/>
-              </a:rPr>
-              <a:t>VarCorr(mixed_model)</a:t>
-            </a:r>
-            <a:r>
-              <a:rPr/>
-              <a:t>, how does the variance attributed to </a:t>
-            </a:r>
-            <a:r>
-              <a:rPr>
-                <a:latin typeface="Courier"/>
-              </a:rPr>
-              <a:t>patch</a:t>
-            </a:r>
-            <a:r>
-              <a:rPr/>
-              <a:t> compare to the residual variance? What does that tell you about spatial heterogeneity in this system? </a:t>
-            </a:r>
-            <a:r>
-              <a:rPr>
-                <a:latin typeface="Courier"/>
-              </a:rPr>
-              <a:t>________________________</a:t>
-            </a:r>
-          </a:p>
-          <a:p>
-            <a:pPr lvl="0" indent="0" marL="1270000">
+              <a:t> Write a 2–3 sentence results paragraph for this analysis, using your own F-statistic, df, and p-value from Part 2.</a:t>
+            </a:r>
+          </a:p>
+          <a:p>
+            <a:pPr lvl="0" indent="0">
               <a:buNone/>
             </a:pPr>
             <a:r>
-              <a:rPr sz="2000" b="1"/>
-              <a:t>Tip</a:t>
-            </a:r>
-          </a:p>
-          <a:p>
-            <a:pPr lvl="0" indent="0" marL="1270000">
-              <a:buNone/>
-            </a:pPr>
-            <a:r>
-              <a:rPr sz="2000" b="1"/>
-              <a:t>🚀 If you finish early:</a:t>
-            </a:r>
-            <a:r>
-              <a:rPr sz="2000"/>
-              <a:t> DHARMa’s </a:t>
-            </a:r>
-            <a:r>
-              <a:rPr sz="2000">
-                <a:latin typeface="Courier"/>
-              </a:rPr>
-              <a:t>testDispersion()</a:t>
-            </a:r>
-            <a:r>
-              <a:rPr sz="2000"/>
-              <a:t> checks for over/under-dispersion. Look up (</a:t>
-            </a:r>
-            <a:r>
-              <a:rPr sz="2000">
-                <a:latin typeface="Courier"/>
-              </a:rPr>
-              <a:t>?testDispersion</a:t>
-            </a:r>
-            <a:r>
-              <a:rPr sz="2000"/>
-              <a:t>) what a significant result would mean, and write a one-sentence summary.</a:t>
-            </a:r>
-          </a:p>
-          <a:p>
-            <a:pPr lvl="0" indent="0">
-              <a:buNone/>
-            </a:pPr>
-            <a:r>
-              <a:rPr sz="2000">
-                <a:latin typeface="Courier"/>
-              </a:rPr>
-              <a:t>________________________________________________________</a:t>
+              <a:rPr>
+                <a:latin typeface="Courier"/>
+              </a:rPr>
+              <a:t>________________________________________________________
+________________________________________________________</a:t>
             </a:r>
           </a:p>
         </p:txBody>
@@ -9195,7 +9177,7 @@
             </a:pPr>
             <a:r>
               <a:rPr/>
-              <a:t>Part 5 · Post-Hoc Comparisons</a:t>
+              <a:t>Review and checkpoint</a:t>
             </a:r>
           </a:p>
         </p:txBody>
@@ -9219,277 +9201,137 @@
               <a:buNone/>
             </a:pPr>
             <a:r>
-              <a:rPr b="1"/>
-              <a:t>▶ Run this:</a:t>
-            </a:r>
-          </a:p>
-          <a:p>
-            <a:pPr lvl="0" indent="0">
+              <a:rPr/>
+              <a:t>At this point you can:</a:t>
+            </a:r>
+          </a:p>
+          <a:p>
+            <a:pPr lvl="0"/>
+            <a:r>
+              <a:rPr/>
+              <a:t>☐ Explain why </a:t>
+            </a:r>
+            <a:r>
+              <a:rPr>
+                <a:latin typeface="Courier"/>
+              </a:rPr>
+              <a:t>patch</a:t>
+            </a:r>
+            <a:r>
+              <a:rPr/>
+              <a:t> nested in </a:t>
+            </a:r>
+            <a:r>
+              <a:rPr>
+                <a:latin typeface="Courier"/>
+              </a:rPr>
+              <a:t>treat</a:t>
+            </a:r>
+            <a:r>
+              <a:rPr/>
+              <a:t> cannot be analyzed as a simple factorial design</a:t>
+            </a:r>
+          </a:p>
+          <a:p>
+            <a:pPr lvl="0"/>
+            <a:r>
+              <a:rPr/>
+              <a:t>☐ Fit a nested ANOVA with </a:t>
+            </a:r>
+            <a:r>
+              <a:rPr>
+                <a:latin typeface="Courier"/>
+              </a:rPr>
+              <a:t>aov(..., Error(...))</a:t>
+            </a:r>
+            <a:r>
+              <a:rPr/>
+              <a:t> and with </a:t>
+            </a:r>
+            <a:r>
+              <a:rPr>
+                <a:latin typeface="Courier"/>
+              </a:rPr>
+              <a:t>afex::aov_car()</a:t>
+            </a:r>
+          </a:p>
+          <a:p>
+            <a:pPr lvl="0"/>
+            <a:r>
+              <a:rPr/>
+              <a:t>☐ Compute EMMs and post-hoc comparisons for a nested design</a:t>
+            </a:r>
+          </a:p>
+          <a:p>
+            <a:pPr lvl="0"/>
+            <a:r>
+              <a:rPr/>
+              <a:t>☐ Write a properly formatted nested-ANOVA results sentence</a:t>
+            </a:r>
+          </a:p>
+          <a:p>
+            <a:pPr lvl="0" indent="0" marL="1270000">
               <a:buNone/>
             </a:pPr>
             <a:r>
-              <a:rPr>
-                <a:solidFill>
-                  <a:srgbClr val="003B4F"/>
-                </a:solidFill>
-                <a:latin typeface="Courier"/>
-              </a:rPr>
-              <a:t>emm &lt;- </a:t>
-            </a:r>
-            <a:r>
-              <a:rPr>
-                <a:solidFill>
-                  <a:srgbClr val="4758AB"/>
-                </a:solidFill>
-                <a:latin typeface="Courier"/>
-              </a:rPr>
-              <a:t>emmeans</a:t>
-            </a:r>
-            <a:r>
-              <a:rPr>
-                <a:solidFill>
-                  <a:srgbClr val="003B4F"/>
-                </a:solidFill>
-                <a:latin typeface="Courier"/>
-              </a:rPr>
-              <a:t>(nested_model, </a:t>
-            </a:r>
-            <a:r>
-              <a:rPr>
-                <a:solidFill>
-                  <a:srgbClr val="5E5E5E"/>
-                </a:solidFill>
-                <a:latin typeface="Courier"/>
-              </a:rPr>
-              <a:t>~</a:t>
-            </a:r>
-            <a:r>
-              <a:rPr>
-                <a:solidFill>
-                  <a:srgbClr val="003B4F"/>
-                </a:solidFill>
-                <a:latin typeface="Courier"/>
-              </a:rPr>
-              <a:t> treat)</a:t>
-            </a:r>
-            <a:br/>
-            <a:r>
-              <a:rPr>
-                <a:solidFill>
-                  <a:srgbClr val="4758AB"/>
-                </a:solidFill>
-                <a:latin typeface="Courier"/>
-              </a:rPr>
-              <a:t>summary</a:t>
-            </a:r>
-            <a:r>
-              <a:rPr>
-                <a:solidFill>
-                  <a:srgbClr val="003B4F"/>
-                </a:solidFill>
-                <a:latin typeface="Courier"/>
-              </a:rPr>
-              <a:t>(emm)</a:t>
-            </a:r>
-            <a:br/>
-            <a:br/>
-            <a:r>
-              <a:rPr>
-                <a:solidFill>
-                  <a:srgbClr val="003B4F"/>
-                </a:solidFill>
-                <a:latin typeface="Courier"/>
-              </a:rPr>
-              <a:t>pairs_result &lt;- </a:t>
-            </a:r>
-            <a:r>
-              <a:rPr>
-                <a:solidFill>
-                  <a:srgbClr val="4758AB"/>
-                </a:solidFill>
-                <a:latin typeface="Courier"/>
-              </a:rPr>
-              <a:t>pairs</a:t>
-            </a:r>
-            <a:r>
-              <a:rPr>
-                <a:solidFill>
-                  <a:srgbClr val="003B4F"/>
-                </a:solidFill>
-                <a:latin typeface="Courier"/>
-              </a:rPr>
-              <a:t>(emm, </a:t>
-            </a:r>
-            <a:r>
-              <a:rPr>
-                <a:solidFill>
-                  <a:srgbClr val="657422"/>
-                </a:solidFill>
-                <a:latin typeface="Courier"/>
-              </a:rPr>
-              <a:t>adjust =</a:t>
-            </a:r>
-            <a:r>
-              <a:rPr>
-                <a:solidFill>
-                  <a:srgbClr val="003B4F"/>
-                </a:solidFill>
-                <a:latin typeface="Courier"/>
-              </a:rPr>
-              <a:t> </a:t>
-            </a:r>
-            <a:r>
-              <a:rPr>
-                <a:solidFill>
-                  <a:srgbClr val="20794D"/>
-                </a:solidFill>
-                <a:latin typeface="Courier"/>
-              </a:rPr>
-              <a:t>"sidak"</a:t>
-            </a:r>
-            <a:r>
-              <a:rPr>
-                <a:solidFill>
-                  <a:srgbClr val="003B4F"/>
-                </a:solidFill>
-                <a:latin typeface="Courier"/>
-              </a:rPr>
+              <a:rPr sz="2000" b="1"/>
+              <a:t>Note</a:t>
+            </a:r>
+          </a:p>
+          <a:p>
+            <a:pPr lvl="0" indent="0" marL="1270000">
+              <a:buNone/>
+            </a:pPr>
+            <a:r>
+              <a:rPr sz="2000" b="1"/>
+              <a:t>📤 What to turn in before next class</a:t>
+            </a:r>
+          </a:p>
+          <a:p>
+            <a:pPr lvl="0" indent="0" marL="1270000">
+              <a:buNone/>
+            </a:pPr>
+            <a:r>
+              <a:rPr sz="2000"/>
+              <a:t>Upload both of these to the course management system:</a:t>
+            </a:r>
+          </a:p>
+          <a:p>
+            <a:pPr lvl="0" indent="-342900" marL="342900">
+              <a:buAutoNum type="arabicPeriod"/>
+            </a:pPr>
+            <a:r>
+              <a:rPr sz="2000"/>
+              <a:t>Your code — the </a:t>
+            </a:r>
+            <a:r>
+              <a:rPr sz="2000">
+                <a:latin typeface="Courier"/>
+              </a:rPr>
+              <a:t>scripts/</a:t>
+            </a:r>
+            <a:r>
+              <a:rPr sz="2000"/>
+              <a:t> folder (or just </a:t>
+            </a:r>
+            <a:r>
+              <a:rPr sz="2000">
+                <a:latin typeface="Courier"/>
+              </a:rPr>
+              <a:t>14_nested_anova.R</a:t>
+            </a:r>
+            <a:r>
+              <a:rPr sz="2000"/>
               <a:t>)</a:t>
             </a:r>
-            <a:br/>
-            <a:r>
-              <a:rPr>
-                <a:solidFill>
-                  <a:srgbClr val="003B4F"/>
-                </a:solidFill>
-                <a:latin typeface="Courier"/>
-              </a:rPr>
-              <a:t>pairs_result</a:t>
-            </a:r>
-            <a:br/>
-            <a:br/>
-            <a:r>
-              <a:rPr>
-                <a:solidFill>
-                  <a:srgbClr val="003B4F"/>
-                </a:solidFill>
-                <a:latin typeface="Courier"/>
-              </a:rPr>
-              <a:t>cld_result &lt;- multcomp</a:t>
-            </a:r>
-            <a:r>
-              <a:rPr>
-                <a:solidFill>
-                  <a:srgbClr val="5E5E5E"/>
-                </a:solidFill>
-                <a:latin typeface="Courier"/>
-              </a:rPr>
-              <a:t>::</a:t>
-            </a:r>
-            <a:r>
-              <a:rPr>
-                <a:solidFill>
-                  <a:srgbClr val="4758AB"/>
-                </a:solidFill>
-                <a:latin typeface="Courier"/>
-              </a:rPr>
-              <a:t>cld</a:t>
-            </a:r>
-            <a:r>
-              <a:rPr>
-                <a:solidFill>
-                  <a:srgbClr val="003B4F"/>
-                </a:solidFill>
-                <a:latin typeface="Courier"/>
-              </a:rPr>
-              <a:t>(emm, </a:t>
-            </a:r>
-            <a:r>
-              <a:rPr>
-                <a:solidFill>
-                  <a:srgbClr val="657422"/>
-                </a:solidFill>
-                <a:latin typeface="Courier"/>
-              </a:rPr>
-              <a:t>alpha =</a:t>
-            </a:r>
-            <a:r>
-              <a:rPr>
-                <a:solidFill>
-                  <a:srgbClr val="003B4F"/>
-                </a:solidFill>
-                <a:latin typeface="Courier"/>
-              </a:rPr>
-              <a:t> </a:t>
-            </a:r>
-            <a:r>
-              <a:rPr>
-                <a:solidFill>
-                  <a:srgbClr val="AD0000"/>
-                </a:solidFill>
-                <a:latin typeface="Courier"/>
-              </a:rPr>
-              <a:t>0.05</a:t>
-            </a:r>
-            <a:r>
-              <a:rPr>
-                <a:solidFill>
-                  <a:srgbClr val="003B4F"/>
-                </a:solidFill>
-                <a:latin typeface="Courier"/>
-              </a:rPr>
-              <a:t>, </a:t>
-            </a:r>
-            <a:r>
-              <a:rPr>
-                <a:solidFill>
-                  <a:srgbClr val="657422"/>
-                </a:solidFill>
-                <a:latin typeface="Courier"/>
-              </a:rPr>
-              <a:t>Letters =</a:t>
-            </a:r>
-            <a:r>
-              <a:rPr>
-                <a:solidFill>
-                  <a:srgbClr val="003B4F"/>
-                </a:solidFill>
-                <a:latin typeface="Courier"/>
-              </a:rPr>
-              <a:t> letters)</a:t>
-            </a:r>
-            <a:br/>
-            <a:r>
-              <a:rPr>
-                <a:solidFill>
-                  <a:srgbClr val="003B4F"/>
-                </a:solidFill>
-                <a:latin typeface="Courier"/>
-              </a:rPr>
-              <a:t>cld_result</a:t>
-            </a:r>
-          </a:p>
-          <a:p>
-            <a:pPr lvl="0" indent="0" marL="0">
-              <a:buNone/>
+          </a:p>
+          <a:p>
+            <a:pPr lvl="0" indent="-342900" marL="342900">
+              <a:buAutoNum type="arabicPeriod"/>
             </a:pPr>
             <a:r>
-              <a:rPr/>
-              <a:t>✏️ </a:t>
-            </a:r>
-            <a:r>
-              <a:rPr b="1"/>
-              <a:t>Your turn:</a:t>
-            </a:r>
-            <a:r>
-              <a:rPr/>
-              <a:t> Mean algae cover for Control (1.30%) looks much lower than the reduced-density treatments (66%: 21.55%, 33%: 19.00%, Removed: 39.20%). Based on your compact letter display, are any of those differences actually statistically significant at α = 0.05? </a:t>
-            </a:r>
-            <a:r>
-              <a:rPr>
-                <a:latin typeface="Courier"/>
-              </a:rPr>
-              <a:t>________________________</a:t>
+              <a:rPr sz="2000"/>
+              <a:t>This worksheet, with your written answers</a:t>
             </a:r>
           </a:p>
         </p:txBody>
@@ -9541,7 +9383,7 @@
             </a:pPr>
             <a:r>
               <a:rPr/>
-              <a:t>Part 6 · Visualization and Reporting</a:t>
+              <a:t>Getting unstuck</a:t>
             </a:r>
           </a:p>
         </p:txBody>
@@ -9565,2494 +9407,147 @@
               <a:buNone/>
             </a:pPr>
             <a:r>
+              <a:rPr/>
+              <a:t>When code breaks — and it will, that is normal:</a:t>
+            </a:r>
+          </a:p>
+          <a:p>
+            <a:pPr lvl="0" indent="-342900" marL="342900">
+              <a:buAutoNum type="arabicPeriod"/>
+            </a:pPr>
+            <a:r>
               <a:rPr b="1"/>
-              <a:t>▶ Run this</a:t>
+              <a:t>Read the error message out loud.</a:t>
             </a:r>
             <a:r>
               <a:rPr/>
-              <a:t> — a publication-style boxplot:</a:t>
-            </a:r>
-          </a:p>
-          <a:p>
-            <a:pPr lvl="0" indent="0">
-              <a:buNone/>
+              <a:t> R usually names the line and the problem.</a:t>
+            </a:r>
+          </a:p>
+          <a:p>
+            <a:pPr lvl="0" indent="-342900" marL="342900">
+              <a:buAutoNum type="arabicPeriod"/>
             </a:pPr>
             <a:r>
-              <a:rPr>
-                <a:solidFill>
-                  <a:srgbClr val="4758AB"/>
-                </a:solidFill>
-                <a:latin typeface="Courier"/>
-              </a:rPr>
-              <a:t>ggplot</a:t>
-            </a:r>
-            <a:r>
-              <a:rPr>
-                <a:solidFill>
-                  <a:srgbClr val="003B4F"/>
-                </a:solidFill>
-                <a:latin typeface="Courier"/>
-              </a:rPr>
-              <a:t>(u_df, </a:t>
-            </a:r>
-            <a:r>
-              <a:rPr>
-                <a:solidFill>
-                  <a:srgbClr val="4758AB"/>
-                </a:solidFill>
-                <a:latin typeface="Courier"/>
-              </a:rPr>
-              <a:t>aes</a:t>
-            </a:r>
-            <a:r>
-              <a:rPr>
-                <a:solidFill>
-                  <a:srgbClr val="003B4F"/>
-                </a:solidFill>
-                <a:latin typeface="Courier"/>
-              </a:rPr>
-              <a:t>(</a:t>
-            </a:r>
-            <a:r>
-              <a:rPr>
-                <a:solidFill>
-                  <a:srgbClr val="657422"/>
-                </a:solidFill>
-                <a:latin typeface="Courier"/>
-              </a:rPr>
-              <a:t>x =</a:t>
-            </a:r>
-            <a:r>
-              <a:rPr>
-                <a:solidFill>
-                  <a:srgbClr val="003B4F"/>
-                </a:solidFill>
-                <a:latin typeface="Courier"/>
-              </a:rPr>
-              <a:t> treat, </a:t>
-            </a:r>
-            <a:r>
-              <a:rPr>
-                <a:solidFill>
-                  <a:srgbClr val="657422"/>
-                </a:solidFill>
-                <a:latin typeface="Courier"/>
-              </a:rPr>
-              <a:t>y =</a:t>
-            </a:r>
-            <a:r>
-              <a:rPr>
-                <a:solidFill>
-                  <a:srgbClr val="003B4F"/>
-                </a:solidFill>
-                <a:latin typeface="Courier"/>
-              </a:rPr>
-              <a:t> algae, </a:t>
-            </a:r>
-            <a:r>
-              <a:rPr>
-                <a:solidFill>
-                  <a:srgbClr val="657422"/>
-                </a:solidFill>
-                <a:latin typeface="Courier"/>
-              </a:rPr>
-              <a:t>fill =</a:t>
-            </a:r>
-            <a:r>
-              <a:rPr>
-                <a:solidFill>
-                  <a:srgbClr val="003B4F"/>
-                </a:solidFill>
-                <a:latin typeface="Courier"/>
-              </a:rPr>
-              <a:t> treat)) </a:t>
-            </a:r>
-            <a:r>
-              <a:rPr>
-                <a:solidFill>
-                  <a:srgbClr val="5E5E5E"/>
-                </a:solidFill>
-                <a:latin typeface="Courier"/>
-              </a:rPr>
-              <a:t>+</a:t>
-            </a:r>
-            <a:br/>
-            <a:r>
-              <a:rPr>
-                <a:solidFill>
-                  <a:srgbClr val="003B4F"/>
-                </a:solidFill>
-                <a:latin typeface="Courier"/>
-              </a:rPr>
-              <a:t>  </a:t>
-            </a:r>
-            <a:r>
-              <a:rPr>
-                <a:solidFill>
-                  <a:srgbClr val="4758AB"/>
-                </a:solidFill>
-                <a:latin typeface="Courier"/>
-              </a:rPr>
-              <a:t>geom_boxplot</a:t>
-            </a:r>
-            <a:r>
-              <a:rPr>
-                <a:solidFill>
-                  <a:srgbClr val="003B4F"/>
-                </a:solidFill>
-                <a:latin typeface="Courier"/>
-              </a:rPr>
-              <a:t>(</a:t>
-            </a:r>
-            <a:r>
-              <a:rPr>
-                <a:solidFill>
-                  <a:srgbClr val="657422"/>
-                </a:solidFill>
-                <a:latin typeface="Courier"/>
-              </a:rPr>
-              <a:t>alpha =</a:t>
-            </a:r>
-            <a:r>
-              <a:rPr>
-                <a:solidFill>
-                  <a:srgbClr val="003B4F"/>
-                </a:solidFill>
-                <a:latin typeface="Courier"/>
-              </a:rPr>
-              <a:t> </a:t>
-            </a:r>
-            <a:r>
-              <a:rPr>
-                <a:solidFill>
-                  <a:srgbClr val="AD0000"/>
-                </a:solidFill>
-                <a:latin typeface="Courier"/>
-              </a:rPr>
-              <a:t>0.7</a:t>
-            </a:r>
-            <a:r>
-              <a:rPr>
-                <a:solidFill>
-                  <a:srgbClr val="003B4F"/>
-                </a:solidFill>
-                <a:latin typeface="Courier"/>
-              </a:rPr>
+              <a:rPr b="1"/>
+              <a:t>Check the usual suspects:</a:t>
+            </a:r>
+            <a:r>
+              <a:rPr/>
+              <a:t> did you run </a:t>
+            </a:r>
+            <a:r>
+              <a:rPr>
+                <a:latin typeface="Courier"/>
+              </a:rPr>
+              <a:t>library(janitor)</a:t>
+            </a:r>
+            <a:r>
+              <a:rPr/>
               <a:t>, </a:t>
             </a:r>
             <a:r>
               <a:rPr>
-                <a:solidFill>
-                  <a:srgbClr val="657422"/>
-                </a:solidFill>
-                <a:latin typeface="Courier"/>
-              </a:rPr>
-              <a:t>outlier.shape =</a:t>
-            </a:r>
-            <a:r>
-              <a:rPr>
-                <a:solidFill>
-                  <a:srgbClr val="003B4F"/>
-                </a:solidFill>
-                <a:latin typeface="Courier"/>
-              </a:rPr>
-              <a:t> </a:t>
-            </a:r>
-            <a:r>
-              <a:rPr>
-                <a:solidFill>
-                  <a:srgbClr val="8F5902"/>
-                </a:solidFill>
-                <a:latin typeface="Courier"/>
-              </a:rPr>
-              <a:t>NA</a:t>
-            </a:r>
-            <a:r>
-              <a:rPr>
-                <a:solidFill>
-                  <a:srgbClr val="003B4F"/>
-                </a:solidFill>
-                <a:latin typeface="Courier"/>
-              </a:rPr>
-              <a:t>) </a:t>
-            </a:r>
-            <a:r>
-              <a:rPr>
-                <a:solidFill>
-                  <a:srgbClr val="5E5E5E"/>
-                </a:solidFill>
-                <a:latin typeface="Courier"/>
-              </a:rPr>
-              <a:t>+</a:t>
-            </a:r>
-            <a:br/>
-            <a:r>
-              <a:rPr>
-                <a:solidFill>
-                  <a:srgbClr val="003B4F"/>
-                </a:solidFill>
-                <a:latin typeface="Courier"/>
-              </a:rPr>
-              <a:t>  </a:t>
-            </a:r>
-            <a:r>
-              <a:rPr>
-                <a:solidFill>
-                  <a:srgbClr val="4758AB"/>
-                </a:solidFill>
-                <a:latin typeface="Courier"/>
-              </a:rPr>
-              <a:t>geom_jitter</a:t>
-            </a:r>
-            <a:r>
-              <a:rPr>
-                <a:solidFill>
-                  <a:srgbClr val="003B4F"/>
-                </a:solidFill>
-                <a:latin typeface="Courier"/>
-              </a:rPr>
-              <a:t>(</a:t>
-            </a:r>
-            <a:r>
-              <a:rPr>
-                <a:solidFill>
-                  <a:srgbClr val="657422"/>
-                </a:solidFill>
-                <a:latin typeface="Courier"/>
-              </a:rPr>
-              <a:t>width =</a:t>
-            </a:r>
-            <a:r>
-              <a:rPr>
-                <a:solidFill>
-                  <a:srgbClr val="003B4F"/>
-                </a:solidFill>
-                <a:latin typeface="Courier"/>
-              </a:rPr>
-              <a:t> </a:t>
-            </a:r>
-            <a:r>
-              <a:rPr>
-                <a:solidFill>
-                  <a:srgbClr val="AD0000"/>
-                </a:solidFill>
-                <a:latin typeface="Courier"/>
-              </a:rPr>
-              <a:t>0.2</a:t>
-            </a:r>
-            <a:r>
-              <a:rPr>
-                <a:solidFill>
-                  <a:srgbClr val="003B4F"/>
-                </a:solidFill>
-                <a:latin typeface="Courier"/>
-              </a:rPr>
+                <a:latin typeface="Courier"/>
+              </a:rPr>
+              <a:t>library(afex)</a:t>
+            </a:r>
+            <a:r>
+              <a:rPr/>
               <a:t>, </a:t>
             </a:r>
             <a:r>
               <a:rPr>
-                <a:solidFill>
-                  <a:srgbClr val="657422"/>
-                </a:solidFill>
-                <a:latin typeface="Courier"/>
-              </a:rPr>
-              <a:t>alpha =</a:t>
-            </a:r>
-            <a:r>
-              <a:rPr>
-                <a:solidFill>
-                  <a:srgbClr val="003B4F"/>
-                </a:solidFill>
-                <a:latin typeface="Courier"/>
-              </a:rPr>
-              <a:t> </a:t>
-            </a:r>
-            <a:r>
-              <a:rPr>
-                <a:solidFill>
-                  <a:srgbClr val="AD0000"/>
-                </a:solidFill>
-                <a:latin typeface="Courier"/>
-              </a:rPr>
-              <a:t>0.4</a:t>
-            </a:r>
-            <a:r>
-              <a:rPr>
-                <a:solidFill>
-                  <a:srgbClr val="003B4F"/>
-                </a:solidFill>
-                <a:latin typeface="Courier"/>
-              </a:rPr>
-              <a:t>, </a:t>
-            </a:r>
-            <a:r>
-              <a:rPr>
-                <a:solidFill>
-                  <a:srgbClr val="657422"/>
-                </a:solidFill>
-                <a:latin typeface="Courier"/>
-              </a:rPr>
-              <a:t>size =</a:t>
-            </a:r>
-            <a:r>
-              <a:rPr>
-                <a:solidFill>
-                  <a:srgbClr val="003B4F"/>
-                </a:solidFill>
-                <a:latin typeface="Courier"/>
-              </a:rPr>
-              <a:t> </a:t>
-            </a:r>
-            <a:r>
-              <a:rPr>
-                <a:solidFill>
-                  <a:srgbClr val="AD0000"/>
-                </a:solidFill>
-                <a:latin typeface="Courier"/>
-              </a:rPr>
-              <a:t>1</a:t>
-            </a:r>
-            <a:r>
-              <a:rPr>
-                <a:solidFill>
-                  <a:srgbClr val="003B4F"/>
-                </a:solidFill>
-                <a:latin typeface="Courier"/>
-              </a:rPr>
-              <a:t>) </a:t>
-            </a:r>
-            <a:r>
-              <a:rPr>
-                <a:solidFill>
-                  <a:srgbClr val="5E5E5E"/>
-                </a:solidFill>
-                <a:latin typeface="Courier"/>
-              </a:rPr>
-              <a:t>+</a:t>
-            </a:r>
-            <a:br/>
-            <a:r>
-              <a:rPr>
-                <a:solidFill>
-                  <a:srgbClr val="003B4F"/>
-                </a:solidFill>
-                <a:latin typeface="Courier"/>
-              </a:rPr>
-              <a:t>  </a:t>
-            </a:r>
-            <a:r>
-              <a:rPr>
-                <a:solidFill>
-                  <a:srgbClr val="4758AB"/>
-                </a:solidFill>
-                <a:latin typeface="Courier"/>
-              </a:rPr>
-              <a:t>scale_fill_viridis_d</a:t>
-            </a:r>
-            <a:r>
-              <a:rPr>
-                <a:solidFill>
-                  <a:srgbClr val="003B4F"/>
-                </a:solidFill>
-                <a:latin typeface="Courier"/>
-              </a:rPr>
-              <a:t>(</a:t>
-            </a:r>
-            <a:r>
-              <a:rPr>
-                <a:solidFill>
-                  <a:srgbClr val="657422"/>
-                </a:solidFill>
-                <a:latin typeface="Courier"/>
-              </a:rPr>
-              <a:t>option =</a:t>
-            </a:r>
-            <a:r>
-              <a:rPr>
-                <a:solidFill>
-                  <a:srgbClr val="003B4F"/>
-                </a:solidFill>
-                <a:latin typeface="Courier"/>
-              </a:rPr>
-              <a:t> </a:t>
-            </a:r>
-            <a:r>
-              <a:rPr>
-                <a:solidFill>
-                  <a:srgbClr val="20794D"/>
-                </a:solidFill>
-                <a:latin typeface="Courier"/>
-              </a:rPr>
-              <a:t>"D"</a:t>
-            </a:r>
-            <a:r>
-              <a:rPr>
-                <a:solidFill>
-                  <a:srgbClr val="003B4F"/>
-                </a:solidFill>
-                <a:latin typeface="Courier"/>
-              </a:rPr>
-              <a:t>, </a:t>
-            </a:r>
-            <a:r>
-              <a:rPr>
-                <a:solidFill>
-                  <a:srgbClr val="657422"/>
-                </a:solidFill>
-                <a:latin typeface="Courier"/>
-              </a:rPr>
-              <a:t>end =</a:t>
-            </a:r>
-            <a:r>
-              <a:rPr>
-                <a:solidFill>
-                  <a:srgbClr val="003B4F"/>
-                </a:solidFill>
-                <a:latin typeface="Courier"/>
-              </a:rPr>
-              <a:t> </a:t>
-            </a:r>
-            <a:r>
-              <a:rPr>
-                <a:solidFill>
-                  <a:srgbClr val="AD0000"/>
-                </a:solidFill>
-                <a:latin typeface="Courier"/>
-              </a:rPr>
-              <a:t>0.85</a:t>
-            </a:r>
-            <a:r>
-              <a:rPr>
-                <a:solidFill>
-                  <a:srgbClr val="003B4F"/>
-                </a:solidFill>
-                <a:latin typeface="Courier"/>
-              </a:rPr>
-              <a:t>) </a:t>
-            </a:r>
-            <a:r>
-              <a:rPr>
-                <a:solidFill>
-                  <a:srgbClr val="5E5E5E"/>
-                </a:solidFill>
-                <a:latin typeface="Courier"/>
-              </a:rPr>
-              <a:t>+</a:t>
-            </a:r>
-            <a:br/>
-            <a:r>
-              <a:rPr>
-                <a:solidFill>
-                  <a:srgbClr val="003B4F"/>
-                </a:solidFill>
-                <a:latin typeface="Courier"/>
-              </a:rPr>
-              <a:t>  </a:t>
-            </a:r>
-            <a:r>
-              <a:rPr>
-                <a:solidFill>
-                  <a:srgbClr val="4758AB"/>
-                </a:solidFill>
-                <a:latin typeface="Courier"/>
-              </a:rPr>
-              <a:t>labs</a:t>
-            </a:r>
-            <a:r>
-              <a:rPr>
-                <a:solidFill>
-                  <a:srgbClr val="003B4F"/>
-                </a:solidFill>
-                <a:latin typeface="Courier"/>
-              </a:rPr>
-              <a:t>(</a:t>
-            </a:r>
-            <a:br/>
-            <a:r>
-              <a:rPr>
-                <a:solidFill>
-                  <a:srgbClr val="003B4F"/>
-                </a:solidFill>
-                <a:latin typeface="Courier"/>
-              </a:rPr>
-              <a:t>    </a:t>
-            </a:r>
-            <a:r>
-              <a:rPr>
-                <a:solidFill>
-                  <a:srgbClr val="657422"/>
-                </a:solidFill>
-                <a:latin typeface="Courier"/>
-              </a:rPr>
-              <a:t>title =</a:t>
-            </a:r>
-            <a:r>
-              <a:rPr>
-                <a:solidFill>
-                  <a:srgbClr val="003B4F"/>
-                </a:solidFill>
-                <a:latin typeface="Courier"/>
-              </a:rPr>
-              <a:t> </a:t>
-            </a:r>
-            <a:r>
-              <a:rPr>
-                <a:solidFill>
-                  <a:srgbClr val="20794D"/>
-                </a:solidFill>
-                <a:latin typeface="Courier"/>
-              </a:rPr>
-              <a:t>"Effect of Urchin Density on Filamentous Algae Cover"</a:t>
-            </a:r>
-            <a:r>
-              <a:rPr>
-                <a:solidFill>
-                  <a:srgbClr val="003B4F"/>
-                </a:solidFill>
-                <a:latin typeface="Courier"/>
-              </a:rPr>
-              <a:t>,</a:t>
-            </a:r>
-            <a:br/>
-            <a:r>
-              <a:rPr>
-                <a:solidFill>
-                  <a:srgbClr val="003B4F"/>
-                </a:solidFill>
-                <a:latin typeface="Courier"/>
-              </a:rPr>
-              <a:t>    </a:t>
-            </a:r>
-            <a:r>
-              <a:rPr>
-                <a:solidFill>
-                  <a:srgbClr val="657422"/>
-                </a:solidFill>
-                <a:latin typeface="Courier"/>
-              </a:rPr>
-              <a:t>x =</a:t>
-            </a:r>
-            <a:r>
-              <a:rPr>
-                <a:solidFill>
-                  <a:srgbClr val="003B4F"/>
-                </a:solidFill>
-                <a:latin typeface="Courier"/>
-              </a:rPr>
-              <a:t> </a:t>
-            </a:r>
-            <a:r>
-              <a:rPr>
-                <a:solidFill>
-                  <a:srgbClr val="20794D"/>
-                </a:solidFill>
-                <a:latin typeface="Courier"/>
-              </a:rPr>
-              <a:t>"Urchin Density Treatment"</a:t>
-            </a:r>
-            <a:r>
-              <a:rPr>
-                <a:solidFill>
-                  <a:srgbClr val="003B4F"/>
-                </a:solidFill>
-                <a:latin typeface="Courier"/>
-              </a:rPr>
-              <a:t>,</a:t>
-            </a:r>
-            <a:br/>
-            <a:r>
-              <a:rPr>
-                <a:solidFill>
-                  <a:srgbClr val="003B4F"/>
-                </a:solidFill>
-                <a:latin typeface="Courier"/>
-              </a:rPr>
-              <a:t>    </a:t>
-            </a:r>
-            <a:r>
-              <a:rPr>
-                <a:solidFill>
-                  <a:srgbClr val="657422"/>
-                </a:solidFill>
-                <a:latin typeface="Courier"/>
-              </a:rPr>
-              <a:t>y =</a:t>
-            </a:r>
-            <a:r>
-              <a:rPr>
-                <a:solidFill>
-                  <a:srgbClr val="003B4F"/>
-                </a:solidFill>
-                <a:latin typeface="Courier"/>
-              </a:rPr>
-              <a:t> </a:t>
-            </a:r>
-            <a:r>
-              <a:rPr>
-                <a:solidFill>
-                  <a:srgbClr val="20794D"/>
-                </a:solidFill>
-                <a:latin typeface="Courier"/>
-              </a:rPr>
-              <a:t>"Filamentous Algae Cover (%)"</a:t>
-            </a:r>
-            <a:r>
-              <a:rPr>
-                <a:solidFill>
-                  <a:srgbClr val="003B4F"/>
-                </a:solidFill>
-                <a:latin typeface="Courier"/>
-              </a:rPr>
-              <a:t>,</a:t>
-            </a:r>
-            <a:br/>
-            <a:r>
-              <a:rPr>
-                <a:solidFill>
-                  <a:srgbClr val="003B4F"/>
-                </a:solidFill>
-                <a:latin typeface="Courier"/>
-              </a:rPr>
-              <a:t>    </a:t>
-            </a:r>
-            <a:r>
-              <a:rPr>
-                <a:solidFill>
-                  <a:srgbClr val="657422"/>
-                </a:solidFill>
-                <a:latin typeface="Courier"/>
-              </a:rPr>
-              <a:t>caption =</a:t>
-            </a:r>
-            <a:r>
-              <a:rPr>
-                <a:solidFill>
-                  <a:srgbClr val="003B4F"/>
-                </a:solidFill>
-                <a:latin typeface="Courier"/>
-              </a:rPr>
-              <a:t> </a:t>
-            </a:r>
-            <a:r>
-              <a:rPr>
-                <a:solidFill>
-                  <a:srgbClr val="20794D"/>
-                </a:solidFill>
-                <a:latin typeface="Courier"/>
-              </a:rPr>
-              <a:t>"Boxplots showing the distribution of algal cover across urchin density treatments."</a:t>
-            </a:r>
-            <a:br/>
-            <a:r>
-              <a:rPr>
-                <a:solidFill>
-                  <a:srgbClr val="003B4F"/>
-                </a:solidFill>
-                <a:latin typeface="Courier"/>
-              </a:rPr>
-              <a:t>  ) </a:t>
-            </a:r>
-            <a:r>
-              <a:rPr>
-                <a:solidFill>
-                  <a:srgbClr val="5E5E5E"/>
-                </a:solidFill>
-                <a:latin typeface="Courier"/>
-              </a:rPr>
-              <a:t>+</a:t>
-            </a:r>
-            <a:br/>
-            <a:r>
-              <a:rPr>
-                <a:solidFill>
-                  <a:srgbClr val="003B4F"/>
-                </a:solidFill>
-                <a:latin typeface="Courier"/>
-              </a:rPr>
-              <a:t>  </a:t>
-            </a:r>
-            <a:r>
-              <a:rPr>
-                <a:solidFill>
-                  <a:srgbClr val="4758AB"/>
-                </a:solidFill>
-                <a:latin typeface="Courier"/>
-              </a:rPr>
-              <a:t>theme</a:t>
-            </a:r>
-            <a:r>
-              <a:rPr>
-                <a:solidFill>
-                  <a:srgbClr val="003B4F"/>
-                </a:solidFill>
-                <a:latin typeface="Courier"/>
-              </a:rPr>
-              <a:t>(</a:t>
-            </a:r>
-            <a:br/>
-            <a:r>
-              <a:rPr>
-                <a:solidFill>
-                  <a:srgbClr val="003B4F"/>
-                </a:solidFill>
-                <a:latin typeface="Courier"/>
-              </a:rPr>
-              <a:t>    </a:t>
-            </a:r>
-            <a:r>
-              <a:rPr>
-                <a:solidFill>
-                  <a:srgbClr val="657422"/>
-                </a:solidFill>
-                <a:latin typeface="Courier"/>
-              </a:rPr>
-              <a:t>legend.position =</a:t>
-            </a:r>
-            <a:r>
-              <a:rPr>
-                <a:solidFill>
-                  <a:srgbClr val="003B4F"/>
-                </a:solidFill>
-                <a:latin typeface="Courier"/>
-              </a:rPr>
-              <a:t> </a:t>
-            </a:r>
-            <a:r>
-              <a:rPr>
-                <a:solidFill>
-                  <a:srgbClr val="20794D"/>
-                </a:solidFill>
-                <a:latin typeface="Courier"/>
-              </a:rPr>
-              <a:t>"none"</a:t>
-            </a:r>
-            <a:r>
-              <a:rPr>
-                <a:solidFill>
-                  <a:srgbClr val="003B4F"/>
-                </a:solidFill>
-                <a:latin typeface="Courier"/>
-              </a:rPr>
-              <a:t>,</a:t>
-            </a:r>
-            <a:br/>
-            <a:r>
-              <a:rPr>
-                <a:solidFill>
-                  <a:srgbClr val="003B4F"/>
-                </a:solidFill>
-                <a:latin typeface="Courier"/>
-              </a:rPr>
-              <a:t>    </a:t>
-            </a:r>
-            <a:r>
-              <a:rPr>
-                <a:solidFill>
-                  <a:srgbClr val="657422"/>
-                </a:solidFill>
-                <a:latin typeface="Courier"/>
-              </a:rPr>
-              <a:t>plot.title =</a:t>
-            </a:r>
-            <a:r>
-              <a:rPr>
-                <a:solidFill>
-                  <a:srgbClr val="003B4F"/>
-                </a:solidFill>
-                <a:latin typeface="Courier"/>
-              </a:rPr>
-              <a:t> </a:t>
-            </a:r>
-            <a:r>
-              <a:rPr>
-                <a:solidFill>
-                  <a:srgbClr val="4758AB"/>
-                </a:solidFill>
-                <a:latin typeface="Courier"/>
-              </a:rPr>
-              <a:t>element_text</a:t>
-            </a:r>
-            <a:r>
-              <a:rPr>
-                <a:solidFill>
-                  <a:srgbClr val="003B4F"/>
-                </a:solidFill>
-                <a:latin typeface="Courier"/>
-              </a:rPr>
-              <a:t>(</a:t>
-            </a:r>
-            <a:r>
-              <a:rPr>
-                <a:solidFill>
-                  <a:srgbClr val="657422"/>
-                </a:solidFill>
-                <a:latin typeface="Courier"/>
-              </a:rPr>
-              <a:t>face =</a:t>
-            </a:r>
-            <a:r>
-              <a:rPr>
-                <a:solidFill>
-                  <a:srgbClr val="003B4F"/>
-                </a:solidFill>
-                <a:latin typeface="Courier"/>
-              </a:rPr>
-              <a:t> </a:t>
-            </a:r>
-            <a:r>
-              <a:rPr>
-                <a:solidFill>
-                  <a:srgbClr val="20794D"/>
-                </a:solidFill>
-                <a:latin typeface="Courier"/>
-              </a:rPr>
-              <a:t>"bold"</a:t>
-            </a:r>
-            <a:r>
-              <a:rPr>
-                <a:solidFill>
-                  <a:srgbClr val="003B4F"/>
-                </a:solidFill>
-                <a:latin typeface="Courier"/>
-              </a:rPr>
-              <a:t>, </a:t>
-            </a:r>
-            <a:r>
-              <a:rPr>
-                <a:solidFill>
-                  <a:srgbClr val="657422"/>
-                </a:solidFill>
-                <a:latin typeface="Courier"/>
-              </a:rPr>
-              <a:t>size =</a:t>
-            </a:r>
-            <a:r>
-              <a:rPr>
-                <a:solidFill>
-                  <a:srgbClr val="003B4F"/>
-                </a:solidFill>
-                <a:latin typeface="Courier"/>
-              </a:rPr>
-              <a:t> </a:t>
-            </a:r>
-            <a:r>
-              <a:rPr>
-                <a:solidFill>
-                  <a:srgbClr val="AD0000"/>
-                </a:solidFill>
-                <a:latin typeface="Courier"/>
-              </a:rPr>
-              <a:t>14</a:t>
-            </a:r>
-            <a:r>
-              <a:rPr>
-                <a:solidFill>
-                  <a:srgbClr val="003B4F"/>
-                </a:solidFill>
-                <a:latin typeface="Courier"/>
-              </a:rPr>
-              <a:t>),</a:t>
-            </a:r>
-            <a:br/>
-            <a:r>
-              <a:rPr>
-                <a:solidFill>
-                  <a:srgbClr val="003B4F"/>
-                </a:solidFill>
-                <a:latin typeface="Courier"/>
-              </a:rPr>
-              <a:t>    </a:t>
-            </a:r>
-            <a:r>
-              <a:rPr>
-                <a:solidFill>
-                  <a:srgbClr val="657422"/>
-                </a:solidFill>
-                <a:latin typeface="Courier"/>
-              </a:rPr>
-              <a:t>axis.title =</a:t>
-            </a:r>
-            <a:r>
-              <a:rPr>
-                <a:solidFill>
-                  <a:srgbClr val="003B4F"/>
-                </a:solidFill>
-                <a:latin typeface="Courier"/>
-              </a:rPr>
-              <a:t> </a:t>
-            </a:r>
-            <a:r>
-              <a:rPr>
-                <a:solidFill>
-                  <a:srgbClr val="4758AB"/>
-                </a:solidFill>
-                <a:latin typeface="Courier"/>
-              </a:rPr>
-              <a:t>element_text</a:t>
-            </a:r>
-            <a:r>
-              <a:rPr>
-                <a:solidFill>
-                  <a:srgbClr val="003B4F"/>
-                </a:solidFill>
-                <a:latin typeface="Courier"/>
-              </a:rPr>
-              <a:t>(</a:t>
-            </a:r>
-            <a:r>
-              <a:rPr>
-                <a:solidFill>
-                  <a:srgbClr val="657422"/>
-                </a:solidFill>
-                <a:latin typeface="Courier"/>
-              </a:rPr>
-              <a:t>face =</a:t>
-            </a:r>
-            <a:r>
-              <a:rPr>
-                <a:solidFill>
-                  <a:srgbClr val="003B4F"/>
-                </a:solidFill>
-                <a:latin typeface="Courier"/>
-              </a:rPr>
-              <a:t> </a:t>
-            </a:r>
-            <a:r>
-              <a:rPr>
-                <a:solidFill>
-                  <a:srgbClr val="20794D"/>
-                </a:solidFill>
-                <a:latin typeface="Courier"/>
-              </a:rPr>
-              <a:t>"bold"</a:t>
-            </a:r>
-            <a:r>
-              <a:rPr>
-                <a:solidFill>
-                  <a:srgbClr val="003B4F"/>
-                </a:solidFill>
-                <a:latin typeface="Courier"/>
-              </a:rPr>
-              <a:t>, </a:t>
-            </a:r>
-            <a:r>
-              <a:rPr>
-                <a:solidFill>
-                  <a:srgbClr val="657422"/>
-                </a:solidFill>
-                <a:latin typeface="Courier"/>
-              </a:rPr>
-              <a:t>size =</a:t>
-            </a:r>
-            <a:r>
-              <a:rPr>
-                <a:solidFill>
-                  <a:srgbClr val="003B4F"/>
-                </a:solidFill>
-                <a:latin typeface="Courier"/>
-              </a:rPr>
-              <a:t> </a:t>
-            </a:r>
-            <a:r>
-              <a:rPr>
-                <a:solidFill>
-                  <a:srgbClr val="AD0000"/>
-                </a:solidFill>
-                <a:latin typeface="Courier"/>
-              </a:rPr>
-              <a:t>12</a:t>
-            </a:r>
-            <a:r>
-              <a:rPr>
-                <a:solidFill>
-                  <a:srgbClr val="003B4F"/>
-                </a:solidFill>
-                <a:latin typeface="Courier"/>
-              </a:rPr>
-              <a:t>),</a:t>
-            </a:r>
-            <a:br/>
-            <a:r>
-              <a:rPr>
-                <a:solidFill>
-                  <a:srgbClr val="003B4F"/>
-                </a:solidFill>
-                <a:latin typeface="Courier"/>
-              </a:rPr>
-              <a:t>    </a:t>
-            </a:r>
-            <a:r>
-              <a:rPr>
-                <a:solidFill>
-                  <a:srgbClr val="657422"/>
-                </a:solidFill>
-                <a:latin typeface="Courier"/>
-              </a:rPr>
-              <a:t>plot.caption =</a:t>
-            </a:r>
-            <a:r>
-              <a:rPr>
-                <a:solidFill>
-                  <a:srgbClr val="003B4F"/>
-                </a:solidFill>
-                <a:latin typeface="Courier"/>
-              </a:rPr>
-              <a:t> </a:t>
-            </a:r>
-            <a:r>
-              <a:rPr>
-                <a:solidFill>
-                  <a:srgbClr val="4758AB"/>
-                </a:solidFill>
-                <a:latin typeface="Courier"/>
-              </a:rPr>
-              <a:t>element_text</a:t>
-            </a:r>
-            <a:r>
-              <a:rPr>
-                <a:solidFill>
-                  <a:srgbClr val="003B4F"/>
-                </a:solidFill>
-                <a:latin typeface="Courier"/>
-              </a:rPr>
-              <a:t>(</a:t>
-            </a:r>
-            <a:r>
-              <a:rPr>
-                <a:solidFill>
-                  <a:srgbClr val="657422"/>
-                </a:solidFill>
-                <a:latin typeface="Courier"/>
-              </a:rPr>
-              <a:t>hjust =</a:t>
-            </a:r>
-            <a:r>
-              <a:rPr>
-                <a:solidFill>
-                  <a:srgbClr val="003B4F"/>
-                </a:solidFill>
-                <a:latin typeface="Courier"/>
-              </a:rPr>
-              <a:t> </a:t>
-            </a:r>
-            <a:r>
-              <a:rPr>
-                <a:solidFill>
-                  <a:srgbClr val="AD0000"/>
-                </a:solidFill>
-                <a:latin typeface="Courier"/>
-              </a:rPr>
-              <a:t>0</a:t>
-            </a:r>
-            <a:r>
-              <a:rPr>
-                <a:solidFill>
-                  <a:srgbClr val="003B4F"/>
-                </a:solidFill>
-                <a:latin typeface="Courier"/>
-              </a:rPr>
-              <a:t>, </a:t>
-            </a:r>
-            <a:r>
-              <a:rPr>
-                <a:solidFill>
-                  <a:srgbClr val="657422"/>
-                </a:solidFill>
-                <a:latin typeface="Courier"/>
-              </a:rPr>
-              <a:t>face =</a:t>
-            </a:r>
-            <a:r>
-              <a:rPr>
-                <a:solidFill>
-                  <a:srgbClr val="003B4F"/>
-                </a:solidFill>
-                <a:latin typeface="Courier"/>
-              </a:rPr>
-              <a:t> </a:t>
-            </a:r>
-            <a:r>
-              <a:rPr>
-                <a:solidFill>
-                  <a:srgbClr val="20794D"/>
-                </a:solidFill>
-                <a:latin typeface="Courier"/>
-              </a:rPr>
-              <a:t>"italic"</a:t>
-            </a:r>
-            <a:r>
-              <a:rPr>
-                <a:solidFill>
-                  <a:srgbClr val="003B4F"/>
-                </a:solidFill>
-                <a:latin typeface="Courier"/>
-              </a:rPr>
-              <a:t>, </a:t>
-            </a:r>
-            <a:r>
-              <a:rPr>
-                <a:solidFill>
-                  <a:srgbClr val="657422"/>
-                </a:solidFill>
-                <a:latin typeface="Courier"/>
-              </a:rPr>
-              <a:t>size =</a:t>
-            </a:r>
-            <a:r>
-              <a:rPr>
-                <a:solidFill>
-                  <a:srgbClr val="003B4F"/>
-                </a:solidFill>
-                <a:latin typeface="Courier"/>
-              </a:rPr>
-              <a:t> </a:t>
-            </a:r>
-            <a:r>
-              <a:rPr>
-                <a:solidFill>
-                  <a:srgbClr val="AD0000"/>
-                </a:solidFill>
-                <a:latin typeface="Courier"/>
-              </a:rPr>
-              <a:t>10</a:t>
-            </a:r>
-            <a:r>
-              <a:rPr>
-                <a:solidFill>
-                  <a:srgbClr val="003B4F"/>
-                </a:solidFill>
+                <a:latin typeface="Courier"/>
+              </a:rPr>
+              <a:t>library(emmeans)</a:t>
+            </a:r>
+            <a:r>
+              <a:rPr/>
+              <a:t>, and </a:t>
+            </a:r>
+            <a:r>
+              <a:rPr>
+                <a:latin typeface="Courier"/>
+              </a:rPr>
+              <a:t>library(tidyverse)</a:t>
+            </a:r>
+            <a:r>
+              <a:rPr/>
+              <a:t>? Spelling? A missing </a:t>
+            </a:r>
+            <a:r>
+              <a:rPr>
                 <a:latin typeface="Courier"/>
               </a:rPr>
               <a:t>)</a:t>
             </a:r>
-            <a:br/>
-            <a:r>
-              <a:rPr>
-                <a:solidFill>
-                  <a:srgbClr val="003B4F"/>
-                </a:solidFill>
-                <a:latin typeface="Courier"/>
-              </a:rPr>
-              <a:t>  )</a:t>
-            </a:r>
-          </a:p>
-          <a:p>
-            <a:pPr lvl="0" indent="0" marL="0">
-              <a:buNone/>
+            <a:r>
+              <a:rPr/>
+              <a:t> or </a:t>
+            </a:r>
+            <a:r>
+              <a:rPr>
+                <a:latin typeface="Courier"/>
+              </a:rPr>
+              <a:t>%&gt;%</a:t>
+            </a:r>
+            <a:r>
+              <a:rPr/>
+              <a:t> at the </a:t>
+            </a:r>
+            <a:r>
+              <a:rPr i="1"/>
+              <a:t>start</a:t>
+            </a:r>
+            <a:r>
+              <a:rPr/>
+              <a:t> of a line?</a:t>
+            </a:r>
+          </a:p>
+          <a:p>
+            <a:pPr lvl="0" indent="-342900" marL="342900">
+              <a:buAutoNum type="arabicPeriod"/>
             </a:pPr>
             <a:r>
+              <a:rPr>
+                <a:latin typeface="Courier"/>
+              </a:rPr>
+              <a:t>?function_name</a:t>
+            </a:r>
+            <a:r>
+              <a:rPr/>
+              <a:t> opens the built-in help page.</a:t>
+            </a:r>
+          </a:p>
+          <a:p>
+            <a:pPr lvl="0" indent="-342900" marL="342900">
+              <a:buAutoNum type="arabicPeriod"/>
+            </a:pPr>
+            <a:r>
               <a:rPr b="1"/>
-              <a:t>▶ Run this</a:t>
+              <a:t>Bring the exact error</a:t>
             </a:r>
             <a:r>
               <a:rPr/>
-              <a:t> — a mean ± SE plot:</a:t>
-            </a:r>
-          </a:p>
-          <a:p>
-            <a:pPr lvl="0" indent="0">
+              <a:t> (copy-paste it) to class or office hours.</a:t>
+            </a:r>
+          </a:p>
+          <a:p>
+            <a:pPr lvl="0" indent="0" marL="1270000">
               <a:buNone/>
             </a:pPr>
             <a:r>
-              <a:rPr>
-                <a:solidFill>
-                  <a:srgbClr val="4758AB"/>
-                </a:solidFill>
-                <a:latin typeface="Courier"/>
-              </a:rPr>
-              <a:t>ggplot</a:t>
-            </a:r>
-            <a:r>
-              <a:rPr>
-                <a:solidFill>
-                  <a:srgbClr val="003B4F"/>
-                </a:solidFill>
-                <a:latin typeface="Courier"/>
-              </a:rPr>
-              <a:t>(summary_stats, </a:t>
-            </a:r>
-            <a:r>
-              <a:rPr>
-                <a:solidFill>
-                  <a:srgbClr val="4758AB"/>
-                </a:solidFill>
-                <a:latin typeface="Courier"/>
-              </a:rPr>
-              <a:t>aes</a:t>
-            </a:r>
-            <a:r>
-              <a:rPr>
-                <a:solidFill>
-                  <a:srgbClr val="003B4F"/>
-                </a:solidFill>
-                <a:latin typeface="Courier"/>
-              </a:rPr>
-              <a:t>(</a:t>
-            </a:r>
-            <a:r>
-              <a:rPr>
-                <a:solidFill>
-                  <a:srgbClr val="657422"/>
-                </a:solidFill>
-                <a:latin typeface="Courier"/>
-              </a:rPr>
-              <a:t>x =</a:t>
-            </a:r>
-            <a:r>
-              <a:rPr>
-                <a:solidFill>
-                  <a:srgbClr val="003B4F"/>
-                </a:solidFill>
-                <a:latin typeface="Courier"/>
-              </a:rPr>
-              <a:t> treat, </a:t>
-            </a:r>
-            <a:r>
-              <a:rPr>
-                <a:solidFill>
-                  <a:srgbClr val="657422"/>
-                </a:solidFill>
-                <a:latin typeface="Courier"/>
-              </a:rPr>
-              <a:t>y =</a:t>
-            </a:r>
-            <a:r>
-              <a:rPr>
-                <a:solidFill>
-                  <a:srgbClr val="003B4F"/>
-                </a:solidFill>
-                <a:latin typeface="Courier"/>
-              </a:rPr>
-              <a:t> mean, </a:t>
-            </a:r>
-            <a:r>
-              <a:rPr>
-                <a:solidFill>
-                  <a:srgbClr val="657422"/>
-                </a:solidFill>
-                <a:latin typeface="Courier"/>
-              </a:rPr>
-              <a:t>group =</a:t>
-            </a:r>
-            <a:r>
-              <a:rPr>
-                <a:solidFill>
-                  <a:srgbClr val="003B4F"/>
-                </a:solidFill>
-                <a:latin typeface="Courier"/>
-              </a:rPr>
-              <a:t> </a:t>
-            </a:r>
-            <a:r>
-              <a:rPr>
-                <a:solidFill>
-                  <a:srgbClr val="AD0000"/>
-                </a:solidFill>
-                <a:latin typeface="Courier"/>
-              </a:rPr>
-              <a:t>1</a:t>
-            </a:r>
-            <a:r>
-              <a:rPr>
-                <a:solidFill>
-                  <a:srgbClr val="003B4F"/>
-                </a:solidFill>
-                <a:latin typeface="Courier"/>
-              </a:rPr>
-              <a:t>)) </a:t>
-            </a:r>
-            <a:r>
-              <a:rPr>
-                <a:solidFill>
-                  <a:srgbClr val="5E5E5E"/>
-                </a:solidFill>
-                <a:latin typeface="Courier"/>
-              </a:rPr>
-              <a:t>+</a:t>
-            </a:r>
-            <a:br/>
-            <a:r>
-              <a:rPr>
-                <a:solidFill>
-                  <a:srgbClr val="003B4F"/>
-                </a:solidFill>
-                <a:latin typeface="Courier"/>
-              </a:rPr>
-              <a:t>  </a:t>
-            </a:r>
-            <a:r>
-              <a:rPr>
-                <a:solidFill>
-                  <a:srgbClr val="4758AB"/>
-                </a:solidFill>
-                <a:latin typeface="Courier"/>
-              </a:rPr>
-              <a:t>geom_point</a:t>
-            </a:r>
-            <a:r>
-              <a:rPr>
-                <a:solidFill>
-                  <a:srgbClr val="003B4F"/>
-                </a:solidFill>
-                <a:latin typeface="Courier"/>
-              </a:rPr>
-              <a:t>(</a:t>
-            </a:r>
-            <a:r>
-              <a:rPr>
-                <a:solidFill>
-                  <a:srgbClr val="657422"/>
-                </a:solidFill>
-                <a:latin typeface="Courier"/>
-              </a:rPr>
-              <a:t>size =</a:t>
-            </a:r>
-            <a:r>
-              <a:rPr>
-                <a:solidFill>
-                  <a:srgbClr val="003B4F"/>
-                </a:solidFill>
-                <a:latin typeface="Courier"/>
-              </a:rPr>
-              <a:t> </a:t>
-            </a:r>
-            <a:r>
-              <a:rPr>
-                <a:solidFill>
-                  <a:srgbClr val="AD0000"/>
-                </a:solidFill>
-                <a:latin typeface="Courier"/>
-              </a:rPr>
-              <a:t>3</a:t>
-            </a:r>
-            <a:r>
-              <a:rPr>
-                <a:solidFill>
-                  <a:srgbClr val="003B4F"/>
-                </a:solidFill>
-                <a:latin typeface="Courier"/>
-              </a:rPr>
-              <a:t>, </a:t>
-            </a:r>
-            <a:r>
-              <a:rPr>
-                <a:solidFill>
-                  <a:srgbClr val="657422"/>
-                </a:solidFill>
-                <a:latin typeface="Courier"/>
-              </a:rPr>
-              <a:t>shape =</a:t>
-            </a:r>
-            <a:r>
-              <a:rPr>
-                <a:solidFill>
-                  <a:srgbClr val="003B4F"/>
-                </a:solidFill>
-                <a:latin typeface="Courier"/>
-              </a:rPr>
-              <a:t> </a:t>
-            </a:r>
-            <a:r>
-              <a:rPr>
-                <a:solidFill>
-                  <a:srgbClr val="AD0000"/>
-                </a:solidFill>
-                <a:latin typeface="Courier"/>
-              </a:rPr>
-              <a:t>21</a:t>
-            </a:r>
-            <a:r>
-              <a:rPr>
-                <a:solidFill>
-                  <a:srgbClr val="003B4F"/>
-                </a:solidFill>
-                <a:latin typeface="Courier"/>
-              </a:rPr>
-              <a:t>, </a:t>
-            </a:r>
-            <a:r>
-              <a:rPr>
-                <a:solidFill>
-                  <a:srgbClr val="657422"/>
-                </a:solidFill>
-                <a:latin typeface="Courier"/>
-              </a:rPr>
-              <a:t>fill =</a:t>
-            </a:r>
-            <a:r>
-              <a:rPr>
-                <a:solidFill>
-                  <a:srgbClr val="003B4F"/>
-                </a:solidFill>
-                <a:latin typeface="Courier"/>
-              </a:rPr>
-              <a:t> </a:t>
-            </a:r>
-            <a:r>
-              <a:rPr>
-                <a:solidFill>
-                  <a:srgbClr val="20794D"/>
-                </a:solidFill>
-                <a:latin typeface="Courier"/>
-              </a:rPr>
-              <a:t>"white"</a:t>
-            </a:r>
-            <a:r>
-              <a:rPr>
-                <a:solidFill>
-                  <a:srgbClr val="003B4F"/>
-                </a:solidFill>
-                <a:latin typeface="Courier"/>
-              </a:rPr>
-              <a:t>) </a:t>
-            </a:r>
-            <a:r>
-              <a:rPr>
-                <a:solidFill>
-                  <a:srgbClr val="5E5E5E"/>
-                </a:solidFill>
-                <a:latin typeface="Courier"/>
-              </a:rPr>
-              <a:t>+</a:t>
-            </a:r>
-            <a:br/>
-            <a:r>
-              <a:rPr>
-                <a:solidFill>
-                  <a:srgbClr val="003B4F"/>
-                </a:solidFill>
-                <a:latin typeface="Courier"/>
-              </a:rPr>
-              <a:t>  </a:t>
-            </a:r>
-            <a:r>
-              <a:rPr>
-                <a:solidFill>
-                  <a:srgbClr val="4758AB"/>
-                </a:solidFill>
-                <a:latin typeface="Courier"/>
-              </a:rPr>
-              <a:t>geom_errorbar</a:t>
-            </a:r>
-            <a:r>
-              <a:rPr>
-                <a:solidFill>
-                  <a:srgbClr val="003B4F"/>
-                </a:solidFill>
-                <a:latin typeface="Courier"/>
-              </a:rPr>
-              <a:t>(</a:t>
-            </a:r>
-            <a:r>
-              <a:rPr>
-                <a:solidFill>
-                  <a:srgbClr val="4758AB"/>
-                </a:solidFill>
-                <a:latin typeface="Courier"/>
-              </a:rPr>
-              <a:t>aes</a:t>
-            </a:r>
-            <a:r>
-              <a:rPr>
-                <a:solidFill>
-                  <a:srgbClr val="003B4F"/>
-                </a:solidFill>
-                <a:latin typeface="Courier"/>
-              </a:rPr>
-              <a:t>(</a:t>
-            </a:r>
-            <a:r>
-              <a:rPr>
-                <a:solidFill>
-                  <a:srgbClr val="657422"/>
-                </a:solidFill>
-                <a:latin typeface="Courier"/>
-              </a:rPr>
-              <a:t>ymin =</a:t>
-            </a:r>
-            <a:r>
-              <a:rPr>
-                <a:solidFill>
-                  <a:srgbClr val="003B4F"/>
-                </a:solidFill>
-                <a:latin typeface="Courier"/>
-              </a:rPr>
-              <a:t> mean </a:t>
-            </a:r>
-            <a:r>
-              <a:rPr>
-                <a:solidFill>
-                  <a:srgbClr val="5E5E5E"/>
-                </a:solidFill>
-                <a:latin typeface="Courier"/>
-              </a:rPr>
-              <a:t>-</a:t>
-            </a:r>
-            <a:r>
-              <a:rPr>
-                <a:solidFill>
-                  <a:srgbClr val="003B4F"/>
-                </a:solidFill>
-                <a:latin typeface="Courier"/>
-              </a:rPr>
-              <a:t> se, </a:t>
-            </a:r>
-            <a:r>
-              <a:rPr>
-                <a:solidFill>
-                  <a:srgbClr val="657422"/>
-                </a:solidFill>
-                <a:latin typeface="Courier"/>
-              </a:rPr>
-              <a:t>ymax =</a:t>
-            </a:r>
-            <a:r>
-              <a:rPr>
-                <a:solidFill>
-                  <a:srgbClr val="003B4F"/>
-                </a:solidFill>
-                <a:latin typeface="Courier"/>
-              </a:rPr>
-              <a:t> mean </a:t>
-            </a:r>
-            <a:r>
-              <a:rPr>
-                <a:solidFill>
-                  <a:srgbClr val="5E5E5E"/>
-                </a:solidFill>
-                <a:latin typeface="Courier"/>
-              </a:rPr>
-              <a:t>+</a:t>
-            </a:r>
-            <a:r>
-              <a:rPr>
-                <a:solidFill>
-                  <a:srgbClr val="003B4F"/>
-                </a:solidFill>
-                <a:latin typeface="Courier"/>
-              </a:rPr>
-              <a:t> se), </a:t>
-            </a:r>
-            <a:r>
-              <a:rPr>
-                <a:solidFill>
-                  <a:srgbClr val="657422"/>
-                </a:solidFill>
-                <a:latin typeface="Courier"/>
-              </a:rPr>
-              <a:t>width =</a:t>
-            </a:r>
-            <a:r>
-              <a:rPr>
-                <a:solidFill>
-                  <a:srgbClr val="003B4F"/>
-                </a:solidFill>
-                <a:latin typeface="Courier"/>
-              </a:rPr>
-              <a:t> </a:t>
-            </a:r>
-            <a:r>
-              <a:rPr>
-                <a:solidFill>
-                  <a:srgbClr val="AD0000"/>
-                </a:solidFill>
-                <a:latin typeface="Courier"/>
-              </a:rPr>
-              <a:t>0.2</a:t>
-            </a:r>
-            <a:r>
-              <a:rPr>
-                <a:solidFill>
-                  <a:srgbClr val="003B4F"/>
-                </a:solidFill>
-                <a:latin typeface="Courier"/>
-              </a:rPr>
-              <a:t>) </a:t>
-            </a:r>
-            <a:r>
-              <a:rPr>
-                <a:solidFill>
-                  <a:srgbClr val="5E5E5E"/>
-                </a:solidFill>
-                <a:latin typeface="Courier"/>
-              </a:rPr>
-              <a:t>+</a:t>
-            </a:r>
-            <a:br/>
-            <a:r>
-              <a:rPr>
-                <a:solidFill>
-                  <a:srgbClr val="003B4F"/>
-                </a:solidFill>
-                <a:latin typeface="Courier"/>
-              </a:rPr>
-              <a:t>  </a:t>
-            </a:r>
-            <a:r>
-              <a:rPr>
-                <a:solidFill>
-                  <a:srgbClr val="4758AB"/>
-                </a:solidFill>
-                <a:latin typeface="Courier"/>
-              </a:rPr>
-              <a:t>labs</a:t>
-            </a:r>
-            <a:r>
-              <a:rPr>
-                <a:solidFill>
-                  <a:srgbClr val="003B4F"/>
-                </a:solidFill>
-                <a:latin typeface="Courier"/>
-              </a:rPr>
-              <a:t>(</a:t>
-            </a:r>
-            <a:br/>
-            <a:r>
-              <a:rPr>
-                <a:solidFill>
-                  <a:srgbClr val="003B4F"/>
-                </a:solidFill>
-                <a:latin typeface="Courier"/>
-              </a:rPr>
-              <a:t>    </a:t>
-            </a:r>
-            <a:r>
-              <a:rPr>
-                <a:solidFill>
-                  <a:srgbClr val="657422"/>
-                </a:solidFill>
-                <a:latin typeface="Courier"/>
-              </a:rPr>
-              <a:t>title =</a:t>
-            </a:r>
-            <a:r>
-              <a:rPr>
-                <a:solidFill>
-                  <a:srgbClr val="003B4F"/>
-                </a:solidFill>
-                <a:latin typeface="Courier"/>
-              </a:rPr>
-              <a:t> </a:t>
-            </a:r>
-            <a:r>
-              <a:rPr>
-                <a:solidFill>
-                  <a:srgbClr val="20794D"/>
-                </a:solidFill>
-                <a:latin typeface="Courier"/>
-              </a:rPr>
-              <a:t>"Mean Algae Cover by Urchin Density Treatment"</a:t>
-            </a:r>
-            <a:r>
-              <a:rPr>
-                <a:solidFill>
-                  <a:srgbClr val="003B4F"/>
-                </a:solidFill>
-                <a:latin typeface="Courier"/>
-              </a:rPr>
-              <a:t>,</a:t>
-            </a:r>
-            <a:br/>
-            <a:r>
-              <a:rPr>
-                <a:solidFill>
-                  <a:srgbClr val="003B4F"/>
-                </a:solidFill>
-                <a:latin typeface="Courier"/>
-              </a:rPr>
-              <a:t>    </a:t>
-            </a:r>
-            <a:r>
-              <a:rPr>
-                <a:solidFill>
-                  <a:srgbClr val="657422"/>
-                </a:solidFill>
-                <a:latin typeface="Courier"/>
-              </a:rPr>
-              <a:t>x =</a:t>
-            </a:r>
-            <a:r>
-              <a:rPr>
-                <a:solidFill>
-                  <a:srgbClr val="003B4F"/>
-                </a:solidFill>
-                <a:latin typeface="Courier"/>
-              </a:rPr>
-              <a:t> </a:t>
-            </a:r>
-            <a:r>
-              <a:rPr>
-                <a:solidFill>
-                  <a:srgbClr val="20794D"/>
-                </a:solidFill>
-                <a:latin typeface="Courier"/>
-              </a:rPr>
-              <a:t>"Urchin Density Treatment"</a:t>
-            </a:r>
-            <a:r>
-              <a:rPr>
-                <a:solidFill>
-                  <a:srgbClr val="003B4F"/>
-                </a:solidFill>
-                <a:latin typeface="Courier"/>
-              </a:rPr>
-              <a:t>,</a:t>
-            </a:r>
-            <a:br/>
-            <a:r>
-              <a:rPr>
-                <a:solidFill>
-                  <a:srgbClr val="003B4F"/>
-                </a:solidFill>
-                <a:latin typeface="Courier"/>
-              </a:rPr>
-              <a:t>    </a:t>
-            </a:r>
-            <a:r>
-              <a:rPr>
-                <a:solidFill>
-                  <a:srgbClr val="657422"/>
-                </a:solidFill>
-                <a:latin typeface="Courier"/>
-              </a:rPr>
-              <a:t>y =</a:t>
-            </a:r>
-            <a:r>
-              <a:rPr>
-                <a:solidFill>
-                  <a:srgbClr val="003B4F"/>
-                </a:solidFill>
-                <a:latin typeface="Courier"/>
-              </a:rPr>
-              <a:t> </a:t>
-            </a:r>
-            <a:r>
-              <a:rPr>
-                <a:solidFill>
-                  <a:srgbClr val="20794D"/>
-                </a:solidFill>
-                <a:latin typeface="Courier"/>
-              </a:rPr>
-              <a:t>"Mean Filamentous Algae Cover (%)"</a:t>
-            </a:r>
-            <a:r>
-              <a:rPr>
-                <a:solidFill>
-                  <a:srgbClr val="003B4F"/>
-                </a:solidFill>
-                <a:latin typeface="Courier"/>
-              </a:rPr>
-              <a:t>,</a:t>
-            </a:r>
-            <a:br/>
-            <a:r>
-              <a:rPr>
-                <a:solidFill>
-                  <a:srgbClr val="003B4F"/>
-                </a:solidFill>
-                <a:latin typeface="Courier"/>
-              </a:rPr>
-              <a:t>    </a:t>
-            </a:r>
-            <a:r>
-              <a:rPr>
-                <a:solidFill>
-                  <a:srgbClr val="657422"/>
-                </a:solidFill>
-                <a:latin typeface="Courier"/>
-              </a:rPr>
-              <a:t>caption =</a:t>
-            </a:r>
-            <a:r>
-              <a:rPr>
-                <a:solidFill>
-                  <a:srgbClr val="003B4F"/>
-                </a:solidFill>
-                <a:latin typeface="Courier"/>
-              </a:rPr>
-              <a:t> </a:t>
-            </a:r>
-            <a:r>
-              <a:rPr>
-                <a:solidFill>
-                  <a:srgbClr val="20794D"/>
-                </a:solidFill>
-                <a:latin typeface="Courier"/>
-              </a:rPr>
-              <a:t>"Mean (+/- SE) percentage cover of filamentous algae across urchin density treatments."</a:t>
-            </a:r>
-            <a:br/>
-            <a:r>
-              <a:rPr>
-                <a:solidFill>
-                  <a:srgbClr val="003B4F"/>
-                </a:solidFill>
-                <a:latin typeface="Courier"/>
-              </a:rPr>
-              <a:t>  ) </a:t>
-            </a:r>
-            <a:r>
-              <a:rPr>
-                <a:solidFill>
-                  <a:srgbClr val="5E5E5E"/>
-                </a:solidFill>
-                <a:latin typeface="Courier"/>
-              </a:rPr>
-              <a:t>+</a:t>
-            </a:r>
-            <a:br/>
-            <a:r>
-              <a:rPr>
-                <a:solidFill>
-                  <a:srgbClr val="003B4F"/>
-                </a:solidFill>
-                <a:latin typeface="Courier"/>
-              </a:rPr>
-              <a:t>  </a:t>
-            </a:r>
-            <a:r>
-              <a:rPr>
-                <a:solidFill>
-                  <a:srgbClr val="4758AB"/>
-                </a:solidFill>
-                <a:latin typeface="Courier"/>
-              </a:rPr>
-              <a:t>theme</a:t>
-            </a:r>
-            <a:r>
-              <a:rPr>
-                <a:solidFill>
-                  <a:srgbClr val="003B4F"/>
-                </a:solidFill>
-                <a:latin typeface="Courier"/>
-              </a:rPr>
-              <a:t>(</a:t>
-            </a:r>
-            <a:br/>
-            <a:r>
-              <a:rPr>
-                <a:solidFill>
-                  <a:srgbClr val="003B4F"/>
-                </a:solidFill>
-                <a:latin typeface="Courier"/>
-              </a:rPr>
-              <a:t>    </a:t>
-            </a:r>
-            <a:r>
-              <a:rPr>
-                <a:solidFill>
-                  <a:srgbClr val="657422"/>
-                </a:solidFill>
-                <a:latin typeface="Courier"/>
-              </a:rPr>
-              <a:t>plot.title =</a:t>
-            </a:r>
-            <a:r>
-              <a:rPr>
-                <a:solidFill>
-                  <a:srgbClr val="003B4F"/>
-                </a:solidFill>
-                <a:latin typeface="Courier"/>
-              </a:rPr>
-              <a:t> </a:t>
-            </a:r>
-            <a:r>
-              <a:rPr>
-                <a:solidFill>
-                  <a:srgbClr val="4758AB"/>
-                </a:solidFill>
-                <a:latin typeface="Courier"/>
-              </a:rPr>
-              <a:t>element_text</a:t>
-            </a:r>
-            <a:r>
-              <a:rPr>
-                <a:solidFill>
-                  <a:srgbClr val="003B4F"/>
-                </a:solidFill>
-                <a:latin typeface="Courier"/>
-              </a:rPr>
-              <a:t>(</a:t>
-            </a:r>
-            <a:r>
-              <a:rPr>
-                <a:solidFill>
-                  <a:srgbClr val="657422"/>
-                </a:solidFill>
-                <a:latin typeface="Courier"/>
-              </a:rPr>
-              <a:t>face =</a:t>
-            </a:r>
-            <a:r>
-              <a:rPr>
-                <a:solidFill>
-                  <a:srgbClr val="003B4F"/>
-                </a:solidFill>
-                <a:latin typeface="Courier"/>
-              </a:rPr>
-              <a:t> </a:t>
-            </a:r>
-            <a:r>
-              <a:rPr>
-                <a:solidFill>
-                  <a:srgbClr val="20794D"/>
-                </a:solidFill>
-                <a:latin typeface="Courier"/>
-              </a:rPr>
-              <a:t>"bold"</a:t>
-            </a:r>
-            <a:r>
-              <a:rPr>
-                <a:solidFill>
-                  <a:srgbClr val="003B4F"/>
-                </a:solidFill>
-                <a:latin typeface="Courier"/>
-              </a:rPr>
-              <a:t>, </a:t>
-            </a:r>
-            <a:r>
-              <a:rPr>
-                <a:solidFill>
-                  <a:srgbClr val="657422"/>
-                </a:solidFill>
-                <a:latin typeface="Courier"/>
-              </a:rPr>
-              <a:t>size =</a:t>
-            </a:r>
-            <a:r>
-              <a:rPr>
-                <a:solidFill>
-                  <a:srgbClr val="003B4F"/>
-                </a:solidFill>
-                <a:latin typeface="Courier"/>
-              </a:rPr>
-              <a:t> </a:t>
-            </a:r>
-            <a:r>
-              <a:rPr>
-                <a:solidFill>
-                  <a:srgbClr val="AD0000"/>
-                </a:solidFill>
-                <a:latin typeface="Courier"/>
-              </a:rPr>
-              <a:t>14</a:t>
-            </a:r>
-            <a:r>
-              <a:rPr>
-                <a:solidFill>
-                  <a:srgbClr val="003B4F"/>
-                </a:solidFill>
-                <a:latin typeface="Courier"/>
-              </a:rPr>
-              <a:t>),</a:t>
-            </a:r>
-            <a:br/>
-            <a:r>
-              <a:rPr>
-                <a:solidFill>
-                  <a:srgbClr val="003B4F"/>
-                </a:solidFill>
-                <a:latin typeface="Courier"/>
-              </a:rPr>
-              <a:t>    </a:t>
-            </a:r>
-            <a:r>
-              <a:rPr>
-                <a:solidFill>
-                  <a:srgbClr val="657422"/>
-                </a:solidFill>
-                <a:latin typeface="Courier"/>
-              </a:rPr>
-              <a:t>axis.title =</a:t>
-            </a:r>
-            <a:r>
-              <a:rPr>
-                <a:solidFill>
-                  <a:srgbClr val="003B4F"/>
-                </a:solidFill>
-                <a:latin typeface="Courier"/>
-              </a:rPr>
-              <a:t> </a:t>
-            </a:r>
-            <a:r>
-              <a:rPr>
-                <a:solidFill>
-                  <a:srgbClr val="4758AB"/>
-                </a:solidFill>
-                <a:latin typeface="Courier"/>
-              </a:rPr>
-              <a:t>element_text</a:t>
-            </a:r>
-            <a:r>
-              <a:rPr>
-                <a:solidFill>
-                  <a:srgbClr val="003B4F"/>
-                </a:solidFill>
-                <a:latin typeface="Courier"/>
-              </a:rPr>
-              <a:t>(</a:t>
-            </a:r>
-            <a:r>
-              <a:rPr>
-                <a:solidFill>
-                  <a:srgbClr val="657422"/>
-                </a:solidFill>
-                <a:latin typeface="Courier"/>
-              </a:rPr>
-              <a:t>face =</a:t>
-            </a:r>
-            <a:r>
-              <a:rPr>
-                <a:solidFill>
-                  <a:srgbClr val="003B4F"/>
-                </a:solidFill>
-                <a:latin typeface="Courier"/>
-              </a:rPr>
-              <a:t> </a:t>
-            </a:r>
-            <a:r>
-              <a:rPr>
-                <a:solidFill>
-                  <a:srgbClr val="20794D"/>
-                </a:solidFill>
-                <a:latin typeface="Courier"/>
-              </a:rPr>
-              <a:t>"bold"</a:t>
-            </a:r>
-            <a:r>
-              <a:rPr>
-                <a:solidFill>
-                  <a:srgbClr val="003B4F"/>
-                </a:solidFill>
-                <a:latin typeface="Courier"/>
-              </a:rPr>
-              <a:t>, </a:t>
-            </a:r>
-            <a:r>
-              <a:rPr>
-                <a:solidFill>
-                  <a:srgbClr val="657422"/>
-                </a:solidFill>
-                <a:latin typeface="Courier"/>
-              </a:rPr>
-              <a:t>size =</a:t>
-            </a:r>
-            <a:r>
-              <a:rPr>
-                <a:solidFill>
-                  <a:srgbClr val="003B4F"/>
-                </a:solidFill>
-                <a:latin typeface="Courier"/>
-              </a:rPr>
-              <a:t> </a:t>
-            </a:r>
-            <a:r>
-              <a:rPr>
-                <a:solidFill>
-                  <a:srgbClr val="AD0000"/>
-                </a:solidFill>
-                <a:latin typeface="Courier"/>
-              </a:rPr>
-              <a:t>12</a:t>
-            </a:r>
-            <a:r>
-              <a:rPr>
-                <a:solidFill>
-                  <a:srgbClr val="003B4F"/>
-                </a:solidFill>
-                <a:latin typeface="Courier"/>
-              </a:rPr>
-              <a:t>),</a:t>
-            </a:r>
-            <a:br/>
-            <a:r>
-              <a:rPr>
-                <a:solidFill>
-                  <a:srgbClr val="003B4F"/>
-                </a:solidFill>
-                <a:latin typeface="Courier"/>
-              </a:rPr>
-              <a:t>    </a:t>
-            </a:r>
-            <a:r>
-              <a:rPr>
-                <a:solidFill>
-                  <a:srgbClr val="657422"/>
-                </a:solidFill>
-                <a:latin typeface="Courier"/>
-              </a:rPr>
-              <a:t>plot.caption =</a:t>
-            </a:r>
-            <a:r>
-              <a:rPr>
-                <a:solidFill>
-                  <a:srgbClr val="003B4F"/>
-                </a:solidFill>
-                <a:latin typeface="Courier"/>
-              </a:rPr>
-              <a:t> </a:t>
-            </a:r>
-            <a:r>
-              <a:rPr>
-                <a:solidFill>
-                  <a:srgbClr val="4758AB"/>
-                </a:solidFill>
-                <a:latin typeface="Courier"/>
-              </a:rPr>
-              <a:t>element_text</a:t>
-            </a:r>
-            <a:r>
-              <a:rPr>
-                <a:solidFill>
-                  <a:srgbClr val="003B4F"/>
-                </a:solidFill>
-                <a:latin typeface="Courier"/>
-              </a:rPr>
-              <a:t>(</a:t>
-            </a:r>
-            <a:r>
-              <a:rPr>
-                <a:solidFill>
-                  <a:srgbClr val="657422"/>
-                </a:solidFill>
-                <a:latin typeface="Courier"/>
-              </a:rPr>
-              <a:t>hjust =</a:t>
-            </a:r>
-            <a:r>
-              <a:rPr>
-                <a:solidFill>
-                  <a:srgbClr val="003B4F"/>
-                </a:solidFill>
-                <a:latin typeface="Courier"/>
-              </a:rPr>
-              <a:t> </a:t>
-            </a:r>
-            <a:r>
-              <a:rPr>
-                <a:solidFill>
-                  <a:srgbClr val="AD0000"/>
-                </a:solidFill>
-                <a:latin typeface="Courier"/>
-              </a:rPr>
-              <a:t>0</a:t>
-            </a:r>
-            <a:r>
-              <a:rPr>
-                <a:solidFill>
-                  <a:srgbClr val="003B4F"/>
-                </a:solidFill>
-                <a:latin typeface="Courier"/>
-              </a:rPr>
-              <a:t>, </a:t>
-            </a:r>
-            <a:r>
-              <a:rPr>
-                <a:solidFill>
-                  <a:srgbClr val="657422"/>
-                </a:solidFill>
-                <a:latin typeface="Courier"/>
-              </a:rPr>
-              <a:t>face =</a:t>
-            </a:r>
-            <a:r>
-              <a:rPr>
-                <a:solidFill>
-                  <a:srgbClr val="003B4F"/>
-                </a:solidFill>
-                <a:latin typeface="Courier"/>
-              </a:rPr>
-              <a:t> </a:t>
-            </a:r>
-            <a:r>
-              <a:rPr>
-                <a:solidFill>
-                  <a:srgbClr val="20794D"/>
-                </a:solidFill>
-                <a:latin typeface="Courier"/>
-              </a:rPr>
-              <a:t>"italic"</a:t>
-            </a:r>
-            <a:r>
-              <a:rPr>
-                <a:solidFill>
-                  <a:srgbClr val="003B4F"/>
-                </a:solidFill>
-                <a:latin typeface="Courier"/>
-              </a:rPr>
-              <a:t>, </a:t>
-            </a:r>
-            <a:r>
-              <a:rPr>
-                <a:solidFill>
-                  <a:srgbClr val="657422"/>
-                </a:solidFill>
-                <a:latin typeface="Courier"/>
-              </a:rPr>
-              <a:t>size =</a:t>
-            </a:r>
-            <a:r>
-              <a:rPr>
-                <a:solidFill>
-                  <a:srgbClr val="003B4F"/>
-                </a:solidFill>
-                <a:latin typeface="Courier"/>
-              </a:rPr>
-              <a:t> </a:t>
-            </a:r>
-            <a:r>
-              <a:rPr>
-                <a:solidFill>
-                  <a:srgbClr val="AD0000"/>
-                </a:solidFill>
-                <a:latin typeface="Courier"/>
-              </a:rPr>
-              <a:t>10</a:t>
-            </a:r>
-            <a:r>
-              <a:rPr>
-                <a:solidFill>
-                  <a:srgbClr val="003B4F"/>
-                </a:solidFill>
-                <a:latin typeface="Courier"/>
-              </a:rPr>
-              <a:t>)</a:t>
-            </a:r>
-            <a:br/>
-            <a:r>
-              <a:rPr>
-                <a:solidFill>
-                  <a:srgbClr val="003B4F"/>
-                </a:solidFill>
-                <a:latin typeface="Courier"/>
-              </a:rPr>
-              <a:t>  )</a:t>
-            </a:r>
-          </a:p>
-          <a:p>
-            <a:pPr lvl="0" indent="0" marL="1270000">
-              <a:buNone/>
-            </a:pPr>
+              <a:rPr sz="2000"/>
+              <a:t>💡 </a:t>
+            </a:r>
             <a:r>
               <a:rPr sz="2000" b="1"/>
-              <a:t>Note</a:t>
-            </a:r>
-          </a:p>
-          <a:p>
-            <a:pPr lvl="0" indent="0" marL="1270000">
-              <a:buNone/>
-            </a:pPr>
-            <a:r>
-              <a:rPr sz="2000" b="1"/>
-              <a:t>Scientific interpretation</a:t>
-            </a:r>
-          </a:p>
-          <a:p>
-            <a:pPr lvl="0" indent="0" marL="1270000">
-              <a:buNone/>
-            </a:pPr>
+              <a:t>Key idea:</a:t>
+            </a:r>
             <a:r>
               <a:rPr sz="2000"/>
-              <a:t>This nested ANOVA reveals substantial spatial heterogeneity in algae cover, with significant variation among patches within each treatment. Whether the urchin-density treatment effect itself reaches significance depends on which test (F vs. Chi-square) and which model specification you use — a good reminder that “significant” is sensitive to analytical choices in nested designs. The substantial variance component associated with patches nested within treatments shows why spatial heterogeneity needs to be accounted for when designing and analyzing ecological field experiments.</a:t>
-            </a:r>
-          </a:p>
-          <a:p>
-            <a:pPr lvl="0" indent="0" marL="0">
-              <a:buNone/>
-            </a:pPr>
-            <a:r>
-              <a:rPr/>
-              <a:t>✏️ </a:t>
-            </a:r>
-            <a:r>
-              <a:rPr b="1"/>
-              <a:t>Your turn:</a:t>
-            </a:r>
-            <a:r>
-              <a:rPr/>
-              <a:t> Write a 2–3 sentence results paragraph for this analysis, using your own F-statistic, df, p-value, and variance component numbers from Parts 3–4.</a:t>
-            </a:r>
-          </a:p>
-          <a:p>
-            <a:pPr lvl="0" indent="0">
-              <a:buNone/>
-            </a:pPr>
-            <a:r>
-              <a:rPr>
-                <a:latin typeface="Courier"/>
-              </a:rPr>
-              <a:t>________________________________________________________
-________________________________________________________</a:t>
-            </a:r>
-          </a:p>
-        </p:txBody>
-      </p:sp>
-    </p:spTree>
-  </p:cSld>
-</p:sld>
-</file>
-
-<file path=ppt/slides/slide9.xml><?xml version="1.0" encoding="utf-8"?>
-<p:sld xmlns:a="http://schemas.openxmlformats.org/drawingml/2006/main" xmlns:r="http://schemas.openxmlformats.org/officeDocument/2006/relationships" xmlns:p="http://schemas.openxmlformats.org/presentationml/2006/main">
-  <p:cSld>
-    <p:spTree>
-      <p:nvGrpSpPr>
-        <p:cNvPr id="1" name=""/>
-        <p:cNvGrpSpPr/>
-        <p:nvPr/>
-      </p:nvGrpSpPr>
-      <p:grpSpPr>
-        <a:xfrm>
-          <a:off x="0" y="0"/>
-          <a:ext cx="0" cy="0"/>
-          <a:chOff x="0" y="0"/>
-          <a:chExt cx="0" cy="0"/>
-        </a:xfrm>
-      </p:grpSpPr>
-      <p:sp>
-        <p:nvSpPr>
-          <p:cNvPr id="2" name="Title 1"/>
-          <p:cNvSpPr>
-            <a:spLocks noGrp="1"/>
-          </p:cNvSpPr>
-          <p:nvPr>
-            <p:ph type="title"/>
-          </p:nvPr>
-        </p:nvSpPr>
-        <p:spPr>
-          <a:xfrm>
-            <a:off x="0" y="0"/>
-            <a:ext cx="9144000" cy="582780"/>
-          </a:xfrm>
-        </p:spPr>
-        <p:txBody>
-          <a:bodyPr/>
-          <a:lstStyle/>
-          <a:p>
-            <a:pPr lvl="0" indent="0" marL="0">
-              <a:buNone/>
-            </a:pPr>
-            <a:r>
-              <a:rPr/>
-              <a:t>Part 7 · Comparing the Two Approaches</a:t>
-            </a:r>
-          </a:p>
-        </p:txBody>
-      </p:sp>
-      <p:sp>
-        <p:nvSpPr>
-          <p:cNvPr id="3" name="Content Placeholder 2"/>
-          <p:cNvSpPr>
-            <a:spLocks noGrp="1"/>
-          </p:cNvSpPr>
-          <p:nvPr>
-            <p:ph idx="1"/>
-          </p:nvPr>
-        </p:nvSpPr>
-        <p:spPr/>
-        <p:txBody>
-          <a:bodyPr/>
-          <a:lstStyle/>
-          <a:p>
-            <a:pPr lvl="0" indent="0" marL="0">
-              <a:buNone/>
-            </a:pPr>
-            <a:r>
-              <a:rPr/>
-              <a:t>The linear mixed-model approach (</a:t>
-            </a:r>
-            <a:r>
-              <a:rPr>
-                <a:latin typeface="Courier"/>
-              </a:rPr>
-              <a:t>lmer</a:t>
-            </a:r>
-            <a:r>
-              <a:rPr/>
-              <a:t>) gives similar results to the traditional nested ANOVA (</a:t>
-            </a:r>
-            <a:r>
-              <a:rPr>
-                <a:latin typeface="Courier"/>
-              </a:rPr>
-              <a:t>aov</a:t>
-            </a:r>
-            <a:r>
-              <a:rPr/>
-              <a:t> with an </a:t>
-            </a:r>
-            <a:r>
-              <a:rPr>
-                <a:latin typeface="Courier"/>
-              </a:rPr>
-              <a:t>Error()</a:t>
-            </a:r>
-            <a:r>
-              <a:rPr/>
-              <a:t> term). The main advantage of the mixed-model approach is its more elegant handling of random effects, easier extension to unbalanced or more complex designs, and the extensive diagnostic tools available through packages like </a:t>
-            </a:r>
-            <a:r>
-              <a:rPr>
-                <a:latin typeface="Courier"/>
-              </a:rPr>
-              <a:t>DHARMa</a:t>
-            </a:r>
-            <a:r>
-              <a:rPr/>
-              <a:t>.</a:t>
-            </a:r>
-          </a:p>
-          <a:p>
-            <a:pPr lvl="0" indent="0" marL="0">
-              <a:buNone/>
-            </a:pPr>
-            <a:r>
-              <a:rPr/>
-              <a:t>✏️ </a:t>
-            </a:r>
-            <a:r>
-              <a:rPr b="1"/>
-              <a:t>Your turn:</a:t>
-            </a:r>
-            <a:r>
-              <a:rPr/>
-              <a:t> Compare the p-value for </a:t>
-            </a:r>
-            <a:r>
-              <a:rPr>
-                <a:latin typeface="Courier"/>
-              </a:rPr>
-              <a:t>treat</a:t>
-            </a:r>
-            <a:r>
-              <a:rPr/>
-              <a:t> from </a:t>
-            </a:r>
-            <a:r>
-              <a:rPr>
-                <a:latin typeface="Courier"/>
-              </a:rPr>
-              <a:t>nested_model</a:t>
-            </a:r>
-            <a:r>
-              <a:rPr/>
-              <a:t> (Part 2) to the p-value from </a:t>
-            </a:r>
-            <a:r>
-              <a:rPr>
-                <a:latin typeface="Courier"/>
-              </a:rPr>
-              <a:t>satt_result</a:t>
-            </a:r>
-            <a:r>
-              <a:rPr/>
-              <a:t> (Part 3). Are they close? Which approach would you reach for first on a future nested design of your own, and why? </a:t>
-            </a:r>
-            <a:r>
-              <a:rPr>
-                <a:latin typeface="Courier"/>
-              </a:rPr>
-              <a:t>________________________</a:t>
+              <a:t> Every working scientist googles error messages daily. Getting stuck is not failing — it is the job.</a:t>
             </a:r>
           </a:p>
         </p:txBody>
